--- a/outputs/GFCC7Jun2026_OrdinaryTime.pptx
+++ b/outputs/GFCC7Jun2026_OrdinaryTime.pptx
@@ -5316,7 +5316,124 @@
         </p:nvSpPr>
         <p:spPr>
           <a:xfrm>
-            <a:off x="914400" y="667512"/>
+            <a:off x="914400" y="603504"/>
+            <a:ext cx="16459200" cy="658368"/>
+          </a:xfrm>
+          <a:prstGeom prst="rect">
+            <a:avLst/>
+          </a:prstGeom>
+          <a:noFill/>
+        </p:spPr>
+        <p:txBody>
+          <a:bodyPr wrap="square" lIns="109728" rIns="109728" tIns="73152" bIns="73152">
+            <a:noAutofit/>
+          </a:bodyPr>
+          <a:lstStyle/>
+          <a:p>
+            <a:pPr algn="ctr">
+              <a:lnSpc>
+                <a:spcPct val="108000"/>
+              </a:lnSpc>
+              <a:defRPr sz="2800" b="1" i="0">
+                <a:solidFill>
+                  <a:srgbClr val="86EFAC"/>
+                </a:solidFill>
+                <a:latin typeface="Aptos"/>
+              </a:defRPr>
+            </a:pPr>
+            <a:r>
+              <a:t>Ordinary Time</a:t>
+            </a:r>
+          </a:p>
+        </p:txBody>
+      </p:sp>
+      <p:sp>
+        <p:nvSpPr>
+          <p:cNvPr id="3" name="TextBox 2"/>
+          <p:cNvSpPr txBox="1"/>
+          <p:nvPr/>
+        </p:nvSpPr>
+        <p:spPr>
+          <a:xfrm>
+            <a:off x="914400" y="1316736"/>
+            <a:ext cx="16459200" cy="502920"/>
+          </a:xfrm>
+          <a:prstGeom prst="rect">
+            <a:avLst/>
+          </a:prstGeom>
+          <a:noFill/>
+        </p:spPr>
+        <p:txBody>
+          <a:bodyPr wrap="square" lIns="109728" rIns="109728" tIns="73152" bIns="73152">
+            <a:noAutofit/>
+          </a:bodyPr>
+          <a:lstStyle/>
+          <a:p>
+            <a:pPr algn="ctr">
+              <a:lnSpc>
+                <a:spcPct val="108000"/>
+              </a:lnSpc>
+              <a:defRPr sz="2600" b="0" i="0">
+                <a:solidFill>
+                  <a:srgbClr val="22C55E"/>
+                </a:solidFill>
+                <a:latin typeface="Aptos"/>
+              </a:defRPr>
+            </a:pPr>
+            <a:r>
+              <a:t>2026-06-07</a:t>
+            </a:r>
+          </a:p>
+        </p:txBody>
+      </p:sp>
+      <p:sp>
+        <p:nvSpPr>
+          <p:cNvPr id="4" name="TextBox 3"/>
+          <p:cNvSpPr txBox="1"/>
+          <p:nvPr/>
+        </p:nvSpPr>
+        <p:spPr>
+          <a:xfrm>
+            <a:off x="914400" y="2203704"/>
+            <a:ext cx="16459200" cy="6071616"/>
+          </a:xfrm>
+          <a:prstGeom prst="rect">
+            <a:avLst/>
+          </a:prstGeom>
+          <a:noFill/>
+        </p:spPr>
+        <p:txBody>
+          <a:bodyPr wrap="square" lIns="109728" rIns="109728" tIns="73152" bIns="73152" anchor="ctr">
+            <a:noAutofit/>
+          </a:bodyPr>
+          <a:lstStyle/>
+          <a:p>
+            <a:pPr algn="ctr">
+              <a:lnSpc>
+                <a:spcPct val="108000"/>
+              </a:lnSpc>
+              <a:defRPr sz="7200" b="1" i="0">
+                <a:solidFill>
+                  <a:srgbClr val="F0FDF4"/>
+                </a:solidFill>
+                <a:latin typeface="Aptos Display"/>
+              </a:defRPr>
+            </a:pPr>
+            <a:r>
+              <a:t>“I am the living bread that came down from heaven; whoever eats this bread will live forever; and the bread that I will give is my flesh for the life of the world.”</a:t>
+            </a:r>
+          </a:p>
+        </p:txBody>
+      </p:sp>
+      <p:sp>
+        <p:nvSpPr>
+          <p:cNvPr id="5" name="TextBox 4"/>
+          <p:cNvSpPr txBox="1"/>
+          <p:nvPr/>
+        </p:nvSpPr>
+        <p:spPr>
+          <a:xfrm>
+            <a:off x="914400" y="8458200"/>
             <a:ext cx="16459200" cy="960120"/>
           </a:xfrm>
           <a:prstGeom prst="rect">
@@ -5331,29 +5448,32 @@
           <a:lstStyle/>
           <a:p>
             <a:pPr algn="ctr">
-              <a:defRPr sz="5500" b="1" i="0">
-                <a:solidFill>
-                  <a:srgbClr val="86EFAC"/>
-                </a:solidFill>
-                <a:latin typeface="Inter"/>
-              </a:defRPr>
-            </a:pPr>
-            <a:r>
-              <a:t>Ordinary Time Celebration</a:t>
-            </a:r>
-          </a:p>
-        </p:txBody>
-      </p:sp>
-      <p:sp>
-        <p:nvSpPr>
-          <p:cNvPr id="3" name="TextBox 2"/>
-          <p:cNvSpPr txBox="1"/>
-          <p:nvPr/>
-        </p:nvSpPr>
-        <p:spPr>
-          <a:xfrm>
-            <a:off x="914400" y="1719072"/>
-            <a:ext cx="16459200" cy="3108960"/>
+              <a:lnSpc>
+                <a:spcPct val="108000"/>
+              </a:lnSpc>
+              <a:defRPr sz="4000" b="0" i="0">
+                <a:solidFill>
+                  <a:srgbClr val="22C55E"/>
+                </a:solidFill>
+                <a:latin typeface="Aptos"/>
+              </a:defRPr>
+            </a:pPr>
+            <a:r>
+              <a:t>“How can this man give us his flesh to eat?”</a:t>
+            </a:r>
+          </a:p>
+        </p:txBody>
+      </p:sp>
+      <p:sp>
+        <p:nvSpPr>
+          <p:cNvPr id="6" name="TextBox 5"/>
+          <p:cNvSpPr txBox="1"/>
+          <p:nvPr/>
+        </p:nvSpPr>
+        <p:spPr>
+          <a:xfrm>
+            <a:off x="914400" y="9482328"/>
+            <a:ext cx="16459200" cy="457200"/>
           </a:xfrm>
           <a:prstGeom prst="rect">
             <a:avLst/>
@@ -5367,88 +5487,32 @@
           <a:lstStyle/>
           <a:p>
             <a:pPr algn="ctr">
-              <a:spcAft>
-                <a:spcPts val="500"/>
-              </a:spcAft>
-              <a:defRPr sz="5500" b="0" i="0">
-                <a:solidFill>
-                  <a:srgbClr val="F0FDF4"/>
-                </a:solidFill>
-                <a:latin typeface="Inter"/>
-              </a:defRPr>
-            </a:pPr>
-            <a:r>
-              <a:t>2026-06-07</a:t>
-            </a:r>
-          </a:p>
-          <a:p>
-            <a:pPr algn="ctr">
-              <a:spcAft>
-                <a:spcPts val="500"/>
-              </a:spcAft>
-              <a:defRPr sz="5500" b="0" i="0">
-                <a:solidFill>
-                  <a:srgbClr val="F0FDF4"/>
-                </a:solidFill>
-                <a:latin typeface="Inter"/>
-              </a:defRPr>
-            </a:pPr>
-            <a:r>
-              <a:t>Celebrant: Rev. Fr. Jonrey Lauron, RCJ</a:t>
-            </a:r>
-          </a:p>
-          <a:p>
-            <a:pPr algn="ctr">
-              <a:spcAft>
-                <a:spcPts val="500"/>
-              </a:spcAft>
-              <a:defRPr sz="5500" b="0" i="0">
-                <a:solidFill>
-                  <a:srgbClr val="F0FDF4"/>
-                </a:solidFill>
-                <a:latin typeface="Inter"/>
-              </a:defRPr>
-            </a:pPr>
-            <a:r>
-              <a:t>Gospel: John 6:51-58</a:t>
-            </a:r>
-            <a:br/>
-            <a:r>
-              <a:t>Season: Ordinary Time · Sunday Lectionary Year A</a:t>
-            </a:r>
-          </a:p>
-          <a:p>
-            <a:pPr algn="ctr">
-              <a:spcAft>
-                <a:spcPts val="500"/>
-              </a:spcAft>
-              <a:defRPr sz="5500" b="0" i="0">
-                <a:solidFill>
-                  <a:srgbClr val="F0FDF4"/>
-                </a:solidFill>
-                <a:latin typeface="Inter"/>
-              </a:defRPr>
-            </a:pPr>
-            <a:r>
-              <a:t>Excerpt:</a:t>
-            </a:r>
-            <a:br/>
-            <a:r>
-              <a:t>“I am the living bread that came down from heaven; whoever eats this bread will live forever; and the bread that I will give is my flesh for the life of the world.”</a:t>
-            </a:r>
-          </a:p>
-        </p:txBody>
-      </p:sp>
-      <p:sp>
-        <p:nvSpPr>
-          <p:cNvPr id="4" name="TextBox 3"/>
-          <p:cNvSpPr txBox="1"/>
-          <p:nvPr/>
-        </p:nvSpPr>
-        <p:spPr>
-          <a:xfrm>
-            <a:off x="914400" y="9418320"/>
-            <a:ext cx="16459200" cy="777240"/>
+              <a:lnSpc>
+                <a:spcPct val="108000"/>
+              </a:lnSpc>
+              <a:defRPr sz="3000" b="0" i="0">
+                <a:solidFill>
+                  <a:srgbClr val="22C55E"/>
+                </a:solidFill>
+                <a:latin typeface="Aptos"/>
+              </a:defRPr>
+            </a:pPr>
+            <a:r>
+              <a:t>John 6:51-58</a:t>
+            </a:r>
+          </a:p>
+        </p:txBody>
+      </p:sp>
+      <p:sp>
+        <p:nvSpPr>
+          <p:cNvPr id="7" name="TextBox 6"/>
+          <p:cNvSpPr txBox="1"/>
+          <p:nvPr/>
+        </p:nvSpPr>
+        <p:spPr>
+          <a:xfrm>
+            <a:off x="914400" y="9628632"/>
+            <a:ext cx="16459200" cy="502920"/>
           </a:xfrm>
           <a:prstGeom prst="rect">
             <a:avLst/>
@@ -5460,21 +5524,17 @@
             <a:noAutofit/>
           </a:bodyPr>
           <a:lstStyle/>
-          <a:p/>
-          <a:p>
-            <a:pPr algn="l">
-              <a:spcBef>
-                <a:spcPts val="200"/>
-              </a:spcBef>
-              <a:defRPr sz="1200" b="0" i="0">
-                <a:solidFill>
-                  <a:srgbClr val="86EFAC"/>
-                </a:solidFill>
-                <a:latin typeface="Inter"/>
-              </a:defRPr>
-            </a:pPr>
-            <a:r>
-              <a:t>Title</a:t>
+          <a:p>
+            <a:pPr algn="ctr">
+              <a:defRPr sz="1800" b="0" i="0">
+                <a:solidFill>
+                  <a:srgbClr val="22C55E"/>
+                </a:solidFill>
+                <a:latin typeface="Aptos"/>
+              </a:defRPr>
+            </a:pPr>
+            <a:r>
+              <a:t>Rev. Fr. Jonrey Lauron, RCJ</a:t>
             </a:r>
           </a:p>
         </p:txBody>

--- a/outputs/GFCC7Jun2026_OrdinaryTime.pptx
+++ b/outputs/GFCC7Jun2026_OrdinaryTime.pptx
@@ -100,6 +100,8 @@
     <p:sldId id="348" r:id="rId99"/>
     <p:sldId id="349" r:id="rId100"/>
     <p:sldId id="350" r:id="rId101"/>
+    <p:sldId id="351" r:id="rId102"/>
+    <p:sldId id="352" r:id="rId103"/>
   </p:sldIdLst>
   <p:sldSz cx="18288000" cy="10287000" type="screen4x3"/>
   <p:notesSz cx="6858000" cy="9144000"/>
@@ -14254,7 +14256,7 @@
               </a:defRPr>
             </a:pPr>
             <a:r>
-              <a:t>You are Mine</a:t>
+              <a:t>Here I Am, Lord</a:t>
             </a:r>
           </a:p>
         </p:txBody>
@@ -14296,7 +14298,7 @@
               </a:defRPr>
             </a:pPr>
             <a:r>
-              <a:t>I WILL COME TO YOU IN THE SILENCE</a:t>
+              <a:t>I, THE LORD OF SEA AND SKY,</a:t>
             </a:r>
           </a:p>
           <a:p>
@@ -14315,7 +14317,7 @@
               </a:defRPr>
             </a:pPr>
             <a:r>
-              <a:t>I WILL LIFT YOU FROM ALL YOUR FEAR</a:t>
+              <a:t>I HAVE HEARD MY PEOPLE CRY.</a:t>
             </a:r>
           </a:p>
           <a:p>
@@ -14334,7 +14336,7 @@
               </a:defRPr>
             </a:pPr>
             <a:r>
-              <a:t>YOU WILL HEAR MY VOICE</a:t>
+              <a:t>ALL WHO DWELL IN DARK AND SIN,</a:t>
             </a:r>
           </a:p>
           <a:p>
@@ -14353,26 +14355,7 @@
               </a:defRPr>
             </a:pPr>
             <a:r>
-              <a:t>I CLAIM YOU AS MY CHOICE</a:t>
-            </a:r>
-          </a:p>
-          <a:p>
-            <a:pPr algn="ctr">
-              <a:lnSpc>
-                <a:spcPct val="100000"/>
-              </a:lnSpc>
-              <a:spcAft>
-                <a:spcPts val="600"/>
-              </a:spcAft>
-              <a:defRPr sz="5500" b="1" i="0">
-                <a:solidFill>
-                  <a:srgbClr val="FFFFFF"/>
-                </a:solidFill>
-                <a:latin typeface="Arial Black"/>
-              </a:defRPr>
-            </a:pPr>
-            <a:r>
-              <a:t>BE STILL, AND KNOW I AM NEAR</a:t>
+              <a:t>MY HAND WILL SAVE.</a:t>
             </a:r>
           </a:p>
         </p:txBody>
@@ -14480,7 +14463,7 @@
               </a:defRPr>
             </a:pPr>
             <a:r>
-              <a:t>I AM HOPE FOR ALL WHO ARE HOPELESS</a:t>
+              <a:t>I WHO MADE THE STARS OF NIGHT,</a:t>
             </a:r>
           </a:p>
           <a:p>
@@ -14499,7 +14482,7 @@
               </a:defRPr>
             </a:pPr>
             <a:r>
-              <a:t>I AM EYES FOR ALL WHO LONG TO SEE</a:t>
+              <a:t>I WILL MAKE THEIR DARKNESS BRIGHT.</a:t>
             </a:r>
           </a:p>
           <a:p>
@@ -14518,7 +14501,7 @@
               </a:defRPr>
             </a:pPr>
             <a:r>
-              <a:t>IN THE SHADOWS OF THE NIGHT</a:t>
+              <a:t>WHO WILL BEAR MY LIGHT TO THEM?</a:t>
             </a:r>
           </a:p>
           <a:p>
@@ -14537,26 +14520,7 @@
               </a:defRPr>
             </a:pPr>
             <a:r>
-              <a:t>I WILL BE YOUR LIGHT</a:t>
-            </a:r>
-          </a:p>
-          <a:p>
-            <a:pPr algn="ctr">
-              <a:lnSpc>
-                <a:spcPct val="100000"/>
-              </a:lnSpc>
-              <a:spcAft>
-                <a:spcPts val="600"/>
-              </a:spcAft>
-              <a:defRPr sz="5500" b="1" i="0">
-                <a:solidFill>
-                  <a:srgbClr val="FFFFFF"/>
-                </a:solidFill>
-                <a:latin typeface="Arial Black"/>
-              </a:defRPr>
-            </a:pPr>
-            <a:r>
-              <a:t>COME AND REST IN ME</a:t>
+              <a:t>WHOM SHALL I SEND?</a:t>
             </a:r>
           </a:p>
         </p:txBody>
@@ -14656,15 +14620,15 @@
               <a:spcAft>
                 <a:spcPts val="600"/>
               </a:spcAft>
-              <a:defRPr sz="5500" b="1" i="1">
-                <a:solidFill>
-                  <a:srgbClr val="FFB800"/>
+              <a:defRPr sz="5500" b="1" i="0">
+                <a:solidFill>
+                  <a:srgbClr val="FFFFFF"/>
                 </a:solidFill>
                 <a:latin typeface="Arial Black"/>
               </a:defRPr>
             </a:pPr>
             <a:r>
-              <a:t>DO NOT BE AFRAID, I AM WITH YOU</a:t>
+              <a:t>HERE I AM, LORD.</a:t>
             </a:r>
           </a:p>
           <a:p>
@@ -14675,15 +14639,15 @@
               <a:spcAft>
                 <a:spcPts val="600"/>
               </a:spcAft>
-              <a:defRPr sz="5500" b="1" i="1">
-                <a:solidFill>
-                  <a:srgbClr val="FFB800"/>
+              <a:defRPr sz="5500" b="1" i="0">
+                <a:solidFill>
+                  <a:srgbClr val="FFFFFF"/>
                 </a:solidFill>
                 <a:latin typeface="Arial Black"/>
               </a:defRPr>
             </a:pPr>
             <a:r>
-              <a:t>I HAVE CALLED YOU EACH BY NAME</a:t>
+              <a:t>IS IT I, LORD?</a:t>
             </a:r>
           </a:p>
           <a:p>
@@ -14694,15 +14658,15 @@
               <a:spcAft>
                 <a:spcPts val="600"/>
               </a:spcAft>
-              <a:defRPr sz="5500" b="1" i="1">
-                <a:solidFill>
-                  <a:srgbClr val="FFB800"/>
+              <a:defRPr sz="5500" b="1" i="0">
+                <a:solidFill>
+                  <a:srgbClr val="FFFFFF"/>
                 </a:solidFill>
                 <a:latin typeface="Arial Black"/>
               </a:defRPr>
             </a:pPr>
             <a:r>
-              <a:t>COME AND FOLLOW ME</a:t>
+              <a:t>I HAVE HEARD YOU CALLING IN THE NIGHT.</a:t>
             </a:r>
           </a:p>
           <a:p>
@@ -14713,15 +14677,15 @@
               <a:spcAft>
                 <a:spcPts val="600"/>
               </a:spcAft>
-              <a:defRPr sz="5500" b="1" i="1">
-                <a:solidFill>
-                  <a:srgbClr val="FFB800"/>
+              <a:defRPr sz="5500" b="1" i="0">
+                <a:solidFill>
+                  <a:srgbClr val="FFFFFF"/>
                 </a:solidFill>
                 <a:latin typeface="Arial Black"/>
               </a:defRPr>
             </a:pPr>
             <a:r>
-              <a:t>I WILL BRING YOU HOME</a:t>
+              <a:t>I WILL GO, LORD,</a:t>
             </a:r>
           </a:p>
           <a:p>
@@ -14732,15 +14696,34 @@
               <a:spcAft>
                 <a:spcPts val="600"/>
               </a:spcAft>
-              <a:defRPr sz="5500" b="1" i="1">
-                <a:solidFill>
-                  <a:srgbClr val="FFB800"/>
+              <a:defRPr sz="5500" b="1" i="0">
+                <a:solidFill>
+                  <a:srgbClr val="FFFFFF"/>
                 </a:solidFill>
                 <a:latin typeface="Arial Black"/>
               </a:defRPr>
             </a:pPr>
             <a:r>
-              <a:t>I LOVE YOU AND YOU ARE MINE</a:t>
+              <a:t>IF YOU LEAD ME.</a:t>
+            </a:r>
+          </a:p>
+          <a:p>
+            <a:pPr algn="ctr">
+              <a:lnSpc>
+                <a:spcPct val="100000"/>
+              </a:lnSpc>
+              <a:spcAft>
+                <a:spcPts val="600"/>
+              </a:spcAft>
+              <a:defRPr sz="5500" b="1" i="0">
+                <a:solidFill>
+                  <a:srgbClr val="FFFFFF"/>
+                </a:solidFill>
+                <a:latin typeface="Arial Black"/>
+              </a:defRPr>
+            </a:pPr>
+            <a:r>
+              <a:t>I WILL HOLD YOUR PEOPLE IN MY HEART.</a:t>
             </a:r>
           </a:p>
         </p:txBody>
@@ -14848,7 +14831,7 @@
               </a:defRPr>
             </a:pPr>
             <a:r>
-              <a:t>I AM STRENGTH FOR ALL THE DESPAIRING</a:t>
+              <a:t>I, THE LORD OF SNOW AND RAIN,</a:t>
             </a:r>
           </a:p>
           <a:p>
@@ -14867,7 +14850,7 @@
               </a:defRPr>
             </a:pPr>
             <a:r>
-              <a:t>HEALING FOR THE ONES WHO DWELL IN SHAME</a:t>
+              <a:t>I HAVE BORNE MY PEOPLE'S PAIN.</a:t>
             </a:r>
           </a:p>
           <a:p>
@@ -14886,7 +14869,7 @@
               </a:defRPr>
             </a:pPr>
             <a:r>
-              <a:t>ALL THE BLIND WILL SEE,</a:t>
+              <a:t>I HAVE WEPT FOR LOVE OF THEM,</a:t>
             </a:r>
           </a:p>
           <a:p>
@@ -14905,26 +14888,7 @@
               </a:defRPr>
             </a:pPr>
             <a:r>
-              <a:t>THE LAME WILL ALL RUN FREE</a:t>
-            </a:r>
-          </a:p>
-          <a:p>
-            <a:pPr algn="ctr">
-              <a:lnSpc>
-                <a:spcPct val="100000"/>
-              </a:lnSpc>
-              <a:spcAft>
-                <a:spcPts val="600"/>
-              </a:spcAft>
-              <a:defRPr sz="5500" b="1" i="0">
-                <a:solidFill>
-                  <a:srgbClr val="FFFFFF"/>
-                </a:solidFill>
-                <a:latin typeface="Arial Black"/>
-              </a:defRPr>
-            </a:pPr>
-            <a:r>
-              <a:t>AND ALL WILL KNOW MY NAME</a:t>
+              <a:t>THEY TURN AWAY.</a:t>
             </a:r>
           </a:p>
         </p:txBody>
@@ -15024,15 +14988,15 @@
               <a:spcAft>
                 <a:spcPts val="600"/>
               </a:spcAft>
-              <a:defRPr sz="5500" b="1" i="1">
-                <a:solidFill>
-                  <a:srgbClr val="FFB800"/>
+              <a:defRPr sz="5500" b="1" i="0">
+                <a:solidFill>
+                  <a:srgbClr val="FFFFFF"/>
                 </a:solidFill>
                 <a:latin typeface="Arial Black"/>
               </a:defRPr>
             </a:pPr>
             <a:r>
-              <a:t>DO NOT BE AFRAID, I AM WITH YOU</a:t>
+              <a:t>I WILL BREAK THEIR HEARTS OF STONE,</a:t>
             </a:r>
           </a:p>
           <a:p>
@@ -15043,15 +15007,15 @@
               <a:spcAft>
                 <a:spcPts val="600"/>
               </a:spcAft>
-              <a:defRPr sz="5500" b="1" i="1">
-                <a:solidFill>
-                  <a:srgbClr val="FFB800"/>
+              <a:defRPr sz="5500" b="1" i="0">
+                <a:solidFill>
+                  <a:srgbClr val="FFFFFF"/>
                 </a:solidFill>
                 <a:latin typeface="Arial Black"/>
               </a:defRPr>
             </a:pPr>
             <a:r>
-              <a:t>I HAVE CALLED YOU EACH BY NAME</a:t>
+              <a:t>GIVE THEM HEARTS FOR LOVE ALONE.</a:t>
             </a:r>
           </a:p>
           <a:p>
@@ -15062,15 +15026,15 @@
               <a:spcAft>
                 <a:spcPts val="600"/>
               </a:spcAft>
-              <a:defRPr sz="5500" b="1" i="1">
-                <a:solidFill>
-                  <a:srgbClr val="FFB800"/>
+              <a:defRPr sz="5500" b="1" i="0">
+                <a:solidFill>
+                  <a:srgbClr val="FFFFFF"/>
                 </a:solidFill>
                 <a:latin typeface="Arial Black"/>
               </a:defRPr>
             </a:pPr>
             <a:r>
-              <a:t>COME AND FOLLOW ME</a:t>
+              <a:t>I WILL SPEAK MY WORD TO THEM.</a:t>
             </a:r>
           </a:p>
           <a:p>
@@ -15081,34 +15045,15 @@
               <a:spcAft>
                 <a:spcPts val="600"/>
               </a:spcAft>
-              <a:defRPr sz="5500" b="1" i="1">
-                <a:solidFill>
-                  <a:srgbClr val="FFB800"/>
+              <a:defRPr sz="5500" b="1" i="0">
+                <a:solidFill>
+                  <a:srgbClr val="FFFFFF"/>
                 </a:solidFill>
                 <a:latin typeface="Arial Black"/>
               </a:defRPr>
             </a:pPr>
             <a:r>
-              <a:t>I WILL BRING YOU HOME</a:t>
-            </a:r>
-          </a:p>
-          <a:p>
-            <a:pPr algn="ctr">
-              <a:lnSpc>
-                <a:spcPct val="100000"/>
-              </a:lnSpc>
-              <a:spcAft>
-                <a:spcPts val="600"/>
-              </a:spcAft>
-              <a:defRPr sz="5500" b="1" i="1">
-                <a:solidFill>
-                  <a:srgbClr val="FFB800"/>
-                </a:solidFill>
-                <a:latin typeface="Arial Black"/>
-              </a:defRPr>
-            </a:pPr>
-            <a:r>
-              <a:t>I LOVE YOU AND YOU ARE MINE</a:t>
+              <a:t>WHOM SHALL I SEND?</a:t>
             </a:r>
           </a:p>
         </p:txBody>
@@ -15216,7 +15161,7 @@
               </a:defRPr>
             </a:pPr>
             <a:r>
-              <a:t>I AM THE WORD THAT LEADS ALL TO FREEDOM</a:t>
+              <a:t>HERE I AM, LORD.</a:t>
             </a:r>
           </a:p>
           <a:p>
@@ -15235,7 +15180,7 @@
               </a:defRPr>
             </a:pPr>
             <a:r>
-              <a:t>I AM THE PEACE THE WORLD CANNOT GIVE</a:t>
+              <a:t>IS IT I, LORD?</a:t>
             </a:r>
           </a:p>
           <a:p>
@@ -15254,7 +15199,7 @@
               </a:defRPr>
             </a:pPr>
             <a:r>
-              <a:t>I WILL CALL YOUR NAME, EMBRACING ALL YOUR PAIN</a:t>
+              <a:t>I HAVE HEARD YOU CALLING IN THE NIGHT.</a:t>
             </a:r>
           </a:p>
           <a:p>
@@ -15273,7 +15218,45 @@
               </a:defRPr>
             </a:pPr>
             <a:r>
-              <a:t>STAND UP, NOW, WALK, AND LIVE</a:t>
+              <a:t>I WILL GO, LORD,</a:t>
+            </a:r>
+          </a:p>
+          <a:p>
+            <a:pPr algn="ctr">
+              <a:lnSpc>
+                <a:spcPct val="100000"/>
+              </a:lnSpc>
+              <a:spcAft>
+                <a:spcPts val="600"/>
+              </a:spcAft>
+              <a:defRPr sz="5500" b="1" i="0">
+                <a:solidFill>
+                  <a:srgbClr val="FFFFFF"/>
+                </a:solidFill>
+                <a:latin typeface="Arial Black"/>
+              </a:defRPr>
+            </a:pPr>
+            <a:r>
+              <a:t>IF YOU LEAD ME.</a:t>
+            </a:r>
+          </a:p>
+          <a:p>
+            <a:pPr algn="ctr">
+              <a:lnSpc>
+                <a:spcPct val="100000"/>
+              </a:lnSpc>
+              <a:spcAft>
+                <a:spcPts val="600"/>
+              </a:spcAft>
+              <a:defRPr sz="5500" b="1" i="0">
+                <a:solidFill>
+                  <a:srgbClr val="FFFFFF"/>
+                </a:solidFill>
+                <a:latin typeface="Arial Black"/>
+              </a:defRPr>
+            </a:pPr>
+            <a:r>
+              <a:t>I WILL HOLD YOUR PEOPLE IN MY HEART.</a:t>
             </a:r>
           </a:p>
         </p:txBody>
@@ -15373,15 +15356,15 @@
               <a:spcAft>
                 <a:spcPts val="600"/>
               </a:spcAft>
-              <a:defRPr sz="5500" b="1" i="1">
-                <a:solidFill>
-                  <a:srgbClr val="FFB800"/>
+              <a:defRPr sz="5500" b="1" i="0">
+                <a:solidFill>
+                  <a:srgbClr val="FFFFFF"/>
                 </a:solidFill>
                 <a:latin typeface="Arial Black"/>
               </a:defRPr>
             </a:pPr>
             <a:r>
-              <a:t>DO NOT BE AFRAID, I AM WITH YOU</a:t>
+              <a:t>I, THE LORD OF WIND AND FLAME,</a:t>
             </a:r>
           </a:p>
           <a:p>
@@ -15392,15 +15375,15 @@
               <a:spcAft>
                 <a:spcPts val="600"/>
               </a:spcAft>
-              <a:defRPr sz="5500" b="1" i="1">
-                <a:solidFill>
-                  <a:srgbClr val="FFB800"/>
+              <a:defRPr sz="5500" b="1" i="0">
+                <a:solidFill>
+                  <a:srgbClr val="FFFFFF"/>
                 </a:solidFill>
                 <a:latin typeface="Arial Black"/>
               </a:defRPr>
             </a:pPr>
             <a:r>
-              <a:t>I HAVE CALLED YOU EACH BY NAME</a:t>
+              <a:t>I WILL TEND THE POOR AND LAME.</a:t>
             </a:r>
           </a:p>
           <a:p>
@@ -15411,15 +15394,15 @@
               <a:spcAft>
                 <a:spcPts val="600"/>
               </a:spcAft>
-              <a:defRPr sz="5500" b="1" i="1">
-                <a:solidFill>
-                  <a:srgbClr val="FFB800"/>
+              <a:defRPr sz="5500" b="1" i="0">
+                <a:solidFill>
+                  <a:srgbClr val="FFFFFF"/>
                 </a:solidFill>
                 <a:latin typeface="Arial Black"/>
               </a:defRPr>
             </a:pPr>
             <a:r>
-              <a:t>COME AND FOLLOW ME</a:t>
+              <a:t>I WILL SET A FEAST FOR THEM.</a:t>
             </a:r>
           </a:p>
           <a:p>
@@ -15430,34 +15413,15 @@
               <a:spcAft>
                 <a:spcPts val="600"/>
               </a:spcAft>
-              <a:defRPr sz="5500" b="1" i="1">
-                <a:solidFill>
-                  <a:srgbClr val="FFB800"/>
+              <a:defRPr sz="5500" b="1" i="0">
+                <a:solidFill>
+                  <a:srgbClr val="FFFFFF"/>
                 </a:solidFill>
                 <a:latin typeface="Arial Black"/>
               </a:defRPr>
             </a:pPr>
             <a:r>
-              <a:t>I WILL BRING YOU HOME</a:t>
-            </a:r>
-          </a:p>
-          <a:p>
-            <a:pPr algn="ctr">
-              <a:lnSpc>
-                <a:spcPct val="100000"/>
-              </a:lnSpc>
-              <a:spcAft>
-                <a:spcPts val="600"/>
-              </a:spcAft>
-              <a:defRPr sz="5500" b="1" i="1">
-                <a:solidFill>
-                  <a:srgbClr val="FFB800"/>
-                </a:solidFill>
-                <a:latin typeface="Arial Black"/>
-              </a:defRPr>
-            </a:pPr>
-            <a:r>
-              <a:t>I LOVE YOU AND YOU ARE MINE</a:t>
+              <a:t>MY HAND WILL SAVE.</a:t>
             </a:r>
           </a:p>
         </p:txBody>
@@ -15516,7 +15480,7 @@
     <p:bg>
       <p:bgPr>
         <a:solidFill>
-          <a:srgbClr val="10251C"/>
+          <a:srgbClr val="000000"/>
         </a:solidFill>
         <a:effectLst/>
       </p:bgPr>
@@ -15536,55 +15500,93 @@
         </p:nvSpPr>
         <p:spPr>
           <a:xfrm>
-            <a:off x="914400" y="530352"/>
-            <a:ext cx="16459200" cy="8750808"/>
-          </a:xfrm>
-          <a:prstGeom prst="rect">
-            <a:avLst/>
-          </a:prstGeom>
-          <a:noFill/>
-        </p:spPr>
-        <p:txBody>
-          <a:bodyPr wrap="square" lIns="109728" rIns="109728" tIns="73152" bIns="73152">
-            <a:noAutofit/>
-          </a:bodyPr>
-          <a:lstStyle/>
-          <a:p>
-            <a:pPr algn="ctr">
-              <a:spcBef>
-                <a:spcPts val="400"/>
-              </a:spcBef>
-              <a:spcAft>
-                <a:spcPts val="500"/>
+            <a:off x="0" y="0"/>
+            <a:ext cx="18288000" cy="10287000"/>
+          </a:xfrm>
+          <a:prstGeom prst="rect">
+            <a:avLst/>
+          </a:prstGeom>
+          <a:noFill/>
+        </p:spPr>
+        <p:txBody>
+          <a:bodyPr wrap="square" lIns="0" rIns="0" tIns="0" bIns="0" anchor="ctr">
+            <a:noAutofit/>
+          </a:bodyPr>
+          <a:lstStyle/>
+          <a:p>
+            <a:pPr algn="ctr">
+              <a:lnSpc>
+                <a:spcPct val="100000"/>
+              </a:lnSpc>
+              <a:spcAft>
+                <a:spcPts val="600"/>
               </a:spcAft>
               <a:defRPr sz="5500" b="1" i="0">
                 <a:solidFill>
-                  <a:srgbClr val="86EFAC"/>
-                </a:solidFill>
-                <a:latin typeface="Inter"/>
-              </a:defRPr>
-            </a:pPr>
-            <a:r>
-              <a:t>Priest: Let us pray.</a:t>
-            </a:r>
-          </a:p>
-          <a:p>
-            <a:pPr algn="ctr">
-              <a:spcBef>
-                <a:spcPts val="400"/>
-              </a:spcBef>
-              <a:spcAft>
-                <a:spcPts val="500"/>
+                  <a:srgbClr val="FFFFFF"/>
+                </a:solidFill>
+                <a:latin typeface="Arial Black"/>
+              </a:defRPr>
+            </a:pPr>
+            <a:r>
+              <a:t>FINEST BREAD I WILL PROVIDE</a:t>
+            </a:r>
+          </a:p>
+          <a:p>
+            <a:pPr algn="ctr">
+              <a:lnSpc>
+                <a:spcPct val="100000"/>
+              </a:lnSpc>
+              <a:spcAft>
+                <a:spcPts val="600"/>
               </a:spcAft>
               <a:defRPr sz="5500" b="1" i="0">
                 <a:solidFill>
-                  <a:srgbClr val="F0FDF4"/>
-                </a:solidFill>
-                <a:latin typeface="Inter"/>
-              </a:defRPr>
-            </a:pPr>
-            <a:r>
-              <a:t>All: Amen.</a:t>
+                  <a:srgbClr val="FFFFFF"/>
+                </a:solidFill>
+                <a:latin typeface="Arial Black"/>
+              </a:defRPr>
+            </a:pPr>
+            <a:r>
+              <a:t>TILL THEIR HEARTS BE SATISFIED.</a:t>
+            </a:r>
+          </a:p>
+          <a:p>
+            <a:pPr algn="ctr">
+              <a:lnSpc>
+                <a:spcPct val="100000"/>
+              </a:lnSpc>
+              <a:spcAft>
+                <a:spcPts val="600"/>
+              </a:spcAft>
+              <a:defRPr sz="5500" b="1" i="0">
+                <a:solidFill>
+                  <a:srgbClr val="FFFFFF"/>
+                </a:solidFill>
+                <a:latin typeface="Arial Black"/>
+              </a:defRPr>
+            </a:pPr>
+            <a:r>
+              <a:t>I WILL GIVE MY LIFE TO THEM.</a:t>
+            </a:r>
+          </a:p>
+          <a:p>
+            <a:pPr algn="ctr">
+              <a:lnSpc>
+                <a:spcPct val="100000"/>
+              </a:lnSpc>
+              <a:spcAft>
+                <a:spcPts val="600"/>
+              </a:spcAft>
+              <a:defRPr sz="5500" b="1" i="0">
+                <a:solidFill>
+                  <a:srgbClr val="FFFFFF"/>
+                </a:solidFill>
+                <a:latin typeface="Arial Black"/>
+              </a:defRPr>
+            </a:pPr>
+            <a:r>
+              <a:t>WHOM SHALL I SEND?</a:t>
             </a:r>
           </a:p>
         </p:txBody>
@@ -15612,19 +15614,19 @@
           <a:lstStyle/>
           <a:p/>
           <a:p>
-            <a:pPr algn="l">
+            <a:pPr>
               <a:spcBef>
                 <a:spcPts val="200"/>
               </a:spcBef>
               <a:defRPr sz="1200" b="0" i="0">
                 <a:solidFill>
-                  <a:srgbClr val="86EFAC"/>
-                </a:solidFill>
-                <a:latin typeface="Inter"/>
-              </a:defRPr>
-            </a:pPr>
-            <a:r>
-              <a:t>The Communion Rite</a:t>
+                  <a:srgbClr val="FFCC4D"/>
+                </a:solidFill>
+                <a:latin typeface="Inter"/>
+              </a:defRPr>
+            </a:pPr>
+            <a:r>
+              <a:t>Communion (2)</a:t>
             </a:r>
           </a:p>
         </p:txBody>
@@ -15640,6 +15642,14 @@
 <file path=ppt/slides/slide79.xml><?xml version="1.0" encoding="utf-8"?>
 <p:sld xmlns:a="http://schemas.openxmlformats.org/drawingml/2006/main" xmlns:p="http://schemas.openxmlformats.org/presentationml/2006/main" xmlns:r="http://schemas.openxmlformats.org/officeDocument/2006/relationships">
   <p:cSld>
+    <p:bg>
+      <p:bgPr>
+        <a:solidFill>
+          <a:srgbClr val="000000"/>
+        </a:solidFill>
+        <a:effectLst/>
+      </p:bgPr>
+    </p:bg>
     <p:spTree>
       <p:nvGrpSpPr>
         <p:cNvPr id="1" name=""/>
@@ -15647,20 +15657,12 @@
         <p:nvPr/>
       </p:nvGrpSpPr>
       <p:grpSpPr/>
-      <p:pic>
-        <p:nvPicPr>
-          <p:cNvPr id="2" name="Picture 1" descr="GFCC7Jun2026_OrdinaryTime_16x9.png"/>
-          <p:cNvPicPr>
-            <a:picLocks noChangeAspect="1"/>
-          </p:cNvPicPr>
-          <p:nvPr/>
-        </p:nvPicPr>
-        <p:blipFill>
-          <a:blip r:embed="rId2"/>
-          <a:stretch>
-            <a:fillRect/>
-          </a:stretch>
-        </p:blipFill>
+      <p:sp>
+        <p:nvSpPr>
+          <p:cNvPr id="2" name="TextBox 1"/>
+          <p:cNvSpPr txBox="1"/>
+          <p:nvPr/>
+        </p:nvSpPr>
         <p:spPr>
           <a:xfrm>
             <a:off x="0" y="0"/>
@@ -15669,156 +15671,132 @@
           <a:prstGeom prst="rect">
             <a:avLst/>
           </a:prstGeom>
-        </p:spPr>
-      </p:pic>
+          <a:noFill/>
+        </p:spPr>
+        <p:txBody>
+          <a:bodyPr wrap="square" lIns="0" rIns="0" tIns="0" bIns="0" anchor="ctr">
+            <a:noAutofit/>
+          </a:bodyPr>
+          <a:lstStyle/>
+          <a:p>
+            <a:pPr algn="ctr">
+              <a:lnSpc>
+                <a:spcPct val="100000"/>
+              </a:lnSpc>
+              <a:spcAft>
+                <a:spcPts val="600"/>
+              </a:spcAft>
+              <a:defRPr sz="5500" b="1" i="0">
+                <a:solidFill>
+                  <a:srgbClr val="FFFFFF"/>
+                </a:solidFill>
+                <a:latin typeface="Arial Black"/>
+              </a:defRPr>
+            </a:pPr>
+            <a:r>
+              <a:t>HERE I AM, LORD.</a:t>
+            </a:r>
+          </a:p>
+          <a:p>
+            <a:pPr algn="ctr">
+              <a:lnSpc>
+                <a:spcPct val="100000"/>
+              </a:lnSpc>
+              <a:spcAft>
+                <a:spcPts val="600"/>
+              </a:spcAft>
+              <a:defRPr sz="5500" b="1" i="0">
+                <a:solidFill>
+                  <a:srgbClr val="FFFFFF"/>
+                </a:solidFill>
+                <a:latin typeface="Arial Black"/>
+              </a:defRPr>
+            </a:pPr>
+            <a:r>
+              <a:t>IS IT I, LORD?</a:t>
+            </a:r>
+          </a:p>
+          <a:p>
+            <a:pPr algn="ctr">
+              <a:lnSpc>
+                <a:spcPct val="100000"/>
+              </a:lnSpc>
+              <a:spcAft>
+                <a:spcPts val="600"/>
+              </a:spcAft>
+              <a:defRPr sz="5500" b="1" i="0">
+                <a:solidFill>
+                  <a:srgbClr val="FFFFFF"/>
+                </a:solidFill>
+                <a:latin typeface="Arial Black"/>
+              </a:defRPr>
+            </a:pPr>
+            <a:r>
+              <a:t>I HAVE HEARD YOU CALLING IN THE NIGHT.</a:t>
+            </a:r>
+          </a:p>
+          <a:p>
+            <a:pPr algn="ctr">
+              <a:lnSpc>
+                <a:spcPct val="100000"/>
+              </a:lnSpc>
+              <a:spcAft>
+                <a:spcPts val="600"/>
+              </a:spcAft>
+              <a:defRPr sz="5500" b="1" i="0">
+                <a:solidFill>
+                  <a:srgbClr val="FFFFFF"/>
+                </a:solidFill>
+                <a:latin typeface="Arial Black"/>
+              </a:defRPr>
+            </a:pPr>
+            <a:r>
+              <a:t>I WILL GO, LORD,</a:t>
+            </a:r>
+          </a:p>
+          <a:p>
+            <a:pPr algn="ctr">
+              <a:lnSpc>
+                <a:spcPct val="100000"/>
+              </a:lnSpc>
+              <a:spcAft>
+                <a:spcPts val="600"/>
+              </a:spcAft>
+              <a:defRPr sz="5500" b="1" i="0">
+                <a:solidFill>
+                  <a:srgbClr val="FFFFFF"/>
+                </a:solidFill>
+                <a:latin typeface="Arial Black"/>
+              </a:defRPr>
+            </a:pPr>
+            <a:r>
+              <a:t>IF YOU LEAD ME.</a:t>
+            </a:r>
+          </a:p>
+          <a:p>
+            <a:pPr algn="ctr">
+              <a:lnSpc>
+                <a:spcPct val="100000"/>
+              </a:lnSpc>
+              <a:spcAft>
+                <a:spcPts val="600"/>
+              </a:spcAft>
+              <a:defRPr sz="5500" b="1" i="0">
+                <a:solidFill>
+                  <a:srgbClr val="FFFFFF"/>
+                </a:solidFill>
+                <a:latin typeface="Arial Black"/>
+              </a:defRPr>
+            </a:pPr>
+            <a:r>
+              <a:t>I WILL HOLD YOUR PEOPLE IN MY HEART.</a:t>
+            </a:r>
+          </a:p>
+        </p:txBody>
+      </p:sp>
       <p:sp>
         <p:nvSpPr>
           <p:cNvPr id="3" name="TextBox 2"/>
-          <p:cNvSpPr txBox="1"/>
-          <p:nvPr/>
-        </p:nvSpPr>
-        <p:spPr>
-          <a:xfrm>
-            <a:off x="914400" y="850392"/>
-            <a:ext cx="16459200" cy="5943600"/>
-          </a:xfrm>
-          <a:prstGeom prst="rect">
-            <a:avLst/>
-          </a:prstGeom>
-          <a:noFill/>
-        </p:spPr>
-        <p:txBody>
-          <a:bodyPr wrap="square" lIns="109728" rIns="109728" tIns="73152" bIns="73152">
-            <a:noAutofit/>
-          </a:bodyPr>
-          <a:lstStyle/>
-          <a:p>
-            <a:pPr algn="ctr">
-              <a:spcAft>
-                <a:spcPts val="300"/>
-              </a:spcAft>
-              <a:defRPr sz="5500" b="1" i="0">
-                <a:solidFill>
-                  <a:srgbClr val="86EFAC"/>
-                </a:solidFill>
-                <a:latin typeface="Inter"/>
-              </a:defRPr>
-            </a:pPr>
-            <a:r>
-              <a:t>MASS CELEBRANT:</a:t>
-            </a:r>
-          </a:p>
-          <a:p>
-            <a:pPr algn="ctr">
-              <a:spcAft>
-                <a:spcPts val="300"/>
-              </a:spcAft>
-              <a:defRPr sz="5500" b="0" i="0">
-                <a:solidFill>
-                  <a:srgbClr val="F0FDF4"/>
-                </a:solidFill>
-                <a:latin typeface="Inter"/>
-              </a:defRPr>
-            </a:pPr>
-            <a:r>
-              <a:t>Rev. Fr. Jonrey Lauron, RCJ</a:t>
-            </a:r>
-          </a:p>
-          <a:p>
-            <a:pPr algn="ctr">
-              <a:spcAft>
-                <a:spcPts val="300"/>
-              </a:spcAft>
-              <a:defRPr sz="5500" b="0" i="0">
-                <a:solidFill>
-                  <a:srgbClr val="F0FDF4"/>
-                </a:solidFill>
-                <a:latin typeface="Inter"/>
-              </a:defRPr>
-            </a:pPr>
-          </a:p>
-          <a:p>
-            <a:pPr algn="ctr">
-              <a:spcAft>
-                <a:spcPts val="300"/>
-              </a:spcAft>
-              <a:defRPr sz="5500" b="0" i="0">
-                <a:solidFill>
-                  <a:srgbClr val="F0FDF4"/>
-                </a:solidFill>
-                <a:latin typeface="Inter"/>
-              </a:defRPr>
-            </a:pPr>
-            <a:r>
-              <a:t>Gospel (John 6:51-58)</a:t>
-            </a:r>
-          </a:p>
-          <a:p>
-            <a:pPr algn="ctr">
-              <a:spcAft>
-                <a:spcPts val="300"/>
-              </a:spcAft>
-              <a:defRPr sz="5500" b="0" i="0">
-                <a:solidFill>
-                  <a:srgbClr val="F0FDF4"/>
-                </a:solidFill>
-                <a:latin typeface="Inter"/>
-              </a:defRPr>
-            </a:pPr>
-            <a:r>
-              <a:t>“I am the living bread that came down from heaven; whoever eats this bread will live forever; and the bread that I will give is my flesh for the life of the world.”</a:t>
-            </a:r>
-          </a:p>
-          <a:p>
-            <a:pPr algn="ctr">
-              <a:spcAft>
-                <a:spcPts val="300"/>
-              </a:spcAft>
-              <a:defRPr sz="5500" b="0" i="0">
-                <a:solidFill>
-                  <a:srgbClr val="F0FDF4"/>
-                </a:solidFill>
-                <a:latin typeface="Inter"/>
-              </a:defRPr>
-            </a:pPr>
-          </a:p>
-          <a:p>
-            <a:pPr algn="ctr">
-              <a:spcAft>
-                <a:spcPts val="300"/>
-              </a:spcAft>
-              <a:defRPr sz="5500" b="0" i="0">
-                <a:solidFill>
-                  <a:srgbClr val="F0FDF4"/>
-                </a:solidFill>
-                <a:latin typeface="Inter"/>
-              </a:defRPr>
-            </a:pPr>
-            <a:r>
-              <a:t>YEAR A</a:t>
-            </a:r>
-          </a:p>
-          <a:p>
-            <a:pPr algn="ctr">
-              <a:spcAft>
-                <a:spcPts val="300"/>
-              </a:spcAft>
-              <a:defRPr sz="5500" b="0" i="0">
-                <a:solidFill>
-                  <a:srgbClr val="F0FDF4"/>
-                </a:solidFill>
-                <a:latin typeface="Inter"/>
-              </a:defRPr>
-            </a:pPr>
-            <a:r>
-              <a:t>2026-06-07 · Ordinary Time</a:t>
-            </a:r>
-          </a:p>
-        </p:txBody>
-      </p:sp>
-      <p:sp>
-        <p:nvSpPr>
-          <p:cNvPr id="4" name="TextBox 3"/>
           <p:cNvSpPr txBox="1"/>
           <p:nvPr/>
         </p:nvSpPr>
@@ -15839,19 +15817,19 @@
           <a:lstStyle/>
           <a:p/>
           <a:p>
-            <a:pPr algn="l">
+            <a:pPr>
               <a:spcBef>
                 <a:spcPts val="200"/>
               </a:spcBef>
               <a:defRPr sz="1200" b="0" i="0">
                 <a:solidFill>
-                  <a:srgbClr val="86EFAC"/>
-                </a:solidFill>
-                <a:latin typeface="Inter"/>
-              </a:defRPr>
-            </a:pPr>
-            <a:r>
-              <a:t>Mass poster / divider</a:t>
+                  <a:srgbClr val="FFCC4D"/>
+                </a:solidFill>
+                <a:latin typeface="Inter"/>
+              </a:defRPr>
+            </a:pPr>
+            <a:r>
+              <a:t>Communion (2)</a:t>
             </a:r>
           </a:p>
         </p:txBody>
@@ -16132,50 +16110,40 @@
           <a:lstStyle/>
           <a:p>
             <a:pPr algn="ctr">
+              <a:spcBef>
+                <a:spcPts val="400"/>
+              </a:spcBef>
               <a:spcAft>
                 <a:spcPts val="500"/>
               </a:spcAft>
               <a:defRPr sz="5500" b="1" i="0">
                 <a:solidFill>
+                  <a:srgbClr val="86EFAC"/>
+                </a:solidFill>
+                <a:latin typeface="Inter"/>
+              </a:defRPr>
+            </a:pPr>
+            <a:r>
+              <a:t>Priest: Let us pray.</a:t>
+            </a:r>
+          </a:p>
+          <a:p>
+            <a:pPr algn="ctr">
+              <a:spcBef>
+                <a:spcPts val="400"/>
+              </a:spcBef>
+              <a:spcAft>
+                <a:spcPts val="500"/>
+              </a:spcAft>
+              <a:defRPr sz="5500" b="1" i="0">
+                <a:solidFill>
                   <a:srgbClr val="F0FDF4"/>
                 </a:solidFill>
                 <a:latin typeface="Inter"/>
               </a:defRPr>
             </a:pPr>
             <a:r>
-              <a:t>MASS COLLECTION</a:t>
-            </a:r>
-          </a:p>
-          <a:p>
-            <a:pPr algn="ctr">
-              <a:spcAft>
-                <a:spcPts val="500"/>
-              </a:spcAft>
-              <a:defRPr sz="5500" b="0" i="0">
-                <a:solidFill>
-                  <a:srgbClr val="F0FDF4"/>
-                </a:solidFill>
-                <a:latin typeface="Inter"/>
-              </a:defRPr>
-            </a:pPr>
-            <a:r>
-              <a:t>Thank you for your generosity.</a:t>
-            </a:r>
-          </a:p>
-          <a:p>
-            <a:pPr algn="ctr">
-              <a:spcAft>
-                <a:spcPts val="500"/>
-              </a:spcAft>
-              <a:defRPr sz="5500" b="0" i="0">
-                <a:solidFill>
-                  <a:srgbClr val="F0FDF4"/>
-                </a:solidFill>
-                <a:latin typeface="Inter"/>
-              </a:defRPr>
-            </a:pPr>
-            <a:r>
-              <a:t>Date: Sunday, May 31, 2026</a:t>
+              <a:t>All: Amen.</a:t>
             </a:r>
           </a:p>
         </p:txBody>
@@ -16215,7 +16183,7 @@
               </a:defRPr>
             </a:pPr>
             <a:r>
-              <a:t>Mass Collection</a:t>
+              <a:t>The Communion Rite</a:t>
             </a:r>
           </a:p>
         </p:txBody>
@@ -16231,14 +16199,6 @@
 <file path=ppt/slides/slide81.xml><?xml version="1.0" encoding="utf-8"?>
 <p:sld xmlns:a="http://schemas.openxmlformats.org/drawingml/2006/main" xmlns:p="http://schemas.openxmlformats.org/presentationml/2006/main" xmlns:r="http://schemas.openxmlformats.org/officeDocument/2006/relationships">
   <p:cSld>
-    <p:bg>
-      <p:bgPr>
-        <a:solidFill>
-          <a:srgbClr val="10251C"/>
-        </a:solidFill>
-        <a:effectLst/>
-      </p:bgPr>
-    </p:bg>
     <p:spTree>
       <p:nvGrpSpPr>
         <p:cNvPr id="1" name=""/>
@@ -16246,16 +16206,40 @@
         <p:nvPr/>
       </p:nvGrpSpPr>
       <p:grpSpPr/>
-      <p:sp>
-        <p:nvSpPr>
-          <p:cNvPr id="2" name="TextBox 1"/>
-          <p:cNvSpPr txBox="1"/>
-          <p:nvPr/>
-        </p:nvSpPr>
-        <p:spPr>
-          <a:xfrm>
-            <a:off x="914400" y="530352"/>
-            <a:ext cx="16459200" cy="8750808"/>
+      <p:pic>
+        <p:nvPicPr>
+          <p:cNvPr id="2" name="Picture 1" descr="GFCC7Jun2026_OrdinaryTime_16x9.png"/>
+          <p:cNvPicPr>
+            <a:picLocks noChangeAspect="1"/>
+          </p:cNvPicPr>
+          <p:nvPr/>
+        </p:nvPicPr>
+        <p:blipFill>
+          <a:blip r:embed="rId2"/>
+          <a:stretch>
+            <a:fillRect/>
+          </a:stretch>
+        </p:blipFill>
+        <p:spPr>
+          <a:xfrm>
+            <a:off x="0" y="0"/>
+            <a:ext cx="18288000" cy="10287000"/>
+          </a:xfrm>
+          <a:prstGeom prst="rect">
+            <a:avLst/>
+          </a:prstGeom>
+        </p:spPr>
+      </p:pic>
+      <p:sp>
+        <p:nvSpPr>
+          <p:cNvPr id="3" name="TextBox 2"/>
+          <p:cNvSpPr txBox="1"/>
+          <p:nvPr/>
+        </p:nvSpPr>
+        <p:spPr>
+          <a:xfrm>
+            <a:off x="914400" y="850392"/>
+            <a:ext cx="16459200" cy="5943600"/>
           </a:xfrm>
           <a:prstGeom prst="rect">
             <a:avLst/>
@@ -16270,23 +16254,39 @@
           <a:p>
             <a:pPr algn="ctr">
               <a:spcAft>
-                <a:spcPts val="500"/>
+                <a:spcPts val="300"/>
               </a:spcAft>
               <a:defRPr sz="5500" b="1" i="0">
                 <a:solidFill>
+                  <a:srgbClr val="86EFAC"/>
+                </a:solidFill>
+                <a:latin typeface="Inter"/>
+              </a:defRPr>
+            </a:pPr>
+            <a:r>
+              <a:t>MASS CELEBRANT:</a:t>
+            </a:r>
+          </a:p>
+          <a:p>
+            <a:pPr algn="ctr">
+              <a:spcAft>
+                <a:spcPts val="300"/>
+              </a:spcAft>
+              <a:defRPr sz="5500" b="0" i="0">
+                <a:solidFill>
                   <a:srgbClr val="F0FDF4"/>
                 </a:solidFill>
                 <a:latin typeface="Inter"/>
               </a:defRPr>
             </a:pPr>
             <a:r>
-              <a:t>FOOD SPONSORS</a:t>
-            </a:r>
-          </a:p>
-          <a:p>
-            <a:pPr algn="ctr">
-              <a:spcAft>
-                <a:spcPts val="500"/>
+              <a:t>Rev. Fr. Jonrey Lauron, RCJ</a:t>
+            </a:r>
+          </a:p>
+          <a:p>
+            <a:pPr algn="ctr">
+              <a:spcAft>
+                <a:spcPts val="300"/>
               </a:spcAft>
               <a:defRPr sz="5500" b="0" i="0">
                 <a:solidFill>
@@ -16295,14 +16295,11 @@
                 <a:latin typeface="Inter"/>
               </a:defRPr>
             </a:pPr>
-            <a:r>
-              <a:t>The community thanks our food sponsors.</a:t>
-            </a:r>
-          </a:p>
-          <a:p>
-            <a:pPr algn="ctr">
-              <a:spcAft>
-                <a:spcPts val="500"/>
+          </a:p>
+          <a:p>
+            <a:pPr algn="ctr">
+              <a:spcAft>
+                <a:spcPts val="300"/>
               </a:spcAft>
               <a:defRPr sz="5500" b="0" i="0">
                 <a:solidFill>
@@ -16312,13 +16309,13 @@
               </a:defRPr>
             </a:pPr>
             <a:r>
-              <a:t>• Keshi Gonzales</a:t>
-            </a:r>
-          </a:p>
-          <a:p>
-            <a:pPr algn="ctr">
-              <a:spcAft>
-                <a:spcPts val="500"/>
+              <a:t>Gospel (John 6:51-58)</a:t>
+            </a:r>
+          </a:p>
+          <a:p>
+            <a:pPr algn="ctr">
+              <a:spcAft>
+                <a:spcPts val="300"/>
               </a:spcAft>
               <a:defRPr sz="5500" b="0" i="0">
                 <a:solidFill>
@@ -16328,14 +16325,59 @@
               </a:defRPr>
             </a:pPr>
             <a:r>
-              <a:t>• Divino Gabriel</a:t>
-            </a:r>
-          </a:p>
-        </p:txBody>
-      </p:sp>
-      <p:sp>
-        <p:nvSpPr>
-          <p:cNvPr id="3" name="TextBox 2"/>
+              <a:t>“I am the living bread that came down from heaven; whoever eats this bread will live forever; and the bread that I will give is my flesh for the life of the world.”</a:t>
+            </a:r>
+          </a:p>
+          <a:p>
+            <a:pPr algn="ctr">
+              <a:spcAft>
+                <a:spcPts val="300"/>
+              </a:spcAft>
+              <a:defRPr sz="5500" b="0" i="0">
+                <a:solidFill>
+                  <a:srgbClr val="F0FDF4"/>
+                </a:solidFill>
+                <a:latin typeface="Inter"/>
+              </a:defRPr>
+            </a:pPr>
+          </a:p>
+          <a:p>
+            <a:pPr algn="ctr">
+              <a:spcAft>
+                <a:spcPts val="300"/>
+              </a:spcAft>
+              <a:defRPr sz="5500" b="0" i="0">
+                <a:solidFill>
+                  <a:srgbClr val="F0FDF4"/>
+                </a:solidFill>
+                <a:latin typeface="Inter"/>
+              </a:defRPr>
+            </a:pPr>
+            <a:r>
+              <a:t>YEAR A</a:t>
+            </a:r>
+          </a:p>
+          <a:p>
+            <a:pPr algn="ctr">
+              <a:spcAft>
+                <a:spcPts val="300"/>
+              </a:spcAft>
+              <a:defRPr sz="5500" b="0" i="0">
+                <a:solidFill>
+                  <a:srgbClr val="F0FDF4"/>
+                </a:solidFill>
+                <a:latin typeface="Inter"/>
+              </a:defRPr>
+            </a:pPr>
+            <a:r>
+              <a:t>2026-06-07 · Ordinary Time</a:t>
+            </a:r>
+          </a:p>
+        </p:txBody>
+      </p:sp>
+      <p:sp>
+        <p:nvSpPr>
+          <p:cNvPr id="4" name="TextBox 3"/>
           <p:cNvSpPr txBox="1"/>
           <p:nvPr/>
         </p:nvSpPr>
@@ -16368,7 +16410,7 @@
               </a:defRPr>
             </a:pPr>
             <a:r>
-              <a:t>Food Sponsors</a:t>
+              <a:t>Mass poster / divider</a:t>
             </a:r>
           </a:p>
         </p:txBody>
@@ -16433,7 +16475,39 @@
               </a:defRPr>
             </a:pPr>
             <a:r>
-              <a:t>CHURCH ANNOUNCEMENTS</a:t>
+              <a:t>MASS COLLECTION</a:t>
+            </a:r>
+          </a:p>
+          <a:p>
+            <a:pPr algn="ctr">
+              <a:spcAft>
+                <a:spcPts val="500"/>
+              </a:spcAft>
+              <a:defRPr sz="5500" b="0" i="0">
+                <a:solidFill>
+                  <a:srgbClr val="F0FDF4"/>
+                </a:solidFill>
+                <a:latin typeface="Inter"/>
+              </a:defRPr>
+            </a:pPr>
+            <a:r>
+              <a:t>Thank you for your generosity.</a:t>
+            </a:r>
+          </a:p>
+          <a:p>
+            <a:pPr algn="ctr">
+              <a:spcAft>
+                <a:spcPts val="500"/>
+              </a:spcAft>
+              <a:defRPr sz="5500" b="0" i="0">
+                <a:solidFill>
+                  <a:srgbClr val="F0FDF4"/>
+                </a:solidFill>
+                <a:latin typeface="Inter"/>
+              </a:defRPr>
+            </a:pPr>
+            <a:r>
+              <a:t>Date: Sunday, May 31, 2026</a:t>
             </a:r>
           </a:p>
         </p:txBody>
@@ -16473,7 +16547,7 @@
               </a:defRPr>
             </a:pPr>
             <a:r>
-              <a:t>Announcements</a:t>
+              <a:t>Mass Collection</a:t>
             </a:r>
           </a:p>
         </p:txBody>
@@ -16538,7 +16612,39 @@
               </a:defRPr>
             </a:pPr>
             <a:r>
-              <a:t>Welcome newcomers!</a:t>
+              <a:t>FOOD SPONSORS</a:t>
+            </a:r>
+          </a:p>
+          <a:p>
+            <a:pPr algn="ctr">
+              <a:spcAft>
+                <a:spcPts val="500"/>
+              </a:spcAft>
+              <a:defRPr sz="5500" b="0" i="0">
+                <a:solidFill>
+                  <a:srgbClr val="F0FDF4"/>
+                </a:solidFill>
+                <a:latin typeface="Inter"/>
+              </a:defRPr>
+            </a:pPr>
+            <a:r>
+              <a:t>The community thanks our food sponsors.</a:t>
+            </a:r>
+          </a:p>
+          <a:p>
+            <a:pPr algn="ctr">
+              <a:spcAft>
+                <a:spcPts val="500"/>
+              </a:spcAft>
+              <a:defRPr sz="5500" b="0" i="0">
+                <a:solidFill>
+                  <a:srgbClr val="F0FDF4"/>
+                </a:solidFill>
+                <a:latin typeface="Inter"/>
+              </a:defRPr>
+            </a:pPr>
+            <a:r>
+              <a:t>• Diino</a:t>
             </a:r>
           </a:p>
         </p:txBody>
@@ -16578,7 +16684,7 @@
               </a:defRPr>
             </a:pPr>
             <a:r>
-              <a:t>Announcements</a:t>
+              <a:t>Food Sponsors</a:t>
             </a:r>
           </a:p>
         </p:txBody>
@@ -16643,7 +16749,7 @@
               </a:defRPr>
             </a:pPr>
             <a:r>
-              <a:t>Sacrament of Confession</a:t>
+              <a:t>CHURCH ANNOUNCEMENTS</a:t>
             </a:r>
           </a:p>
         </p:txBody>
@@ -16748,7 +16854,7 @@
               </a:defRPr>
             </a:pPr>
             <a:r>
-              <a:t>Updates and Announcements</a:t>
+              <a:t>Welcome newcomers!</a:t>
             </a:r>
           </a:p>
         </p:txBody>
@@ -16842,116 +16948,18 @@
           <a:lstStyle/>
           <a:p>
             <a:pPr algn="ctr">
-              <a:spcBef>
-                <a:spcPts val="400"/>
-              </a:spcBef>
               <a:spcAft>
                 <a:spcPts val="500"/>
               </a:spcAft>
               <a:defRPr sz="5500" b="1" i="0">
                 <a:solidFill>
-                  <a:srgbClr val="86EFAC"/>
-                </a:solidFill>
-                <a:latin typeface="Inter"/>
-              </a:defRPr>
-            </a:pPr>
-            <a:r>
-              <a:t>Priest: The Lord be with you.</a:t>
-            </a:r>
-          </a:p>
-          <a:p>
-            <a:pPr algn="ctr">
-              <a:spcBef>
-                <a:spcPts val="400"/>
-              </a:spcBef>
-              <a:spcAft>
-                <a:spcPts val="500"/>
-              </a:spcAft>
-              <a:defRPr sz="5500" b="1" i="0">
-                <a:solidFill>
                   <a:srgbClr val="F0FDF4"/>
                 </a:solidFill>
                 <a:latin typeface="Inter"/>
               </a:defRPr>
             </a:pPr>
             <a:r>
-              <a:t>All: And with your spirit.</a:t>
-            </a:r>
-          </a:p>
-          <a:p>
-            <a:pPr algn="ctr">
-              <a:spcBef>
-                <a:spcPts val="400"/>
-              </a:spcBef>
-              <a:spcAft>
-                <a:spcPts val="500"/>
-              </a:spcAft>
-              <a:defRPr sz="5500" b="1" i="0">
-                <a:solidFill>
-                  <a:srgbClr val="86EFAC"/>
-                </a:solidFill>
-                <a:latin typeface="Inter"/>
-              </a:defRPr>
-            </a:pPr>
-            <a:r>
-              <a:t>Priest: May almighty God bless you, the Father, and the Son, and the Holy Spirit.</a:t>
-            </a:r>
-          </a:p>
-          <a:p>
-            <a:pPr algn="ctr">
-              <a:spcBef>
-                <a:spcPts val="400"/>
-              </a:spcBef>
-              <a:spcAft>
-                <a:spcPts val="500"/>
-              </a:spcAft>
-              <a:defRPr sz="5500" b="1" i="0">
-                <a:solidFill>
-                  <a:srgbClr val="F0FDF4"/>
-                </a:solidFill>
-                <a:latin typeface="Inter"/>
-              </a:defRPr>
-            </a:pPr>
-            <a:r>
-              <a:t>All: Amen.</a:t>
-            </a:r>
-          </a:p>
-          <a:p>
-            <a:pPr algn="ctr">
-              <a:spcBef>
-                <a:spcPts val="400"/>
-              </a:spcBef>
-              <a:spcAft>
-                <a:spcPts val="500"/>
-              </a:spcAft>
-              <a:defRPr sz="5500" b="1" i="0">
-                <a:solidFill>
-                  <a:srgbClr val="86EFAC"/>
-                </a:solidFill>
-                <a:latin typeface="Inter"/>
-              </a:defRPr>
-            </a:pPr>
-            <a:r>
-              <a:t>Priest: Go in peace, glorifying the Lord by your life.</a:t>
-            </a:r>
-          </a:p>
-          <a:p>
-            <a:pPr algn="ctr">
-              <a:spcBef>
-                <a:spcPts val="400"/>
-              </a:spcBef>
-              <a:spcAft>
-                <a:spcPts val="500"/>
-              </a:spcAft>
-              <a:defRPr sz="5500" b="1" i="0">
-                <a:solidFill>
-                  <a:srgbClr val="F0FDF4"/>
-                </a:solidFill>
-                <a:latin typeface="Inter"/>
-              </a:defRPr>
-            </a:pPr>
-            <a:r>
-              <a:t>All: Thanks be to God.</a:t>
+              <a:t>Sacrament of Confession</a:t>
             </a:r>
           </a:p>
         </p:txBody>
@@ -16991,7 +16999,7 @@
               </a:defRPr>
             </a:pPr>
             <a:r>
-              <a:t>Final Blessing</a:t>
+              <a:t>Announcements</a:t>
             </a:r>
           </a:p>
         </p:txBody>
@@ -17010,7 +17018,7 @@
     <p:bg>
       <p:bgPr>
         <a:solidFill>
-          <a:srgbClr val="000000"/>
+          <a:srgbClr val="10251C"/>
         </a:solidFill>
         <a:effectLst/>
       </p:bgPr>
@@ -17030,8 +17038,8 @@
         </p:nvSpPr>
         <p:spPr>
           <a:xfrm>
-            <a:off x="914400" y="109728"/>
-            <a:ext cx="16459200" cy="868680"/>
+            <a:off x="914400" y="530352"/>
+            <a:ext cx="16459200" cy="8750808"/>
           </a:xfrm>
           <a:prstGeom prst="rect">
             <a:avLst/>
@@ -17045,15 +17053,18 @@
           <a:lstStyle/>
           <a:p>
             <a:pPr algn="ctr">
-              <a:defRPr sz="3850" b="1" i="0">
-                <a:solidFill>
-                  <a:srgbClr val="FFCC4D"/>
-                </a:solidFill>
-                <a:latin typeface="Georgia"/>
-              </a:defRPr>
-            </a:pPr>
-            <a:r>
-              <a:t>We Are Called</a:t>
+              <a:spcAft>
+                <a:spcPts val="500"/>
+              </a:spcAft>
+              <a:defRPr sz="5500" b="1" i="0">
+                <a:solidFill>
+                  <a:srgbClr val="F0FDF4"/>
+                </a:solidFill>
+                <a:latin typeface="Inter"/>
+              </a:defRPr>
+            </a:pPr>
+            <a:r>
+              <a:t>Updates and Announcements</a:t>
             </a:r>
           </a:p>
         </p:txBody>
@@ -17061,105 +17072,6 @@
       <p:sp>
         <p:nvSpPr>
           <p:cNvPr id="3" name="TextBox 2"/>
-          <p:cNvSpPr txBox="1"/>
-          <p:nvPr/>
-        </p:nvSpPr>
-        <p:spPr>
-          <a:xfrm>
-            <a:off x="0" y="1069848"/>
-            <a:ext cx="18288000" cy="8348472"/>
-          </a:xfrm>
-          <a:prstGeom prst="rect">
-            <a:avLst/>
-          </a:prstGeom>
-          <a:noFill/>
-        </p:spPr>
-        <p:txBody>
-          <a:bodyPr wrap="square" lIns="0" rIns="0" tIns="73152" bIns="73152" anchor="ctr">
-            <a:noAutofit/>
-          </a:bodyPr>
-          <a:lstStyle/>
-          <a:p>
-            <a:pPr algn="ctr">
-              <a:lnSpc>
-                <a:spcPct val="100000"/>
-              </a:lnSpc>
-              <a:spcAft>
-                <a:spcPts val="600"/>
-              </a:spcAft>
-              <a:defRPr sz="5500" b="1" i="0">
-                <a:solidFill>
-                  <a:srgbClr val="FFFFFF"/>
-                </a:solidFill>
-                <a:latin typeface="Arial Black"/>
-              </a:defRPr>
-            </a:pPr>
-            <a:r>
-              <a:t>WE ARE CALLED TO ACT WITH JUSTICE,</a:t>
-            </a:r>
-          </a:p>
-          <a:p>
-            <a:pPr algn="ctr">
-              <a:lnSpc>
-                <a:spcPct val="100000"/>
-              </a:lnSpc>
-              <a:spcAft>
-                <a:spcPts val="600"/>
-              </a:spcAft>
-              <a:defRPr sz="5500" b="1" i="0">
-                <a:solidFill>
-                  <a:srgbClr val="FFFFFF"/>
-                </a:solidFill>
-                <a:latin typeface="Arial Black"/>
-              </a:defRPr>
-            </a:pPr>
-            <a:r>
-              <a:t>WE ARE CALLED TO LOVE TENDERLY;</a:t>
-            </a:r>
-          </a:p>
-          <a:p>
-            <a:pPr algn="ctr">
-              <a:lnSpc>
-                <a:spcPct val="100000"/>
-              </a:lnSpc>
-              <a:spcAft>
-                <a:spcPts val="600"/>
-              </a:spcAft>
-              <a:defRPr sz="5500" b="1" i="0">
-                <a:solidFill>
-                  <a:srgbClr val="FFFFFF"/>
-                </a:solidFill>
-                <a:latin typeface="Arial Black"/>
-              </a:defRPr>
-            </a:pPr>
-            <a:r>
-              <a:t>WE ARE CALLED TO SERVE ONE ANOTHER,</a:t>
-            </a:r>
-          </a:p>
-          <a:p>
-            <a:pPr algn="ctr">
-              <a:lnSpc>
-                <a:spcPct val="100000"/>
-              </a:lnSpc>
-              <a:spcAft>
-                <a:spcPts val="600"/>
-              </a:spcAft>
-              <a:defRPr sz="5500" b="1" i="0">
-                <a:solidFill>
-                  <a:srgbClr val="FFFFFF"/>
-                </a:solidFill>
-                <a:latin typeface="Arial Black"/>
-              </a:defRPr>
-            </a:pPr>
-            <a:r>
-              <a:t>TO WALK HUMBLY WITH GOD.</a:t>
-            </a:r>
-          </a:p>
-        </p:txBody>
-      </p:sp>
-      <p:sp>
-        <p:nvSpPr>
-          <p:cNvPr id="4" name="TextBox 3"/>
           <p:cNvSpPr txBox="1"/>
           <p:nvPr/>
         </p:nvSpPr>
@@ -17180,19 +17092,19 @@
           <a:lstStyle/>
           <a:p/>
           <a:p>
-            <a:pPr>
+            <a:pPr algn="l">
               <a:spcBef>
                 <a:spcPts val="200"/>
               </a:spcBef>
               <a:defRPr sz="1200" b="0" i="0">
                 <a:solidFill>
-                  <a:srgbClr val="FFCC4D"/>
-                </a:solidFill>
-                <a:latin typeface="Inter"/>
-              </a:defRPr>
-            </a:pPr>
-            <a:r>
-              <a:t>Recessional</a:t>
+                  <a:srgbClr val="86EFAC"/>
+                </a:solidFill>
+                <a:latin typeface="Inter"/>
+              </a:defRPr>
+            </a:pPr>
+            <a:r>
+              <a:t>Announcements</a:t>
             </a:r>
           </a:p>
         </p:txBody>
@@ -17211,7 +17123,7 @@
     <p:bg>
       <p:bgPr>
         <a:solidFill>
-          <a:srgbClr val="000000"/>
+          <a:srgbClr val="10251C"/>
         </a:solidFill>
         <a:effectLst/>
       </p:bgPr>
@@ -17231,55 +17143,131 @@
         </p:nvSpPr>
         <p:spPr>
           <a:xfrm>
-            <a:off x="0" y="0"/>
-            <a:ext cx="18288000" cy="10287000"/>
-          </a:xfrm>
-          <a:prstGeom prst="rect">
-            <a:avLst/>
-          </a:prstGeom>
-          <a:noFill/>
-        </p:spPr>
-        <p:txBody>
-          <a:bodyPr wrap="square" lIns="0" rIns="0" tIns="0" bIns="0" anchor="ctr">
-            <a:noAutofit/>
-          </a:bodyPr>
-          <a:lstStyle/>
-          <a:p>
-            <a:pPr algn="ctr">
-              <a:lnSpc>
-                <a:spcPct val="100000"/>
-              </a:lnSpc>
-              <a:spcAft>
-                <a:spcPts val="600"/>
+            <a:off x="914400" y="530352"/>
+            <a:ext cx="16459200" cy="8750808"/>
+          </a:xfrm>
+          <a:prstGeom prst="rect">
+            <a:avLst/>
+          </a:prstGeom>
+          <a:noFill/>
+        </p:spPr>
+        <p:txBody>
+          <a:bodyPr wrap="square" lIns="109728" rIns="109728" tIns="73152" bIns="73152">
+            <a:noAutofit/>
+          </a:bodyPr>
+          <a:lstStyle/>
+          <a:p>
+            <a:pPr algn="ctr">
+              <a:spcBef>
+                <a:spcPts val="400"/>
+              </a:spcBef>
+              <a:spcAft>
+                <a:spcPts val="500"/>
               </a:spcAft>
               <a:defRPr sz="5500" b="1" i="0">
                 <a:solidFill>
-                  <a:srgbClr val="FFFFFF"/>
-                </a:solidFill>
-                <a:latin typeface="Arial Black"/>
-              </a:defRPr>
-            </a:pPr>
-            <a:r>
-              <a:t>COME! LIVE IN THE LIGHT!</a:t>
-            </a:r>
-          </a:p>
-          <a:p>
-            <a:pPr algn="ctr">
-              <a:lnSpc>
-                <a:spcPct val="100000"/>
-              </a:lnSpc>
-              <a:spcAft>
-                <a:spcPts val="600"/>
+                  <a:srgbClr val="86EFAC"/>
+                </a:solidFill>
+                <a:latin typeface="Inter"/>
+              </a:defRPr>
+            </a:pPr>
+            <a:r>
+              <a:t>Priest: The Lord be with you.</a:t>
+            </a:r>
+          </a:p>
+          <a:p>
+            <a:pPr algn="ctr">
+              <a:spcBef>
+                <a:spcPts val="400"/>
+              </a:spcBef>
+              <a:spcAft>
+                <a:spcPts val="500"/>
               </a:spcAft>
               <a:defRPr sz="5500" b="1" i="0">
                 <a:solidFill>
-                  <a:srgbClr val="FFFFFF"/>
-                </a:solidFill>
-                <a:latin typeface="Arial Black"/>
-              </a:defRPr>
-            </a:pPr>
-            <a:r>
-              <a:t>SHINE WITH THE JOY AND THE LOVE OF THE LORD!</a:t>
+                  <a:srgbClr val="F0FDF4"/>
+                </a:solidFill>
+                <a:latin typeface="Inter"/>
+              </a:defRPr>
+            </a:pPr>
+            <a:r>
+              <a:t>All: And with your spirit.</a:t>
+            </a:r>
+          </a:p>
+          <a:p>
+            <a:pPr algn="ctr">
+              <a:spcBef>
+                <a:spcPts val="400"/>
+              </a:spcBef>
+              <a:spcAft>
+                <a:spcPts val="500"/>
+              </a:spcAft>
+              <a:defRPr sz="5500" b="1" i="0">
+                <a:solidFill>
+                  <a:srgbClr val="86EFAC"/>
+                </a:solidFill>
+                <a:latin typeface="Inter"/>
+              </a:defRPr>
+            </a:pPr>
+            <a:r>
+              <a:t>Priest: May almighty God bless you, the Father, and the Son, and the Holy Spirit.</a:t>
+            </a:r>
+          </a:p>
+          <a:p>
+            <a:pPr algn="ctr">
+              <a:spcBef>
+                <a:spcPts val="400"/>
+              </a:spcBef>
+              <a:spcAft>
+                <a:spcPts val="500"/>
+              </a:spcAft>
+              <a:defRPr sz="5500" b="1" i="0">
+                <a:solidFill>
+                  <a:srgbClr val="F0FDF4"/>
+                </a:solidFill>
+                <a:latin typeface="Inter"/>
+              </a:defRPr>
+            </a:pPr>
+            <a:r>
+              <a:t>All: Amen.</a:t>
+            </a:r>
+          </a:p>
+          <a:p>
+            <a:pPr algn="ctr">
+              <a:spcBef>
+                <a:spcPts val="400"/>
+              </a:spcBef>
+              <a:spcAft>
+                <a:spcPts val="500"/>
+              </a:spcAft>
+              <a:defRPr sz="5500" b="1" i="0">
+                <a:solidFill>
+                  <a:srgbClr val="86EFAC"/>
+                </a:solidFill>
+                <a:latin typeface="Inter"/>
+              </a:defRPr>
+            </a:pPr>
+            <a:r>
+              <a:t>Priest: Go in peace, glorifying the Lord by your life.</a:t>
+            </a:r>
+          </a:p>
+          <a:p>
+            <a:pPr algn="ctr">
+              <a:spcBef>
+                <a:spcPts val="400"/>
+              </a:spcBef>
+              <a:spcAft>
+                <a:spcPts val="500"/>
+              </a:spcAft>
+              <a:defRPr sz="5500" b="1" i="0">
+                <a:solidFill>
+                  <a:srgbClr val="F0FDF4"/>
+                </a:solidFill>
+                <a:latin typeface="Inter"/>
+              </a:defRPr>
+            </a:pPr>
+            <a:r>
+              <a:t>All: Thanks be to God.</a:t>
             </a:r>
           </a:p>
         </p:txBody>
@@ -17307,19 +17295,19 @@
           <a:lstStyle/>
           <a:p/>
           <a:p>
-            <a:pPr>
+            <a:pPr algn="l">
               <a:spcBef>
                 <a:spcPts val="200"/>
               </a:spcBef>
               <a:defRPr sz="1200" b="0" i="0">
                 <a:solidFill>
-                  <a:srgbClr val="FFCC4D"/>
-                </a:solidFill>
-                <a:latin typeface="Inter"/>
-              </a:defRPr>
-            </a:pPr>
-            <a:r>
-              <a:t>Recessional</a:t>
+                  <a:srgbClr val="86EFAC"/>
+                </a:solidFill>
+                <a:latin typeface="Inter"/>
+              </a:defRPr>
+            </a:pPr>
+            <a:r>
+              <a:t>Final Blessing</a:t>
             </a:r>
           </a:p>
         </p:txBody>
@@ -17358,16 +17346,52 @@
         </p:nvSpPr>
         <p:spPr>
           <a:xfrm>
-            <a:off x="0" y="0"/>
-            <a:ext cx="18288000" cy="10287000"/>
-          </a:xfrm>
-          <a:prstGeom prst="rect">
-            <a:avLst/>
-          </a:prstGeom>
-          <a:noFill/>
-        </p:spPr>
-        <p:txBody>
-          <a:bodyPr wrap="square" lIns="0" rIns="0" tIns="0" bIns="0" anchor="ctr">
+            <a:off x="914400" y="109728"/>
+            <a:ext cx="16459200" cy="868680"/>
+          </a:xfrm>
+          <a:prstGeom prst="rect">
+            <a:avLst/>
+          </a:prstGeom>
+          <a:noFill/>
+        </p:spPr>
+        <p:txBody>
+          <a:bodyPr wrap="square" lIns="109728" rIns="109728" tIns="73152" bIns="73152">
+            <a:noAutofit/>
+          </a:bodyPr>
+          <a:lstStyle/>
+          <a:p>
+            <a:pPr algn="ctr">
+              <a:defRPr sz="3850" b="1" i="0">
+                <a:solidFill>
+                  <a:srgbClr val="FFCC4D"/>
+                </a:solidFill>
+                <a:latin typeface="Georgia"/>
+              </a:defRPr>
+            </a:pPr>
+            <a:r>
+              <a:t>We Are Called</a:t>
+            </a:r>
+          </a:p>
+        </p:txBody>
+      </p:sp>
+      <p:sp>
+        <p:nvSpPr>
+          <p:cNvPr id="3" name="TextBox 2"/>
+          <p:cNvSpPr txBox="1"/>
+          <p:nvPr/>
+        </p:nvSpPr>
+        <p:spPr>
+          <a:xfrm>
+            <a:off x="0" y="1069848"/>
+            <a:ext cx="18288000" cy="8348472"/>
+          </a:xfrm>
+          <a:prstGeom prst="rect">
+            <a:avLst/>
+          </a:prstGeom>
+          <a:noFill/>
+        </p:spPr>
+        <p:txBody>
+          <a:bodyPr wrap="square" lIns="0" rIns="0" tIns="73152" bIns="73152" anchor="ctr">
             <a:noAutofit/>
           </a:bodyPr>
           <a:lstStyle/>
@@ -17387,7 +17411,7 @@
               </a:defRPr>
             </a:pPr>
             <a:r>
-              <a:t>GOD OF DAYBREAK, GOD OF SHADOW,</a:t>
+              <a:t>WE ARE CALLED TO ACT WITH JUSTICE,</a:t>
             </a:r>
           </a:p>
           <a:p>
@@ -17406,7 +17430,7 @@
               </a:defRPr>
             </a:pPr>
             <a:r>
-              <a:t>COME INTO OUR RESTLESS LIVES;</a:t>
+              <a:t>WE ARE CALLED TO LOVE TENDERLY;</a:t>
             </a:r>
           </a:p>
           <a:p>
@@ -17425,7 +17449,7 @@
               </a:defRPr>
             </a:pPr>
             <a:r>
-              <a:t>LIFT FROM US THE FEAR OF SHADOWS,</a:t>
+              <a:t>WE ARE CALLED TO SERVE ONE ANOTHER,</a:t>
             </a:r>
           </a:p>
           <a:p>
@@ -17444,14 +17468,14 @@
               </a:defRPr>
             </a:pPr>
             <a:r>
-              <a:t>THAT WE MAY ARISE WITH LIGHT.</a:t>
-            </a:r>
-          </a:p>
-        </p:txBody>
-      </p:sp>
-      <p:sp>
-        <p:nvSpPr>
-          <p:cNvPr id="3" name="TextBox 2"/>
+              <a:t>TO WALK HUMBLY WITH GOD.</a:t>
+            </a:r>
+          </a:p>
+        </p:txBody>
+      </p:sp>
+      <p:sp>
+        <p:nvSpPr>
+          <p:cNvPr id="4" name="TextBox 3"/>
           <p:cNvSpPr txBox="1"/>
           <p:nvPr/>
         </p:nvSpPr>
@@ -17717,7 +17741,26 @@
               </a:defRPr>
             </a:pPr>
             <a:r>
-              <a:t>WE ARE CALLED TO ACT WITH JUSTICE...</a:t>
+              <a:t>COME! LIVE IN THE LIGHT!</a:t>
+            </a:r>
+          </a:p>
+          <a:p>
+            <a:pPr algn="ctr">
+              <a:lnSpc>
+                <a:spcPct val="100000"/>
+              </a:lnSpc>
+              <a:spcAft>
+                <a:spcPts val="600"/>
+              </a:spcAft>
+              <a:defRPr sz="5500" b="1" i="0">
+                <a:solidFill>
+                  <a:srgbClr val="FFFFFF"/>
+                </a:solidFill>
+                <a:latin typeface="Arial Black"/>
+              </a:defRPr>
+            </a:pPr>
+            <a:r>
+              <a:t>SHINE WITH THE JOY AND THE LOVE OF THE LORD!</a:t>
             </a:r>
           </a:p>
         </p:txBody>
@@ -17825,7 +17868,64 @@
               </a:defRPr>
             </a:pPr>
             <a:r>
-              <a:t>COME! LIVE IN THE LIGHT!...</a:t>
+              <a:t>GOD OF DAYBREAK, GOD OF SHADOW,</a:t>
+            </a:r>
+          </a:p>
+          <a:p>
+            <a:pPr algn="ctr">
+              <a:lnSpc>
+                <a:spcPct val="100000"/>
+              </a:lnSpc>
+              <a:spcAft>
+                <a:spcPts val="600"/>
+              </a:spcAft>
+              <a:defRPr sz="5500" b="1" i="0">
+                <a:solidFill>
+                  <a:srgbClr val="FFFFFF"/>
+                </a:solidFill>
+                <a:latin typeface="Arial Black"/>
+              </a:defRPr>
+            </a:pPr>
+            <a:r>
+              <a:t>COME INTO OUR RESTLESS LIVES;</a:t>
+            </a:r>
+          </a:p>
+          <a:p>
+            <a:pPr algn="ctr">
+              <a:lnSpc>
+                <a:spcPct val="100000"/>
+              </a:lnSpc>
+              <a:spcAft>
+                <a:spcPts val="600"/>
+              </a:spcAft>
+              <a:defRPr sz="5500" b="1" i="0">
+                <a:solidFill>
+                  <a:srgbClr val="FFFFFF"/>
+                </a:solidFill>
+                <a:latin typeface="Arial Black"/>
+              </a:defRPr>
+            </a:pPr>
+            <a:r>
+              <a:t>LIFT FROM US THE FEAR OF SHADOWS,</a:t>
+            </a:r>
+          </a:p>
+          <a:p>
+            <a:pPr algn="ctr">
+              <a:lnSpc>
+                <a:spcPct val="100000"/>
+              </a:lnSpc>
+              <a:spcAft>
+                <a:spcPts val="600"/>
+              </a:spcAft>
+              <a:defRPr sz="5500" b="1" i="0">
+                <a:solidFill>
+                  <a:srgbClr val="FFFFFF"/>
+                </a:solidFill>
+                <a:latin typeface="Arial Black"/>
+              </a:defRPr>
+            </a:pPr>
+            <a:r>
+              <a:t>THAT WE MAY ARISE WITH LIGHT.</a:t>
             </a:r>
           </a:p>
         </p:txBody>
@@ -17933,64 +18033,7 @@
               </a:defRPr>
             </a:pPr>
             <a:r>
-              <a:t>GOD OF NEWNESS, GOD OF FRESHNESS,</a:t>
-            </a:r>
-          </a:p>
-          <a:p>
-            <a:pPr algn="ctr">
-              <a:lnSpc>
-                <a:spcPct val="100000"/>
-              </a:lnSpc>
-              <a:spcAft>
-                <a:spcPts val="600"/>
-              </a:spcAft>
-              <a:defRPr sz="5500" b="1" i="0">
-                <a:solidFill>
-                  <a:srgbClr val="FFFFFF"/>
-                </a:solidFill>
-                <a:latin typeface="Arial Black"/>
-              </a:defRPr>
-            </a:pPr>
-            <a:r>
-              <a:t>COME INTO OUR MORNING SONG:</a:t>
-            </a:r>
-          </a:p>
-          <a:p>
-            <a:pPr algn="ctr">
-              <a:lnSpc>
-                <a:spcPct val="100000"/>
-              </a:lnSpc>
-              <a:spcAft>
-                <a:spcPts val="600"/>
-              </a:spcAft>
-              <a:defRPr sz="5500" b="1" i="0">
-                <a:solidFill>
-                  <a:srgbClr val="FFFFFF"/>
-                </a:solidFill>
-                <a:latin typeface="Arial Black"/>
-              </a:defRPr>
-            </a:pPr>
-            <a:r>
-              <a:t>GIVE TO US A NEW BEGINNING,</a:t>
-            </a:r>
-          </a:p>
-          <a:p>
-            <a:pPr algn="ctr">
-              <a:lnSpc>
-                <a:spcPct val="100000"/>
-              </a:lnSpc>
-              <a:spcAft>
-                <a:spcPts val="600"/>
-              </a:spcAft>
-              <a:defRPr sz="5500" b="1" i="0">
-                <a:solidFill>
-                  <a:srgbClr val="FFFFFF"/>
-                </a:solidFill>
-                <a:latin typeface="Arial Black"/>
-              </a:defRPr>
-            </a:pPr>
-            <a:r>
-              <a:t>SEND US FORTH WITH HEARTS MADE STRONG.</a:t>
+              <a:t>WE ARE CALLED TO ACT WITH JUSTICE...</a:t>
             </a:r>
           </a:p>
         </p:txBody>
@@ -18098,7 +18141,7 @@
               </a:defRPr>
             </a:pPr>
             <a:r>
-              <a:t>WE ARE CALLED TO ACT WITH JUSTICE...</a:t>
+              <a:t>COME! LIVE IN THE LIGHT!...</a:t>
             </a:r>
           </a:p>
         </p:txBody>
@@ -18206,7 +18249,64 @@
               </a:defRPr>
             </a:pPr>
             <a:r>
-              <a:t>COME! LIVE IN THE LIGHT!...</a:t>
+              <a:t>GOD OF NEWNESS, GOD OF FRESHNESS,</a:t>
+            </a:r>
+          </a:p>
+          <a:p>
+            <a:pPr algn="ctr">
+              <a:lnSpc>
+                <a:spcPct val="100000"/>
+              </a:lnSpc>
+              <a:spcAft>
+                <a:spcPts val="600"/>
+              </a:spcAft>
+              <a:defRPr sz="5500" b="1" i="0">
+                <a:solidFill>
+                  <a:srgbClr val="FFFFFF"/>
+                </a:solidFill>
+                <a:latin typeface="Arial Black"/>
+              </a:defRPr>
+            </a:pPr>
+            <a:r>
+              <a:t>COME INTO OUR MORNING SONG:</a:t>
+            </a:r>
+          </a:p>
+          <a:p>
+            <a:pPr algn="ctr">
+              <a:lnSpc>
+                <a:spcPct val="100000"/>
+              </a:lnSpc>
+              <a:spcAft>
+                <a:spcPts val="600"/>
+              </a:spcAft>
+              <a:defRPr sz="5500" b="1" i="0">
+                <a:solidFill>
+                  <a:srgbClr val="FFFFFF"/>
+                </a:solidFill>
+                <a:latin typeface="Arial Black"/>
+              </a:defRPr>
+            </a:pPr>
+            <a:r>
+              <a:t>GIVE TO US A NEW BEGINNING,</a:t>
+            </a:r>
+          </a:p>
+          <a:p>
+            <a:pPr algn="ctr">
+              <a:lnSpc>
+                <a:spcPct val="100000"/>
+              </a:lnSpc>
+              <a:spcAft>
+                <a:spcPts val="600"/>
+              </a:spcAft>
+              <a:defRPr sz="5500" b="1" i="0">
+                <a:solidFill>
+                  <a:srgbClr val="FFFFFF"/>
+                </a:solidFill>
+                <a:latin typeface="Arial Black"/>
+              </a:defRPr>
+            </a:pPr>
+            <a:r>
+              <a:t>SEND US FORTH WITH HEARTS MADE STRONG.</a:t>
             </a:r>
           </a:p>
         </p:txBody>
@@ -18260,6 +18360,222 @@
 </file>
 
 <file path=ppt/slides/slide95.xml><?xml version="1.0" encoding="utf-8"?>
+<p:sld xmlns:a="http://schemas.openxmlformats.org/drawingml/2006/main" xmlns:p="http://schemas.openxmlformats.org/presentationml/2006/main" xmlns:r="http://schemas.openxmlformats.org/officeDocument/2006/relationships">
+  <p:cSld>
+    <p:bg>
+      <p:bgPr>
+        <a:solidFill>
+          <a:srgbClr val="000000"/>
+        </a:solidFill>
+        <a:effectLst/>
+      </p:bgPr>
+    </p:bg>
+    <p:spTree>
+      <p:nvGrpSpPr>
+        <p:cNvPr id="1" name=""/>
+        <p:cNvGrpSpPr/>
+        <p:nvPr/>
+      </p:nvGrpSpPr>
+      <p:grpSpPr/>
+      <p:sp>
+        <p:nvSpPr>
+          <p:cNvPr id="2" name="TextBox 1"/>
+          <p:cNvSpPr txBox="1"/>
+          <p:nvPr/>
+        </p:nvSpPr>
+        <p:spPr>
+          <a:xfrm>
+            <a:off x="0" y="0"/>
+            <a:ext cx="18288000" cy="10287000"/>
+          </a:xfrm>
+          <a:prstGeom prst="rect">
+            <a:avLst/>
+          </a:prstGeom>
+          <a:noFill/>
+        </p:spPr>
+        <p:txBody>
+          <a:bodyPr wrap="square" lIns="0" rIns="0" tIns="0" bIns="0" anchor="ctr">
+            <a:noAutofit/>
+          </a:bodyPr>
+          <a:lstStyle/>
+          <a:p>
+            <a:pPr algn="ctr">
+              <a:lnSpc>
+                <a:spcPct val="100000"/>
+              </a:lnSpc>
+              <a:spcAft>
+                <a:spcPts val="600"/>
+              </a:spcAft>
+              <a:defRPr sz="5500" b="1" i="0">
+                <a:solidFill>
+                  <a:srgbClr val="FFFFFF"/>
+                </a:solidFill>
+                <a:latin typeface="Arial Black"/>
+              </a:defRPr>
+            </a:pPr>
+            <a:r>
+              <a:t>WE ARE CALLED TO ACT WITH JUSTICE...</a:t>
+            </a:r>
+          </a:p>
+        </p:txBody>
+      </p:sp>
+      <p:sp>
+        <p:nvSpPr>
+          <p:cNvPr id="3" name="TextBox 2"/>
+          <p:cNvSpPr txBox="1"/>
+          <p:nvPr/>
+        </p:nvSpPr>
+        <p:spPr>
+          <a:xfrm>
+            <a:off x="914400" y="9418320"/>
+            <a:ext cx="16459200" cy="777240"/>
+          </a:xfrm>
+          <a:prstGeom prst="rect">
+            <a:avLst/>
+          </a:prstGeom>
+          <a:noFill/>
+        </p:spPr>
+        <p:txBody>
+          <a:bodyPr wrap="square" lIns="109728" rIns="109728" tIns="73152" bIns="73152">
+            <a:noAutofit/>
+          </a:bodyPr>
+          <a:lstStyle/>
+          <a:p/>
+          <a:p>
+            <a:pPr>
+              <a:spcBef>
+                <a:spcPts val="200"/>
+              </a:spcBef>
+              <a:defRPr sz="1200" b="0" i="0">
+                <a:solidFill>
+                  <a:srgbClr val="FFCC4D"/>
+                </a:solidFill>
+                <a:latin typeface="Inter"/>
+              </a:defRPr>
+            </a:pPr>
+            <a:r>
+              <a:t>Recessional</a:t>
+            </a:r>
+          </a:p>
+        </p:txBody>
+      </p:sp>
+    </p:spTree>
+  </p:cSld>
+  <p:clrMapOvr>
+    <a:masterClrMapping/>
+  </p:clrMapOvr>
+</p:sld>
+</file>
+
+<file path=ppt/slides/slide96.xml><?xml version="1.0" encoding="utf-8"?>
+<p:sld xmlns:a="http://schemas.openxmlformats.org/drawingml/2006/main" xmlns:p="http://schemas.openxmlformats.org/presentationml/2006/main" xmlns:r="http://schemas.openxmlformats.org/officeDocument/2006/relationships">
+  <p:cSld>
+    <p:bg>
+      <p:bgPr>
+        <a:solidFill>
+          <a:srgbClr val="000000"/>
+        </a:solidFill>
+        <a:effectLst/>
+      </p:bgPr>
+    </p:bg>
+    <p:spTree>
+      <p:nvGrpSpPr>
+        <p:cNvPr id="1" name=""/>
+        <p:cNvGrpSpPr/>
+        <p:nvPr/>
+      </p:nvGrpSpPr>
+      <p:grpSpPr/>
+      <p:sp>
+        <p:nvSpPr>
+          <p:cNvPr id="2" name="TextBox 1"/>
+          <p:cNvSpPr txBox="1"/>
+          <p:nvPr/>
+        </p:nvSpPr>
+        <p:spPr>
+          <a:xfrm>
+            <a:off x="0" y="0"/>
+            <a:ext cx="18288000" cy="10287000"/>
+          </a:xfrm>
+          <a:prstGeom prst="rect">
+            <a:avLst/>
+          </a:prstGeom>
+          <a:noFill/>
+        </p:spPr>
+        <p:txBody>
+          <a:bodyPr wrap="square" lIns="0" rIns="0" tIns="0" bIns="0" anchor="ctr">
+            <a:noAutofit/>
+          </a:bodyPr>
+          <a:lstStyle/>
+          <a:p>
+            <a:pPr algn="ctr">
+              <a:lnSpc>
+                <a:spcPct val="100000"/>
+              </a:lnSpc>
+              <a:spcAft>
+                <a:spcPts val="600"/>
+              </a:spcAft>
+              <a:defRPr sz="5500" b="1" i="0">
+                <a:solidFill>
+                  <a:srgbClr val="FFFFFF"/>
+                </a:solidFill>
+                <a:latin typeface="Arial Black"/>
+              </a:defRPr>
+            </a:pPr>
+            <a:r>
+              <a:t>COME! LIVE IN THE LIGHT!...</a:t>
+            </a:r>
+          </a:p>
+        </p:txBody>
+      </p:sp>
+      <p:sp>
+        <p:nvSpPr>
+          <p:cNvPr id="3" name="TextBox 2"/>
+          <p:cNvSpPr txBox="1"/>
+          <p:nvPr/>
+        </p:nvSpPr>
+        <p:spPr>
+          <a:xfrm>
+            <a:off x="914400" y="9418320"/>
+            <a:ext cx="16459200" cy="777240"/>
+          </a:xfrm>
+          <a:prstGeom prst="rect">
+            <a:avLst/>
+          </a:prstGeom>
+          <a:noFill/>
+        </p:spPr>
+        <p:txBody>
+          <a:bodyPr wrap="square" lIns="109728" rIns="109728" tIns="73152" bIns="73152">
+            <a:noAutofit/>
+          </a:bodyPr>
+          <a:lstStyle/>
+          <a:p/>
+          <a:p>
+            <a:pPr>
+              <a:spcBef>
+                <a:spcPts val="200"/>
+              </a:spcBef>
+              <a:defRPr sz="1200" b="0" i="0">
+                <a:solidFill>
+                  <a:srgbClr val="FFCC4D"/>
+                </a:solidFill>
+                <a:latin typeface="Inter"/>
+              </a:defRPr>
+            </a:pPr>
+            <a:r>
+              <a:t>Recessional</a:t>
+            </a:r>
+          </a:p>
+        </p:txBody>
+      </p:sp>
+    </p:spTree>
+  </p:cSld>
+  <p:clrMapOvr>
+    <a:masterClrMapping/>
+  </p:clrMapOvr>
+</p:sld>
+</file>
+
+<file path=ppt/slides/slide97.xml><?xml version="1.0" encoding="utf-8"?>
 <p:sld xmlns:a="http://schemas.openxmlformats.org/drawingml/2006/main" xmlns:p="http://schemas.openxmlformats.org/presentationml/2006/main" xmlns:r="http://schemas.openxmlformats.org/officeDocument/2006/relationships">
   <p:cSld>
     <p:spTree>

--- a/outputs/GFCC7Jun2026_OrdinaryTime.pptx
+++ b/outputs/GFCC7Jun2026_OrdinaryTime.pptx
@@ -94,14 +94,6 @@
     <p:sldId id="342" r:id="rId93"/>
     <p:sldId id="343" r:id="rId94"/>
     <p:sldId id="344" r:id="rId95"/>
-    <p:sldId id="345" r:id="rId96"/>
-    <p:sldId id="346" r:id="rId97"/>
-    <p:sldId id="347" r:id="rId98"/>
-    <p:sldId id="348" r:id="rId99"/>
-    <p:sldId id="349" r:id="rId100"/>
-    <p:sldId id="350" r:id="rId101"/>
-    <p:sldId id="351" r:id="rId102"/>
-    <p:sldId id="352" r:id="rId103"/>
   </p:sldIdLst>
   <p:sldSz cx="18288000" cy="10287000" type="screen4x3"/>
   <p:notesSz cx="6858000" cy="9144000"/>
@@ -14256,7 +14248,7 @@
               </a:defRPr>
             </a:pPr>
             <a:r>
-              <a:t>Here I Am, Lord</a:t>
+              <a:t>Pananagutan</a:t>
             </a:r>
           </a:p>
         </p:txBody>
@@ -14298,64 +14290,7 @@
               </a:defRPr>
             </a:pPr>
             <a:r>
-              <a:t>I, THE LORD OF SEA AND SKY,</a:t>
-            </a:r>
-          </a:p>
-          <a:p>
-            <a:pPr algn="ctr">
-              <a:lnSpc>
-                <a:spcPct val="100000"/>
-              </a:lnSpc>
-              <a:spcAft>
-                <a:spcPts val="600"/>
-              </a:spcAft>
-              <a:defRPr sz="5500" b="1" i="0">
-                <a:solidFill>
-                  <a:srgbClr val="FFFFFF"/>
-                </a:solidFill>
-                <a:latin typeface="Arial Black"/>
-              </a:defRPr>
-            </a:pPr>
-            <a:r>
-              <a:t>I HAVE HEARD MY PEOPLE CRY.</a:t>
-            </a:r>
-          </a:p>
-          <a:p>
-            <a:pPr algn="ctr">
-              <a:lnSpc>
-                <a:spcPct val="100000"/>
-              </a:lnSpc>
-              <a:spcAft>
-                <a:spcPts val="600"/>
-              </a:spcAft>
-              <a:defRPr sz="5500" b="1" i="0">
-                <a:solidFill>
-                  <a:srgbClr val="FFFFFF"/>
-                </a:solidFill>
-                <a:latin typeface="Arial Black"/>
-              </a:defRPr>
-            </a:pPr>
-            <a:r>
-              <a:t>ALL WHO DWELL IN DARK AND SIN,</a:t>
-            </a:r>
-          </a:p>
-          <a:p>
-            <a:pPr algn="ctr">
-              <a:lnSpc>
-                <a:spcPct val="100000"/>
-              </a:lnSpc>
-              <a:spcAft>
-                <a:spcPts val="600"/>
-              </a:spcAft>
-              <a:defRPr sz="5500" b="1" i="0">
-                <a:solidFill>
-                  <a:srgbClr val="FFFFFF"/>
-                </a:solidFill>
-                <a:latin typeface="Arial Black"/>
-              </a:defRPr>
-            </a:pPr>
-            <a:r>
-              <a:t>MY HAND WILL SAVE.</a:t>
+              <a:t>(NO LYRICS IN LIBRARY FOR THIS HYMN.)</a:t>
             </a:r>
           </a:p>
         </p:txBody>
@@ -14414,7 +14349,7 @@
     <p:bg>
       <p:bgPr>
         <a:solidFill>
-          <a:srgbClr val="000000"/>
+          <a:srgbClr val="10251C"/>
         </a:solidFill>
         <a:effectLst/>
       </p:bgPr>
@@ -14434,93 +14369,55 @@
         </p:nvSpPr>
         <p:spPr>
           <a:xfrm>
-            <a:off x="0" y="0"/>
-            <a:ext cx="18288000" cy="10287000"/>
-          </a:xfrm>
-          <a:prstGeom prst="rect">
-            <a:avLst/>
-          </a:prstGeom>
-          <a:noFill/>
-        </p:spPr>
-        <p:txBody>
-          <a:bodyPr wrap="square" lIns="0" rIns="0" tIns="0" bIns="0" anchor="ctr">
-            <a:noAutofit/>
-          </a:bodyPr>
-          <a:lstStyle/>
-          <a:p>
-            <a:pPr algn="ctr">
-              <a:lnSpc>
-                <a:spcPct val="100000"/>
-              </a:lnSpc>
-              <a:spcAft>
-                <a:spcPts val="600"/>
+            <a:off x="914400" y="530352"/>
+            <a:ext cx="16459200" cy="8750808"/>
+          </a:xfrm>
+          <a:prstGeom prst="rect">
+            <a:avLst/>
+          </a:prstGeom>
+          <a:noFill/>
+        </p:spPr>
+        <p:txBody>
+          <a:bodyPr wrap="square" lIns="109728" rIns="109728" tIns="73152" bIns="73152">
+            <a:noAutofit/>
+          </a:bodyPr>
+          <a:lstStyle/>
+          <a:p>
+            <a:pPr algn="ctr">
+              <a:spcBef>
+                <a:spcPts val="400"/>
+              </a:spcBef>
+              <a:spcAft>
+                <a:spcPts val="500"/>
               </a:spcAft>
               <a:defRPr sz="5500" b="1" i="0">
                 <a:solidFill>
-                  <a:srgbClr val="FFFFFF"/>
-                </a:solidFill>
-                <a:latin typeface="Arial Black"/>
-              </a:defRPr>
-            </a:pPr>
-            <a:r>
-              <a:t>I WHO MADE THE STARS OF NIGHT,</a:t>
-            </a:r>
-          </a:p>
-          <a:p>
-            <a:pPr algn="ctr">
-              <a:lnSpc>
-                <a:spcPct val="100000"/>
-              </a:lnSpc>
-              <a:spcAft>
-                <a:spcPts val="600"/>
+                  <a:srgbClr val="86EFAC"/>
+                </a:solidFill>
+                <a:latin typeface="Inter"/>
+              </a:defRPr>
+            </a:pPr>
+            <a:r>
+              <a:t>Priest: Let us pray.</a:t>
+            </a:r>
+          </a:p>
+          <a:p>
+            <a:pPr algn="ctr">
+              <a:spcBef>
+                <a:spcPts val="400"/>
+              </a:spcBef>
+              <a:spcAft>
+                <a:spcPts val="500"/>
               </a:spcAft>
               <a:defRPr sz="5500" b="1" i="0">
                 <a:solidFill>
-                  <a:srgbClr val="FFFFFF"/>
-                </a:solidFill>
-                <a:latin typeface="Arial Black"/>
-              </a:defRPr>
-            </a:pPr>
-            <a:r>
-              <a:t>I WILL MAKE THEIR DARKNESS BRIGHT.</a:t>
-            </a:r>
-          </a:p>
-          <a:p>
-            <a:pPr algn="ctr">
-              <a:lnSpc>
-                <a:spcPct val="100000"/>
-              </a:lnSpc>
-              <a:spcAft>
-                <a:spcPts val="600"/>
-              </a:spcAft>
-              <a:defRPr sz="5500" b="1" i="0">
-                <a:solidFill>
-                  <a:srgbClr val="FFFFFF"/>
-                </a:solidFill>
-                <a:latin typeface="Arial Black"/>
-              </a:defRPr>
-            </a:pPr>
-            <a:r>
-              <a:t>WHO WILL BEAR MY LIGHT TO THEM?</a:t>
-            </a:r>
-          </a:p>
-          <a:p>
-            <a:pPr algn="ctr">
-              <a:lnSpc>
-                <a:spcPct val="100000"/>
-              </a:lnSpc>
-              <a:spcAft>
-                <a:spcPts val="600"/>
-              </a:spcAft>
-              <a:defRPr sz="5500" b="1" i="0">
-                <a:solidFill>
-                  <a:srgbClr val="FFFFFF"/>
-                </a:solidFill>
-                <a:latin typeface="Arial Black"/>
-              </a:defRPr>
-            </a:pPr>
-            <a:r>
-              <a:t>WHOM SHALL I SEND?</a:t>
+                  <a:srgbClr val="F0FDF4"/>
+                </a:solidFill>
+                <a:latin typeface="Inter"/>
+              </a:defRPr>
+            </a:pPr>
+            <a:r>
+              <a:t>All: Amen.</a:t>
             </a:r>
           </a:p>
         </p:txBody>
@@ -14548,19 +14445,19 @@
           <a:lstStyle/>
           <a:p/>
           <a:p>
-            <a:pPr>
+            <a:pPr algn="l">
               <a:spcBef>
                 <a:spcPts val="200"/>
               </a:spcBef>
               <a:defRPr sz="1200" b="0" i="0">
                 <a:solidFill>
-                  <a:srgbClr val="FFCC4D"/>
-                </a:solidFill>
-                <a:latin typeface="Inter"/>
-              </a:defRPr>
-            </a:pPr>
-            <a:r>
-              <a:t>Communion (2)</a:t>
+                  <a:srgbClr val="86EFAC"/>
+                </a:solidFill>
+                <a:latin typeface="Inter"/>
+              </a:defRPr>
+            </a:pPr>
+            <a:r>
+              <a:t>The Communion Rite</a:t>
             </a:r>
           </a:p>
         </p:txBody>
@@ -14576,14 +14473,6 @@
 <file path=ppt/slides/slide73.xml><?xml version="1.0" encoding="utf-8"?>
 <p:sld xmlns:a="http://schemas.openxmlformats.org/drawingml/2006/main" xmlns:p="http://schemas.openxmlformats.org/presentationml/2006/main" xmlns:r="http://schemas.openxmlformats.org/officeDocument/2006/relationships">
   <p:cSld>
-    <p:bg>
-      <p:bgPr>
-        <a:solidFill>
-          <a:srgbClr val="000000"/>
-        </a:solidFill>
-        <a:effectLst/>
-      </p:bgPr>
-    </p:bg>
     <p:spTree>
       <p:nvGrpSpPr>
         <p:cNvPr id="1" name=""/>
@@ -14591,12 +14480,20 @@
         <p:nvPr/>
       </p:nvGrpSpPr>
       <p:grpSpPr/>
-      <p:sp>
-        <p:nvSpPr>
-          <p:cNvPr id="2" name="TextBox 1"/>
-          <p:cNvSpPr txBox="1"/>
-          <p:nvPr/>
-        </p:nvSpPr>
+      <p:pic>
+        <p:nvPicPr>
+          <p:cNvPr id="2" name="Picture 1" descr="GFCC7Jun2026_OrdinaryTime_16x9.png"/>
+          <p:cNvPicPr>
+            <a:picLocks noChangeAspect="1"/>
+          </p:cNvPicPr>
+          <p:nvPr/>
+        </p:nvPicPr>
+        <p:blipFill>
+          <a:blip r:embed="rId2"/>
+          <a:stretch>
+            <a:fillRect/>
+          </a:stretch>
+        </p:blipFill>
         <p:spPr>
           <a:xfrm>
             <a:off x="0" y="0"/>
@@ -14605,132 +14502,156 @@
           <a:prstGeom prst="rect">
             <a:avLst/>
           </a:prstGeom>
-          <a:noFill/>
-        </p:spPr>
-        <p:txBody>
-          <a:bodyPr wrap="square" lIns="0" rIns="0" tIns="0" bIns="0" anchor="ctr">
-            <a:noAutofit/>
-          </a:bodyPr>
-          <a:lstStyle/>
-          <a:p>
-            <a:pPr algn="ctr">
-              <a:lnSpc>
-                <a:spcPct val="100000"/>
-              </a:lnSpc>
-              <a:spcAft>
-                <a:spcPts val="600"/>
+        </p:spPr>
+      </p:pic>
+      <p:sp>
+        <p:nvSpPr>
+          <p:cNvPr id="3" name="TextBox 2"/>
+          <p:cNvSpPr txBox="1"/>
+          <p:nvPr/>
+        </p:nvSpPr>
+        <p:spPr>
+          <a:xfrm>
+            <a:off x="914400" y="850392"/>
+            <a:ext cx="16459200" cy="5943600"/>
+          </a:xfrm>
+          <a:prstGeom prst="rect">
+            <a:avLst/>
+          </a:prstGeom>
+          <a:noFill/>
+        </p:spPr>
+        <p:txBody>
+          <a:bodyPr wrap="square" lIns="109728" rIns="109728" tIns="73152" bIns="73152">
+            <a:noAutofit/>
+          </a:bodyPr>
+          <a:lstStyle/>
+          <a:p>
+            <a:pPr algn="ctr">
+              <a:spcAft>
+                <a:spcPts val="300"/>
               </a:spcAft>
               <a:defRPr sz="5500" b="1" i="0">
                 <a:solidFill>
-                  <a:srgbClr val="FFFFFF"/>
-                </a:solidFill>
-                <a:latin typeface="Arial Black"/>
-              </a:defRPr>
-            </a:pPr>
-            <a:r>
-              <a:t>HERE I AM, LORD.</a:t>
-            </a:r>
-          </a:p>
-          <a:p>
-            <a:pPr algn="ctr">
-              <a:lnSpc>
-                <a:spcPct val="100000"/>
-              </a:lnSpc>
-              <a:spcAft>
-                <a:spcPts val="600"/>
-              </a:spcAft>
-              <a:defRPr sz="5500" b="1" i="0">
-                <a:solidFill>
-                  <a:srgbClr val="FFFFFF"/>
-                </a:solidFill>
-                <a:latin typeface="Arial Black"/>
-              </a:defRPr>
-            </a:pPr>
-            <a:r>
-              <a:t>IS IT I, LORD?</a:t>
-            </a:r>
-          </a:p>
-          <a:p>
-            <a:pPr algn="ctr">
-              <a:lnSpc>
-                <a:spcPct val="100000"/>
-              </a:lnSpc>
-              <a:spcAft>
-                <a:spcPts val="600"/>
-              </a:spcAft>
-              <a:defRPr sz="5500" b="1" i="0">
-                <a:solidFill>
-                  <a:srgbClr val="FFFFFF"/>
-                </a:solidFill>
-                <a:latin typeface="Arial Black"/>
-              </a:defRPr>
-            </a:pPr>
-            <a:r>
-              <a:t>I HAVE HEARD YOU CALLING IN THE NIGHT.</a:t>
-            </a:r>
-          </a:p>
-          <a:p>
-            <a:pPr algn="ctr">
-              <a:lnSpc>
-                <a:spcPct val="100000"/>
-              </a:lnSpc>
-              <a:spcAft>
-                <a:spcPts val="600"/>
-              </a:spcAft>
-              <a:defRPr sz="5500" b="1" i="0">
-                <a:solidFill>
-                  <a:srgbClr val="FFFFFF"/>
-                </a:solidFill>
-                <a:latin typeface="Arial Black"/>
-              </a:defRPr>
-            </a:pPr>
-            <a:r>
-              <a:t>I WILL GO, LORD,</a:t>
-            </a:r>
-          </a:p>
-          <a:p>
-            <a:pPr algn="ctr">
-              <a:lnSpc>
-                <a:spcPct val="100000"/>
-              </a:lnSpc>
-              <a:spcAft>
-                <a:spcPts val="600"/>
-              </a:spcAft>
-              <a:defRPr sz="5500" b="1" i="0">
-                <a:solidFill>
-                  <a:srgbClr val="FFFFFF"/>
-                </a:solidFill>
-                <a:latin typeface="Arial Black"/>
-              </a:defRPr>
-            </a:pPr>
-            <a:r>
-              <a:t>IF YOU LEAD ME.</a:t>
-            </a:r>
-          </a:p>
-          <a:p>
-            <a:pPr algn="ctr">
-              <a:lnSpc>
-                <a:spcPct val="100000"/>
-              </a:lnSpc>
-              <a:spcAft>
-                <a:spcPts val="600"/>
-              </a:spcAft>
-              <a:defRPr sz="5500" b="1" i="0">
-                <a:solidFill>
-                  <a:srgbClr val="FFFFFF"/>
-                </a:solidFill>
-                <a:latin typeface="Arial Black"/>
-              </a:defRPr>
-            </a:pPr>
-            <a:r>
-              <a:t>I WILL HOLD YOUR PEOPLE IN MY HEART.</a:t>
-            </a:r>
-          </a:p>
-        </p:txBody>
-      </p:sp>
-      <p:sp>
-        <p:nvSpPr>
-          <p:cNvPr id="3" name="TextBox 2"/>
+                  <a:srgbClr val="86EFAC"/>
+                </a:solidFill>
+                <a:latin typeface="Inter"/>
+              </a:defRPr>
+            </a:pPr>
+            <a:r>
+              <a:t>MASS CELEBRANT:</a:t>
+            </a:r>
+          </a:p>
+          <a:p>
+            <a:pPr algn="ctr">
+              <a:spcAft>
+                <a:spcPts val="300"/>
+              </a:spcAft>
+              <a:defRPr sz="5500" b="0" i="0">
+                <a:solidFill>
+                  <a:srgbClr val="F0FDF4"/>
+                </a:solidFill>
+                <a:latin typeface="Inter"/>
+              </a:defRPr>
+            </a:pPr>
+            <a:r>
+              <a:t>Rev. Fr. Jonrey Lauron, RCJ</a:t>
+            </a:r>
+          </a:p>
+          <a:p>
+            <a:pPr algn="ctr">
+              <a:spcAft>
+                <a:spcPts val="300"/>
+              </a:spcAft>
+              <a:defRPr sz="5500" b="0" i="0">
+                <a:solidFill>
+                  <a:srgbClr val="F0FDF4"/>
+                </a:solidFill>
+                <a:latin typeface="Inter"/>
+              </a:defRPr>
+            </a:pPr>
+          </a:p>
+          <a:p>
+            <a:pPr algn="ctr">
+              <a:spcAft>
+                <a:spcPts val="300"/>
+              </a:spcAft>
+              <a:defRPr sz="5500" b="0" i="0">
+                <a:solidFill>
+                  <a:srgbClr val="F0FDF4"/>
+                </a:solidFill>
+                <a:latin typeface="Inter"/>
+              </a:defRPr>
+            </a:pPr>
+            <a:r>
+              <a:t>Gospel (John 6:51-58)</a:t>
+            </a:r>
+          </a:p>
+          <a:p>
+            <a:pPr algn="ctr">
+              <a:spcAft>
+                <a:spcPts val="300"/>
+              </a:spcAft>
+              <a:defRPr sz="5500" b="0" i="0">
+                <a:solidFill>
+                  <a:srgbClr val="F0FDF4"/>
+                </a:solidFill>
+                <a:latin typeface="Inter"/>
+              </a:defRPr>
+            </a:pPr>
+            <a:r>
+              <a:t>“I am the living bread that came down from heaven; whoever eats this bread will live forever; and the bread that I will give is my flesh for the life of the world.”</a:t>
+            </a:r>
+          </a:p>
+          <a:p>
+            <a:pPr algn="ctr">
+              <a:spcAft>
+                <a:spcPts val="300"/>
+              </a:spcAft>
+              <a:defRPr sz="5500" b="0" i="0">
+                <a:solidFill>
+                  <a:srgbClr val="F0FDF4"/>
+                </a:solidFill>
+                <a:latin typeface="Inter"/>
+              </a:defRPr>
+            </a:pPr>
+          </a:p>
+          <a:p>
+            <a:pPr algn="ctr">
+              <a:spcAft>
+                <a:spcPts val="300"/>
+              </a:spcAft>
+              <a:defRPr sz="5500" b="0" i="0">
+                <a:solidFill>
+                  <a:srgbClr val="F0FDF4"/>
+                </a:solidFill>
+                <a:latin typeface="Inter"/>
+              </a:defRPr>
+            </a:pPr>
+            <a:r>
+              <a:t>YEAR A</a:t>
+            </a:r>
+          </a:p>
+          <a:p>
+            <a:pPr algn="ctr">
+              <a:spcAft>
+                <a:spcPts val="300"/>
+              </a:spcAft>
+              <a:defRPr sz="5500" b="0" i="0">
+                <a:solidFill>
+                  <a:srgbClr val="F0FDF4"/>
+                </a:solidFill>
+                <a:latin typeface="Inter"/>
+              </a:defRPr>
+            </a:pPr>
+            <a:r>
+              <a:t>2026-06-07 · Ordinary Time</a:t>
+            </a:r>
+          </a:p>
+        </p:txBody>
+      </p:sp>
+      <p:sp>
+        <p:nvSpPr>
+          <p:cNvPr id="4" name="TextBox 3"/>
           <p:cNvSpPr txBox="1"/>
           <p:nvPr/>
         </p:nvSpPr>
@@ -14751,19 +14672,19 @@
           <a:lstStyle/>
           <a:p/>
           <a:p>
-            <a:pPr>
+            <a:pPr algn="l">
               <a:spcBef>
                 <a:spcPts val="200"/>
               </a:spcBef>
               <a:defRPr sz="1200" b="0" i="0">
                 <a:solidFill>
-                  <a:srgbClr val="FFCC4D"/>
-                </a:solidFill>
-                <a:latin typeface="Inter"/>
-              </a:defRPr>
-            </a:pPr>
-            <a:r>
-              <a:t>Communion (2)</a:t>
+                  <a:srgbClr val="86EFAC"/>
+                </a:solidFill>
+                <a:latin typeface="Inter"/>
+              </a:defRPr>
+            </a:pPr>
+            <a:r>
+              <a:t>Mass poster / divider</a:t>
             </a:r>
           </a:p>
         </p:txBody>
@@ -14782,7 +14703,7 @@
     <p:bg>
       <p:bgPr>
         <a:solidFill>
-          <a:srgbClr val="000000"/>
+          <a:srgbClr val="10251C"/>
         </a:solidFill>
         <a:effectLst/>
       </p:bgPr>
@@ -14802,93 +14723,65 @@
         </p:nvSpPr>
         <p:spPr>
           <a:xfrm>
-            <a:off x="0" y="0"/>
-            <a:ext cx="18288000" cy="10287000"/>
-          </a:xfrm>
-          <a:prstGeom prst="rect">
-            <a:avLst/>
-          </a:prstGeom>
-          <a:noFill/>
-        </p:spPr>
-        <p:txBody>
-          <a:bodyPr wrap="square" lIns="0" rIns="0" tIns="0" bIns="0" anchor="ctr">
-            <a:noAutofit/>
-          </a:bodyPr>
-          <a:lstStyle/>
-          <a:p>
-            <a:pPr algn="ctr">
-              <a:lnSpc>
-                <a:spcPct val="100000"/>
-              </a:lnSpc>
-              <a:spcAft>
-                <a:spcPts val="600"/>
+            <a:off x="914400" y="530352"/>
+            <a:ext cx="16459200" cy="8750808"/>
+          </a:xfrm>
+          <a:prstGeom prst="rect">
+            <a:avLst/>
+          </a:prstGeom>
+          <a:noFill/>
+        </p:spPr>
+        <p:txBody>
+          <a:bodyPr wrap="square" lIns="109728" rIns="109728" tIns="73152" bIns="73152">
+            <a:noAutofit/>
+          </a:bodyPr>
+          <a:lstStyle/>
+          <a:p>
+            <a:pPr algn="ctr">
+              <a:spcAft>
+                <a:spcPts val="500"/>
               </a:spcAft>
               <a:defRPr sz="5500" b="1" i="0">
                 <a:solidFill>
-                  <a:srgbClr val="FFFFFF"/>
-                </a:solidFill>
-                <a:latin typeface="Arial Black"/>
-              </a:defRPr>
-            </a:pPr>
-            <a:r>
-              <a:t>I, THE LORD OF SNOW AND RAIN,</a:t>
-            </a:r>
-          </a:p>
-          <a:p>
-            <a:pPr algn="ctr">
-              <a:lnSpc>
-                <a:spcPct val="100000"/>
-              </a:lnSpc>
-              <a:spcAft>
-                <a:spcPts val="600"/>
-              </a:spcAft>
-              <a:defRPr sz="5500" b="1" i="0">
-                <a:solidFill>
-                  <a:srgbClr val="FFFFFF"/>
-                </a:solidFill>
-                <a:latin typeface="Arial Black"/>
-              </a:defRPr>
-            </a:pPr>
-            <a:r>
-              <a:t>I HAVE BORNE MY PEOPLE'S PAIN.</a:t>
-            </a:r>
-          </a:p>
-          <a:p>
-            <a:pPr algn="ctr">
-              <a:lnSpc>
-                <a:spcPct val="100000"/>
-              </a:lnSpc>
-              <a:spcAft>
-                <a:spcPts val="600"/>
-              </a:spcAft>
-              <a:defRPr sz="5500" b="1" i="0">
-                <a:solidFill>
-                  <a:srgbClr val="FFFFFF"/>
-                </a:solidFill>
-                <a:latin typeface="Arial Black"/>
-              </a:defRPr>
-            </a:pPr>
-            <a:r>
-              <a:t>I HAVE WEPT FOR LOVE OF THEM,</a:t>
-            </a:r>
-          </a:p>
-          <a:p>
-            <a:pPr algn="ctr">
-              <a:lnSpc>
-                <a:spcPct val="100000"/>
-              </a:lnSpc>
-              <a:spcAft>
-                <a:spcPts val="600"/>
-              </a:spcAft>
-              <a:defRPr sz="5500" b="1" i="0">
-                <a:solidFill>
-                  <a:srgbClr val="FFFFFF"/>
-                </a:solidFill>
-                <a:latin typeface="Arial Black"/>
-              </a:defRPr>
-            </a:pPr>
-            <a:r>
-              <a:t>THEY TURN AWAY.</a:t>
+                  <a:srgbClr val="F0FDF4"/>
+                </a:solidFill>
+                <a:latin typeface="Inter"/>
+              </a:defRPr>
+            </a:pPr>
+            <a:r>
+              <a:t>MASS COLLECTION</a:t>
+            </a:r>
+          </a:p>
+          <a:p>
+            <a:pPr algn="ctr">
+              <a:spcAft>
+                <a:spcPts val="500"/>
+              </a:spcAft>
+              <a:defRPr sz="5500" b="0" i="0">
+                <a:solidFill>
+                  <a:srgbClr val="F0FDF4"/>
+                </a:solidFill>
+                <a:latin typeface="Inter"/>
+              </a:defRPr>
+            </a:pPr>
+            <a:r>
+              <a:t>Thank you for your generosity.</a:t>
+            </a:r>
+          </a:p>
+          <a:p>
+            <a:pPr algn="ctr">
+              <a:spcAft>
+                <a:spcPts val="500"/>
+              </a:spcAft>
+              <a:defRPr sz="5500" b="0" i="0">
+                <a:solidFill>
+                  <a:srgbClr val="F0FDF4"/>
+                </a:solidFill>
+                <a:latin typeface="Inter"/>
+              </a:defRPr>
+            </a:pPr>
+            <a:r>
+              <a:t>Date: Sunday, May 31, 2026</a:t>
             </a:r>
           </a:p>
         </p:txBody>
@@ -14916,19 +14809,19 @@
           <a:lstStyle/>
           <a:p/>
           <a:p>
-            <a:pPr>
+            <a:pPr algn="l">
               <a:spcBef>
                 <a:spcPts val="200"/>
               </a:spcBef>
               <a:defRPr sz="1200" b="0" i="0">
                 <a:solidFill>
-                  <a:srgbClr val="FFCC4D"/>
-                </a:solidFill>
-                <a:latin typeface="Inter"/>
-              </a:defRPr>
-            </a:pPr>
-            <a:r>
-              <a:t>Communion (2)</a:t>
+                  <a:srgbClr val="86EFAC"/>
+                </a:solidFill>
+                <a:latin typeface="Inter"/>
+              </a:defRPr>
+            </a:pPr>
+            <a:r>
+              <a:t>Mass Collection</a:t>
             </a:r>
           </a:p>
         </p:txBody>
@@ -14947,7 +14840,7 @@
     <p:bg>
       <p:bgPr>
         <a:solidFill>
-          <a:srgbClr val="000000"/>
+          <a:srgbClr val="10251C"/>
         </a:solidFill>
         <a:effectLst/>
       </p:bgPr>
@@ -14967,93 +14860,65 @@
         </p:nvSpPr>
         <p:spPr>
           <a:xfrm>
-            <a:off x="0" y="0"/>
-            <a:ext cx="18288000" cy="10287000"/>
-          </a:xfrm>
-          <a:prstGeom prst="rect">
-            <a:avLst/>
-          </a:prstGeom>
-          <a:noFill/>
-        </p:spPr>
-        <p:txBody>
-          <a:bodyPr wrap="square" lIns="0" rIns="0" tIns="0" bIns="0" anchor="ctr">
-            <a:noAutofit/>
-          </a:bodyPr>
-          <a:lstStyle/>
-          <a:p>
-            <a:pPr algn="ctr">
-              <a:lnSpc>
-                <a:spcPct val="100000"/>
-              </a:lnSpc>
-              <a:spcAft>
-                <a:spcPts val="600"/>
+            <a:off x="914400" y="530352"/>
+            <a:ext cx="16459200" cy="8750808"/>
+          </a:xfrm>
+          <a:prstGeom prst="rect">
+            <a:avLst/>
+          </a:prstGeom>
+          <a:noFill/>
+        </p:spPr>
+        <p:txBody>
+          <a:bodyPr wrap="square" lIns="109728" rIns="109728" tIns="73152" bIns="73152">
+            <a:noAutofit/>
+          </a:bodyPr>
+          <a:lstStyle/>
+          <a:p>
+            <a:pPr algn="ctr">
+              <a:spcAft>
+                <a:spcPts val="500"/>
               </a:spcAft>
               <a:defRPr sz="5500" b="1" i="0">
                 <a:solidFill>
-                  <a:srgbClr val="FFFFFF"/>
-                </a:solidFill>
-                <a:latin typeface="Arial Black"/>
-              </a:defRPr>
-            </a:pPr>
-            <a:r>
-              <a:t>I WILL BREAK THEIR HEARTS OF STONE,</a:t>
-            </a:r>
-          </a:p>
-          <a:p>
-            <a:pPr algn="ctr">
-              <a:lnSpc>
-                <a:spcPct val="100000"/>
-              </a:lnSpc>
-              <a:spcAft>
-                <a:spcPts val="600"/>
-              </a:spcAft>
-              <a:defRPr sz="5500" b="1" i="0">
-                <a:solidFill>
-                  <a:srgbClr val="FFFFFF"/>
-                </a:solidFill>
-                <a:latin typeface="Arial Black"/>
-              </a:defRPr>
-            </a:pPr>
-            <a:r>
-              <a:t>GIVE THEM HEARTS FOR LOVE ALONE.</a:t>
-            </a:r>
-          </a:p>
-          <a:p>
-            <a:pPr algn="ctr">
-              <a:lnSpc>
-                <a:spcPct val="100000"/>
-              </a:lnSpc>
-              <a:spcAft>
-                <a:spcPts val="600"/>
-              </a:spcAft>
-              <a:defRPr sz="5500" b="1" i="0">
-                <a:solidFill>
-                  <a:srgbClr val="FFFFFF"/>
-                </a:solidFill>
-                <a:latin typeface="Arial Black"/>
-              </a:defRPr>
-            </a:pPr>
-            <a:r>
-              <a:t>I WILL SPEAK MY WORD TO THEM.</a:t>
-            </a:r>
-          </a:p>
-          <a:p>
-            <a:pPr algn="ctr">
-              <a:lnSpc>
-                <a:spcPct val="100000"/>
-              </a:lnSpc>
-              <a:spcAft>
-                <a:spcPts val="600"/>
-              </a:spcAft>
-              <a:defRPr sz="5500" b="1" i="0">
-                <a:solidFill>
-                  <a:srgbClr val="FFFFFF"/>
-                </a:solidFill>
-                <a:latin typeface="Arial Black"/>
-              </a:defRPr>
-            </a:pPr>
-            <a:r>
-              <a:t>WHOM SHALL I SEND?</a:t>
+                  <a:srgbClr val="F0FDF4"/>
+                </a:solidFill>
+                <a:latin typeface="Inter"/>
+              </a:defRPr>
+            </a:pPr>
+            <a:r>
+              <a:t>FOOD SPONSORS</a:t>
+            </a:r>
+          </a:p>
+          <a:p>
+            <a:pPr algn="ctr">
+              <a:spcAft>
+                <a:spcPts val="500"/>
+              </a:spcAft>
+              <a:defRPr sz="5500" b="0" i="0">
+                <a:solidFill>
+                  <a:srgbClr val="F0FDF4"/>
+                </a:solidFill>
+                <a:latin typeface="Inter"/>
+              </a:defRPr>
+            </a:pPr>
+            <a:r>
+              <a:t>The community thanks our food sponsors.</a:t>
+            </a:r>
+          </a:p>
+          <a:p>
+            <a:pPr algn="ctr">
+              <a:spcAft>
+                <a:spcPts val="500"/>
+              </a:spcAft>
+              <a:defRPr sz="5500" b="0" i="0">
+                <a:solidFill>
+                  <a:srgbClr val="F0FDF4"/>
+                </a:solidFill>
+                <a:latin typeface="Inter"/>
+              </a:defRPr>
+            </a:pPr>
+            <a:r>
+              <a:t>• Keshi</a:t>
             </a:r>
           </a:p>
         </p:txBody>
@@ -15081,19 +14946,19 @@
           <a:lstStyle/>
           <a:p/>
           <a:p>
-            <a:pPr>
+            <a:pPr algn="l">
               <a:spcBef>
                 <a:spcPts val="200"/>
               </a:spcBef>
               <a:defRPr sz="1200" b="0" i="0">
                 <a:solidFill>
-                  <a:srgbClr val="FFCC4D"/>
-                </a:solidFill>
-                <a:latin typeface="Inter"/>
-              </a:defRPr>
-            </a:pPr>
-            <a:r>
-              <a:t>Communion (2)</a:t>
+                  <a:srgbClr val="86EFAC"/>
+                </a:solidFill>
+                <a:latin typeface="Inter"/>
+              </a:defRPr>
+            </a:pPr>
+            <a:r>
+              <a:t>Food Sponsors</a:t>
             </a:r>
           </a:p>
         </p:txBody>
@@ -15112,7 +14977,7 @@
     <p:bg>
       <p:bgPr>
         <a:solidFill>
-          <a:srgbClr val="000000"/>
+          <a:srgbClr val="10251C"/>
         </a:solidFill>
         <a:effectLst/>
       </p:bgPr>
@@ -15132,131 +14997,33 @@
         </p:nvSpPr>
         <p:spPr>
           <a:xfrm>
-            <a:off x="0" y="0"/>
-            <a:ext cx="18288000" cy="10287000"/>
-          </a:xfrm>
-          <a:prstGeom prst="rect">
-            <a:avLst/>
-          </a:prstGeom>
-          <a:noFill/>
-        </p:spPr>
-        <p:txBody>
-          <a:bodyPr wrap="square" lIns="0" rIns="0" tIns="0" bIns="0" anchor="ctr">
-            <a:noAutofit/>
-          </a:bodyPr>
-          <a:lstStyle/>
-          <a:p>
-            <a:pPr algn="ctr">
-              <a:lnSpc>
-                <a:spcPct val="100000"/>
-              </a:lnSpc>
-              <a:spcAft>
-                <a:spcPts val="600"/>
+            <a:off x="914400" y="530352"/>
+            <a:ext cx="16459200" cy="8750808"/>
+          </a:xfrm>
+          <a:prstGeom prst="rect">
+            <a:avLst/>
+          </a:prstGeom>
+          <a:noFill/>
+        </p:spPr>
+        <p:txBody>
+          <a:bodyPr wrap="square" lIns="109728" rIns="109728" tIns="73152" bIns="73152">
+            <a:noAutofit/>
+          </a:bodyPr>
+          <a:lstStyle/>
+          <a:p>
+            <a:pPr algn="ctr">
+              <a:spcAft>
+                <a:spcPts val="500"/>
               </a:spcAft>
               <a:defRPr sz="5500" b="1" i="0">
                 <a:solidFill>
-                  <a:srgbClr val="FFFFFF"/>
-                </a:solidFill>
-                <a:latin typeface="Arial Black"/>
-              </a:defRPr>
-            </a:pPr>
-            <a:r>
-              <a:t>HERE I AM, LORD.</a:t>
-            </a:r>
-          </a:p>
-          <a:p>
-            <a:pPr algn="ctr">
-              <a:lnSpc>
-                <a:spcPct val="100000"/>
-              </a:lnSpc>
-              <a:spcAft>
-                <a:spcPts val="600"/>
-              </a:spcAft>
-              <a:defRPr sz="5500" b="1" i="0">
-                <a:solidFill>
-                  <a:srgbClr val="FFFFFF"/>
-                </a:solidFill>
-                <a:latin typeface="Arial Black"/>
-              </a:defRPr>
-            </a:pPr>
-            <a:r>
-              <a:t>IS IT I, LORD?</a:t>
-            </a:r>
-          </a:p>
-          <a:p>
-            <a:pPr algn="ctr">
-              <a:lnSpc>
-                <a:spcPct val="100000"/>
-              </a:lnSpc>
-              <a:spcAft>
-                <a:spcPts val="600"/>
-              </a:spcAft>
-              <a:defRPr sz="5500" b="1" i="0">
-                <a:solidFill>
-                  <a:srgbClr val="FFFFFF"/>
-                </a:solidFill>
-                <a:latin typeface="Arial Black"/>
-              </a:defRPr>
-            </a:pPr>
-            <a:r>
-              <a:t>I HAVE HEARD YOU CALLING IN THE NIGHT.</a:t>
-            </a:r>
-          </a:p>
-          <a:p>
-            <a:pPr algn="ctr">
-              <a:lnSpc>
-                <a:spcPct val="100000"/>
-              </a:lnSpc>
-              <a:spcAft>
-                <a:spcPts val="600"/>
-              </a:spcAft>
-              <a:defRPr sz="5500" b="1" i="0">
-                <a:solidFill>
-                  <a:srgbClr val="FFFFFF"/>
-                </a:solidFill>
-                <a:latin typeface="Arial Black"/>
-              </a:defRPr>
-            </a:pPr>
-            <a:r>
-              <a:t>I WILL GO, LORD,</a:t>
-            </a:r>
-          </a:p>
-          <a:p>
-            <a:pPr algn="ctr">
-              <a:lnSpc>
-                <a:spcPct val="100000"/>
-              </a:lnSpc>
-              <a:spcAft>
-                <a:spcPts val="600"/>
-              </a:spcAft>
-              <a:defRPr sz="5500" b="1" i="0">
-                <a:solidFill>
-                  <a:srgbClr val="FFFFFF"/>
-                </a:solidFill>
-                <a:latin typeface="Arial Black"/>
-              </a:defRPr>
-            </a:pPr>
-            <a:r>
-              <a:t>IF YOU LEAD ME.</a:t>
-            </a:r>
-          </a:p>
-          <a:p>
-            <a:pPr algn="ctr">
-              <a:lnSpc>
-                <a:spcPct val="100000"/>
-              </a:lnSpc>
-              <a:spcAft>
-                <a:spcPts val="600"/>
-              </a:spcAft>
-              <a:defRPr sz="5500" b="1" i="0">
-                <a:solidFill>
-                  <a:srgbClr val="FFFFFF"/>
-                </a:solidFill>
-                <a:latin typeface="Arial Black"/>
-              </a:defRPr>
-            </a:pPr>
-            <a:r>
-              <a:t>I WILL HOLD YOUR PEOPLE IN MY HEART.</a:t>
+                  <a:srgbClr val="F0FDF4"/>
+                </a:solidFill>
+                <a:latin typeface="Inter"/>
+              </a:defRPr>
+            </a:pPr>
+            <a:r>
+              <a:t>CHURCH ANNOUNCEMENTS</a:t>
             </a:r>
           </a:p>
         </p:txBody>
@@ -15284,19 +15051,19 @@
           <a:lstStyle/>
           <a:p/>
           <a:p>
-            <a:pPr>
+            <a:pPr algn="l">
               <a:spcBef>
                 <a:spcPts val="200"/>
               </a:spcBef>
               <a:defRPr sz="1200" b="0" i="0">
                 <a:solidFill>
-                  <a:srgbClr val="FFCC4D"/>
-                </a:solidFill>
-                <a:latin typeface="Inter"/>
-              </a:defRPr>
-            </a:pPr>
-            <a:r>
-              <a:t>Communion (2)</a:t>
+                  <a:srgbClr val="86EFAC"/>
+                </a:solidFill>
+                <a:latin typeface="Inter"/>
+              </a:defRPr>
+            </a:pPr>
+            <a:r>
+              <a:t>Announcements</a:t>
             </a:r>
           </a:p>
         </p:txBody>
@@ -15315,7 +15082,7 @@
     <p:bg>
       <p:bgPr>
         <a:solidFill>
-          <a:srgbClr val="000000"/>
+          <a:srgbClr val="10251C"/>
         </a:solidFill>
         <a:effectLst/>
       </p:bgPr>
@@ -15335,93 +15102,33 @@
         </p:nvSpPr>
         <p:spPr>
           <a:xfrm>
-            <a:off x="0" y="0"/>
-            <a:ext cx="18288000" cy="10287000"/>
-          </a:xfrm>
-          <a:prstGeom prst="rect">
-            <a:avLst/>
-          </a:prstGeom>
-          <a:noFill/>
-        </p:spPr>
-        <p:txBody>
-          <a:bodyPr wrap="square" lIns="0" rIns="0" tIns="0" bIns="0" anchor="ctr">
-            <a:noAutofit/>
-          </a:bodyPr>
-          <a:lstStyle/>
-          <a:p>
-            <a:pPr algn="ctr">
-              <a:lnSpc>
-                <a:spcPct val="100000"/>
-              </a:lnSpc>
-              <a:spcAft>
-                <a:spcPts val="600"/>
+            <a:off x="914400" y="530352"/>
+            <a:ext cx="16459200" cy="8750808"/>
+          </a:xfrm>
+          <a:prstGeom prst="rect">
+            <a:avLst/>
+          </a:prstGeom>
+          <a:noFill/>
+        </p:spPr>
+        <p:txBody>
+          <a:bodyPr wrap="square" lIns="109728" rIns="109728" tIns="73152" bIns="73152">
+            <a:noAutofit/>
+          </a:bodyPr>
+          <a:lstStyle/>
+          <a:p>
+            <a:pPr algn="ctr">
+              <a:spcAft>
+                <a:spcPts val="500"/>
               </a:spcAft>
               <a:defRPr sz="5500" b="1" i="0">
                 <a:solidFill>
-                  <a:srgbClr val="FFFFFF"/>
-                </a:solidFill>
-                <a:latin typeface="Arial Black"/>
-              </a:defRPr>
-            </a:pPr>
-            <a:r>
-              <a:t>I, THE LORD OF WIND AND FLAME,</a:t>
-            </a:r>
-          </a:p>
-          <a:p>
-            <a:pPr algn="ctr">
-              <a:lnSpc>
-                <a:spcPct val="100000"/>
-              </a:lnSpc>
-              <a:spcAft>
-                <a:spcPts val="600"/>
-              </a:spcAft>
-              <a:defRPr sz="5500" b="1" i="0">
-                <a:solidFill>
-                  <a:srgbClr val="FFFFFF"/>
-                </a:solidFill>
-                <a:latin typeface="Arial Black"/>
-              </a:defRPr>
-            </a:pPr>
-            <a:r>
-              <a:t>I WILL TEND THE POOR AND LAME.</a:t>
-            </a:r>
-          </a:p>
-          <a:p>
-            <a:pPr algn="ctr">
-              <a:lnSpc>
-                <a:spcPct val="100000"/>
-              </a:lnSpc>
-              <a:spcAft>
-                <a:spcPts val="600"/>
-              </a:spcAft>
-              <a:defRPr sz="5500" b="1" i="0">
-                <a:solidFill>
-                  <a:srgbClr val="FFFFFF"/>
-                </a:solidFill>
-                <a:latin typeface="Arial Black"/>
-              </a:defRPr>
-            </a:pPr>
-            <a:r>
-              <a:t>I WILL SET A FEAST FOR THEM.</a:t>
-            </a:r>
-          </a:p>
-          <a:p>
-            <a:pPr algn="ctr">
-              <a:lnSpc>
-                <a:spcPct val="100000"/>
-              </a:lnSpc>
-              <a:spcAft>
-                <a:spcPts val="600"/>
-              </a:spcAft>
-              <a:defRPr sz="5500" b="1" i="0">
-                <a:solidFill>
-                  <a:srgbClr val="FFFFFF"/>
-                </a:solidFill>
-                <a:latin typeface="Arial Black"/>
-              </a:defRPr>
-            </a:pPr>
-            <a:r>
-              <a:t>MY HAND WILL SAVE.</a:t>
+                  <a:srgbClr val="F0FDF4"/>
+                </a:solidFill>
+                <a:latin typeface="Inter"/>
+              </a:defRPr>
+            </a:pPr>
+            <a:r>
+              <a:t>Welcome newcomers!</a:t>
             </a:r>
           </a:p>
         </p:txBody>
@@ -15449,19 +15156,19 @@
           <a:lstStyle/>
           <a:p/>
           <a:p>
-            <a:pPr>
+            <a:pPr algn="l">
               <a:spcBef>
                 <a:spcPts val="200"/>
               </a:spcBef>
               <a:defRPr sz="1200" b="0" i="0">
                 <a:solidFill>
-                  <a:srgbClr val="FFCC4D"/>
-                </a:solidFill>
-                <a:latin typeface="Inter"/>
-              </a:defRPr>
-            </a:pPr>
-            <a:r>
-              <a:t>Communion (2)</a:t>
+                  <a:srgbClr val="86EFAC"/>
+                </a:solidFill>
+                <a:latin typeface="Inter"/>
+              </a:defRPr>
+            </a:pPr>
+            <a:r>
+              <a:t>Announcements</a:t>
             </a:r>
           </a:p>
         </p:txBody>
@@ -15480,7 +15187,7 @@
     <p:bg>
       <p:bgPr>
         <a:solidFill>
-          <a:srgbClr val="000000"/>
+          <a:srgbClr val="10251C"/>
         </a:solidFill>
         <a:effectLst/>
       </p:bgPr>
@@ -15500,93 +15207,33 @@
         </p:nvSpPr>
         <p:spPr>
           <a:xfrm>
-            <a:off x="0" y="0"/>
-            <a:ext cx="18288000" cy="10287000"/>
-          </a:xfrm>
-          <a:prstGeom prst="rect">
-            <a:avLst/>
-          </a:prstGeom>
-          <a:noFill/>
-        </p:spPr>
-        <p:txBody>
-          <a:bodyPr wrap="square" lIns="0" rIns="0" tIns="0" bIns="0" anchor="ctr">
-            <a:noAutofit/>
-          </a:bodyPr>
-          <a:lstStyle/>
-          <a:p>
-            <a:pPr algn="ctr">
-              <a:lnSpc>
-                <a:spcPct val="100000"/>
-              </a:lnSpc>
-              <a:spcAft>
-                <a:spcPts val="600"/>
+            <a:off x="914400" y="530352"/>
+            <a:ext cx="16459200" cy="8750808"/>
+          </a:xfrm>
+          <a:prstGeom prst="rect">
+            <a:avLst/>
+          </a:prstGeom>
+          <a:noFill/>
+        </p:spPr>
+        <p:txBody>
+          <a:bodyPr wrap="square" lIns="109728" rIns="109728" tIns="73152" bIns="73152">
+            <a:noAutofit/>
+          </a:bodyPr>
+          <a:lstStyle/>
+          <a:p>
+            <a:pPr algn="ctr">
+              <a:spcAft>
+                <a:spcPts val="500"/>
               </a:spcAft>
               <a:defRPr sz="5500" b="1" i="0">
                 <a:solidFill>
-                  <a:srgbClr val="FFFFFF"/>
-                </a:solidFill>
-                <a:latin typeface="Arial Black"/>
-              </a:defRPr>
-            </a:pPr>
-            <a:r>
-              <a:t>FINEST BREAD I WILL PROVIDE</a:t>
-            </a:r>
-          </a:p>
-          <a:p>
-            <a:pPr algn="ctr">
-              <a:lnSpc>
-                <a:spcPct val="100000"/>
-              </a:lnSpc>
-              <a:spcAft>
-                <a:spcPts val="600"/>
-              </a:spcAft>
-              <a:defRPr sz="5500" b="1" i="0">
-                <a:solidFill>
-                  <a:srgbClr val="FFFFFF"/>
-                </a:solidFill>
-                <a:latin typeface="Arial Black"/>
-              </a:defRPr>
-            </a:pPr>
-            <a:r>
-              <a:t>TILL THEIR HEARTS BE SATISFIED.</a:t>
-            </a:r>
-          </a:p>
-          <a:p>
-            <a:pPr algn="ctr">
-              <a:lnSpc>
-                <a:spcPct val="100000"/>
-              </a:lnSpc>
-              <a:spcAft>
-                <a:spcPts val="600"/>
-              </a:spcAft>
-              <a:defRPr sz="5500" b="1" i="0">
-                <a:solidFill>
-                  <a:srgbClr val="FFFFFF"/>
-                </a:solidFill>
-                <a:latin typeface="Arial Black"/>
-              </a:defRPr>
-            </a:pPr>
-            <a:r>
-              <a:t>I WILL GIVE MY LIFE TO THEM.</a:t>
-            </a:r>
-          </a:p>
-          <a:p>
-            <a:pPr algn="ctr">
-              <a:lnSpc>
-                <a:spcPct val="100000"/>
-              </a:lnSpc>
-              <a:spcAft>
-                <a:spcPts val="600"/>
-              </a:spcAft>
-              <a:defRPr sz="5500" b="1" i="0">
-                <a:solidFill>
-                  <a:srgbClr val="FFFFFF"/>
-                </a:solidFill>
-                <a:latin typeface="Arial Black"/>
-              </a:defRPr>
-            </a:pPr>
-            <a:r>
-              <a:t>WHOM SHALL I SEND?</a:t>
+                  <a:srgbClr val="F0FDF4"/>
+                </a:solidFill>
+                <a:latin typeface="Inter"/>
+              </a:defRPr>
+            </a:pPr>
+            <a:r>
+              <a:t>Sacrament of Confession</a:t>
             </a:r>
           </a:p>
         </p:txBody>
@@ -15614,19 +15261,19 @@
           <a:lstStyle/>
           <a:p/>
           <a:p>
-            <a:pPr>
+            <a:pPr algn="l">
               <a:spcBef>
                 <a:spcPts val="200"/>
               </a:spcBef>
               <a:defRPr sz="1200" b="0" i="0">
                 <a:solidFill>
-                  <a:srgbClr val="FFCC4D"/>
-                </a:solidFill>
-                <a:latin typeface="Inter"/>
-              </a:defRPr>
-            </a:pPr>
-            <a:r>
-              <a:t>Communion (2)</a:t>
+                  <a:srgbClr val="86EFAC"/>
+                </a:solidFill>
+                <a:latin typeface="Inter"/>
+              </a:defRPr>
+            </a:pPr>
+            <a:r>
+              <a:t>Announcements</a:t>
             </a:r>
           </a:p>
         </p:txBody>
@@ -15645,7 +15292,7 @@
     <p:bg>
       <p:bgPr>
         <a:solidFill>
-          <a:srgbClr val="000000"/>
+          <a:srgbClr val="10251C"/>
         </a:solidFill>
         <a:effectLst/>
       </p:bgPr>
@@ -15665,131 +15312,33 @@
         </p:nvSpPr>
         <p:spPr>
           <a:xfrm>
-            <a:off x="0" y="0"/>
-            <a:ext cx="18288000" cy="10287000"/>
-          </a:xfrm>
-          <a:prstGeom prst="rect">
-            <a:avLst/>
-          </a:prstGeom>
-          <a:noFill/>
-        </p:spPr>
-        <p:txBody>
-          <a:bodyPr wrap="square" lIns="0" rIns="0" tIns="0" bIns="0" anchor="ctr">
-            <a:noAutofit/>
-          </a:bodyPr>
-          <a:lstStyle/>
-          <a:p>
-            <a:pPr algn="ctr">
-              <a:lnSpc>
-                <a:spcPct val="100000"/>
-              </a:lnSpc>
-              <a:spcAft>
-                <a:spcPts val="600"/>
+            <a:off x="914400" y="530352"/>
+            <a:ext cx="16459200" cy="8750808"/>
+          </a:xfrm>
+          <a:prstGeom prst="rect">
+            <a:avLst/>
+          </a:prstGeom>
+          <a:noFill/>
+        </p:spPr>
+        <p:txBody>
+          <a:bodyPr wrap="square" lIns="109728" rIns="109728" tIns="73152" bIns="73152">
+            <a:noAutofit/>
+          </a:bodyPr>
+          <a:lstStyle/>
+          <a:p>
+            <a:pPr algn="ctr">
+              <a:spcAft>
+                <a:spcPts val="500"/>
               </a:spcAft>
               <a:defRPr sz="5500" b="1" i="0">
                 <a:solidFill>
-                  <a:srgbClr val="FFFFFF"/>
-                </a:solidFill>
-                <a:latin typeface="Arial Black"/>
-              </a:defRPr>
-            </a:pPr>
-            <a:r>
-              <a:t>HERE I AM, LORD.</a:t>
-            </a:r>
-          </a:p>
-          <a:p>
-            <a:pPr algn="ctr">
-              <a:lnSpc>
-                <a:spcPct val="100000"/>
-              </a:lnSpc>
-              <a:spcAft>
-                <a:spcPts val="600"/>
-              </a:spcAft>
-              <a:defRPr sz="5500" b="1" i="0">
-                <a:solidFill>
-                  <a:srgbClr val="FFFFFF"/>
-                </a:solidFill>
-                <a:latin typeface="Arial Black"/>
-              </a:defRPr>
-            </a:pPr>
-            <a:r>
-              <a:t>IS IT I, LORD?</a:t>
-            </a:r>
-          </a:p>
-          <a:p>
-            <a:pPr algn="ctr">
-              <a:lnSpc>
-                <a:spcPct val="100000"/>
-              </a:lnSpc>
-              <a:spcAft>
-                <a:spcPts val="600"/>
-              </a:spcAft>
-              <a:defRPr sz="5500" b="1" i="0">
-                <a:solidFill>
-                  <a:srgbClr val="FFFFFF"/>
-                </a:solidFill>
-                <a:latin typeface="Arial Black"/>
-              </a:defRPr>
-            </a:pPr>
-            <a:r>
-              <a:t>I HAVE HEARD YOU CALLING IN THE NIGHT.</a:t>
-            </a:r>
-          </a:p>
-          <a:p>
-            <a:pPr algn="ctr">
-              <a:lnSpc>
-                <a:spcPct val="100000"/>
-              </a:lnSpc>
-              <a:spcAft>
-                <a:spcPts val="600"/>
-              </a:spcAft>
-              <a:defRPr sz="5500" b="1" i="0">
-                <a:solidFill>
-                  <a:srgbClr val="FFFFFF"/>
-                </a:solidFill>
-                <a:latin typeface="Arial Black"/>
-              </a:defRPr>
-            </a:pPr>
-            <a:r>
-              <a:t>I WILL GO, LORD,</a:t>
-            </a:r>
-          </a:p>
-          <a:p>
-            <a:pPr algn="ctr">
-              <a:lnSpc>
-                <a:spcPct val="100000"/>
-              </a:lnSpc>
-              <a:spcAft>
-                <a:spcPts val="600"/>
-              </a:spcAft>
-              <a:defRPr sz="5500" b="1" i="0">
-                <a:solidFill>
-                  <a:srgbClr val="FFFFFF"/>
-                </a:solidFill>
-                <a:latin typeface="Arial Black"/>
-              </a:defRPr>
-            </a:pPr>
-            <a:r>
-              <a:t>IF YOU LEAD ME.</a:t>
-            </a:r>
-          </a:p>
-          <a:p>
-            <a:pPr algn="ctr">
-              <a:lnSpc>
-                <a:spcPct val="100000"/>
-              </a:lnSpc>
-              <a:spcAft>
-                <a:spcPts val="600"/>
-              </a:spcAft>
-              <a:defRPr sz="5500" b="1" i="0">
-                <a:solidFill>
-                  <a:srgbClr val="FFFFFF"/>
-                </a:solidFill>
-                <a:latin typeface="Arial Black"/>
-              </a:defRPr>
-            </a:pPr>
-            <a:r>
-              <a:t>I WILL HOLD YOUR PEOPLE IN MY HEART.</a:t>
+                  <a:srgbClr val="F0FDF4"/>
+                </a:solidFill>
+                <a:latin typeface="Inter"/>
+              </a:defRPr>
+            </a:pPr>
+            <a:r>
+              <a:t>Updates and Announcements</a:t>
             </a:r>
           </a:p>
         </p:txBody>
@@ -15817,19 +15366,19 @@
           <a:lstStyle/>
           <a:p/>
           <a:p>
-            <a:pPr>
+            <a:pPr algn="l">
               <a:spcBef>
                 <a:spcPts val="200"/>
               </a:spcBef>
               <a:defRPr sz="1200" b="0" i="0">
                 <a:solidFill>
-                  <a:srgbClr val="FFCC4D"/>
-                </a:solidFill>
-                <a:latin typeface="Inter"/>
-              </a:defRPr>
-            </a:pPr>
-            <a:r>
-              <a:t>Communion (2)</a:t>
+                  <a:srgbClr val="86EFAC"/>
+                </a:solidFill>
+                <a:latin typeface="Inter"/>
+              </a:defRPr>
+            </a:pPr>
+            <a:r>
+              <a:t>Announcements</a:t>
             </a:r>
           </a:p>
         </p:txBody>
@@ -16124,7 +15673,7 @@
               </a:defRPr>
             </a:pPr>
             <a:r>
-              <a:t>Priest: Let us pray.</a:t>
+              <a:t>Priest: The Lord be with you.</a:t>
             </a:r>
           </a:p>
           <a:p>
@@ -16143,7 +15692,83 @@
               </a:defRPr>
             </a:pPr>
             <a:r>
+              <a:t>All: And with your spirit.</a:t>
+            </a:r>
+          </a:p>
+          <a:p>
+            <a:pPr algn="ctr">
+              <a:spcBef>
+                <a:spcPts val="400"/>
+              </a:spcBef>
+              <a:spcAft>
+                <a:spcPts val="500"/>
+              </a:spcAft>
+              <a:defRPr sz="5500" b="1" i="0">
+                <a:solidFill>
+                  <a:srgbClr val="86EFAC"/>
+                </a:solidFill>
+                <a:latin typeface="Inter"/>
+              </a:defRPr>
+            </a:pPr>
+            <a:r>
+              <a:t>Priest: May almighty God bless you, the Father, and the Son, and the Holy Spirit.</a:t>
+            </a:r>
+          </a:p>
+          <a:p>
+            <a:pPr algn="ctr">
+              <a:spcBef>
+                <a:spcPts val="400"/>
+              </a:spcBef>
+              <a:spcAft>
+                <a:spcPts val="500"/>
+              </a:spcAft>
+              <a:defRPr sz="5500" b="1" i="0">
+                <a:solidFill>
+                  <a:srgbClr val="F0FDF4"/>
+                </a:solidFill>
+                <a:latin typeface="Inter"/>
+              </a:defRPr>
+            </a:pPr>
+            <a:r>
               <a:t>All: Amen.</a:t>
+            </a:r>
+          </a:p>
+          <a:p>
+            <a:pPr algn="ctr">
+              <a:spcBef>
+                <a:spcPts val="400"/>
+              </a:spcBef>
+              <a:spcAft>
+                <a:spcPts val="500"/>
+              </a:spcAft>
+              <a:defRPr sz="5500" b="1" i="0">
+                <a:solidFill>
+                  <a:srgbClr val="86EFAC"/>
+                </a:solidFill>
+                <a:latin typeface="Inter"/>
+              </a:defRPr>
+            </a:pPr>
+            <a:r>
+              <a:t>Priest: Go in peace, glorifying the Lord by your life.</a:t>
+            </a:r>
+          </a:p>
+          <a:p>
+            <a:pPr algn="ctr">
+              <a:spcBef>
+                <a:spcPts val="400"/>
+              </a:spcBef>
+              <a:spcAft>
+                <a:spcPts val="500"/>
+              </a:spcAft>
+              <a:defRPr sz="5500" b="1" i="0">
+                <a:solidFill>
+                  <a:srgbClr val="F0FDF4"/>
+                </a:solidFill>
+                <a:latin typeface="Inter"/>
+              </a:defRPr>
+            </a:pPr>
+            <a:r>
+              <a:t>All: Thanks be to God.</a:t>
             </a:r>
           </a:p>
         </p:txBody>
@@ -16183,7 +15808,7 @@
               </a:defRPr>
             </a:pPr>
             <a:r>
-              <a:t>The Communion Rite</a:t>
+              <a:t>Final Blessing</a:t>
             </a:r>
           </a:p>
         </p:txBody>
@@ -16197,1130 +15822,6 @@
 </file>
 
 <file path=ppt/slides/slide81.xml><?xml version="1.0" encoding="utf-8"?>
-<p:sld xmlns:a="http://schemas.openxmlformats.org/drawingml/2006/main" xmlns:p="http://schemas.openxmlformats.org/presentationml/2006/main" xmlns:r="http://schemas.openxmlformats.org/officeDocument/2006/relationships">
-  <p:cSld>
-    <p:spTree>
-      <p:nvGrpSpPr>
-        <p:cNvPr id="1" name=""/>
-        <p:cNvGrpSpPr/>
-        <p:nvPr/>
-      </p:nvGrpSpPr>
-      <p:grpSpPr/>
-      <p:pic>
-        <p:nvPicPr>
-          <p:cNvPr id="2" name="Picture 1" descr="GFCC7Jun2026_OrdinaryTime_16x9.png"/>
-          <p:cNvPicPr>
-            <a:picLocks noChangeAspect="1"/>
-          </p:cNvPicPr>
-          <p:nvPr/>
-        </p:nvPicPr>
-        <p:blipFill>
-          <a:blip r:embed="rId2"/>
-          <a:stretch>
-            <a:fillRect/>
-          </a:stretch>
-        </p:blipFill>
-        <p:spPr>
-          <a:xfrm>
-            <a:off x="0" y="0"/>
-            <a:ext cx="18288000" cy="10287000"/>
-          </a:xfrm>
-          <a:prstGeom prst="rect">
-            <a:avLst/>
-          </a:prstGeom>
-        </p:spPr>
-      </p:pic>
-      <p:sp>
-        <p:nvSpPr>
-          <p:cNvPr id="3" name="TextBox 2"/>
-          <p:cNvSpPr txBox="1"/>
-          <p:nvPr/>
-        </p:nvSpPr>
-        <p:spPr>
-          <a:xfrm>
-            <a:off x="914400" y="850392"/>
-            <a:ext cx="16459200" cy="5943600"/>
-          </a:xfrm>
-          <a:prstGeom prst="rect">
-            <a:avLst/>
-          </a:prstGeom>
-          <a:noFill/>
-        </p:spPr>
-        <p:txBody>
-          <a:bodyPr wrap="square" lIns="109728" rIns="109728" tIns="73152" bIns="73152">
-            <a:noAutofit/>
-          </a:bodyPr>
-          <a:lstStyle/>
-          <a:p>
-            <a:pPr algn="ctr">
-              <a:spcAft>
-                <a:spcPts val="300"/>
-              </a:spcAft>
-              <a:defRPr sz="5500" b="1" i="0">
-                <a:solidFill>
-                  <a:srgbClr val="86EFAC"/>
-                </a:solidFill>
-                <a:latin typeface="Inter"/>
-              </a:defRPr>
-            </a:pPr>
-            <a:r>
-              <a:t>MASS CELEBRANT:</a:t>
-            </a:r>
-          </a:p>
-          <a:p>
-            <a:pPr algn="ctr">
-              <a:spcAft>
-                <a:spcPts val="300"/>
-              </a:spcAft>
-              <a:defRPr sz="5500" b="0" i="0">
-                <a:solidFill>
-                  <a:srgbClr val="F0FDF4"/>
-                </a:solidFill>
-                <a:latin typeface="Inter"/>
-              </a:defRPr>
-            </a:pPr>
-            <a:r>
-              <a:t>Rev. Fr. Jonrey Lauron, RCJ</a:t>
-            </a:r>
-          </a:p>
-          <a:p>
-            <a:pPr algn="ctr">
-              <a:spcAft>
-                <a:spcPts val="300"/>
-              </a:spcAft>
-              <a:defRPr sz="5500" b="0" i="0">
-                <a:solidFill>
-                  <a:srgbClr val="F0FDF4"/>
-                </a:solidFill>
-                <a:latin typeface="Inter"/>
-              </a:defRPr>
-            </a:pPr>
-          </a:p>
-          <a:p>
-            <a:pPr algn="ctr">
-              <a:spcAft>
-                <a:spcPts val="300"/>
-              </a:spcAft>
-              <a:defRPr sz="5500" b="0" i="0">
-                <a:solidFill>
-                  <a:srgbClr val="F0FDF4"/>
-                </a:solidFill>
-                <a:latin typeface="Inter"/>
-              </a:defRPr>
-            </a:pPr>
-            <a:r>
-              <a:t>Gospel (John 6:51-58)</a:t>
-            </a:r>
-          </a:p>
-          <a:p>
-            <a:pPr algn="ctr">
-              <a:spcAft>
-                <a:spcPts val="300"/>
-              </a:spcAft>
-              <a:defRPr sz="5500" b="0" i="0">
-                <a:solidFill>
-                  <a:srgbClr val="F0FDF4"/>
-                </a:solidFill>
-                <a:latin typeface="Inter"/>
-              </a:defRPr>
-            </a:pPr>
-            <a:r>
-              <a:t>“I am the living bread that came down from heaven; whoever eats this bread will live forever; and the bread that I will give is my flesh for the life of the world.”</a:t>
-            </a:r>
-          </a:p>
-          <a:p>
-            <a:pPr algn="ctr">
-              <a:spcAft>
-                <a:spcPts val="300"/>
-              </a:spcAft>
-              <a:defRPr sz="5500" b="0" i="0">
-                <a:solidFill>
-                  <a:srgbClr val="F0FDF4"/>
-                </a:solidFill>
-                <a:latin typeface="Inter"/>
-              </a:defRPr>
-            </a:pPr>
-          </a:p>
-          <a:p>
-            <a:pPr algn="ctr">
-              <a:spcAft>
-                <a:spcPts val="300"/>
-              </a:spcAft>
-              <a:defRPr sz="5500" b="0" i="0">
-                <a:solidFill>
-                  <a:srgbClr val="F0FDF4"/>
-                </a:solidFill>
-                <a:latin typeface="Inter"/>
-              </a:defRPr>
-            </a:pPr>
-            <a:r>
-              <a:t>YEAR A</a:t>
-            </a:r>
-          </a:p>
-          <a:p>
-            <a:pPr algn="ctr">
-              <a:spcAft>
-                <a:spcPts val="300"/>
-              </a:spcAft>
-              <a:defRPr sz="5500" b="0" i="0">
-                <a:solidFill>
-                  <a:srgbClr val="F0FDF4"/>
-                </a:solidFill>
-                <a:latin typeface="Inter"/>
-              </a:defRPr>
-            </a:pPr>
-            <a:r>
-              <a:t>2026-06-07 · Ordinary Time</a:t>
-            </a:r>
-          </a:p>
-        </p:txBody>
-      </p:sp>
-      <p:sp>
-        <p:nvSpPr>
-          <p:cNvPr id="4" name="TextBox 3"/>
-          <p:cNvSpPr txBox="1"/>
-          <p:nvPr/>
-        </p:nvSpPr>
-        <p:spPr>
-          <a:xfrm>
-            <a:off x="914400" y="9418320"/>
-            <a:ext cx="16459200" cy="777240"/>
-          </a:xfrm>
-          <a:prstGeom prst="rect">
-            <a:avLst/>
-          </a:prstGeom>
-          <a:noFill/>
-        </p:spPr>
-        <p:txBody>
-          <a:bodyPr wrap="square" lIns="109728" rIns="109728" tIns="73152" bIns="73152">
-            <a:noAutofit/>
-          </a:bodyPr>
-          <a:lstStyle/>
-          <a:p/>
-          <a:p>
-            <a:pPr algn="l">
-              <a:spcBef>
-                <a:spcPts val="200"/>
-              </a:spcBef>
-              <a:defRPr sz="1200" b="0" i="0">
-                <a:solidFill>
-                  <a:srgbClr val="86EFAC"/>
-                </a:solidFill>
-                <a:latin typeface="Inter"/>
-              </a:defRPr>
-            </a:pPr>
-            <a:r>
-              <a:t>Mass poster / divider</a:t>
-            </a:r>
-          </a:p>
-        </p:txBody>
-      </p:sp>
-    </p:spTree>
-  </p:cSld>
-  <p:clrMapOvr>
-    <a:masterClrMapping/>
-  </p:clrMapOvr>
-</p:sld>
-</file>
-
-<file path=ppt/slides/slide82.xml><?xml version="1.0" encoding="utf-8"?>
-<p:sld xmlns:a="http://schemas.openxmlformats.org/drawingml/2006/main" xmlns:p="http://schemas.openxmlformats.org/presentationml/2006/main" xmlns:r="http://schemas.openxmlformats.org/officeDocument/2006/relationships">
-  <p:cSld>
-    <p:bg>
-      <p:bgPr>
-        <a:solidFill>
-          <a:srgbClr val="10251C"/>
-        </a:solidFill>
-        <a:effectLst/>
-      </p:bgPr>
-    </p:bg>
-    <p:spTree>
-      <p:nvGrpSpPr>
-        <p:cNvPr id="1" name=""/>
-        <p:cNvGrpSpPr/>
-        <p:nvPr/>
-      </p:nvGrpSpPr>
-      <p:grpSpPr/>
-      <p:sp>
-        <p:nvSpPr>
-          <p:cNvPr id="2" name="TextBox 1"/>
-          <p:cNvSpPr txBox="1"/>
-          <p:nvPr/>
-        </p:nvSpPr>
-        <p:spPr>
-          <a:xfrm>
-            <a:off x="914400" y="530352"/>
-            <a:ext cx="16459200" cy="8750808"/>
-          </a:xfrm>
-          <a:prstGeom prst="rect">
-            <a:avLst/>
-          </a:prstGeom>
-          <a:noFill/>
-        </p:spPr>
-        <p:txBody>
-          <a:bodyPr wrap="square" lIns="109728" rIns="109728" tIns="73152" bIns="73152">
-            <a:noAutofit/>
-          </a:bodyPr>
-          <a:lstStyle/>
-          <a:p>
-            <a:pPr algn="ctr">
-              <a:spcAft>
-                <a:spcPts val="500"/>
-              </a:spcAft>
-              <a:defRPr sz="5500" b="1" i="0">
-                <a:solidFill>
-                  <a:srgbClr val="F0FDF4"/>
-                </a:solidFill>
-                <a:latin typeface="Inter"/>
-              </a:defRPr>
-            </a:pPr>
-            <a:r>
-              <a:t>MASS COLLECTION</a:t>
-            </a:r>
-          </a:p>
-          <a:p>
-            <a:pPr algn="ctr">
-              <a:spcAft>
-                <a:spcPts val="500"/>
-              </a:spcAft>
-              <a:defRPr sz="5500" b="0" i="0">
-                <a:solidFill>
-                  <a:srgbClr val="F0FDF4"/>
-                </a:solidFill>
-                <a:latin typeface="Inter"/>
-              </a:defRPr>
-            </a:pPr>
-            <a:r>
-              <a:t>Thank you for your generosity.</a:t>
-            </a:r>
-          </a:p>
-          <a:p>
-            <a:pPr algn="ctr">
-              <a:spcAft>
-                <a:spcPts val="500"/>
-              </a:spcAft>
-              <a:defRPr sz="5500" b="0" i="0">
-                <a:solidFill>
-                  <a:srgbClr val="F0FDF4"/>
-                </a:solidFill>
-                <a:latin typeface="Inter"/>
-              </a:defRPr>
-            </a:pPr>
-            <a:r>
-              <a:t>Date: Sunday, May 31, 2026</a:t>
-            </a:r>
-          </a:p>
-        </p:txBody>
-      </p:sp>
-      <p:sp>
-        <p:nvSpPr>
-          <p:cNvPr id="3" name="TextBox 2"/>
-          <p:cNvSpPr txBox="1"/>
-          <p:nvPr/>
-        </p:nvSpPr>
-        <p:spPr>
-          <a:xfrm>
-            <a:off x="914400" y="9418320"/>
-            <a:ext cx="16459200" cy="777240"/>
-          </a:xfrm>
-          <a:prstGeom prst="rect">
-            <a:avLst/>
-          </a:prstGeom>
-          <a:noFill/>
-        </p:spPr>
-        <p:txBody>
-          <a:bodyPr wrap="square" lIns="109728" rIns="109728" tIns="73152" bIns="73152">
-            <a:noAutofit/>
-          </a:bodyPr>
-          <a:lstStyle/>
-          <a:p/>
-          <a:p>
-            <a:pPr algn="l">
-              <a:spcBef>
-                <a:spcPts val="200"/>
-              </a:spcBef>
-              <a:defRPr sz="1200" b="0" i="0">
-                <a:solidFill>
-                  <a:srgbClr val="86EFAC"/>
-                </a:solidFill>
-                <a:latin typeface="Inter"/>
-              </a:defRPr>
-            </a:pPr>
-            <a:r>
-              <a:t>Mass Collection</a:t>
-            </a:r>
-          </a:p>
-        </p:txBody>
-      </p:sp>
-    </p:spTree>
-  </p:cSld>
-  <p:clrMapOvr>
-    <a:masterClrMapping/>
-  </p:clrMapOvr>
-</p:sld>
-</file>
-
-<file path=ppt/slides/slide83.xml><?xml version="1.0" encoding="utf-8"?>
-<p:sld xmlns:a="http://schemas.openxmlformats.org/drawingml/2006/main" xmlns:p="http://schemas.openxmlformats.org/presentationml/2006/main" xmlns:r="http://schemas.openxmlformats.org/officeDocument/2006/relationships">
-  <p:cSld>
-    <p:bg>
-      <p:bgPr>
-        <a:solidFill>
-          <a:srgbClr val="10251C"/>
-        </a:solidFill>
-        <a:effectLst/>
-      </p:bgPr>
-    </p:bg>
-    <p:spTree>
-      <p:nvGrpSpPr>
-        <p:cNvPr id="1" name=""/>
-        <p:cNvGrpSpPr/>
-        <p:nvPr/>
-      </p:nvGrpSpPr>
-      <p:grpSpPr/>
-      <p:sp>
-        <p:nvSpPr>
-          <p:cNvPr id="2" name="TextBox 1"/>
-          <p:cNvSpPr txBox="1"/>
-          <p:nvPr/>
-        </p:nvSpPr>
-        <p:spPr>
-          <a:xfrm>
-            <a:off x="914400" y="530352"/>
-            <a:ext cx="16459200" cy="8750808"/>
-          </a:xfrm>
-          <a:prstGeom prst="rect">
-            <a:avLst/>
-          </a:prstGeom>
-          <a:noFill/>
-        </p:spPr>
-        <p:txBody>
-          <a:bodyPr wrap="square" lIns="109728" rIns="109728" tIns="73152" bIns="73152">
-            <a:noAutofit/>
-          </a:bodyPr>
-          <a:lstStyle/>
-          <a:p>
-            <a:pPr algn="ctr">
-              <a:spcAft>
-                <a:spcPts val="500"/>
-              </a:spcAft>
-              <a:defRPr sz="5500" b="1" i="0">
-                <a:solidFill>
-                  <a:srgbClr val="F0FDF4"/>
-                </a:solidFill>
-                <a:latin typeface="Inter"/>
-              </a:defRPr>
-            </a:pPr>
-            <a:r>
-              <a:t>FOOD SPONSORS</a:t>
-            </a:r>
-          </a:p>
-          <a:p>
-            <a:pPr algn="ctr">
-              <a:spcAft>
-                <a:spcPts val="500"/>
-              </a:spcAft>
-              <a:defRPr sz="5500" b="0" i="0">
-                <a:solidFill>
-                  <a:srgbClr val="F0FDF4"/>
-                </a:solidFill>
-                <a:latin typeface="Inter"/>
-              </a:defRPr>
-            </a:pPr>
-            <a:r>
-              <a:t>The community thanks our food sponsors.</a:t>
-            </a:r>
-          </a:p>
-          <a:p>
-            <a:pPr algn="ctr">
-              <a:spcAft>
-                <a:spcPts val="500"/>
-              </a:spcAft>
-              <a:defRPr sz="5500" b="0" i="0">
-                <a:solidFill>
-                  <a:srgbClr val="F0FDF4"/>
-                </a:solidFill>
-                <a:latin typeface="Inter"/>
-              </a:defRPr>
-            </a:pPr>
-            <a:r>
-              <a:t>• Diino</a:t>
-            </a:r>
-          </a:p>
-        </p:txBody>
-      </p:sp>
-      <p:sp>
-        <p:nvSpPr>
-          <p:cNvPr id="3" name="TextBox 2"/>
-          <p:cNvSpPr txBox="1"/>
-          <p:nvPr/>
-        </p:nvSpPr>
-        <p:spPr>
-          <a:xfrm>
-            <a:off x="914400" y="9418320"/>
-            <a:ext cx="16459200" cy="777240"/>
-          </a:xfrm>
-          <a:prstGeom prst="rect">
-            <a:avLst/>
-          </a:prstGeom>
-          <a:noFill/>
-        </p:spPr>
-        <p:txBody>
-          <a:bodyPr wrap="square" lIns="109728" rIns="109728" tIns="73152" bIns="73152">
-            <a:noAutofit/>
-          </a:bodyPr>
-          <a:lstStyle/>
-          <a:p/>
-          <a:p>
-            <a:pPr algn="l">
-              <a:spcBef>
-                <a:spcPts val="200"/>
-              </a:spcBef>
-              <a:defRPr sz="1200" b="0" i="0">
-                <a:solidFill>
-                  <a:srgbClr val="86EFAC"/>
-                </a:solidFill>
-                <a:latin typeface="Inter"/>
-              </a:defRPr>
-            </a:pPr>
-            <a:r>
-              <a:t>Food Sponsors</a:t>
-            </a:r>
-          </a:p>
-        </p:txBody>
-      </p:sp>
-    </p:spTree>
-  </p:cSld>
-  <p:clrMapOvr>
-    <a:masterClrMapping/>
-  </p:clrMapOvr>
-</p:sld>
-</file>
-
-<file path=ppt/slides/slide84.xml><?xml version="1.0" encoding="utf-8"?>
-<p:sld xmlns:a="http://schemas.openxmlformats.org/drawingml/2006/main" xmlns:p="http://schemas.openxmlformats.org/presentationml/2006/main" xmlns:r="http://schemas.openxmlformats.org/officeDocument/2006/relationships">
-  <p:cSld>
-    <p:bg>
-      <p:bgPr>
-        <a:solidFill>
-          <a:srgbClr val="10251C"/>
-        </a:solidFill>
-        <a:effectLst/>
-      </p:bgPr>
-    </p:bg>
-    <p:spTree>
-      <p:nvGrpSpPr>
-        <p:cNvPr id="1" name=""/>
-        <p:cNvGrpSpPr/>
-        <p:nvPr/>
-      </p:nvGrpSpPr>
-      <p:grpSpPr/>
-      <p:sp>
-        <p:nvSpPr>
-          <p:cNvPr id="2" name="TextBox 1"/>
-          <p:cNvSpPr txBox="1"/>
-          <p:nvPr/>
-        </p:nvSpPr>
-        <p:spPr>
-          <a:xfrm>
-            <a:off x="914400" y="530352"/>
-            <a:ext cx="16459200" cy="8750808"/>
-          </a:xfrm>
-          <a:prstGeom prst="rect">
-            <a:avLst/>
-          </a:prstGeom>
-          <a:noFill/>
-        </p:spPr>
-        <p:txBody>
-          <a:bodyPr wrap="square" lIns="109728" rIns="109728" tIns="73152" bIns="73152">
-            <a:noAutofit/>
-          </a:bodyPr>
-          <a:lstStyle/>
-          <a:p>
-            <a:pPr algn="ctr">
-              <a:spcAft>
-                <a:spcPts val="500"/>
-              </a:spcAft>
-              <a:defRPr sz="5500" b="1" i="0">
-                <a:solidFill>
-                  <a:srgbClr val="F0FDF4"/>
-                </a:solidFill>
-                <a:latin typeface="Inter"/>
-              </a:defRPr>
-            </a:pPr>
-            <a:r>
-              <a:t>CHURCH ANNOUNCEMENTS</a:t>
-            </a:r>
-          </a:p>
-        </p:txBody>
-      </p:sp>
-      <p:sp>
-        <p:nvSpPr>
-          <p:cNvPr id="3" name="TextBox 2"/>
-          <p:cNvSpPr txBox="1"/>
-          <p:nvPr/>
-        </p:nvSpPr>
-        <p:spPr>
-          <a:xfrm>
-            <a:off x="914400" y="9418320"/>
-            <a:ext cx="16459200" cy="777240"/>
-          </a:xfrm>
-          <a:prstGeom prst="rect">
-            <a:avLst/>
-          </a:prstGeom>
-          <a:noFill/>
-        </p:spPr>
-        <p:txBody>
-          <a:bodyPr wrap="square" lIns="109728" rIns="109728" tIns="73152" bIns="73152">
-            <a:noAutofit/>
-          </a:bodyPr>
-          <a:lstStyle/>
-          <a:p/>
-          <a:p>
-            <a:pPr algn="l">
-              <a:spcBef>
-                <a:spcPts val="200"/>
-              </a:spcBef>
-              <a:defRPr sz="1200" b="0" i="0">
-                <a:solidFill>
-                  <a:srgbClr val="86EFAC"/>
-                </a:solidFill>
-                <a:latin typeface="Inter"/>
-              </a:defRPr>
-            </a:pPr>
-            <a:r>
-              <a:t>Announcements</a:t>
-            </a:r>
-          </a:p>
-        </p:txBody>
-      </p:sp>
-    </p:spTree>
-  </p:cSld>
-  <p:clrMapOvr>
-    <a:masterClrMapping/>
-  </p:clrMapOvr>
-</p:sld>
-</file>
-
-<file path=ppt/slides/slide85.xml><?xml version="1.0" encoding="utf-8"?>
-<p:sld xmlns:a="http://schemas.openxmlformats.org/drawingml/2006/main" xmlns:p="http://schemas.openxmlformats.org/presentationml/2006/main" xmlns:r="http://schemas.openxmlformats.org/officeDocument/2006/relationships">
-  <p:cSld>
-    <p:bg>
-      <p:bgPr>
-        <a:solidFill>
-          <a:srgbClr val="10251C"/>
-        </a:solidFill>
-        <a:effectLst/>
-      </p:bgPr>
-    </p:bg>
-    <p:spTree>
-      <p:nvGrpSpPr>
-        <p:cNvPr id="1" name=""/>
-        <p:cNvGrpSpPr/>
-        <p:nvPr/>
-      </p:nvGrpSpPr>
-      <p:grpSpPr/>
-      <p:sp>
-        <p:nvSpPr>
-          <p:cNvPr id="2" name="TextBox 1"/>
-          <p:cNvSpPr txBox="1"/>
-          <p:nvPr/>
-        </p:nvSpPr>
-        <p:spPr>
-          <a:xfrm>
-            <a:off x="914400" y="530352"/>
-            <a:ext cx="16459200" cy="8750808"/>
-          </a:xfrm>
-          <a:prstGeom prst="rect">
-            <a:avLst/>
-          </a:prstGeom>
-          <a:noFill/>
-        </p:spPr>
-        <p:txBody>
-          <a:bodyPr wrap="square" lIns="109728" rIns="109728" tIns="73152" bIns="73152">
-            <a:noAutofit/>
-          </a:bodyPr>
-          <a:lstStyle/>
-          <a:p>
-            <a:pPr algn="ctr">
-              <a:spcAft>
-                <a:spcPts val="500"/>
-              </a:spcAft>
-              <a:defRPr sz="5500" b="1" i="0">
-                <a:solidFill>
-                  <a:srgbClr val="F0FDF4"/>
-                </a:solidFill>
-                <a:latin typeface="Inter"/>
-              </a:defRPr>
-            </a:pPr>
-            <a:r>
-              <a:t>Welcome newcomers!</a:t>
-            </a:r>
-          </a:p>
-        </p:txBody>
-      </p:sp>
-      <p:sp>
-        <p:nvSpPr>
-          <p:cNvPr id="3" name="TextBox 2"/>
-          <p:cNvSpPr txBox="1"/>
-          <p:nvPr/>
-        </p:nvSpPr>
-        <p:spPr>
-          <a:xfrm>
-            <a:off x="914400" y="9418320"/>
-            <a:ext cx="16459200" cy="777240"/>
-          </a:xfrm>
-          <a:prstGeom prst="rect">
-            <a:avLst/>
-          </a:prstGeom>
-          <a:noFill/>
-        </p:spPr>
-        <p:txBody>
-          <a:bodyPr wrap="square" lIns="109728" rIns="109728" tIns="73152" bIns="73152">
-            <a:noAutofit/>
-          </a:bodyPr>
-          <a:lstStyle/>
-          <a:p/>
-          <a:p>
-            <a:pPr algn="l">
-              <a:spcBef>
-                <a:spcPts val="200"/>
-              </a:spcBef>
-              <a:defRPr sz="1200" b="0" i="0">
-                <a:solidFill>
-                  <a:srgbClr val="86EFAC"/>
-                </a:solidFill>
-                <a:latin typeface="Inter"/>
-              </a:defRPr>
-            </a:pPr>
-            <a:r>
-              <a:t>Announcements</a:t>
-            </a:r>
-          </a:p>
-        </p:txBody>
-      </p:sp>
-    </p:spTree>
-  </p:cSld>
-  <p:clrMapOvr>
-    <a:masterClrMapping/>
-  </p:clrMapOvr>
-</p:sld>
-</file>
-
-<file path=ppt/slides/slide86.xml><?xml version="1.0" encoding="utf-8"?>
-<p:sld xmlns:a="http://schemas.openxmlformats.org/drawingml/2006/main" xmlns:p="http://schemas.openxmlformats.org/presentationml/2006/main" xmlns:r="http://schemas.openxmlformats.org/officeDocument/2006/relationships">
-  <p:cSld>
-    <p:bg>
-      <p:bgPr>
-        <a:solidFill>
-          <a:srgbClr val="10251C"/>
-        </a:solidFill>
-        <a:effectLst/>
-      </p:bgPr>
-    </p:bg>
-    <p:spTree>
-      <p:nvGrpSpPr>
-        <p:cNvPr id="1" name=""/>
-        <p:cNvGrpSpPr/>
-        <p:nvPr/>
-      </p:nvGrpSpPr>
-      <p:grpSpPr/>
-      <p:sp>
-        <p:nvSpPr>
-          <p:cNvPr id="2" name="TextBox 1"/>
-          <p:cNvSpPr txBox="1"/>
-          <p:nvPr/>
-        </p:nvSpPr>
-        <p:spPr>
-          <a:xfrm>
-            <a:off x="914400" y="530352"/>
-            <a:ext cx="16459200" cy="8750808"/>
-          </a:xfrm>
-          <a:prstGeom prst="rect">
-            <a:avLst/>
-          </a:prstGeom>
-          <a:noFill/>
-        </p:spPr>
-        <p:txBody>
-          <a:bodyPr wrap="square" lIns="109728" rIns="109728" tIns="73152" bIns="73152">
-            <a:noAutofit/>
-          </a:bodyPr>
-          <a:lstStyle/>
-          <a:p>
-            <a:pPr algn="ctr">
-              <a:spcAft>
-                <a:spcPts val="500"/>
-              </a:spcAft>
-              <a:defRPr sz="5500" b="1" i="0">
-                <a:solidFill>
-                  <a:srgbClr val="F0FDF4"/>
-                </a:solidFill>
-                <a:latin typeface="Inter"/>
-              </a:defRPr>
-            </a:pPr>
-            <a:r>
-              <a:t>Sacrament of Confession</a:t>
-            </a:r>
-          </a:p>
-        </p:txBody>
-      </p:sp>
-      <p:sp>
-        <p:nvSpPr>
-          <p:cNvPr id="3" name="TextBox 2"/>
-          <p:cNvSpPr txBox="1"/>
-          <p:nvPr/>
-        </p:nvSpPr>
-        <p:spPr>
-          <a:xfrm>
-            <a:off x="914400" y="9418320"/>
-            <a:ext cx="16459200" cy="777240"/>
-          </a:xfrm>
-          <a:prstGeom prst="rect">
-            <a:avLst/>
-          </a:prstGeom>
-          <a:noFill/>
-        </p:spPr>
-        <p:txBody>
-          <a:bodyPr wrap="square" lIns="109728" rIns="109728" tIns="73152" bIns="73152">
-            <a:noAutofit/>
-          </a:bodyPr>
-          <a:lstStyle/>
-          <a:p/>
-          <a:p>
-            <a:pPr algn="l">
-              <a:spcBef>
-                <a:spcPts val="200"/>
-              </a:spcBef>
-              <a:defRPr sz="1200" b="0" i="0">
-                <a:solidFill>
-                  <a:srgbClr val="86EFAC"/>
-                </a:solidFill>
-                <a:latin typeface="Inter"/>
-              </a:defRPr>
-            </a:pPr>
-            <a:r>
-              <a:t>Announcements</a:t>
-            </a:r>
-          </a:p>
-        </p:txBody>
-      </p:sp>
-    </p:spTree>
-  </p:cSld>
-  <p:clrMapOvr>
-    <a:masterClrMapping/>
-  </p:clrMapOvr>
-</p:sld>
-</file>
-
-<file path=ppt/slides/slide87.xml><?xml version="1.0" encoding="utf-8"?>
-<p:sld xmlns:a="http://schemas.openxmlformats.org/drawingml/2006/main" xmlns:p="http://schemas.openxmlformats.org/presentationml/2006/main" xmlns:r="http://schemas.openxmlformats.org/officeDocument/2006/relationships">
-  <p:cSld>
-    <p:bg>
-      <p:bgPr>
-        <a:solidFill>
-          <a:srgbClr val="10251C"/>
-        </a:solidFill>
-        <a:effectLst/>
-      </p:bgPr>
-    </p:bg>
-    <p:spTree>
-      <p:nvGrpSpPr>
-        <p:cNvPr id="1" name=""/>
-        <p:cNvGrpSpPr/>
-        <p:nvPr/>
-      </p:nvGrpSpPr>
-      <p:grpSpPr/>
-      <p:sp>
-        <p:nvSpPr>
-          <p:cNvPr id="2" name="TextBox 1"/>
-          <p:cNvSpPr txBox="1"/>
-          <p:nvPr/>
-        </p:nvSpPr>
-        <p:spPr>
-          <a:xfrm>
-            <a:off x="914400" y="530352"/>
-            <a:ext cx="16459200" cy="8750808"/>
-          </a:xfrm>
-          <a:prstGeom prst="rect">
-            <a:avLst/>
-          </a:prstGeom>
-          <a:noFill/>
-        </p:spPr>
-        <p:txBody>
-          <a:bodyPr wrap="square" lIns="109728" rIns="109728" tIns="73152" bIns="73152">
-            <a:noAutofit/>
-          </a:bodyPr>
-          <a:lstStyle/>
-          <a:p>
-            <a:pPr algn="ctr">
-              <a:spcAft>
-                <a:spcPts val="500"/>
-              </a:spcAft>
-              <a:defRPr sz="5500" b="1" i="0">
-                <a:solidFill>
-                  <a:srgbClr val="F0FDF4"/>
-                </a:solidFill>
-                <a:latin typeface="Inter"/>
-              </a:defRPr>
-            </a:pPr>
-            <a:r>
-              <a:t>Updates and Announcements</a:t>
-            </a:r>
-          </a:p>
-        </p:txBody>
-      </p:sp>
-      <p:sp>
-        <p:nvSpPr>
-          <p:cNvPr id="3" name="TextBox 2"/>
-          <p:cNvSpPr txBox="1"/>
-          <p:nvPr/>
-        </p:nvSpPr>
-        <p:spPr>
-          <a:xfrm>
-            <a:off x="914400" y="9418320"/>
-            <a:ext cx="16459200" cy="777240"/>
-          </a:xfrm>
-          <a:prstGeom prst="rect">
-            <a:avLst/>
-          </a:prstGeom>
-          <a:noFill/>
-        </p:spPr>
-        <p:txBody>
-          <a:bodyPr wrap="square" lIns="109728" rIns="109728" tIns="73152" bIns="73152">
-            <a:noAutofit/>
-          </a:bodyPr>
-          <a:lstStyle/>
-          <a:p/>
-          <a:p>
-            <a:pPr algn="l">
-              <a:spcBef>
-                <a:spcPts val="200"/>
-              </a:spcBef>
-              <a:defRPr sz="1200" b="0" i="0">
-                <a:solidFill>
-                  <a:srgbClr val="86EFAC"/>
-                </a:solidFill>
-                <a:latin typeface="Inter"/>
-              </a:defRPr>
-            </a:pPr>
-            <a:r>
-              <a:t>Announcements</a:t>
-            </a:r>
-          </a:p>
-        </p:txBody>
-      </p:sp>
-    </p:spTree>
-  </p:cSld>
-  <p:clrMapOvr>
-    <a:masterClrMapping/>
-  </p:clrMapOvr>
-</p:sld>
-</file>
-
-<file path=ppt/slides/slide88.xml><?xml version="1.0" encoding="utf-8"?>
-<p:sld xmlns:a="http://schemas.openxmlformats.org/drawingml/2006/main" xmlns:p="http://schemas.openxmlformats.org/presentationml/2006/main" xmlns:r="http://schemas.openxmlformats.org/officeDocument/2006/relationships">
-  <p:cSld>
-    <p:bg>
-      <p:bgPr>
-        <a:solidFill>
-          <a:srgbClr val="10251C"/>
-        </a:solidFill>
-        <a:effectLst/>
-      </p:bgPr>
-    </p:bg>
-    <p:spTree>
-      <p:nvGrpSpPr>
-        <p:cNvPr id="1" name=""/>
-        <p:cNvGrpSpPr/>
-        <p:nvPr/>
-      </p:nvGrpSpPr>
-      <p:grpSpPr/>
-      <p:sp>
-        <p:nvSpPr>
-          <p:cNvPr id="2" name="TextBox 1"/>
-          <p:cNvSpPr txBox="1"/>
-          <p:nvPr/>
-        </p:nvSpPr>
-        <p:spPr>
-          <a:xfrm>
-            <a:off x="914400" y="530352"/>
-            <a:ext cx="16459200" cy="8750808"/>
-          </a:xfrm>
-          <a:prstGeom prst="rect">
-            <a:avLst/>
-          </a:prstGeom>
-          <a:noFill/>
-        </p:spPr>
-        <p:txBody>
-          <a:bodyPr wrap="square" lIns="109728" rIns="109728" tIns="73152" bIns="73152">
-            <a:noAutofit/>
-          </a:bodyPr>
-          <a:lstStyle/>
-          <a:p>
-            <a:pPr algn="ctr">
-              <a:spcBef>
-                <a:spcPts val="400"/>
-              </a:spcBef>
-              <a:spcAft>
-                <a:spcPts val="500"/>
-              </a:spcAft>
-              <a:defRPr sz="5500" b="1" i="0">
-                <a:solidFill>
-                  <a:srgbClr val="86EFAC"/>
-                </a:solidFill>
-                <a:latin typeface="Inter"/>
-              </a:defRPr>
-            </a:pPr>
-            <a:r>
-              <a:t>Priest: The Lord be with you.</a:t>
-            </a:r>
-          </a:p>
-          <a:p>
-            <a:pPr algn="ctr">
-              <a:spcBef>
-                <a:spcPts val="400"/>
-              </a:spcBef>
-              <a:spcAft>
-                <a:spcPts val="500"/>
-              </a:spcAft>
-              <a:defRPr sz="5500" b="1" i="0">
-                <a:solidFill>
-                  <a:srgbClr val="F0FDF4"/>
-                </a:solidFill>
-                <a:latin typeface="Inter"/>
-              </a:defRPr>
-            </a:pPr>
-            <a:r>
-              <a:t>All: And with your spirit.</a:t>
-            </a:r>
-          </a:p>
-          <a:p>
-            <a:pPr algn="ctr">
-              <a:spcBef>
-                <a:spcPts val="400"/>
-              </a:spcBef>
-              <a:spcAft>
-                <a:spcPts val="500"/>
-              </a:spcAft>
-              <a:defRPr sz="5500" b="1" i="0">
-                <a:solidFill>
-                  <a:srgbClr val="86EFAC"/>
-                </a:solidFill>
-                <a:latin typeface="Inter"/>
-              </a:defRPr>
-            </a:pPr>
-            <a:r>
-              <a:t>Priest: May almighty God bless you, the Father, and the Son, and the Holy Spirit.</a:t>
-            </a:r>
-          </a:p>
-          <a:p>
-            <a:pPr algn="ctr">
-              <a:spcBef>
-                <a:spcPts val="400"/>
-              </a:spcBef>
-              <a:spcAft>
-                <a:spcPts val="500"/>
-              </a:spcAft>
-              <a:defRPr sz="5500" b="1" i="0">
-                <a:solidFill>
-                  <a:srgbClr val="F0FDF4"/>
-                </a:solidFill>
-                <a:latin typeface="Inter"/>
-              </a:defRPr>
-            </a:pPr>
-            <a:r>
-              <a:t>All: Amen.</a:t>
-            </a:r>
-          </a:p>
-          <a:p>
-            <a:pPr algn="ctr">
-              <a:spcBef>
-                <a:spcPts val="400"/>
-              </a:spcBef>
-              <a:spcAft>
-                <a:spcPts val="500"/>
-              </a:spcAft>
-              <a:defRPr sz="5500" b="1" i="0">
-                <a:solidFill>
-                  <a:srgbClr val="86EFAC"/>
-                </a:solidFill>
-                <a:latin typeface="Inter"/>
-              </a:defRPr>
-            </a:pPr>
-            <a:r>
-              <a:t>Priest: Go in peace, glorifying the Lord by your life.</a:t>
-            </a:r>
-          </a:p>
-          <a:p>
-            <a:pPr algn="ctr">
-              <a:spcBef>
-                <a:spcPts val="400"/>
-              </a:spcBef>
-              <a:spcAft>
-                <a:spcPts val="500"/>
-              </a:spcAft>
-              <a:defRPr sz="5500" b="1" i="0">
-                <a:solidFill>
-                  <a:srgbClr val="F0FDF4"/>
-                </a:solidFill>
-                <a:latin typeface="Inter"/>
-              </a:defRPr>
-            </a:pPr>
-            <a:r>
-              <a:t>All: Thanks be to God.</a:t>
-            </a:r>
-          </a:p>
-        </p:txBody>
-      </p:sp>
-      <p:sp>
-        <p:nvSpPr>
-          <p:cNvPr id="3" name="TextBox 2"/>
-          <p:cNvSpPr txBox="1"/>
-          <p:nvPr/>
-        </p:nvSpPr>
-        <p:spPr>
-          <a:xfrm>
-            <a:off x="914400" y="9418320"/>
-            <a:ext cx="16459200" cy="777240"/>
-          </a:xfrm>
-          <a:prstGeom prst="rect">
-            <a:avLst/>
-          </a:prstGeom>
-          <a:noFill/>
-        </p:spPr>
-        <p:txBody>
-          <a:bodyPr wrap="square" lIns="109728" rIns="109728" tIns="73152" bIns="73152">
-            <a:noAutofit/>
-          </a:bodyPr>
-          <a:lstStyle/>
-          <a:p/>
-          <a:p>
-            <a:pPr algn="l">
-              <a:spcBef>
-                <a:spcPts val="200"/>
-              </a:spcBef>
-              <a:defRPr sz="1200" b="0" i="0">
-                <a:solidFill>
-                  <a:srgbClr val="86EFAC"/>
-                </a:solidFill>
-                <a:latin typeface="Inter"/>
-              </a:defRPr>
-            </a:pPr>
-            <a:r>
-              <a:t>Final Blessing</a:t>
-            </a:r>
-          </a:p>
-        </p:txBody>
-      </p:sp>
-    </p:spTree>
-  </p:cSld>
-  <p:clrMapOvr>
-    <a:masterClrMapping/>
-  </p:clrMapOvr>
-</p:sld>
-</file>
-
-<file path=ppt/slides/slide89.xml><?xml version="1.0" encoding="utf-8"?>
 <p:sld xmlns:a="http://schemas.openxmlformats.org/drawingml/2006/main" xmlns:p="http://schemas.openxmlformats.org/presentationml/2006/main" xmlns:r="http://schemas.openxmlformats.org/officeDocument/2006/relationships">
   <p:cSld>
     <p:bg>
@@ -17509,6 +16010,1122 @@
             </a:pPr>
             <a:r>
               <a:t>Recessional</a:t>
+            </a:r>
+          </a:p>
+        </p:txBody>
+      </p:sp>
+    </p:spTree>
+  </p:cSld>
+  <p:clrMapOvr>
+    <a:masterClrMapping/>
+  </p:clrMapOvr>
+</p:sld>
+</file>
+
+<file path=ppt/slides/slide82.xml><?xml version="1.0" encoding="utf-8"?>
+<p:sld xmlns:a="http://schemas.openxmlformats.org/drawingml/2006/main" xmlns:p="http://schemas.openxmlformats.org/presentationml/2006/main" xmlns:r="http://schemas.openxmlformats.org/officeDocument/2006/relationships">
+  <p:cSld>
+    <p:bg>
+      <p:bgPr>
+        <a:solidFill>
+          <a:srgbClr val="000000"/>
+        </a:solidFill>
+        <a:effectLst/>
+      </p:bgPr>
+    </p:bg>
+    <p:spTree>
+      <p:nvGrpSpPr>
+        <p:cNvPr id="1" name=""/>
+        <p:cNvGrpSpPr/>
+        <p:nvPr/>
+      </p:nvGrpSpPr>
+      <p:grpSpPr/>
+      <p:sp>
+        <p:nvSpPr>
+          <p:cNvPr id="2" name="TextBox 1"/>
+          <p:cNvSpPr txBox="1"/>
+          <p:nvPr/>
+        </p:nvSpPr>
+        <p:spPr>
+          <a:xfrm>
+            <a:off x="0" y="0"/>
+            <a:ext cx="18288000" cy="10287000"/>
+          </a:xfrm>
+          <a:prstGeom prst="rect">
+            <a:avLst/>
+          </a:prstGeom>
+          <a:noFill/>
+        </p:spPr>
+        <p:txBody>
+          <a:bodyPr wrap="square" lIns="0" rIns="0" tIns="0" bIns="0" anchor="ctr">
+            <a:noAutofit/>
+          </a:bodyPr>
+          <a:lstStyle/>
+          <a:p>
+            <a:pPr algn="ctr">
+              <a:lnSpc>
+                <a:spcPct val="100000"/>
+              </a:lnSpc>
+              <a:spcAft>
+                <a:spcPts val="600"/>
+              </a:spcAft>
+              <a:defRPr sz="5500" b="1" i="0">
+                <a:solidFill>
+                  <a:srgbClr val="FFFFFF"/>
+                </a:solidFill>
+                <a:latin typeface="Arial Black"/>
+              </a:defRPr>
+            </a:pPr>
+            <a:r>
+              <a:t>COME! LIVE IN THE LIGHT!</a:t>
+            </a:r>
+          </a:p>
+          <a:p>
+            <a:pPr algn="ctr">
+              <a:lnSpc>
+                <a:spcPct val="100000"/>
+              </a:lnSpc>
+              <a:spcAft>
+                <a:spcPts val="600"/>
+              </a:spcAft>
+              <a:defRPr sz="5500" b="1" i="0">
+                <a:solidFill>
+                  <a:srgbClr val="FFFFFF"/>
+                </a:solidFill>
+                <a:latin typeface="Arial Black"/>
+              </a:defRPr>
+            </a:pPr>
+            <a:r>
+              <a:t>SHINE WITH THE JOY AND THE LOVE OF THE LORD!</a:t>
+            </a:r>
+          </a:p>
+        </p:txBody>
+      </p:sp>
+      <p:sp>
+        <p:nvSpPr>
+          <p:cNvPr id="3" name="TextBox 2"/>
+          <p:cNvSpPr txBox="1"/>
+          <p:nvPr/>
+        </p:nvSpPr>
+        <p:spPr>
+          <a:xfrm>
+            <a:off x="914400" y="9418320"/>
+            <a:ext cx="16459200" cy="777240"/>
+          </a:xfrm>
+          <a:prstGeom prst="rect">
+            <a:avLst/>
+          </a:prstGeom>
+          <a:noFill/>
+        </p:spPr>
+        <p:txBody>
+          <a:bodyPr wrap="square" lIns="109728" rIns="109728" tIns="73152" bIns="73152">
+            <a:noAutofit/>
+          </a:bodyPr>
+          <a:lstStyle/>
+          <a:p/>
+          <a:p>
+            <a:pPr>
+              <a:spcBef>
+                <a:spcPts val="200"/>
+              </a:spcBef>
+              <a:defRPr sz="1200" b="0" i="0">
+                <a:solidFill>
+                  <a:srgbClr val="FFCC4D"/>
+                </a:solidFill>
+                <a:latin typeface="Inter"/>
+              </a:defRPr>
+            </a:pPr>
+            <a:r>
+              <a:t>Recessional</a:t>
+            </a:r>
+          </a:p>
+        </p:txBody>
+      </p:sp>
+    </p:spTree>
+  </p:cSld>
+  <p:clrMapOvr>
+    <a:masterClrMapping/>
+  </p:clrMapOvr>
+</p:sld>
+</file>
+
+<file path=ppt/slides/slide83.xml><?xml version="1.0" encoding="utf-8"?>
+<p:sld xmlns:a="http://schemas.openxmlformats.org/drawingml/2006/main" xmlns:p="http://schemas.openxmlformats.org/presentationml/2006/main" xmlns:r="http://schemas.openxmlformats.org/officeDocument/2006/relationships">
+  <p:cSld>
+    <p:bg>
+      <p:bgPr>
+        <a:solidFill>
+          <a:srgbClr val="000000"/>
+        </a:solidFill>
+        <a:effectLst/>
+      </p:bgPr>
+    </p:bg>
+    <p:spTree>
+      <p:nvGrpSpPr>
+        <p:cNvPr id="1" name=""/>
+        <p:cNvGrpSpPr/>
+        <p:nvPr/>
+      </p:nvGrpSpPr>
+      <p:grpSpPr/>
+      <p:sp>
+        <p:nvSpPr>
+          <p:cNvPr id="2" name="TextBox 1"/>
+          <p:cNvSpPr txBox="1"/>
+          <p:nvPr/>
+        </p:nvSpPr>
+        <p:spPr>
+          <a:xfrm>
+            <a:off x="0" y="0"/>
+            <a:ext cx="18288000" cy="10287000"/>
+          </a:xfrm>
+          <a:prstGeom prst="rect">
+            <a:avLst/>
+          </a:prstGeom>
+          <a:noFill/>
+        </p:spPr>
+        <p:txBody>
+          <a:bodyPr wrap="square" lIns="0" rIns="0" tIns="0" bIns="0" anchor="ctr">
+            <a:noAutofit/>
+          </a:bodyPr>
+          <a:lstStyle/>
+          <a:p>
+            <a:pPr algn="ctr">
+              <a:lnSpc>
+                <a:spcPct val="100000"/>
+              </a:lnSpc>
+              <a:spcAft>
+                <a:spcPts val="600"/>
+              </a:spcAft>
+              <a:defRPr sz="5500" b="1" i="0">
+                <a:solidFill>
+                  <a:srgbClr val="FFFFFF"/>
+                </a:solidFill>
+                <a:latin typeface="Arial Black"/>
+              </a:defRPr>
+            </a:pPr>
+            <a:r>
+              <a:t>GOD OF DAYBREAK, GOD OF SHADOW,</a:t>
+            </a:r>
+          </a:p>
+          <a:p>
+            <a:pPr algn="ctr">
+              <a:lnSpc>
+                <a:spcPct val="100000"/>
+              </a:lnSpc>
+              <a:spcAft>
+                <a:spcPts val="600"/>
+              </a:spcAft>
+              <a:defRPr sz="5500" b="1" i="0">
+                <a:solidFill>
+                  <a:srgbClr val="FFFFFF"/>
+                </a:solidFill>
+                <a:latin typeface="Arial Black"/>
+              </a:defRPr>
+            </a:pPr>
+            <a:r>
+              <a:t>COME INTO OUR RESTLESS LIVES;</a:t>
+            </a:r>
+          </a:p>
+          <a:p>
+            <a:pPr algn="ctr">
+              <a:lnSpc>
+                <a:spcPct val="100000"/>
+              </a:lnSpc>
+              <a:spcAft>
+                <a:spcPts val="600"/>
+              </a:spcAft>
+              <a:defRPr sz="5500" b="1" i="0">
+                <a:solidFill>
+                  <a:srgbClr val="FFFFFF"/>
+                </a:solidFill>
+                <a:latin typeface="Arial Black"/>
+              </a:defRPr>
+            </a:pPr>
+            <a:r>
+              <a:t>LIFT FROM US THE FEAR OF SHADOWS,</a:t>
+            </a:r>
+          </a:p>
+          <a:p>
+            <a:pPr algn="ctr">
+              <a:lnSpc>
+                <a:spcPct val="100000"/>
+              </a:lnSpc>
+              <a:spcAft>
+                <a:spcPts val="600"/>
+              </a:spcAft>
+              <a:defRPr sz="5500" b="1" i="0">
+                <a:solidFill>
+                  <a:srgbClr val="FFFFFF"/>
+                </a:solidFill>
+                <a:latin typeface="Arial Black"/>
+              </a:defRPr>
+            </a:pPr>
+            <a:r>
+              <a:t>THAT WE MAY ARISE WITH LIGHT.</a:t>
+            </a:r>
+          </a:p>
+        </p:txBody>
+      </p:sp>
+      <p:sp>
+        <p:nvSpPr>
+          <p:cNvPr id="3" name="TextBox 2"/>
+          <p:cNvSpPr txBox="1"/>
+          <p:nvPr/>
+        </p:nvSpPr>
+        <p:spPr>
+          <a:xfrm>
+            <a:off x="914400" y="9418320"/>
+            <a:ext cx="16459200" cy="777240"/>
+          </a:xfrm>
+          <a:prstGeom prst="rect">
+            <a:avLst/>
+          </a:prstGeom>
+          <a:noFill/>
+        </p:spPr>
+        <p:txBody>
+          <a:bodyPr wrap="square" lIns="109728" rIns="109728" tIns="73152" bIns="73152">
+            <a:noAutofit/>
+          </a:bodyPr>
+          <a:lstStyle/>
+          <a:p/>
+          <a:p>
+            <a:pPr>
+              <a:spcBef>
+                <a:spcPts val="200"/>
+              </a:spcBef>
+              <a:defRPr sz="1200" b="0" i="0">
+                <a:solidFill>
+                  <a:srgbClr val="FFCC4D"/>
+                </a:solidFill>
+                <a:latin typeface="Inter"/>
+              </a:defRPr>
+            </a:pPr>
+            <a:r>
+              <a:t>Recessional</a:t>
+            </a:r>
+          </a:p>
+        </p:txBody>
+      </p:sp>
+    </p:spTree>
+  </p:cSld>
+  <p:clrMapOvr>
+    <a:masterClrMapping/>
+  </p:clrMapOvr>
+</p:sld>
+</file>
+
+<file path=ppt/slides/slide84.xml><?xml version="1.0" encoding="utf-8"?>
+<p:sld xmlns:a="http://schemas.openxmlformats.org/drawingml/2006/main" xmlns:p="http://schemas.openxmlformats.org/presentationml/2006/main" xmlns:r="http://schemas.openxmlformats.org/officeDocument/2006/relationships">
+  <p:cSld>
+    <p:bg>
+      <p:bgPr>
+        <a:solidFill>
+          <a:srgbClr val="000000"/>
+        </a:solidFill>
+        <a:effectLst/>
+      </p:bgPr>
+    </p:bg>
+    <p:spTree>
+      <p:nvGrpSpPr>
+        <p:cNvPr id="1" name=""/>
+        <p:cNvGrpSpPr/>
+        <p:nvPr/>
+      </p:nvGrpSpPr>
+      <p:grpSpPr/>
+      <p:sp>
+        <p:nvSpPr>
+          <p:cNvPr id="2" name="TextBox 1"/>
+          <p:cNvSpPr txBox="1"/>
+          <p:nvPr/>
+        </p:nvSpPr>
+        <p:spPr>
+          <a:xfrm>
+            <a:off x="0" y="0"/>
+            <a:ext cx="18288000" cy="10287000"/>
+          </a:xfrm>
+          <a:prstGeom prst="rect">
+            <a:avLst/>
+          </a:prstGeom>
+          <a:noFill/>
+        </p:spPr>
+        <p:txBody>
+          <a:bodyPr wrap="square" lIns="0" rIns="0" tIns="0" bIns="0" anchor="ctr">
+            <a:noAutofit/>
+          </a:bodyPr>
+          <a:lstStyle/>
+          <a:p>
+            <a:pPr algn="ctr">
+              <a:lnSpc>
+                <a:spcPct val="100000"/>
+              </a:lnSpc>
+              <a:spcAft>
+                <a:spcPts val="600"/>
+              </a:spcAft>
+              <a:defRPr sz="5500" b="1" i="0">
+                <a:solidFill>
+                  <a:srgbClr val="FFFFFF"/>
+                </a:solidFill>
+                <a:latin typeface="Arial Black"/>
+              </a:defRPr>
+            </a:pPr>
+            <a:r>
+              <a:t>WE ARE CALLED TO ACT WITH JUSTICE...</a:t>
+            </a:r>
+          </a:p>
+        </p:txBody>
+      </p:sp>
+      <p:sp>
+        <p:nvSpPr>
+          <p:cNvPr id="3" name="TextBox 2"/>
+          <p:cNvSpPr txBox="1"/>
+          <p:nvPr/>
+        </p:nvSpPr>
+        <p:spPr>
+          <a:xfrm>
+            <a:off x="914400" y="9418320"/>
+            <a:ext cx="16459200" cy="777240"/>
+          </a:xfrm>
+          <a:prstGeom prst="rect">
+            <a:avLst/>
+          </a:prstGeom>
+          <a:noFill/>
+        </p:spPr>
+        <p:txBody>
+          <a:bodyPr wrap="square" lIns="109728" rIns="109728" tIns="73152" bIns="73152">
+            <a:noAutofit/>
+          </a:bodyPr>
+          <a:lstStyle/>
+          <a:p/>
+          <a:p>
+            <a:pPr>
+              <a:spcBef>
+                <a:spcPts val="200"/>
+              </a:spcBef>
+              <a:defRPr sz="1200" b="0" i="0">
+                <a:solidFill>
+                  <a:srgbClr val="FFCC4D"/>
+                </a:solidFill>
+                <a:latin typeface="Inter"/>
+              </a:defRPr>
+            </a:pPr>
+            <a:r>
+              <a:t>Recessional</a:t>
+            </a:r>
+          </a:p>
+        </p:txBody>
+      </p:sp>
+    </p:spTree>
+  </p:cSld>
+  <p:clrMapOvr>
+    <a:masterClrMapping/>
+  </p:clrMapOvr>
+</p:sld>
+</file>
+
+<file path=ppt/slides/slide85.xml><?xml version="1.0" encoding="utf-8"?>
+<p:sld xmlns:a="http://schemas.openxmlformats.org/drawingml/2006/main" xmlns:p="http://schemas.openxmlformats.org/presentationml/2006/main" xmlns:r="http://schemas.openxmlformats.org/officeDocument/2006/relationships">
+  <p:cSld>
+    <p:bg>
+      <p:bgPr>
+        <a:solidFill>
+          <a:srgbClr val="000000"/>
+        </a:solidFill>
+        <a:effectLst/>
+      </p:bgPr>
+    </p:bg>
+    <p:spTree>
+      <p:nvGrpSpPr>
+        <p:cNvPr id="1" name=""/>
+        <p:cNvGrpSpPr/>
+        <p:nvPr/>
+      </p:nvGrpSpPr>
+      <p:grpSpPr/>
+      <p:sp>
+        <p:nvSpPr>
+          <p:cNvPr id="2" name="TextBox 1"/>
+          <p:cNvSpPr txBox="1"/>
+          <p:nvPr/>
+        </p:nvSpPr>
+        <p:spPr>
+          <a:xfrm>
+            <a:off x="0" y="0"/>
+            <a:ext cx="18288000" cy="10287000"/>
+          </a:xfrm>
+          <a:prstGeom prst="rect">
+            <a:avLst/>
+          </a:prstGeom>
+          <a:noFill/>
+        </p:spPr>
+        <p:txBody>
+          <a:bodyPr wrap="square" lIns="0" rIns="0" tIns="0" bIns="0" anchor="ctr">
+            <a:noAutofit/>
+          </a:bodyPr>
+          <a:lstStyle/>
+          <a:p>
+            <a:pPr algn="ctr">
+              <a:lnSpc>
+                <a:spcPct val="100000"/>
+              </a:lnSpc>
+              <a:spcAft>
+                <a:spcPts val="600"/>
+              </a:spcAft>
+              <a:defRPr sz="5500" b="1" i="0">
+                <a:solidFill>
+                  <a:srgbClr val="FFFFFF"/>
+                </a:solidFill>
+                <a:latin typeface="Arial Black"/>
+              </a:defRPr>
+            </a:pPr>
+            <a:r>
+              <a:t>COME! LIVE IN THE LIGHT!...</a:t>
+            </a:r>
+          </a:p>
+        </p:txBody>
+      </p:sp>
+      <p:sp>
+        <p:nvSpPr>
+          <p:cNvPr id="3" name="TextBox 2"/>
+          <p:cNvSpPr txBox="1"/>
+          <p:nvPr/>
+        </p:nvSpPr>
+        <p:spPr>
+          <a:xfrm>
+            <a:off x="914400" y="9418320"/>
+            <a:ext cx="16459200" cy="777240"/>
+          </a:xfrm>
+          <a:prstGeom prst="rect">
+            <a:avLst/>
+          </a:prstGeom>
+          <a:noFill/>
+        </p:spPr>
+        <p:txBody>
+          <a:bodyPr wrap="square" lIns="109728" rIns="109728" tIns="73152" bIns="73152">
+            <a:noAutofit/>
+          </a:bodyPr>
+          <a:lstStyle/>
+          <a:p/>
+          <a:p>
+            <a:pPr>
+              <a:spcBef>
+                <a:spcPts val="200"/>
+              </a:spcBef>
+              <a:defRPr sz="1200" b="0" i="0">
+                <a:solidFill>
+                  <a:srgbClr val="FFCC4D"/>
+                </a:solidFill>
+                <a:latin typeface="Inter"/>
+              </a:defRPr>
+            </a:pPr>
+            <a:r>
+              <a:t>Recessional</a:t>
+            </a:r>
+          </a:p>
+        </p:txBody>
+      </p:sp>
+    </p:spTree>
+  </p:cSld>
+  <p:clrMapOvr>
+    <a:masterClrMapping/>
+  </p:clrMapOvr>
+</p:sld>
+</file>
+
+<file path=ppt/slides/slide86.xml><?xml version="1.0" encoding="utf-8"?>
+<p:sld xmlns:a="http://schemas.openxmlformats.org/drawingml/2006/main" xmlns:p="http://schemas.openxmlformats.org/presentationml/2006/main" xmlns:r="http://schemas.openxmlformats.org/officeDocument/2006/relationships">
+  <p:cSld>
+    <p:bg>
+      <p:bgPr>
+        <a:solidFill>
+          <a:srgbClr val="000000"/>
+        </a:solidFill>
+        <a:effectLst/>
+      </p:bgPr>
+    </p:bg>
+    <p:spTree>
+      <p:nvGrpSpPr>
+        <p:cNvPr id="1" name=""/>
+        <p:cNvGrpSpPr/>
+        <p:nvPr/>
+      </p:nvGrpSpPr>
+      <p:grpSpPr/>
+      <p:sp>
+        <p:nvSpPr>
+          <p:cNvPr id="2" name="TextBox 1"/>
+          <p:cNvSpPr txBox="1"/>
+          <p:nvPr/>
+        </p:nvSpPr>
+        <p:spPr>
+          <a:xfrm>
+            <a:off x="0" y="0"/>
+            <a:ext cx="18288000" cy="10287000"/>
+          </a:xfrm>
+          <a:prstGeom prst="rect">
+            <a:avLst/>
+          </a:prstGeom>
+          <a:noFill/>
+        </p:spPr>
+        <p:txBody>
+          <a:bodyPr wrap="square" lIns="0" rIns="0" tIns="0" bIns="0" anchor="ctr">
+            <a:noAutofit/>
+          </a:bodyPr>
+          <a:lstStyle/>
+          <a:p>
+            <a:pPr algn="ctr">
+              <a:lnSpc>
+                <a:spcPct val="100000"/>
+              </a:lnSpc>
+              <a:spcAft>
+                <a:spcPts val="600"/>
+              </a:spcAft>
+              <a:defRPr sz="5500" b="1" i="0">
+                <a:solidFill>
+                  <a:srgbClr val="FFFFFF"/>
+                </a:solidFill>
+                <a:latin typeface="Arial Black"/>
+              </a:defRPr>
+            </a:pPr>
+            <a:r>
+              <a:t>GOD OF NEWNESS, GOD OF FRESHNESS,</a:t>
+            </a:r>
+          </a:p>
+          <a:p>
+            <a:pPr algn="ctr">
+              <a:lnSpc>
+                <a:spcPct val="100000"/>
+              </a:lnSpc>
+              <a:spcAft>
+                <a:spcPts val="600"/>
+              </a:spcAft>
+              <a:defRPr sz="5500" b="1" i="0">
+                <a:solidFill>
+                  <a:srgbClr val="FFFFFF"/>
+                </a:solidFill>
+                <a:latin typeface="Arial Black"/>
+              </a:defRPr>
+            </a:pPr>
+            <a:r>
+              <a:t>COME INTO OUR MORNING SONG:</a:t>
+            </a:r>
+          </a:p>
+          <a:p>
+            <a:pPr algn="ctr">
+              <a:lnSpc>
+                <a:spcPct val="100000"/>
+              </a:lnSpc>
+              <a:spcAft>
+                <a:spcPts val="600"/>
+              </a:spcAft>
+              <a:defRPr sz="5500" b="1" i="0">
+                <a:solidFill>
+                  <a:srgbClr val="FFFFFF"/>
+                </a:solidFill>
+                <a:latin typeface="Arial Black"/>
+              </a:defRPr>
+            </a:pPr>
+            <a:r>
+              <a:t>GIVE TO US A NEW BEGINNING,</a:t>
+            </a:r>
+          </a:p>
+          <a:p>
+            <a:pPr algn="ctr">
+              <a:lnSpc>
+                <a:spcPct val="100000"/>
+              </a:lnSpc>
+              <a:spcAft>
+                <a:spcPts val="600"/>
+              </a:spcAft>
+              <a:defRPr sz="5500" b="1" i="0">
+                <a:solidFill>
+                  <a:srgbClr val="FFFFFF"/>
+                </a:solidFill>
+                <a:latin typeface="Arial Black"/>
+              </a:defRPr>
+            </a:pPr>
+            <a:r>
+              <a:t>SEND US FORTH WITH HEARTS MADE STRONG.</a:t>
+            </a:r>
+          </a:p>
+        </p:txBody>
+      </p:sp>
+      <p:sp>
+        <p:nvSpPr>
+          <p:cNvPr id="3" name="TextBox 2"/>
+          <p:cNvSpPr txBox="1"/>
+          <p:nvPr/>
+        </p:nvSpPr>
+        <p:spPr>
+          <a:xfrm>
+            <a:off x="914400" y="9418320"/>
+            <a:ext cx="16459200" cy="777240"/>
+          </a:xfrm>
+          <a:prstGeom prst="rect">
+            <a:avLst/>
+          </a:prstGeom>
+          <a:noFill/>
+        </p:spPr>
+        <p:txBody>
+          <a:bodyPr wrap="square" lIns="109728" rIns="109728" tIns="73152" bIns="73152">
+            <a:noAutofit/>
+          </a:bodyPr>
+          <a:lstStyle/>
+          <a:p/>
+          <a:p>
+            <a:pPr>
+              <a:spcBef>
+                <a:spcPts val="200"/>
+              </a:spcBef>
+              <a:defRPr sz="1200" b="0" i="0">
+                <a:solidFill>
+                  <a:srgbClr val="FFCC4D"/>
+                </a:solidFill>
+                <a:latin typeface="Inter"/>
+              </a:defRPr>
+            </a:pPr>
+            <a:r>
+              <a:t>Recessional</a:t>
+            </a:r>
+          </a:p>
+        </p:txBody>
+      </p:sp>
+    </p:spTree>
+  </p:cSld>
+  <p:clrMapOvr>
+    <a:masterClrMapping/>
+  </p:clrMapOvr>
+</p:sld>
+</file>
+
+<file path=ppt/slides/slide87.xml><?xml version="1.0" encoding="utf-8"?>
+<p:sld xmlns:a="http://schemas.openxmlformats.org/drawingml/2006/main" xmlns:p="http://schemas.openxmlformats.org/presentationml/2006/main" xmlns:r="http://schemas.openxmlformats.org/officeDocument/2006/relationships">
+  <p:cSld>
+    <p:bg>
+      <p:bgPr>
+        <a:solidFill>
+          <a:srgbClr val="000000"/>
+        </a:solidFill>
+        <a:effectLst/>
+      </p:bgPr>
+    </p:bg>
+    <p:spTree>
+      <p:nvGrpSpPr>
+        <p:cNvPr id="1" name=""/>
+        <p:cNvGrpSpPr/>
+        <p:nvPr/>
+      </p:nvGrpSpPr>
+      <p:grpSpPr/>
+      <p:sp>
+        <p:nvSpPr>
+          <p:cNvPr id="2" name="TextBox 1"/>
+          <p:cNvSpPr txBox="1"/>
+          <p:nvPr/>
+        </p:nvSpPr>
+        <p:spPr>
+          <a:xfrm>
+            <a:off x="0" y="0"/>
+            <a:ext cx="18288000" cy="10287000"/>
+          </a:xfrm>
+          <a:prstGeom prst="rect">
+            <a:avLst/>
+          </a:prstGeom>
+          <a:noFill/>
+        </p:spPr>
+        <p:txBody>
+          <a:bodyPr wrap="square" lIns="0" rIns="0" tIns="0" bIns="0" anchor="ctr">
+            <a:noAutofit/>
+          </a:bodyPr>
+          <a:lstStyle/>
+          <a:p>
+            <a:pPr algn="ctr">
+              <a:lnSpc>
+                <a:spcPct val="100000"/>
+              </a:lnSpc>
+              <a:spcAft>
+                <a:spcPts val="600"/>
+              </a:spcAft>
+              <a:defRPr sz="5500" b="1" i="0">
+                <a:solidFill>
+                  <a:srgbClr val="FFFFFF"/>
+                </a:solidFill>
+                <a:latin typeface="Arial Black"/>
+              </a:defRPr>
+            </a:pPr>
+            <a:r>
+              <a:t>WE ARE CALLED TO ACT WITH JUSTICE...</a:t>
+            </a:r>
+          </a:p>
+        </p:txBody>
+      </p:sp>
+      <p:sp>
+        <p:nvSpPr>
+          <p:cNvPr id="3" name="TextBox 2"/>
+          <p:cNvSpPr txBox="1"/>
+          <p:nvPr/>
+        </p:nvSpPr>
+        <p:spPr>
+          <a:xfrm>
+            <a:off x="914400" y="9418320"/>
+            <a:ext cx="16459200" cy="777240"/>
+          </a:xfrm>
+          <a:prstGeom prst="rect">
+            <a:avLst/>
+          </a:prstGeom>
+          <a:noFill/>
+        </p:spPr>
+        <p:txBody>
+          <a:bodyPr wrap="square" lIns="109728" rIns="109728" tIns="73152" bIns="73152">
+            <a:noAutofit/>
+          </a:bodyPr>
+          <a:lstStyle/>
+          <a:p/>
+          <a:p>
+            <a:pPr>
+              <a:spcBef>
+                <a:spcPts val="200"/>
+              </a:spcBef>
+              <a:defRPr sz="1200" b="0" i="0">
+                <a:solidFill>
+                  <a:srgbClr val="FFCC4D"/>
+                </a:solidFill>
+                <a:latin typeface="Inter"/>
+              </a:defRPr>
+            </a:pPr>
+            <a:r>
+              <a:t>Recessional</a:t>
+            </a:r>
+          </a:p>
+        </p:txBody>
+      </p:sp>
+    </p:spTree>
+  </p:cSld>
+  <p:clrMapOvr>
+    <a:masterClrMapping/>
+  </p:clrMapOvr>
+</p:sld>
+</file>
+
+<file path=ppt/slides/slide88.xml><?xml version="1.0" encoding="utf-8"?>
+<p:sld xmlns:a="http://schemas.openxmlformats.org/drawingml/2006/main" xmlns:p="http://schemas.openxmlformats.org/presentationml/2006/main" xmlns:r="http://schemas.openxmlformats.org/officeDocument/2006/relationships">
+  <p:cSld>
+    <p:bg>
+      <p:bgPr>
+        <a:solidFill>
+          <a:srgbClr val="000000"/>
+        </a:solidFill>
+        <a:effectLst/>
+      </p:bgPr>
+    </p:bg>
+    <p:spTree>
+      <p:nvGrpSpPr>
+        <p:cNvPr id="1" name=""/>
+        <p:cNvGrpSpPr/>
+        <p:nvPr/>
+      </p:nvGrpSpPr>
+      <p:grpSpPr/>
+      <p:sp>
+        <p:nvSpPr>
+          <p:cNvPr id="2" name="TextBox 1"/>
+          <p:cNvSpPr txBox="1"/>
+          <p:nvPr/>
+        </p:nvSpPr>
+        <p:spPr>
+          <a:xfrm>
+            <a:off x="0" y="0"/>
+            <a:ext cx="18288000" cy="10287000"/>
+          </a:xfrm>
+          <a:prstGeom prst="rect">
+            <a:avLst/>
+          </a:prstGeom>
+          <a:noFill/>
+        </p:spPr>
+        <p:txBody>
+          <a:bodyPr wrap="square" lIns="0" rIns="0" tIns="0" bIns="0" anchor="ctr">
+            <a:noAutofit/>
+          </a:bodyPr>
+          <a:lstStyle/>
+          <a:p>
+            <a:pPr algn="ctr">
+              <a:lnSpc>
+                <a:spcPct val="100000"/>
+              </a:lnSpc>
+              <a:spcAft>
+                <a:spcPts val="600"/>
+              </a:spcAft>
+              <a:defRPr sz="5500" b="1" i="0">
+                <a:solidFill>
+                  <a:srgbClr val="FFFFFF"/>
+                </a:solidFill>
+                <a:latin typeface="Arial Black"/>
+              </a:defRPr>
+            </a:pPr>
+            <a:r>
+              <a:t>COME! LIVE IN THE LIGHT!...</a:t>
+            </a:r>
+          </a:p>
+        </p:txBody>
+      </p:sp>
+      <p:sp>
+        <p:nvSpPr>
+          <p:cNvPr id="3" name="TextBox 2"/>
+          <p:cNvSpPr txBox="1"/>
+          <p:nvPr/>
+        </p:nvSpPr>
+        <p:spPr>
+          <a:xfrm>
+            <a:off x="914400" y="9418320"/>
+            <a:ext cx="16459200" cy="777240"/>
+          </a:xfrm>
+          <a:prstGeom prst="rect">
+            <a:avLst/>
+          </a:prstGeom>
+          <a:noFill/>
+        </p:spPr>
+        <p:txBody>
+          <a:bodyPr wrap="square" lIns="109728" rIns="109728" tIns="73152" bIns="73152">
+            <a:noAutofit/>
+          </a:bodyPr>
+          <a:lstStyle/>
+          <a:p/>
+          <a:p>
+            <a:pPr>
+              <a:spcBef>
+                <a:spcPts val="200"/>
+              </a:spcBef>
+              <a:defRPr sz="1200" b="0" i="0">
+                <a:solidFill>
+                  <a:srgbClr val="FFCC4D"/>
+                </a:solidFill>
+                <a:latin typeface="Inter"/>
+              </a:defRPr>
+            </a:pPr>
+            <a:r>
+              <a:t>Recessional</a:t>
+            </a:r>
+          </a:p>
+        </p:txBody>
+      </p:sp>
+    </p:spTree>
+  </p:cSld>
+  <p:clrMapOvr>
+    <a:masterClrMapping/>
+  </p:clrMapOvr>
+</p:sld>
+</file>
+
+<file path=ppt/slides/slide89.xml><?xml version="1.0" encoding="utf-8"?>
+<p:sld xmlns:a="http://schemas.openxmlformats.org/drawingml/2006/main" xmlns:p="http://schemas.openxmlformats.org/presentationml/2006/main" xmlns:r="http://schemas.openxmlformats.org/officeDocument/2006/relationships">
+  <p:cSld>
+    <p:spTree>
+      <p:nvGrpSpPr>
+        <p:cNvPr id="1" name=""/>
+        <p:cNvGrpSpPr/>
+        <p:nvPr/>
+      </p:nvGrpSpPr>
+      <p:grpSpPr/>
+      <p:pic>
+        <p:nvPicPr>
+          <p:cNvPr id="2" name="Picture 1" descr="GFCC7Jun2026_OrdinaryTime_16x9.png"/>
+          <p:cNvPicPr>
+            <a:picLocks noChangeAspect="1"/>
+          </p:cNvPicPr>
+          <p:nvPr/>
+        </p:nvPicPr>
+        <p:blipFill>
+          <a:blip r:embed="rId2"/>
+          <a:stretch>
+            <a:fillRect/>
+          </a:stretch>
+        </p:blipFill>
+        <p:spPr>
+          <a:xfrm>
+            <a:off x="0" y="0"/>
+            <a:ext cx="18288000" cy="10287000"/>
+          </a:xfrm>
+          <a:prstGeom prst="rect">
+            <a:avLst/>
+          </a:prstGeom>
+        </p:spPr>
+      </p:pic>
+      <p:sp>
+        <p:nvSpPr>
+          <p:cNvPr id="3" name="TextBox 2"/>
+          <p:cNvSpPr txBox="1"/>
+          <p:nvPr/>
+        </p:nvSpPr>
+        <p:spPr>
+          <a:xfrm>
+            <a:off x="914400" y="850392"/>
+            <a:ext cx="16459200" cy="5943600"/>
+          </a:xfrm>
+          <a:prstGeom prst="rect">
+            <a:avLst/>
+          </a:prstGeom>
+          <a:noFill/>
+        </p:spPr>
+        <p:txBody>
+          <a:bodyPr wrap="square" lIns="109728" rIns="109728" tIns="73152" bIns="73152">
+            <a:noAutofit/>
+          </a:bodyPr>
+          <a:lstStyle/>
+          <a:p>
+            <a:pPr algn="ctr">
+              <a:spcAft>
+                <a:spcPts val="300"/>
+              </a:spcAft>
+              <a:defRPr sz="5500" b="1" i="0">
+                <a:solidFill>
+                  <a:srgbClr val="86EFAC"/>
+                </a:solidFill>
+                <a:latin typeface="Inter"/>
+              </a:defRPr>
+            </a:pPr>
+            <a:r>
+              <a:t>MASS CELEBRANT:</a:t>
+            </a:r>
+          </a:p>
+          <a:p>
+            <a:pPr algn="ctr">
+              <a:spcAft>
+                <a:spcPts val="300"/>
+              </a:spcAft>
+              <a:defRPr sz="5500" b="0" i="0">
+                <a:solidFill>
+                  <a:srgbClr val="F0FDF4"/>
+                </a:solidFill>
+                <a:latin typeface="Inter"/>
+              </a:defRPr>
+            </a:pPr>
+            <a:r>
+              <a:t>Rev. Fr. Jonrey Lauron, RCJ</a:t>
+            </a:r>
+          </a:p>
+          <a:p>
+            <a:pPr algn="ctr">
+              <a:spcAft>
+                <a:spcPts val="300"/>
+              </a:spcAft>
+              <a:defRPr sz="5500" b="0" i="0">
+                <a:solidFill>
+                  <a:srgbClr val="F0FDF4"/>
+                </a:solidFill>
+                <a:latin typeface="Inter"/>
+              </a:defRPr>
+            </a:pPr>
+          </a:p>
+          <a:p>
+            <a:pPr algn="ctr">
+              <a:spcAft>
+                <a:spcPts val="300"/>
+              </a:spcAft>
+              <a:defRPr sz="5500" b="0" i="0">
+                <a:solidFill>
+                  <a:srgbClr val="F0FDF4"/>
+                </a:solidFill>
+                <a:latin typeface="Inter"/>
+              </a:defRPr>
+            </a:pPr>
+            <a:r>
+              <a:t>Gospel (John 6:51-58)</a:t>
+            </a:r>
+          </a:p>
+          <a:p>
+            <a:pPr algn="ctr">
+              <a:spcAft>
+                <a:spcPts val="300"/>
+              </a:spcAft>
+              <a:defRPr sz="5500" b="0" i="0">
+                <a:solidFill>
+                  <a:srgbClr val="F0FDF4"/>
+                </a:solidFill>
+                <a:latin typeface="Inter"/>
+              </a:defRPr>
+            </a:pPr>
+            <a:r>
+              <a:t>“I am the living bread that came down from heaven; whoever eats this bread will live forever; and the bread that I will give is my flesh for the life of the world.”</a:t>
+            </a:r>
+          </a:p>
+          <a:p>
+            <a:pPr algn="ctr">
+              <a:spcAft>
+                <a:spcPts val="300"/>
+              </a:spcAft>
+              <a:defRPr sz="5500" b="0" i="0">
+                <a:solidFill>
+                  <a:srgbClr val="F0FDF4"/>
+                </a:solidFill>
+                <a:latin typeface="Inter"/>
+              </a:defRPr>
+            </a:pPr>
+          </a:p>
+          <a:p>
+            <a:pPr algn="ctr">
+              <a:spcAft>
+                <a:spcPts val="300"/>
+              </a:spcAft>
+              <a:defRPr sz="5500" b="0" i="0">
+                <a:solidFill>
+                  <a:srgbClr val="F0FDF4"/>
+                </a:solidFill>
+                <a:latin typeface="Inter"/>
+              </a:defRPr>
+            </a:pPr>
+            <a:r>
+              <a:t>YEAR A</a:t>
+            </a:r>
+          </a:p>
+          <a:p>
+            <a:pPr algn="ctr">
+              <a:spcAft>
+                <a:spcPts val="300"/>
+              </a:spcAft>
+              <a:defRPr sz="5500" b="0" i="0">
+                <a:solidFill>
+                  <a:srgbClr val="F0FDF4"/>
+                </a:solidFill>
+                <a:latin typeface="Inter"/>
+              </a:defRPr>
+            </a:pPr>
+            <a:r>
+              <a:t>2026-06-07 · Ordinary Time</a:t>
+            </a:r>
+          </a:p>
+        </p:txBody>
+      </p:sp>
+      <p:sp>
+        <p:nvSpPr>
+          <p:cNvPr id="4" name="TextBox 3"/>
+          <p:cNvSpPr txBox="1"/>
+          <p:nvPr/>
+        </p:nvSpPr>
+        <p:spPr>
+          <a:xfrm>
+            <a:off x="914400" y="9418320"/>
+            <a:ext cx="16459200" cy="777240"/>
+          </a:xfrm>
+          <a:prstGeom prst="rect">
+            <a:avLst/>
+          </a:prstGeom>
+          <a:noFill/>
+        </p:spPr>
+        <p:txBody>
+          <a:bodyPr wrap="square" lIns="109728" rIns="109728" tIns="73152" bIns="73152">
+            <a:noAutofit/>
+          </a:bodyPr>
+          <a:lstStyle/>
+          <a:p/>
+          <a:p>
+            <a:pPr algn="l">
+              <a:spcBef>
+                <a:spcPts val="200"/>
+              </a:spcBef>
+              <a:defRPr sz="1200" b="0" i="0">
+                <a:solidFill>
+                  <a:srgbClr val="86EFAC"/>
+                </a:solidFill>
+                <a:latin typeface="Inter"/>
+              </a:defRPr>
+            </a:pPr>
+            <a:r>
+              <a:t>Mass poster / divider</a:t>
             </a:r>
           </a:p>
         </p:txBody>
@@ -17674,1122 +17291,6 @@
             </a:pPr>
             <a:r>
               <a:t>Introductory Rites</a:t>
-            </a:r>
-          </a:p>
-        </p:txBody>
-      </p:sp>
-    </p:spTree>
-  </p:cSld>
-  <p:clrMapOvr>
-    <a:masterClrMapping/>
-  </p:clrMapOvr>
-</p:sld>
-</file>
-
-<file path=ppt/slides/slide90.xml><?xml version="1.0" encoding="utf-8"?>
-<p:sld xmlns:a="http://schemas.openxmlformats.org/drawingml/2006/main" xmlns:p="http://schemas.openxmlformats.org/presentationml/2006/main" xmlns:r="http://schemas.openxmlformats.org/officeDocument/2006/relationships">
-  <p:cSld>
-    <p:bg>
-      <p:bgPr>
-        <a:solidFill>
-          <a:srgbClr val="000000"/>
-        </a:solidFill>
-        <a:effectLst/>
-      </p:bgPr>
-    </p:bg>
-    <p:spTree>
-      <p:nvGrpSpPr>
-        <p:cNvPr id="1" name=""/>
-        <p:cNvGrpSpPr/>
-        <p:nvPr/>
-      </p:nvGrpSpPr>
-      <p:grpSpPr/>
-      <p:sp>
-        <p:nvSpPr>
-          <p:cNvPr id="2" name="TextBox 1"/>
-          <p:cNvSpPr txBox="1"/>
-          <p:nvPr/>
-        </p:nvSpPr>
-        <p:spPr>
-          <a:xfrm>
-            <a:off x="0" y="0"/>
-            <a:ext cx="18288000" cy="10287000"/>
-          </a:xfrm>
-          <a:prstGeom prst="rect">
-            <a:avLst/>
-          </a:prstGeom>
-          <a:noFill/>
-        </p:spPr>
-        <p:txBody>
-          <a:bodyPr wrap="square" lIns="0" rIns="0" tIns="0" bIns="0" anchor="ctr">
-            <a:noAutofit/>
-          </a:bodyPr>
-          <a:lstStyle/>
-          <a:p>
-            <a:pPr algn="ctr">
-              <a:lnSpc>
-                <a:spcPct val="100000"/>
-              </a:lnSpc>
-              <a:spcAft>
-                <a:spcPts val="600"/>
-              </a:spcAft>
-              <a:defRPr sz="5500" b="1" i="0">
-                <a:solidFill>
-                  <a:srgbClr val="FFFFFF"/>
-                </a:solidFill>
-                <a:latin typeface="Arial Black"/>
-              </a:defRPr>
-            </a:pPr>
-            <a:r>
-              <a:t>COME! LIVE IN THE LIGHT!</a:t>
-            </a:r>
-          </a:p>
-          <a:p>
-            <a:pPr algn="ctr">
-              <a:lnSpc>
-                <a:spcPct val="100000"/>
-              </a:lnSpc>
-              <a:spcAft>
-                <a:spcPts val="600"/>
-              </a:spcAft>
-              <a:defRPr sz="5500" b="1" i="0">
-                <a:solidFill>
-                  <a:srgbClr val="FFFFFF"/>
-                </a:solidFill>
-                <a:latin typeface="Arial Black"/>
-              </a:defRPr>
-            </a:pPr>
-            <a:r>
-              <a:t>SHINE WITH THE JOY AND THE LOVE OF THE LORD!</a:t>
-            </a:r>
-          </a:p>
-        </p:txBody>
-      </p:sp>
-      <p:sp>
-        <p:nvSpPr>
-          <p:cNvPr id="3" name="TextBox 2"/>
-          <p:cNvSpPr txBox="1"/>
-          <p:nvPr/>
-        </p:nvSpPr>
-        <p:spPr>
-          <a:xfrm>
-            <a:off x="914400" y="9418320"/>
-            <a:ext cx="16459200" cy="777240"/>
-          </a:xfrm>
-          <a:prstGeom prst="rect">
-            <a:avLst/>
-          </a:prstGeom>
-          <a:noFill/>
-        </p:spPr>
-        <p:txBody>
-          <a:bodyPr wrap="square" lIns="109728" rIns="109728" tIns="73152" bIns="73152">
-            <a:noAutofit/>
-          </a:bodyPr>
-          <a:lstStyle/>
-          <a:p/>
-          <a:p>
-            <a:pPr>
-              <a:spcBef>
-                <a:spcPts val="200"/>
-              </a:spcBef>
-              <a:defRPr sz="1200" b="0" i="0">
-                <a:solidFill>
-                  <a:srgbClr val="FFCC4D"/>
-                </a:solidFill>
-                <a:latin typeface="Inter"/>
-              </a:defRPr>
-            </a:pPr>
-            <a:r>
-              <a:t>Recessional</a:t>
-            </a:r>
-          </a:p>
-        </p:txBody>
-      </p:sp>
-    </p:spTree>
-  </p:cSld>
-  <p:clrMapOvr>
-    <a:masterClrMapping/>
-  </p:clrMapOvr>
-</p:sld>
-</file>
-
-<file path=ppt/slides/slide91.xml><?xml version="1.0" encoding="utf-8"?>
-<p:sld xmlns:a="http://schemas.openxmlformats.org/drawingml/2006/main" xmlns:p="http://schemas.openxmlformats.org/presentationml/2006/main" xmlns:r="http://schemas.openxmlformats.org/officeDocument/2006/relationships">
-  <p:cSld>
-    <p:bg>
-      <p:bgPr>
-        <a:solidFill>
-          <a:srgbClr val="000000"/>
-        </a:solidFill>
-        <a:effectLst/>
-      </p:bgPr>
-    </p:bg>
-    <p:spTree>
-      <p:nvGrpSpPr>
-        <p:cNvPr id="1" name=""/>
-        <p:cNvGrpSpPr/>
-        <p:nvPr/>
-      </p:nvGrpSpPr>
-      <p:grpSpPr/>
-      <p:sp>
-        <p:nvSpPr>
-          <p:cNvPr id="2" name="TextBox 1"/>
-          <p:cNvSpPr txBox="1"/>
-          <p:nvPr/>
-        </p:nvSpPr>
-        <p:spPr>
-          <a:xfrm>
-            <a:off x="0" y="0"/>
-            <a:ext cx="18288000" cy="10287000"/>
-          </a:xfrm>
-          <a:prstGeom prst="rect">
-            <a:avLst/>
-          </a:prstGeom>
-          <a:noFill/>
-        </p:spPr>
-        <p:txBody>
-          <a:bodyPr wrap="square" lIns="0" rIns="0" tIns="0" bIns="0" anchor="ctr">
-            <a:noAutofit/>
-          </a:bodyPr>
-          <a:lstStyle/>
-          <a:p>
-            <a:pPr algn="ctr">
-              <a:lnSpc>
-                <a:spcPct val="100000"/>
-              </a:lnSpc>
-              <a:spcAft>
-                <a:spcPts val="600"/>
-              </a:spcAft>
-              <a:defRPr sz="5500" b="1" i="0">
-                <a:solidFill>
-                  <a:srgbClr val="FFFFFF"/>
-                </a:solidFill>
-                <a:latin typeface="Arial Black"/>
-              </a:defRPr>
-            </a:pPr>
-            <a:r>
-              <a:t>GOD OF DAYBREAK, GOD OF SHADOW,</a:t>
-            </a:r>
-          </a:p>
-          <a:p>
-            <a:pPr algn="ctr">
-              <a:lnSpc>
-                <a:spcPct val="100000"/>
-              </a:lnSpc>
-              <a:spcAft>
-                <a:spcPts val="600"/>
-              </a:spcAft>
-              <a:defRPr sz="5500" b="1" i="0">
-                <a:solidFill>
-                  <a:srgbClr val="FFFFFF"/>
-                </a:solidFill>
-                <a:latin typeface="Arial Black"/>
-              </a:defRPr>
-            </a:pPr>
-            <a:r>
-              <a:t>COME INTO OUR RESTLESS LIVES;</a:t>
-            </a:r>
-          </a:p>
-          <a:p>
-            <a:pPr algn="ctr">
-              <a:lnSpc>
-                <a:spcPct val="100000"/>
-              </a:lnSpc>
-              <a:spcAft>
-                <a:spcPts val="600"/>
-              </a:spcAft>
-              <a:defRPr sz="5500" b="1" i="0">
-                <a:solidFill>
-                  <a:srgbClr val="FFFFFF"/>
-                </a:solidFill>
-                <a:latin typeface="Arial Black"/>
-              </a:defRPr>
-            </a:pPr>
-            <a:r>
-              <a:t>LIFT FROM US THE FEAR OF SHADOWS,</a:t>
-            </a:r>
-          </a:p>
-          <a:p>
-            <a:pPr algn="ctr">
-              <a:lnSpc>
-                <a:spcPct val="100000"/>
-              </a:lnSpc>
-              <a:spcAft>
-                <a:spcPts val="600"/>
-              </a:spcAft>
-              <a:defRPr sz="5500" b="1" i="0">
-                <a:solidFill>
-                  <a:srgbClr val="FFFFFF"/>
-                </a:solidFill>
-                <a:latin typeface="Arial Black"/>
-              </a:defRPr>
-            </a:pPr>
-            <a:r>
-              <a:t>THAT WE MAY ARISE WITH LIGHT.</a:t>
-            </a:r>
-          </a:p>
-        </p:txBody>
-      </p:sp>
-      <p:sp>
-        <p:nvSpPr>
-          <p:cNvPr id="3" name="TextBox 2"/>
-          <p:cNvSpPr txBox="1"/>
-          <p:nvPr/>
-        </p:nvSpPr>
-        <p:spPr>
-          <a:xfrm>
-            <a:off x="914400" y="9418320"/>
-            <a:ext cx="16459200" cy="777240"/>
-          </a:xfrm>
-          <a:prstGeom prst="rect">
-            <a:avLst/>
-          </a:prstGeom>
-          <a:noFill/>
-        </p:spPr>
-        <p:txBody>
-          <a:bodyPr wrap="square" lIns="109728" rIns="109728" tIns="73152" bIns="73152">
-            <a:noAutofit/>
-          </a:bodyPr>
-          <a:lstStyle/>
-          <a:p/>
-          <a:p>
-            <a:pPr>
-              <a:spcBef>
-                <a:spcPts val="200"/>
-              </a:spcBef>
-              <a:defRPr sz="1200" b="0" i="0">
-                <a:solidFill>
-                  <a:srgbClr val="FFCC4D"/>
-                </a:solidFill>
-                <a:latin typeface="Inter"/>
-              </a:defRPr>
-            </a:pPr>
-            <a:r>
-              <a:t>Recessional</a:t>
-            </a:r>
-          </a:p>
-        </p:txBody>
-      </p:sp>
-    </p:spTree>
-  </p:cSld>
-  <p:clrMapOvr>
-    <a:masterClrMapping/>
-  </p:clrMapOvr>
-</p:sld>
-</file>
-
-<file path=ppt/slides/slide92.xml><?xml version="1.0" encoding="utf-8"?>
-<p:sld xmlns:a="http://schemas.openxmlformats.org/drawingml/2006/main" xmlns:p="http://schemas.openxmlformats.org/presentationml/2006/main" xmlns:r="http://schemas.openxmlformats.org/officeDocument/2006/relationships">
-  <p:cSld>
-    <p:bg>
-      <p:bgPr>
-        <a:solidFill>
-          <a:srgbClr val="000000"/>
-        </a:solidFill>
-        <a:effectLst/>
-      </p:bgPr>
-    </p:bg>
-    <p:spTree>
-      <p:nvGrpSpPr>
-        <p:cNvPr id="1" name=""/>
-        <p:cNvGrpSpPr/>
-        <p:nvPr/>
-      </p:nvGrpSpPr>
-      <p:grpSpPr/>
-      <p:sp>
-        <p:nvSpPr>
-          <p:cNvPr id="2" name="TextBox 1"/>
-          <p:cNvSpPr txBox="1"/>
-          <p:nvPr/>
-        </p:nvSpPr>
-        <p:spPr>
-          <a:xfrm>
-            <a:off x="0" y="0"/>
-            <a:ext cx="18288000" cy="10287000"/>
-          </a:xfrm>
-          <a:prstGeom prst="rect">
-            <a:avLst/>
-          </a:prstGeom>
-          <a:noFill/>
-        </p:spPr>
-        <p:txBody>
-          <a:bodyPr wrap="square" lIns="0" rIns="0" tIns="0" bIns="0" anchor="ctr">
-            <a:noAutofit/>
-          </a:bodyPr>
-          <a:lstStyle/>
-          <a:p>
-            <a:pPr algn="ctr">
-              <a:lnSpc>
-                <a:spcPct val="100000"/>
-              </a:lnSpc>
-              <a:spcAft>
-                <a:spcPts val="600"/>
-              </a:spcAft>
-              <a:defRPr sz="5500" b="1" i="0">
-                <a:solidFill>
-                  <a:srgbClr val="FFFFFF"/>
-                </a:solidFill>
-                <a:latin typeface="Arial Black"/>
-              </a:defRPr>
-            </a:pPr>
-            <a:r>
-              <a:t>WE ARE CALLED TO ACT WITH JUSTICE...</a:t>
-            </a:r>
-          </a:p>
-        </p:txBody>
-      </p:sp>
-      <p:sp>
-        <p:nvSpPr>
-          <p:cNvPr id="3" name="TextBox 2"/>
-          <p:cNvSpPr txBox="1"/>
-          <p:nvPr/>
-        </p:nvSpPr>
-        <p:spPr>
-          <a:xfrm>
-            <a:off x="914400" y="9418320"/>
-            <a:ext cx="16459200" cy="777240"/>
-          </a:xfrm>
-          <a:prstGeom prst="rect">
-            <a:avLst/>
-          </a:prstGeom>
-          <a:noFill/>
-        </p:spPr>
-        <p:txBody>
-          <a:bodyPr wrap="square" lIns="109728" rIns="109728" tIns="73152" bIns="73152">
-            <a:noAutofit/>
-          </a:bodyPr>
-          <a:lstStyle/>
-          <a:p/>
-          <a:p>
-            <a:pPr>
-              <a:spcBef>
-                <a:spcPts val="200"/>
-              </a:spcBef>
-              <a:defRPr sz="1200" b="0" i="0">
-                <a:solidFill>
-                  <a:srgbClr val="FFCC4D"/>
-                </a:solidFill>
-                <a:latin typeface="Inter"/>
-              </a:defRPr>
-            </a:pPr>
-            <a:r>
-              <a:t>Recessional</a:t>
-            </a:r>
-          </a:p>
-        </p:txBody>
-      </p:sp>
-    </p:spTree>
-  </p:cSld>
-  <p:clrMapOvr>
-    <a:masterClrMapping/>
-  </p:clrMapOvr>
-</p:sld>
-</file>
-
-<file path=ppt/slides/slide93.xml><?xml version="1.0" encoding="utf-8"?>
-<p:sld xmlns:a="http://schemas.openxmlformats.org/drawingml/2006/main" xmlns:p="http://schemas.openxmlformats.org/presentationml/2006/main" xmlns:r="http://schemas.openxmlformats.org/officeDocument/2006/relationships">
-  <p:cSld>
-    <p:bg>
-      <p:bgPr>
-        <a:solidFill>
-          <a:srgbClr val="000000"/>
-        </a:solidFill>
-        <a:effectLst/>
-      </p:bgPr>
-    </p:bg>
-    <p:spTree>
-      <p:nvGrpSpPr>
-        <p:cNvPr id="1" name=""/>
-        <p:cNvGrpSpPr/>
-        <p:nvPr/>
-      </p:nvGrpSpPr>
-      <p:grpSpPr/>
-      <p:sp>
-        <p:nvSpPr>
-          <p:cNvPr id="2" name="TextBox 1"/>
-          <p:cNvSpPr txBox="1"/>
-          <p:nvPr/>
-        </p:nvSpPr>
-        <p:spPr>
-          <a:xfrm>
-            <a:off x="0" y="0"/>
-            <a:ext cx="18288000" cy="10287000"/>
-          </a:xfrm>
-          <a:prstGeom prst="rect">
-            <a:avLst/>
-          </a:prstGeom>
-          <a:noFill/>
-        </p:spPr>
-        <p:txBody>
-          <a:bodyPr wrap="square" lIns="0" rIns="0" tIns="0" bIns="0" anchor="ctr">
-            <a:noAutofit/>
-          </a:bodyPr>
-          <a:lstStyle/>
-          <a:p>
-            <a:pPr algn="ctr">
-              <a:lnSpc>
-                <a:spcPct val="100000"/>
-              </a:lnSpc>
-              <a:spcAft>
-                <a:spcPts val="600"/>
-              </a:spcAft>
-              <a:defRPr sz="5500" b="1" i="0">
-                <a:solidFill>
-                  <a:srgbClr val="FFFFFF"/>
-                </a:solidFill>
-                <a:latin typeface="Arial Black"/>
-              </a:defRPr>
-            </a:pPr>
-            <a:r>
-              <a:t>COME! LIVE IN THE LIGHT!...</a:t>
-            </a:r>
-          </a:p>
-        </p:txBody>
-      </p:sp>
-      <p:sp>
-        <p:nvSpPr>
-          <p:cNvPr id="3" name="TextBox 2"/>
-          <p:cNvSpPr txBox="1"/>
-          <p:nvPr/>
-        </p:nvSpPr>
-        <p:spPr>
-          <a:xfrm>
-            <a:off x="914400" y="9418320"/>
-            <a:ext cx="16459200" cy="777240"/>
-          </a:xfrm>
-          <a:prstGeom prst="rect">
-            <a:avLst/>
-          </a:prstGeom>
-          <a:noFill/>
-        </p:spPr>
-        <p:txBody>
-          <a:bodyPr wrap="square" lIns="109728" rIns="109728" tIns="73152" bIns="73152">
-            <a:noAutofit/>
-          </a:bodyPr>
-          <a:lstStyle/>
-          <a:p/>
-          <a:p>
-            <a:pPr>
-              <a:spcBef>
-                <a:spcPts val="200"/>
-              </a:spcBef>
-              <a:defRPr sz="1200" b="0" i="0">
-                <a:solidFill>
-                  <a:srgbClr val="FFCC4D"/>
-                </a:solidFill>
-                <a:latin typeface="Inter"/>
-              </a:defRPr>
-            </a:pPr>
-            <a:r>
-              <a:t>Recessional</a:t>
-            </a:r>
-          </a:p>
-        </p:txBody>
-      </p:sp>
-    </p:spTree>
-  </p:cSld>
-  <p:clrMapOvr>
-    <a:masterClrMapping/>
-  </p:clrMapOvr>
-</p:sld>
-</file>
-
-<file path=ppt/slides/slide94.xml><?xml version="1.0" encoding="utf-8"?>
-<p:sld xmlns:a="http://schemas.openxmlformats.org/drawingml/2006/main" xmlns:p="http://schemas.openxmlformats.org/presentationml/2006/main" xmlns:r="http://schemas.openxmlformats.org/officeDocument/2006/relationships">
-  <p:cSld>
-    <p:bg>
-      <p:bgPr>
-        <a:solidFill>
-          <a:srgbClr val="000000"/>
-        </a:solidFill>
-        <a:effectLst/>
-      </p:bgPr>
-    </p:bg>
-    <p:spTree>
-      <p:nvGrpSpPr>
-        <p:cNvPr id="1" name=""/>
-        <p:cNvGrpSpPr/>
-        <p:nvPr/>
-      </p:nvGrpSpPr>
-      <p:grpSpPr/>
-      <p:sp>
-        <p:nvSpPr>
-          <p:cNvPr id="2" name="TextBox 1"/>
-          <p:cNvSpPr txBox="1"/>
-          <p:nvPr/>
-        </p:nvSpPr>
-        <p:spPr>
-          <a:xfrm>
-            <a:off x="0" y="0"/>
-            <a:ext cx="18288000" cy="10287000"/>
-          </a:xfrm>
-          <a:prstGeom prst="rect">
-            <a:avLst/>
-          </a:prstGeom>
-          <a:noFill/>
-        </p:spPr>
-        <p:txBody>
-          <a:bodyPr wrap="square" lIns="0" rIns="0" tIns="0" bIns="0" anchor="ctr">
-            <a:noAutofit/>
-          </a:bodyPr>
-          <a:lstStyle/>
-          <a:p>
-            <a:pPr algn="ctr">
-              <a:lnSpc>
-                <a:spcPct val="100000"/>
-              </a:lnSpc>
-              <a:spcAft>
-                <a:spcPts val="600"/>
-              </a:spcAft>
-              <a:defRPr sz="5500" b="1" i="0">
-                <a:solidFill>
-                  <a:srgbClr val="FFFFFF"/>
-                </a:solidFill>
-                <a:latin typeface="Arial Black"/>
-              </a:defRPr>
-            </a:pPr>
-            <a:r>
-              <a:t>GOD OF NEWNESS, GOD OF FRESHNESS,</a:t>
-            </a:r>
-          </a:p>
-          <a:p>
-            <a:pPr algn="ctr">
-              <a:lnSpc>
-                <a:spcPct val="100000"/>
-              </a:lnSpc>
-              <a:spcAft>
-                <a:spcPts val="600"/>
-              </a:spcAft>
-              <a:defRPr sz="5500" b="1" i="0">
-                <a:solidFill>
-                  <a:srgbClr val="FFFFFF"/>
-                </a:solidFill>
-                <a:latin typeface="Arial Black"/>
-              </a:defRPr>
-            </a:pPr>
-            <a:r>
-              <a:t>COME INTO OUR MORNING SONG:</a:t>
-            </a:r>
-          </a:p>
-          <a:p>
-            <a:pPr algn="ctr">
-              <a:lnSpc>
-                <a:spcPct val="100000"/>
-              </a:lnSpc>
-              <a:spcAft>
-                <a:spcPts val="600"/>
-              </a:spcAft>
-              <a:defRPr sz="5500" b="1" i="0">
-                <a:solidFill>
-                  <a:srgbClr val="FFFFFF"/>
-                </a:solidFill>
-                <a:latin typeface="Arial Black"/>
-              </a:defRPr>
-            </a:pPr>
-            <a:r>
-              <a:t>GIVE TO US A NEW BEGINNING,</a:t>
-            </a:r>
-          </a:p>
-          <a:p>
-            <a:pPr algn="ctr">
-              <a:lnSpc>
-                <a:spcPct val="100000"/>
-              </a:lnSpc>
-              <a:spcAft>
-                <a:spcPts val="600"/>
-              </a:spcAft>
-              <a:defRPr sz="5500" b="1" i="0">
-                <a:solidFill>
-                  <a:srgbClr val="FFFFFF"/>
-                </a:solidFill>
-                <a:latin typeface="Arial Black"/>
-              </a:defRPr>
-            </a:pPr>
-            <a:r>
-              <a:t>SEND US FORTH WITH HEARTS MADE STRONG.</a:t>
-            </a:r>
-          </a:p>
-        </p:txBody>
-      </p:sp>
-      <p:sp>
-        <p:nvSpPr>
-          <p:cNvPr id="3" name="TextBox 2"/>
-          <p:cNvSpPr txBox="1"/>
-          <p:nvPr/>
-        </p:nvSpPr>
-        <p:spPr>
-          <a:xfrm>
-            <a:off x="914400" y="9418320"/>
-            <a:ext cx="16459200" cy="777240"/>
-          </a:xfrm>
-          <a:prstGeom prst="rect">
-            <a:avLst/>
-          </a:prstGeom>
-          <a:noFill/>
-        </p:spPr>
-        <p:txBody>
-          <a:bodyPr wrap="square" lIns="109728" rIns="109728" tIns="73152" bIns="73152">
-            <a:noAutofit/>
-          </a:bodyPr>
-          <a:lstStyle/>
-          <a:p/>
-          <a:p>
-            <a:pPr>
-              <a:spcBef>
-                <a:spcPts val="200"/>
-              </a:spcBef>
-              <a:defRPr sz="1200" b="0" i="0">
-                <a:solidFill>
-                  <a:srgbClr val="FFCC4D"/>
-                </a:solidFill>
-                <a:latin typeface="Inter"/>
-              </a:defRPr>
-            </a:pPr>
-            <a:r>
-              <a:t>Recessional</a:t>
-            </a:r>
-          </a:p>
-        </p:txBody>
-      </p:sp>
-    </p:spTree>
-  </p:cSld>
-  <p:clrMapOvr>
-    <a:masterClrMapping/>
-  </p:clrMapOvr>
-</p:sld>
-</file>
-
-<file path=ppt/slides/slide95.xml><?xml version="1.0" encoding="utf-8"?>
-<p:sld xmlns:a="http://schemas.openxmlformats.org/drawingml/2006/main" xmlns:p="http://schemas.openxmlformats.org/presentationml/2006/main" xmlns:r="http://schemas.openxmlformats.org/officeDocument/2006/relationships">
-  <p:cSld>
-    <p:bg>
-      <p:bgPr>
-        <a:solidFill>
-          <a:srgbClr val="000000"/>
-        </a:solidFill>
-        <a:effectLst/>
-      </p:bgPr>
-    </p:bg>
-    <p:spTree>
-      <p:nvGrpSpPr>
-        <p:cNvPr id="1" name=""/>
-        <p:cNvGrpSpPr/>
-        <p:nvPr/>
-      </p:nvGrpSpPr>
-      <p:grpSpPr/>
-      <p:sp>
-        <p:nvSpPr>
-          <p:cNvPr id="2" name="TextBox 1"/>
-          <p:cNvSpPr txBox="1"/>
-          <p:nvPr/>
-        </p:nvSpPr>
-        <p:spPr>
-          <a:xfrm>
-            <a:off x="0" y="0"/>
-            <a:ext cx="18288000" cy="10287000"/>
-          </a:xfrm>
-          <a:prstGeom prst="rect">
-            <a:avLst/>
-          </a:prstGeom>
-          <a:noFill/>
-        </p:spPr>
-        <p:txBody>
-          <a:bodyPr wrap="square" lIns="0" rIns="0" tIns="0" bIns="0" anchor="ctr">
-            <a:noAutofit/>
-          </a:bodyPr>
-          <a:lstStyle/>
-          <a:p>
-            <a:pPr algn="ctr">
-              <a:lnSpc>
-                <a:spcPct val="100000"/>
-              </a:lnSpc>
-              <a:spcAft>
-                <a:spcPts val="600"/>
-              </a:spcAft>
-              <a:defRPr sz="5500" b="1" i="0">
-                <a:solidFill>
-                  <a:srgbClr val="FFFFFF"/>
-                </a:solidFill>
-                <a:latin typeface="Arial Black"/>
-              </a:defRPr>
-            </a:pPr>
-            <a:r>
-              <a:t>WE ARE CALLED TO ACT WITH JUSTICE...</a:t>
-            </a:r>
-          </a:p>
-        </p:txBody>
-      </p:sp>
-      <p:sp>
-        <p:nvSpPr>
-          <p:cNvPr id="3" name="TextBox 2"/>
-          <p:cNvSpPr txBox="1"/>
-          <p:nvPr/>
-        </p:nvSpPr>
-        <p:spPr>
-          <a:xfrm>
-            <a:off x="914400" y="9418320"/>
-            <a:ext cx="16459200" cy="777240"/>
-          </a:xfrm>
-          <a:prstGeom prst="rect">
-            <a:avLst/>
-          </a:prstGeom>
-          <a:noFill/>
-        </p:spPr>
-        <p:txBody>
-          <a:bodyPr wrap="square" lIns="109728" rIns="109728" tIns="73152" bIns="73152">
-            <a:noAutofit/>
-          </a:bodyPr>
-          <a:lstStyle/>
-          <a:p/>
-          <a:p>
-            <a:pPr>
-              <a:spcBef>
-                <a:spcPts val="200"/>
-              </a:spcBef>
-              <a:defRPr sz="1200" b="0" i="0">
-                <a:solidFill>
-                  <a:srgbClr val="FFCC4D"/>
-                </a:solidFill>
-                <a:latin typeface="Inter"/>
-              </a:defRPr>
-            </a:pPr>
-            <a:r>
-              <a:t>Recessional</a:t>
-            </a:r>
-          </a:p>
-        </p:txBody>
-      </p:sp>
-    </p:spTree>
-  </p:cSld>
-  <p:clrMapOvr>
-    <a:masterClrMapping/>
-  </p:clrMapOvr>
-</p:sld>
-</file>
-
-<file path=ppt/slides/slide96.xml><?xml version="1.0" encoding="utf-8"?>
-<p:sld xmlns:a="http://schemas.openxmlformats.org/drawingml/2006/main" xmlns:p="http://schemas.openxmlformats.org/presentationml/2006/main" xmlns:r="http://schemas.openxmlformats.org/officeDocument/2006/relationships">
-  <p:cSld>
-    <p:bg>
-      <p:bgPr>
-        <a:solidFill>
-          <a:srgbClr val="000000"/>
-        </a:solidFill>
-        <a:effectLst/>
-      </p:bgPr>
-    </p:bg>
-    <p:spTree>
-      <p:nvGrpSpPr>
-        <p:cNvPr id="1" name=""/>
-        <p:cNvGrpSpPr/>
-        <p:nvPr/>
-      </p:nvGrpSpPr>
-      <p:grpSpPr/>
-      <p:sp>
-        <p:nvSpPr>
-          <p:cNvPr id="2" name="TextBox 1"/>
-          <p:cNvSpPr txBox="1"/>
-          <p:nvPr/>
-        </p:nvSpPr>
-        <p:spPr>
-          <a:xfrm>
-            <a:off x="0" y="0"/>
-            <a:ext cx="18288000" cy="10287000"/>
-          </a:xfrm>
-          <a:prstGeom prst="rect">
-            <a:avLst/>
-          </a:prstGeom>
-          <a:noFill/>
-        </p:spPr>
-        <p:txBody>
-          <a:bodyPr wrap="square" lIns="0" rIns="0" tIns="0" bIns="0" anchor="ctr">
-            <a:noAutofit/>
-          </a:bodyPr>
-          <a:lstStyle/>
-          <a:p>
-            <a:pPr algn="ctr">
-              <a:lnSpc>
-                <a:spcPct val="100000"/>
-              </a:lnSpc>
-              <a:spcAft>
-                <a:spcPts val="600"/>
-              </a:spcAft>
-              <a:defRPr sz="5500" b="1" i="0">
-                <a:solidFill>
-                  <a:srgbClr val="FFFFFF"/>
-                </a:solidFill>
-                <a:latin typeface="Arial Black"/>
-              </a:defRPr>
-            </a:pPr>
-            <a:r>
-              <a:t>COME! LIVE IN THE LIGHT!...</a:t>
-            </a:r>
-          </a:p>
-        </p:txBody>
-      </p:sp>
-      <p:sp>
-        <p:nvSpPr>
-          <p:cNvPr id="3" name="TextBox 2"/>
-          <p:cNvSpPr txBox="1"/>
-          <p:nvPr/>
-        </p:nvSpPr>
-        <p:spPr>
-          <a:xfrm>
-            <a:off x="914400" y="9418320"/>
-            <a:ext cx="16459200" cy="777240"/>
-          </a:xfrm>
-          <a:prstGeom prst="rect">
-            <a:avLst/>
-          </a:prstGeom>
-          <a:noFill/>
-        </p:spPr>
-        <p:txBody>
-          <a:bodyPr wrap="square" lIns="109728" rIns="109728" tIns="73152" bIns="73152">
-            <a:noAutofit/>
-          </a:bodyPr>
-          <a:lstStyle/>
-          <a:p/>
-          <a:p>
-            <a:pPr>
-              <a:spcBef>
-                <a:spcPts val="200"/>
-              </a:spcBef>
-              <a:defRPr sz="1200" b="0" i="0">
-                <a:solidFill>
-                  <a:srgbClr val="FFCC4D"/>
-                </a:solidFill>
-                <a:latin typeface="Inter"/>
-              </a:defRPr>
-            </a:pPr>
-            <a:r>
-              <a:t>Recessional</a:t>
-            </a:r>
-          </a:p>
-        </p:txBody>
-      </p:sp>
-    </p:spTree>
-  </p:cSld>
-  <p:clrMapOvr>
-    <a:masterClrMapping/>
-  </p:clrMapOvr>
-</p:sld>
-</file>
-
-<file path=ppt/slides/slide97.xml><?xml version="1.0" encoding="utf-8"?>
-<p:sld xmlns:a="http://schemas.openxmlformats.org/drawingml/2006/main" xmlns:p="http://schemas.openxmlformats.org/presentationml/2006/main" xmlns:r="http://schemas.openxmlformats.org/officeDocument/2006/relationships">
-  <p:cSld>
-    <p:spTree>
-      <p:nvGrpSpPr>
-        <p:cNvPr id="1" name=""/>
-        <p:cNvGrpSpPr/>
-        <p:nvPr/>
-      </p:nvGrpSpPr>
-      <p:grpSpPr/>
-      <p:pic>
-        <p:nvPicPr>
-          <p:cNvPr id="2" name="Picture 1" descr="GFCC7Jun2026_OrdinaryTime_16x9.png"/>
-          <p:cNvPicPr>
-            <a:picLocks noChangeAspect="1"/>
-          </p:cNvPicPr>
-          <p:nvPr/>
-        </p:nvPicPr>
-        <p:blipFill>
-          <a:blip r:embed="rId2"/>
-          <a:stretch>
-            <a:fillRect/>
-          </a:stretch>
-        </p:blipFill>
-        <p:spPr>
-          <a:xfrm>
-            <a:off x="0" y="0"/>
-            <a:ext cx="18288000" cy="10287000"/>
-          </a:xfrm>
-          <a:prstGeom prst="rect">
-            <a:avLst/>
-          </a:prstGeom>
-        </p:spPr>
-      </p:pic>
-      <p:sp>
-        <p:nvSpPr>
-          <p:cNvPr id="3" name="TextBox 2"/>
-          <p:cNvSpPr txBox="1"/>
-          <p:nvPr/>
-        </p:nvSpPr>
-        <p:spPr>
-          <a:xfrm>
-            <a:off x="914400" y="850392"/>
-            <a:ext cx="16459200" cy="5943600"/>
-          </a:xfrm>
-          <a:prstGeom prst="rect">
-            <a:avLst/>
-          </a:prstGeom>
-          <a:noFill/>
-        </p:spPr>
-        <p:txBody>
-          <a:bodyPr wrap="square" lIns="109728" rIns="109728" tIns="73152" bIns="73152">
-            <a:noAutofit/>
-          </a:bodyPr>
-          <a:lstStyle/>
-          <a:p>
-            <a:pPr algn="ctr">
-              <a:spcAft>
-                <a:spcPts val="300"/>
-              </a:spcAft>
-              <a:defRPr sz="5500" b="1" i="0">
-                <a:solidFill>
-                  <a:srgbClr val="86EFAC"/>
-                </a:solidFill>
-                <a:latin typeface="Inter"/>
-              </a:defRPr>
-            </a:pPr>
-            <a:r>
-              <a:t>MASS CELEBRANT:</a:t>
-            </a:r>
-          </a:p>
-          <a:p>
-            <a:pPr algn="ctr">
-              <a:spcAft>
-                <a:spcPts val="300"/>
-              </a:spcAft>
-              <a:defRPr sz="5500" b="0" i="0">
-                <a:solidFill>
-                  <a:srgbClr val="F0FDF4"/>
-                </a:solidFill>
-                <a:latin typeface="Inter"/>
-              </a:defRPr>
-            </a:pPr>
-            <a:r>
-              <a:t>Rev. Fr. Jonrey Lauron, RCJ</a:t>
-            </a:r>
-          </a:p>
-          <a:p>
-            <a:pPr algn="ctr">
-              <a:spcAft>
-                <a:spcPts val="300"/>
-              </a:spcAft>
-              <a:defRPr sz="5500" b="0" i="0">
-                <a:solidFill>
-                  <a:srgbClr val="F0FDF4"/>
-                </a:solidFill>
-                <a:latin typeface="Inter"/>
-              </a:defRPr>
-            </a:pPr>
-          </a:p>
-          <a:p>
-            <a:pPr algn="ctr">
-              <a:spcAft>
-                <a:spcPts val="300"/>
-              </a:spcAft>
-              <a:defRPr sz="5500" b="0" i="0">
-                <a:solidFill>
-                  <a:srgbClr val="F0FDF4"/>
-                </a:solidFill>
-                <a:latin typeface="Inter"/>
-              </a:defRPr>
-            </a:pPr>
-            <a:r>
-              <a:t>Gospel (John 6:51-58)</a:t>
-            </a:r>
-          </a:p>
-          <a:p>
-            <a:pPr algn="ctr">
-              <a:spcAft>
-                <a:spcPts val="300"/>
-              </a:spcAft>
-              <a:defRPr sz="5500" b="0" i="0">
-                <a:solidFill>
-                  <a:srgbClr val="F0FDF4"/>
-                </a:solidFill>
-                <a:latin typeface="Inter"/>
-              </a:defRPr>
-            </a:pPr>
-            <a:r>
-              <a:t>“I am the living bread that came down from heaven; whoever eats this bread will live forever; and the bread that I will give is my flesh for the life of the world.”</a:t>
-            </a:r>
-          </a:p>
-          <a:p>
-            <a:pPr algn="ctr">
-              <a:spcAft>
-                <a:spcPts val="300"/>
-              </a:spcAft>
-              <a:defRPr sz="5500" b="0" i="0">
-                <a:solidFill>
-                  <a:srgbClr val="F0FDF4"/>
-                </a:solidFill>
-                <a:latin typeface="Inter"/>
-              </a:defRPr>
-            </a:pPr>
-          </a:p>
-          <a:p>
-            <a:pPr algn="ctr">
-              <a:spcAft>
-                <a:spcPts val="300"/>
-              </a:spcAft>
-              <a:defRPr sz="5500" b="0" i="0">
-                <a:solidFill>
-                  <a:srgbClr val="F0FDF4"/>
-                </a:solidFill>
-                <a:latin typeface="Inter"/>
-              </a:defRPr>
-            </a:pPr>
-            <a:r>
-              <a:t>YEAR A</a:t>
-            </a:r>
-          </a:p>
-          <a:p>
-            <a:pPr algn="ctr">
-              <a:spcAft>
-                <a:spcPts val="300"/>
-              </a:spcAft>
-              <a:defRPr sz="5500" b="0" i="0">
-                <a:solidFill>
-                  <a:srgbClr val="F0FDF4"/>
-                </a:solidFill>
-                <a:latin typeface="Inter"/>
-              </a:defRPr>
-            </a:pPr>
-            <a:r>
-              <a:t>2026-06-07 · Ordinary Time</a:t>
-            </a:r>
-          </a:p>
-        </p:txBody>
-      </p:sp>
-      <p:sp>
-        <p:nvSpPr>
-          <p:cNvPr id="4" name="TextBox 3"/>
-          <p:cNvSpPr txBox="1"/>
-          <p:nvPr/>
-        </p:nvSpPr>
-        <p:spPr>
-          <a:xfrm>
-            <a:off x="914400" y="9418320"/>
-            <a:ext cx="16459200" cy="777240"/>
-          </a:xfrm>
-          <a:prstGeom prst="rect">
-            <a:avLst/>
-          </a:prstGeom>
-          <a:noFill/>
-        </p:spPr>
-        <p:txBody>
-          <a:bodyPr wrap="square" lIns="109728" rIns="109728" tIns="73152" bIns="73152">
-            <a:noAutofit/>
-          </a:bodyPr>
-          <a:lstStyle/>
-          <a:p/>
-          <a:p>
-            <a:pPr algn="l">
-              <a:spcBef>
-                <a:spcPts val="200"/>
-              </a:spcBef>
-              <a:defRPr sz="1200" b="0" i="0">
-                <a:solidFill>
-                  <a:srgbClr val="86EFAC"/>
-                </a:solidFill>
-                <a:latin typeface="Inter"/>
-              </a:defRPr>
-            </a:pPr>
-            <a:r>
-              <a:t>Mass poster / divider</a:t>
             </a:r>
           </a:p>
         </p:txBody>

--- a/outputs/GFCC7Jun2026_OrdinaryTime.pptx
+++ b/outputs/GFCC7Jun2026_OrdinaryTime.pptx
@@ -92,8 +92,6 @@
     <p:sldId id="340" r:id="rId91"/>
     <p:sldId id="341" r:id="rId92"/>
     <p:sldId id="342" r:id="rId93"/>
-    <p:sldId id="343" r:id="rId94"/>
-    <p:sldId id="344" r:id="rId95"/>
   </p:sldIdLst>
   <p:sldSz cx="18288000" cy="10287000" type="screen4x3"/>
   <p:notesSz cx="6858000" cy="9144000"/>
@@ -5528,7 +5526,7 @@
               </a:defRPr>
             </a:pPr>
             <a:r>
-              <a:t>Rev. Fr. Jonrey Lauron, RCJ</a:t>
+              <a:t>Fr. Michael Hwang</a:t>
             </a:r>
           </a:p>
         </p:txBody>
@@ -6412,7 +6410,7 @@
               </a:defRPr>
             </a:pPr>
             <a:r>
-              <a:t>Rev. Fr. Jonrey Lauron, RCJ</a:t>
+              <a:t>Fr. Michael Hwang</a:t>
             </a:r>
           </a:p>
           <a:p>
@@ -8245,7 +8243,7 @@
               </a:defRPr>
             </a:pPr>
             <a:r>
-              <a:t>Rev. Fr. Jonrey Lauron, RCJ</a:t>
+              <a:t>Fr. Michael Hwang</a:t>
             </a:r>
           </a:p>
           <a:p>
@@ -8910,7 +8908,7 @@
               </a:defRPr>
             </a:pPr>
             <a:r>
-              <a:t>Rev. Fr. Jonrey Lauron, RCJ</a:t>
+              <a:t>Fr. Michael Hwang</a:t>
             </a:r>
           </a:p>
           <a:p>
@@ -11818,7 +11816,7 @@
               </a:defRPr>
             </a:pPr>
             <a:r>
-              <a:t>Rev. Fr. Jonrey Lauron, RCJ</a:t>
+              <a:t>Fr. Michael Hwang</a:t>
             </a:r>
           </a:p>
           <a:p>
@@ -12273,129 +12271,442 @@
       <p:grpSpPr/>
       <p:sp>
         <p:nvSpPr>
-          <p:cNvPr id="2" name="TextBox 1"/>
-          <p:cNvSpPr txBox="1"/>
-          <p:nvPr/>
-        </p:nvSpPr>
-        <p:spPr>
-          <a:xfrm>
-            <a:off x="914400" y="530352"/>
-            <a:ext cx="16459200" cy="8750808"/>
-          </a:xfrm>
-          <a:prstGeom prst="rect">
-            <a:avLst/>
-          </a:prstGeom>
-          <a:noFill/>
-        </p:spPr>
-        <p:txBody>
-          <a:bodyPr wrap="square" lIns="109728" rIns="109728" tIns="73152" bIns="73152" anchor="ctr">
-            <a:noAutofit/>
-          </a:bodyPr>
-          <a:lstStyle/>
-          <a:p>
-            <a:pPr algn="ctr">
+          <p:cNvPr name="TextBox 2" id="2"/>
+          <p:cNvSpPr txBox="true"/>
+          <p:nvPr/>
+        </p:nvSpPr>
+        <p:spPr>
+          <a:xfrm rot="0">
+            <a:off x="2245772" y="1447327"/>
+            <a:ext cx="14598201" cy="2576449"/>
+          </a:xfrm>
+          <a:prstGeom prst="rect">
+            <a:avLst/>
+          </a:prstGeom>
+        </p:spPr>
+        <p:txBody>
+          <a:bodyPr anchor="t" rtlCol="false" tIns="0" lIns="0" bIns="0" rIns="0">
+            <a:spAutoFit/>
+          </a:bodyPr>
+          <a:lstStyle/>
+          <a:p>
+            <a:pPr algn="l">
+              <a:lnSpc>
+                <a:spcPts val="6608"/>
+              </a:lnSpc>
+              <a:defRPr/>
+            </a:pPr>
+            <a:r>
+              <a:rPr lang="en-US" sz="5600" b="true">
+                <a:solidFill>
+                  <a:srgbClr val="FFFFFF"/>
+                </a:solidFill>
+                <a:latin typeface="Poppins Bold"/>
+                <a:ea typeface="Poppins Bold"/>
+                <a:cs typeface="Poppins Bold"/>
+                <a:sym typeface="Poppins Bold"/>
+              </a:rPr>
+              <a:t>LAMB OF GOD</a:t>
+            </a:r>
+          </a:p>
+          <a:p>
+            <a:pPr algn="l">
+              <a:lnSpc>
+                <a:spcPts val="6608"/>
+              </a:lnSpc>
+              <a:defRPr/>
+            </a:pPr>
+            <a:r>
+              <a:rPr lang="en-US" sz="5600" b="true">
+                <a:solidFill>
+                  <a:srgbClr val="FFFFFF"/>
+                </a:solidFill>
+                <a:latin typeface="Poppins Bold"/>
+                <a:ea typeface="Poppins Bold"/>
+                <a:cs typeface="Poppins Bold"/>
+                <a:sym typeface="Poppins Bold"/>
+              </a:rPr>
+              <a:t>YOU TAKE AWAY THE SINS OF THE WORLD</a:t>
+            </a:r>
+          </a:p>
+          <a:p>
+            <a:pPr algn="l" marL="0" indent="0" lvl="0">
+              <a:lnSpc>
+                <a:spcPts val="6608"/>
+              </a:lnSpc>
+              <a:defRPr/>
+            </a:pPr>
+            <a:r>
+              <a:rPr lang="en-US" b="true" sz="5600">
+                <a:solidFill>
+                  <a:srgbClr val="F8B300"/>
+                </a:solidFill>
+                <a:latin typeface="Poppins Bold"/>
+                <a:ea typeface="Poppins Bold"/>
+                <a:cs typeface="Poppins Bold"/>
+                <a:sym typeface="Poppins Bold"/>
+              </a:rPr>
+              <a:t>HAVE MERCY</a:t>
+            </a:r>
+            <a:r>
+              <a:rPr lang="en-US" b="true" sz="5600">
+                <a:solidFill>
+                  <a:srgbClr val="FFFFFF"/>
+                </a:solidFill>
+                <a:latin typeface="Poppins Bold"/>
+                <a:ea typeface="Poppins Bold"/>
+                <a:cs typeface="Poppins Bold"/>
+                <a:sym typeface="Poppins Bold"/>
+              </a:rPr>
+              <a:t>, </a:t>
+            </a:r>
+            <a:r>
+              <a:rPr lang="en-US" b="true" sz="5600">
+                <a:solidFill>
+                  <a:srgbClr val="F8B300"/>
+                </a:solidFill>
+                <a:latin typeface="Poppins Bold"/>
+                <a:ea typeface="Poppins Bold"/>
+                <a:cs typeface="Poppins Bold"/>
+                <a:sym typeface="Poppins Bold"/>
+              </a:rPr>
+              <a:t>H</a:t>
+            </a:r>
+            <a:r>
+              <a:rPr lang="en-US" b="true" sz="5600">
+                <a:solidFill>
+                  <a:srgbClr val="F8B300"/>
+                </a:solidFill>
+                <a:latin typeface="Poppins Bold"/>
+                <a:ea typeface="Poppins Bold"/>
+                <a:cs typeface="Poppins Bold"/>
+                <a:sym typeface="Poppins Bold"/>
+              </a:rPr>
+              <a:t>AVE MERCY ON US</a:t>
+            </a:r>
+            <a:r>
+              <a:rPr lang="en-US" b="true" sz="5600">
+                <a:solidFill>
+                  <a:srgbClr val="FFFFFF"/>
+                </a:solidFill>
+                <a:latin typeface="Poppins Bold"/>
+                <a:ea typeface="Poppins Bold"/>
+                <a:cs typeface="Poppins Bold"/>
+                <a:sym typeface="Poppins Bold"/>
+              </a:rPr>
+              <a:t>.</a:t>
+            </a:r>
+          </a:p>
+        </p:txBody>
+      </p:sp>
+      <p:sp>
+        <p:nvSpPr>
+          <p:cNvPr name="TextBox 3" id="3"/>
+          <p:cNvSpPr txBox="true"/>
+          <p:nvPr/>
+        </p:nvSpPr>
+        <p:spPr>
+          <a:xfrm rot="0">
+            <a:off x="2245772" y="7118506"/>
+            <a:ext cx="14757999" cy="2576449"/>
+          </a:xfrm>
+          <a:prstGeom prst="rect">
+            <a:avLst/>
+          </a:prstGeom>
+        </p:spPr>
+        <p:txBody>
+          <a:bodyPr anchor="t" rtlCol="false" tIns="0" lIns="0" bIns="0" rIns="0">
+            <a:spAutoFit/>
+          </a:bodyPr>
+          <a:lstStyle/>
+          <a:p>
+            <a:pPr algn="l">
+              <a:lnSpc>
+                <a:spcPts val="6608"/>
+              </a:lnSpc>
+              <a:defRPr/>
+            </a:pPr>
+            <a:r>
+              <a:rPr lang="en-US" sz="5600" b="true">
+                <a:solidFill>
+                  <a:srgbClr val="FFFFFF"/>
+                </a:solidFill>
+                <a:latin typeface="Poppins Bold"/>
+                <a:ea typeface="Poppins Bold"/>
+                <a:cs typeface="Poppins Bold"/>
+                <a:sym typeface="Poppins Bold"/>
+              </a:rPr>
+              <a:t>LAMB OF GOD</a:t>
+            </a:r>
+          </a:p>
+          <a:p>
+            <a:pPr algn="l">
+              <a:lnSpc>
+                <a:spcPts val="6608"/>
+              </a:lnSpc>
+              <a:defRPr/>
+            </a:pPr>
+            <a:r>
+              <a:rPr lang="en-US" sz="5600" b="true">
+                <a:solidFill>
+                  <a:srgbClr val="FFFFFF"/>
+                </a:solidFill>
+                <a:latin typeface="Poppins Bold"/>
+                <a:ea typeface="Poppins Bold"/>
+                <a:cs typeface="Poppins Bold"/>
+                <a:sym typeface="Poppins Bold"/>
+              </a:rPr>
+              <a:t>YOU TAKE AWAY THE SINS OF THE WORLD,</a:t>
+            </a:r>
+          </a:p>
+          <a:p>
+            <a:pPr algn="l" marL="0" indent="0" lvl="0">
+              <a:lnSpc>
+                <a:spcPts val="6608"/>
+              </a:lnSpc>
+              <a:defRPr/>
+            </a:pPr>
+            <a:r>
+              <a:rPr lang="en-US" b="true" sz="5600">
+                <a:solidFill>
+                  <a:srgbClr val="F8B300"/>
+                </a:solidFill>
+                <a:latin typeface="Poppins Bold"/>
+                <a:ea typeface="Poppins Bold"/>
+                <a:cs typeface="Poppins Bold"/>
+                <a:sym typeface="Poppins Bold"/>
+              </a:rPr>
+              <a:t>GRANT US PEACE</a:t>
+            </a:r>
+            <a:r>
+              <a:rPr lang="en-US" b="true" sz="5600">
+                <a:solidFill>
+                  <a:srgbClr val="FFFFFF"/>
+                </a:solidFill>
+                <a:latin typeface="Poppins Bold"/>
+                <a:ea typeface="Poppins Bold"/>
+                <a:cs typeface="Poppins Bold"/>
+                <a:sym typeface="Poppins Bold"/>
+              </a:rPr>
+              <a:t>, </a:t>
+            </a:r>
+            <a:r>
+              <a:rPr lang="en-US" b="true" sz="5600">
+                <a:solidFill>
+                  <a:srgbClr val="F8B300"/>
+                </a:solidFill>
+                <a:latin typeface="Poppins Bold"/>
+                <a:ea typeface="Poppins Bold"/>
+                <a:cs typeface="Poppins Bold"/>
+                <a:sym typeface="Poppins Bold"/>
+              </a:rPr>
+              <a:t>GR</a:t>
+            </a:r>
+            <a:r>
+              <a:rPr lang="en-US" b="true" sz="5600">
+                <a:solidFill>
+                  <a:srgbClr val="F8B300"/>
+                </a:solidFill>
+                <a:latin typeface="Poppins Bold"/>
+                <a:ea typeface="Poppins Bold"/>
+                <a:cs typeface="Poppins Bold"/>
+                <a:sym typeface="Poppins Bold"/>
+              </a:rPr>
+              <a:t>ANT US PEACE</a:t>
+            </a:r>
+            <a:r>
+              <a:rPr lang="en-US" b="true" sz="5600">
+                <a:solidFill>
+                  <a:srgbClr val="FFFFFF"/>
+                </a:solidFill>
+                <a:latin typeface="Poppins Bold"/>
+                <a:ea typeface="Poppins Bold"/>
+                <a:cs typeface="Poppins Bold"/>
+                <a:sym typeface="Poppins Bold"/>
+              </a:rPr>
+              <a:t>.</a:t>
+            </a:r>
+          </a:p>
+        </p:txBody>
+      </p:sp>
+      <p:sp>
+        <p:nvSpPr>
+          <p:cNvPr name="TextBox 4" id="4"/>
+          <p:cNvSpPr txBox="true"/>
+          <p:nvPr/>
+        </p:nvSpPr>
+        <p:spPr>
+          <a:xfrm rot="0">
+            <a:off x="2245772" y="4284882"/>
+            <a:ext cx="14598201" cy="2576449"/>
+          </a:xfrm>
+          <a:prstGeom prst="rect">
+            <a:avLst/>
+          </a:prstGeom>
+        </p:spPr>
+        <p:txBody>
+          <a:bodyPr anchor="t" rtlCol="false" tIns="0" lIns="0" bIns="0" rIns="0">
+            <a:spAutoFit/>
+          </a:bodyPr>
+          <a:lstStyle/>
+          <a:p>
+            <a:pPr algn="l">
+              <a:lnSpc>
+                <a:spcPts val="6608"/>
+              </a:lnSpc>
+              <a:defRPr/>
+            </a:pPr>
+            <a:r>
+              <a:rPr lang="en-US" sz="5600" b="true">
+                <a:solidFill>
+                  <a:srgbClr val="FFFFFF"/>
+                </a:solidFill>
+                <a:latin typeface="Poppins Bold"/>
+                <a:ea typeface="Poppins Bold"/>
+                <a:cs typeface="Poppins Bold"/>
+                <a:sym typeface="Poppins Bold"/>
+              </a:rPr>
+              <a:t>LAMB OF GOD</a:t>
+            </a:r>
+          </a:p>
+          <a:p>
+            <a:pPr algn="l">
+              <a:lnSpc>
+                <a:spcPts val="6608"/>
+              </a:lnSpc>
+              <a:defRPr/>
+            </a:pPr>
+            <a:r>
+              <a:rPr lang="en-US" sz="5600" b="true">
+                <a:solidFill>
+                  <a:srgbClr val="FFFFFF"/>
+                </a:solidFill>
+                <a:latin typeface="Poppins Bold"/>
+                <a:ea typeface="Poppins Bold"/>
+                <a:cs typeface="Poppins Bold"/>
+                <a:sym typeface="Poppins Bold"/>
+              </a:rPr>
+              <a:t>YOU TAKE AWAY THE SINS OF THE WORLD</a:t>
+            </a:r>
+          </a:p>
+          <a:p>
+            <a:pPr algn="l" marL="0" indent="0" lvl="0">
+              <a:lnSpc>
+                <a:spcPts val="6608"/>
+              </a:lnSpc>
+              <a:defRPr/>
+            </a:pPr>
+            <a:r>
+              <a:rPr lang="en-US" b="true" sz="5600">
+                <a:solidFill>
+                  <a:srgbClr val="F8B300"/>
+                </a:solidFill>
+                <a:latin typeface="Poppins Bold"/>
+                <a:ea typeface="Poppins Bold"/>
+                <a:cs typeface="Poppins Bold"/>
+                <a:sym typeface="Poppins Bold"/>
+              </a:rPr>
+              <a:t>HAVE MERCY</a:t>
+            </a:r>
+            <a:r>
+              <a:rPr lang="en-US" b="true" sz="5600">
+                <a:solidFill>
+                  <a:srgbClr val="FFFFFF"/>
+                </a:solidFill>
+                <a:latin typeface="Poppins Bold"/>
+                <a:ea typeface="Poppins Bold"/>
+                <a:cs typeface="Poppins Bold"/>
+                <a:sym typeface="Poppins Bold"/>
+              </a:rPr>
+              <a:t>, </a:t>
+            </a:r>
+            <a:r>
+              <a:rPr lang="en-US" b="true" sz="5600">
+                <a:solidFill>
+                  <a:srgbClr val="F8B300"/>
+                </a:solidFill>
+                <a:latin typeface="Poppins Bold"/>
+                <a:ea typeface="Poppins Bold"/>
+                <a:cs typeface="Poppins Bold"/>
+                <a:sym typeface="Poppins Bold"/>
+              </a:rPr>
+              <a:t>H</a:t>
+            </a:r>
+            <a:r>
+              <a:rPr lang="en-US" b="true" sz="5600">
+                <a:solidFill>
+                  <a:srgbClr val="F8B300"/>
+                </a:solidFill>
+                <a:latin typeface="Poppins Bold"/>
+                <a:ea typeface="Poppins Bold"/>
+                <a:cs typeface="Poppins Bold"/>
+                <a:sym typeface="Poppins Bold"/>
+              </a:rPr>
+              <a:t>AVE MERCY ON US</a:t>
+            </a:r>
+            <a:r>
+              <a:rPr lang="en-US" b="true" sz="5600">
+                <a:solidFill>
+                  <a:srgbClr val="FFFFFF"/>
+                </a:solidFill>
+                <a:latin typeface="Poppins Bold"/>
+                <a:ea typeface="Poppins Bold"/>
+                <a:cs typeface="Poppins Bold"/>
+                <a:sym typeface="Poppins Bold"/>
+              </a:rPr>
+              <a:t>.</a:t>
+            </a:r>
+          </a:p>
+        </p:txBody>
+      </p:sp>
+      <p:sp>
+        <p:nvSpPr>
+          <p:cNvPr name="TextBox 5" id="5"/>
+          <p:cNvSpPr txBox="true"/>
+          <p:nvPr/>
+        </p:nvSpPr>
+        <p:spPr>
+          <a:xfrm rot="0">
+            <a:off x="1646296" y="226228"/>
+            <a:ext cx="14995409" cy="1055243"/>
+          </a:xfrm>
+          <a:prstGeom prst="rect">
+            <a:avLst/>
+          </a:prstGeom>
+        </p:spPr>
+        <p:txBody>
+          <a:bodyPr anchor="t" rtlCol="false" tIns="0" lIns="0" bIns="0" rIns="0">
+            <a:spAutoFit/>
+          </a:bodyPr>
+          <a:lstStyle/>
+          <a:p>
+            <a:pPr algn="ctr" marL="0" indent="0" lvl="0">
+              <a:lnSpc>
+                <a:spcPts val="8175"/>
+              </a:lnSpc>
               <a:spcBef>
-                <a:spcPts val="400"/>
+                <a:spcPct val="0"/>
               </a:spcBef>
-              <a:spcAft>
-                <a:spcPts val="800"/>
-              </a:spcAft>
-              <a:defRPr sz="5500" b="1" i="0">
-                <a:solidFill>
-                  <a:srgbClr val="F0FDF4"/>
-                </a:solidFill>
-                <a:latin typeface="Inter"/>
-              </a:defRPr>
-            </a:pPr>
-            <a:r>
-              <a:t>Lamb of God,</a:t>
-            </a:r>
-          </a:p>
-          <a:p>
-            <a:pPr algn="ctr">
-              <a:spcAft>
-                <a:spcPts val="800"/>
-              </a:spcAft>
-              <a:defRPr sz="5500" b="0" i="0">
-                <a:solidFill>
-                  <a:srgbClr val="F0FDF4"/>
-                </a:solidFill>
-                <a:latin typeface="Inter"/>
-              </a:defRPr>
-            </a:pPr>
-            <a:r>
-              <a:t>you take away the sins of the world,</a:t>
-            </a:r>
-          </a:p>
-          <a:p>
-            <a:pPr algn="ctr">
-              <a:spcAft>
-                <a:spcPts val="800"/>
-              </a:spcAft>
-              <a:defRPr sz="5500" b="0" i="0">
-                <a:solidFill>
-                  <a:srgbClr val="F0FDF4"/>
-                </a:solidFill>
-                <a:latin typeface="Inter"/>
-              </a:defRPr>
-            </a:pPr>
-            <a:r>
-              <a:t>have mercy on us.</a:t>
-            </a:r>
-          </a:p>
-          <a:p>
-            <a:pPr algn="ctr">
-              <a:spcAft>
-                <a:spcPts val="800"/>
-              </a:spcAft>
-              <a:defRPr sz="5500" b="0" i="0">
-                <a:solidFill>
-                  <a:srgbClr val="F0FDF4"/>
-                </a:solidFill>
-                <a:latin typeface="Inter"/>
-              </a:defRPr>
-            </a:pPr>
-            <a:r>
-              <a:t>Lamb of God,</a:t>
-            </a:r>
-          </a:p>
-          <a:p>
-            <a:pPr algn="ctr">
-              <a:spcAft>
-                <a:spcPts val="800"/>
-              </a:spcAft>
-              <a:defRPr sz="5500" b="0" i="0">
-                <a:solidFill>
-                  <a:srgbClr val="F0FDF4"/>
-                </a:solidFill>
-                <a:latin typeface="Inter"/>
-              </a:defRPr>
-            </a:pPr>
-            <a:r>
-              <a:t>you take away the sins of the world,</a:t>
-            </a:r>
-          </a:p>
-          <a:p>
-            <a:pPr algn="ctr">
-              <a:spcAft>
-                <a:spcPts val="800"/>
-              </a:spcAft>
-              <a:defRPr sz="5500" b="0" i="0">
-                <a:solidFill>
-                  <a:srgbClr val="F0FDF4"/>
-                </a:solidFill>
-                <a:latin typeface="Inter"/>
-              </a:defRPr>
-            </a:pPr>
-            <a:r>
-              <a:t>have mercy on us.</a:t>
-            </a:r>
-          </a:p>
-        </p:txBody>
-      </p:sp>
-      <p:sp>
-        <p:nvSpPr>
-          <p:cNvPr id="3" name="TextBox 2"/>
+              <a:defRPr/>
+            </a:pPr>
+            <a:r>
+              <a:rPr lang="en-US" sz="7299">
+                <a:solidFill>
+                  <a:srgbClr val="FFB800"/>
+                </a:solidFill>
+                <a:latin typeface="Recoleta"/>
+                <a:ea typeface="Recoleta"/>
+                <a:cs typeface="Recoleta"/>
+                <a:sym typeface="Recoleta"/>
+              </a:rPr>
+              <a:t>Lamb of God</a:t>
+            </a:r>
+          </a:p>
+        </p:txBody>
+      </p:sp>
+      <p:sp>
+        <p:nvSpPr>
+          <p:cNvPr id="6" name="TextBox 5"/>
           <p:cNvSpPr txBox="1"/>
           <p:nvPr/>
         </p:nvSpPr>
@@ -12428,7 +12739,7 @@
               </a:defRPr>
             </a:pPr>
             <a:r>
-              <a:t>Lamb of God (1/2)</a:t>
+              <a:t>Lamb of God</a:t>
             </a:r>
           </a:p>
         </p:txBody>
@@ -12476,16 +12787,38 @@
           <a:noFill/>
         </p:spPr>
         <p:txBody>
-          <a:bodyPr wrap="square" lIns="109728" rIns="109728" tIns="73152" bIns="73152" anchor="ctr">
-            <a:noAutofit/>
-          </a:bodyPr>
-          <a:lstStyle/>
-          <a:p>
-            <a:pPr algn="ctr">
-              <a:spcAft>
-                <a:spcPts val="800"/>
-              </a:spcAft>
-              <a:defRPr sz="5500" b="0" i="0">
+          <a:bodyPr wrap="square" lIns="109728" rIns="109728" tIns="73152" bIns="73152">
+            <a:noAutofit/>
+          </a:bodyPr>
+          <a:lstStyle/>
+          <a:p>
+            <a:pPr algn="ctr">
+              <a:spcBef>
+                <a:spcPts val="400"/>
+              </a:spcBef>
+              <a:spcAft>
+                <a:spcPts val="500"/>
+              </a:spcAft>
+              <a:defRPr sz="5500" b="1" i="0">
+                <a:solidFill>
+                  <a:srgbClr val="86EFAC"/>
+                </a:solidFill>
+                <a:latin typeface="Inter"/>
+              </a:defRPr>
+            </a:pPr>
+            <a:r>
+              <a:t>Priest: Behold the Lamb of God, behold him who takes away the sins of the world. Blessed are those called to the supper of the Lamb.</a:t>
+            </a:r>
+          </a:p>
+          <a:p>
+            <a:pPr algn="ctr">
+              <a:spcBef>
+                <a:spcPts val="400"/>
+              </a:spcBef>
+              <a:spcAft>
+                <a:spcPts val="500"/>
+              </a:spcAft>
+              <a:defRPr sz="5500" b="1" i="0">
                 <a:solidFill>
                   <a:srgbClr val="F0FDF4"/>
                 </a:solidFill>
@@ -12493,39 +12826,7 @@
               </a:defRPr>
             </a:pPr>
             <a:r>
-              <a:t>Lamb of God,</a:t>
-            </a:r>
-          </a:p>
-          <a:p>
-            <a:pPr algn="ctr">
-              <a:spcAft>
-                <a:spcPts val="800"/>
-              </a:spcAft>
-              <a:defRPr sz="5500" b="0" i="0">
-                <a:solidFill>
-                  <a:srgbClr val="F0FDF4"/>
-                </a:solidFill>
-                <a:latin typeface="Inter"/>
-              </a:defRPr>
-            </a:pPr>
-            <a:r>
-              <a:t>you take away the sins of the world,</a:t>
-            </a:r>
-          </a:p>
-          <a:p>
-            <a:pPr algn="ctr">
-              <a:spcAft>
-                <a:spcPts val="800"/>
-              </a:spcAft>
-              <a:defRPr sz="5500" b="0" i="0">
-                <a:solidFill>
-                  <a:srgbClr val="F0FDF4"/>
-                </a:solidFill>
-                <a:latin typeface="Inter"/>
-              </a:defRPr>
-            </a:pPr>
-            <a:r>
-              <a:t>grant us peace.</a:t>
+              <a:t>All: Lord, I am not worthy that you should enter under my roof, but only say the word and my soul shall be healed.</a:t>
             </a:r>
           </a:p>
         </p:txBody>
@@ -12565,7 +12866,7 @@
               </a:defRPr>
             </a:pPr>
             <a:r>
-              <a:t>Lamb of God (2/2)</a:t>
+              <a:t>The Communion Rite</a:t>
             </a:r>
           </a:p>
         </p:txBody>
@@ -12579,133 +12880,6 @@
 </file>
 
 <file path=ppt/slides/slide63.xml><?xml version="1.0" encoding="utf-8"?>
-<p:sld xmlns:a="http://schemas.openxmlformats.org/drawingml/2006/main" xmlns:p="http://schemas.openxmlformats.org/presentationml/2006/main" xmlns:r="http://schemas.openxmlformats.org/officeDocument/2006/relationships">
-  <p:cSld>
-    <p:bg>
-      <p:bgPr>
-        <a:solidFill>
-          <a:srgbClr val="10251C"/>
-        </a:solidFill>
-        <a:effectLst/>
-      </p:bgPr>
-    </p:bg>
-    <p:spTree>
-      <p:nvGrpSpPr>
-        <p:cNvPr id="1" name=""/>
-        <p:cNvGrpSpPr/>
-        <p:nvPr/>
-      </p:nvGrpSpPr>
-      <p:grpSpPr/>
-      <p:sp>
-        <p:nvSpPr>
-          <p:cNvPr id="2" name="TextBox 1"/>
-          <p:cNvSpPr txBox="1"/>
-          <p:nvPr/>
-        </p:nvSpPr>
-        <p:spPr>
-          <a:xfrm>
-            <a:off x="914400" y="530352"/>
-            <a:ext cx="16459200" cy="8750808"/>
-          </a:xfrm>
-          <a:prstGeom prst="rect">
-            <a:avLst/>
-          </a:prstGeom>
-          <a:noFill/>
-        </p:spPr>
-        <p:txBody>
-          <a:bodyPr wrap="square" lIns="109728" rIns="109728" tIns="73152" bIns="73152">
-            <a:noAutofit/>
-          </a:bodyPr>
-          <a:lstStyle/>
-          <a:p>
-            <a:pPr algn="ctr">
-              <a:spcBef>
-                <a:spcPts val="400"/>
-              </a:spcBef>
-              <a:spcAft>
-                <a:spcPts val="500"/>
-              </a:spcAft>
-              <a:defRPr sz="5500" b="1" i="0">
-                <a:solidFill>
-                  <a:srgbClr val="86EFAC"/>
-                </a:solidFill>
-                <a:latin typeface="Inter"/>
-              </a:defRPr>
-            </a:pPr>
-            <a:r>
-              <a:t>Priest: Behold the Lamb of God, behold him who takes away the sins of the world. Blessed are those called to the supper of the Lamb.</a:t>
-            </a:r>
-          </a:p>
-          <a:p>
-            <a:pPr algn="ctr">
-              <a:spcBef>
-                <a:spcPts val="400"/>
-              </a:spcBef>
-              <a:spcAft>
-                <a:spcPts val="500"/>
-              </a:spcAft>
-              <a:defRPr sz="5500" b="1" i="0">
-                <a:solidFill>
-                  <a:srgbClr val="F0FDF4"/>
-                </a:solidFill>
-                <a:latin typeface="Inter"/>
-              </a:defRPr>
-            </a:pPr>
-            <a:r>
-              <a:t>All: Lord, I am not worthy that you should enter under my roof, but only say the word and my soul shall be healed.</a:t>
-            </a:r>
-          </a:p>
-        </p:txBody>
-      </p:sp>
-      <p:sp>
-        <p:nvSpPr>
-          <p:cNvPr id="3" name="TextBox 2"/>
-          <p:cNvSpPr txBox="1"/>
-          <p:nvPr/>
-        </p:nvSpPr>
-        <p:spPr>
-          <a:xfrm>
-            <a:off x="914400" y="9418320"/>
-            <a:ext cx="16459200" cy="777240"/>
-          </a:xfrm>
-          <a:prstGeom prst="rect">
-            <a:avLst/>
-          </a:prstGeom>
-          <a:noFill/>
-        </p:spPr>
-        <p:txBody>
-          <a:bodyPr wrap="square" lIns="109728" rIns="109728" tIns="73152" bIns="73152">
-            <a:noAutofit/>
-          </a:bodyPr>
-          <a:lstStyle/>
-          <a:p/>
-          <a:p>
-            <a:pPr algn="l">
-              <a:spcBef>
-                <a:spcPts val="200"/>
-              </a:spcBef>
-              <a:defRPr sz="1200" b="0" i="0">
-                <a:solidFill>
-                  <a:srgbClr val="86EFAC"/>
-                </a:solidFill>
-                <a:latin typeface="Inter"/>
-              </a:defRPr>
-            </a:pPr>
-            <a:r>
-              <a:t>The Communion Rite</a:t>
-            </a:r>
-          </a:p>
-        </p:txBody>
-      </p:sp>
-    </p:spTree>
-  </p:cSld>
-  <p:clrMapOvr>
-    <a:masterClrMapping/>
-  </p:clrMapOvr>
-</p:sld>
-</file>
-
-<file path=ppt/slides/slide64.xml><?xml version="1.0" encoding="utf-8"?>
 <p:sld xmlns:a="http://schemas.openxmlformats.org/drawingml/2006/main" xmlns:p="http://schemas.openxmlformats.org/presentationml/2006/main" xmlns:r="http://schemas.openxmlformats.org/officeDocument/2006/relationships">
   <p:cSld>
     <p:spTree>
@@ -12789,7 +12963,7 @@
               </a:defRPr>
             </a:pPr>
             <a:r>
-              <a:t>Rev. Fr. Jonrey Lauron, RCJ</a:t>
+              <a:t>Fr. Michael Hwang</a:t>
             </a:r>
           </a:p>
           <a:p>
@@ -12920,6 +13094,207 @@
             </a:pPr>
             <a:r>
               <a:t>Mass poster / divider</a:t>
+            </a:r>
+          </a:p>
+        </p:txBody>
+      </p:sp>
+    </p:spTree>
+  </p:cSld>
+  <p:clrMapOvr>
+    <a:masterClrMapping/>
+  </p:clrMapOvr>
+</p:sld>
+</file>
+
+<file path=ppt/slides/slide64.xml><?xml version="1.0" encoding="utf-8"?>
+<p:sld xmlns:a="http://schemas.openxmlformats.org/drawingml/2006/main" xmlns:p="http://schemas.openxmlformats.org/presentationml/2006/main" xmlns:r="http://schemas.openxmlformats.org/officeDocument/2006/relationships">
+  <p:cSld>
+    <p:bg>
+      <p:bgPr>
+        <a:solidFill>
+          <a:srgbClr val="000000"/>
+        </a:solidFill>
+        <a:effectLst/>
+      </p:bgPr>
+    </p:bg>
+    <p:spTree>
+      <p:nvGrpSpPr>
+        <p:cNvPr id="1" name=""/>
+        <p:cNvGrpSpPr/>
+        <p:nvPr/>
+      </p:nvGrpSpPr>
+      <p:grpSpPr/>
+      <p:sp>
+        <p:nvSpPr>
+          <p:cNvPr id="2" name="TextBox 1"/>
+          <p:cNvSpPr txBox="1"/>
+          <p:nvPr/>
+        </p:nvSpPr>
+        <p:spPr>
+          <a:xfrm>
+            <a:off x="914400" y="109728"/>
+            <a:ext cx="16459200" cy="868680"/>
+          </a:xfrm>
+          <a:prstGeom prst="rect">
+            <a:avLst/>
+          </a:prstGeom>
+          <a:noFill/>
+        </p:spPr>
+        <p:txBody>
+          <a:bodyPr wrap="square" lIns="109728" rIns="109728" tIns="73152" bIns="73152">
+            <a:noAutofit/>
+          </a:bodyPr>
+          <a:lstStyle/>
+          <a:p>
+            <a:pPr algn="ctr">
+              <a:defRPr sz="3850" b="1" i="0">
+                <a:solidFill>
+                  <a:srgbClr val="FFCC4D"/>
+                </a:solidFill>
+                <a:latin typeface="Georgia"/>
+              </a:defRPr>
+            </a:pPr>
+            <a:r>
+              <a:t>Manalig Ka</a:t>
+            </a:r>
+          </a:p>
+        </p:txBody>
+      </p:sp>
+      <p:sp>
+        <p:nvSpPr>
+          <p:cNvPr id="3" name="TextBox 2"/>
+          <p:cNvSpPr txBox="1"/>
+          <p:nvPr/>
+        </p:nvSpPr>
+        <p:spPr>
+          <a:xfrm>
+            <a:off x="0" y="1069848"/>
+            <a:ext cx="18288000" cy="8348472"/>
+          </a:xfrm>
+          <a:prstGeom prst="rect">
+            <a:avLst/>
+          </a:prstGeom>
+          <a:noFill/>
+        </p:spPr>
+        <p:txBody>
+          <a:bodyPr wrap="square" lIns="0" rIns="0" tIns="73152" bIns="73152" anchor="ctr">
+            <a:noAutofit/>
+          </a:bodyPr>
+          <a:lstStyle/>
+          <a:p>
+            <a:pPr algn="ctr">
+              <a:lnSpc>
+                <a:spcPct val="100000"/>
+              </a:lnSpc>
+              <a:spcAft>
+                <a:spcPts val="600"/>
+              </a:spcAft>
+              <a:defRPr sz="5500" b="1" i="0">
+                <a:solidFill>
+                  <a:srgbClr val="FFFFFF"/>
+                </a:solidFill>
+                <a:latin typeface="Arial Black"/>
+              </a:defRPr>
+            </a:pPr>
+            <a:r>
+              <a:t>ILUOM LAHAT NG TAKOT SA IYONG DAMDAMIN</a:t>
+            </a:r>
+          </a:p>
+          <a:p>
+            <a:pPr algn="ctr">
+              <a:lnSpc>
+                <a:spcPct val="100000"/>
+              </a:lnSpc>
+              <a:spcAft>
+                <a:spcPts val="600"/>
+              </a:spcAft>
+              <a:defRPr sz="5500" b="1" i="0">
+                <a:solidFill>
+                  <a:srgbClr val="FFFFFF"/>
+                </a:solidFill>
+                <a:latin typeface="Arial Black"/>
+              </a:defRPr>
+            </a:pPr>
+            <a:r>
+              <a:t>ANG PANGALAN N'YA LAGI ANG TAWAGIN</a:t>
+            </a:r>
+          </a:p>
+          <a:p>
+            <a:pPr algn="ctr">
+              <a:lnSpc>
+                <a:spcPct val="100000"/>
+              </a:lnSpc>
+              <a:spcAft>
+                <a:spcPts val="600"/>
+              </a:spcAft>
+              <a:defRPr sz="5500" b="1" i="0">
+                <a:solidFill>
+                  <a:srgbClr val="FFFFFF"/>
+                </a:solidFill>
+                <a:latin typeface="Arial Black"/>
+              </a:defRPr>
+            </a:pPr>
+            <a:r>
+              <a:t>AT SIYA'Y NAKIKINIG</a:t>
+            </a:r>
+          </a:p>
+          <a:p>
+            <a:pPr algn="ctr">
+              <a:lnSpc>
+                <a:spcPct val="100000"/>
+              </a:lnSpc>
+              <a:spcAft>
+                <a:spcPts val="600"/>
+              </a:spcAft>
+              <a:defRPr sz="5500" b="1" i="0">
+                <a:solidFill>
+                  <a:srgbClr val="FFFFFF"/>
+                </a:solidFill>
+                <a:latin typeface="Arial Black"/>
+              </a:defRPr>
+            </a:pPr>
+            <a:r>
+              <a:t>SA BAWAT HINAING</a:t>
+            </a:r>
+          </a:p>
+        </p:txBody>
+      </p:sp>
+      <p:sp>
+        <p:nvSpPr>
+          <p:cNvPr id="4" name="TextBox 3"/>
+          <p:cNvSpPr txBox="1"/>
+          <p:nvPr/>
+        </p:nvSpPr>
+        <p:spPr>
+          <a:xfrm>
+            <a:off x="914400" y="9418320"/>
+            <a:ext cx="16459200" cy="777240"/>
+          </a:xfrm>
+          <a:prstGeom prst="rect">
+            <a:avLst/>
+          </a:prstGeom>
+          <a:noFill/>
+        </p:spPr>
+        <p:txBody>
+          <a:bodyPr wrap="square" lIns="109728" rIns="109728" tIns="73152" bIns="73152">
+            <a:noAutofit/>
+          </a:bodyPr>
+          <a:lstStyle/>
+          <a:p/>
+          <a:p>
+            <a:pPr>
+              <a:spcBef>
+                <a:spcPts val="200"/>
+              </a:spcBef>
+              <a:defRPr sz="1200" b="0" i="0">
+                <a:solidFill>
+                  <a:srgbClr val="FFCC4D"/>
+                </a:solidFill>
+                <a:latin typeface="Inter"/>
+              </a:defRPr>
+            </a:pPr>
+            <a:r>
+              <a:t>Communion (1)</a:t>
             </a:r>
           </a:p>
         </p:txBody>
@@ -12958,52 +13333,16 @@
         </p:nvSpPr>
         <p:spPr>
           <a:xfrm>
-            <a:off x="914400" y="109728"/>
-            <a:ext cx="16459200" cy="868680"/>
-          </a:xfrm>
-          <a:prstGeom prst="rect">
-            <a:avLst/>
-          </a:prstGeom>
-          <a:noFill/>
-        </p:spPr>
-        <p:txBody>
-          <a:bodyPr wrap="square" lIns="109728" rIns="109728" tIns="73152" bIns="73152">
-            <a:noAutofit/>
-          </a:bodyPr>
-          <a:lstStyle/>
-          <a:p>
-            <a:pPr algn="ctr">
-              <a:defRPr sz="3850" b="1" i="0">
-                <a:solidFill>
-                  <a:srgbClr val="FFCC4D"/>
-                </a:solidFill>
-                <a:latin typeface="Georgia"/>
-              </a:defRPr>
-            </a:pPr>
-            <a:r>
-              <a:t>Manalig Ka</a:t>
-            </a:r>
-          </a:p>
-        </p:txBody>
-      </p:sp>
-      <p:sp>
-        <p:nvSpPr>
-          <p:cNvPr id="3" name="TextBox 2"/>
-          <p:cNvSpPr txBox="1"/>
-          <p:nvPr/>
-        </p:nvSpPr>
-        <p:spPr>
-          <a:xfrm>
-            <a:off x="0" y="1069848"/>
-            <a:ext cx="18288000" cy="8348472"/>
-          </a:xfrm>
-          <a:prstGeom prst="rect">
-            <a:avLst/>
-          </a:prstGeom>
-          <a:noFill/>
-        </p:spPr>
-        <p:txBody>
-          <a:bodyPr wrap="square" lIns="0" rIns="0" tIns="73152" bIns="73152" anchor="ctr">
+            <a:off x="0" y="0"/>
+            <a:ext cx="18288000" cy="10287000"/>
+          </a:xfrm>
+          <a:prstGeom prst="rect">
+            <a:avLst/>
+          </a:prstGeom>
+          <a:noFill/>
+        </p:spPr>
+        <p:txBody>
+          <a:bodyPr wrap="square" lIns="0" rIns="0" tIns="0" bIns="0" anchor="ctr">
             <a:noAutofit/>
           </a:bodyPr>
           <a:lstStyle/>
@@ -13023,7 +13362,7 @@
               </a:defRPr>
             </a:pPr>
             <a:r>
-              <a:t>ILUOM LAHAT NG TAKOT SA IYONG DAMDAMIN</a:t>
+              <a:t>MAGMASID</a:t>
             </a:r>
           </a:p>
           <a:p>
@@ -13042,7 +13381,7 @@
               </a:defRPr>
             </a:pPr>
             <a:r>
-              <a:t>ANG PANGALAN N'YA LAGI ANG TAWAGIN</a:t>
+              <a:t>AT MAMULAT SA KANYANG KAPANGYARIHAN</a:t>
             </a:r>
           </a:p>
           <a:p>
@@ -13061,7 +13400,7 @@
               </a:defRPr>
             </a:pPr>
             <a:r>
-              <a:t>AT SIYA'Y NAKIKINIG</a:t>
+              <a:t>NABATID MO BA NA SIYA'Y NAGLALAAN</a:t>
             </a:r>
           </a:p>
           <a:p>
@@ -13080,14 +13419,14 @@
               </a:defRPr>
             </a:pPr>
             <a:r>
-              <a:t>SA BAWAT HINAING</a:t>
-            </a:r>
-          </a:p>
-        </p:txBody>
-      </p:sp>
-      <p:sp>
-        <p:nvSpPr>
-          <p:cNvPr id="4" name="TextBox 3"/>
+              <a:t>PATULOY NA NAGHAHATID NG TUNAY NA KALAYAAN</a:t>
+            </a:r>
+          </a:p>
+        </p:txBody>
+      </p:sp>
+      <p:sp>
+        <p:nvSpPr>
+          <p:cNvPr id="3" name="TextBox 2"/>
           <p:cNvSpPr txBox="1"/>
           <p:nvPr/>
         </p:nvSpPr>
@@ -13180,15 +13519,15 @@
               <a:spcAft>
                 <a:spcPts val="600"/>
               </a:spcAft>
-              <a:defRPr sz="5500" b="1" i="0">
-                <a:solidFill>
-                  <a:srgbClr val="FFFFFF"/>
+              <a:defRPr sz="5500" b="1" i="1">
+                <a:solidFill>
+                  <a:srgbClr val="FFB800"/>
                 </a:solidFill>
                 <a:latin typeface="Arial Black"/>
               </a:defRPr>
             </a:pPr>
             <a:r>
-              <a:t>MAGMASID</a:t>
+              <a:t>MANALIG KA</a:t>
             </a:r>
           </a:p>
           <a:p>
@@ -13199,15 +13538,15 @@
               <a:spcAft>
                 <a:spcPts val="600"/>
               </a:spcAft>
-              <a:defRPr sz="5500" b="1" i="0">
-                <a:solidFill>
-                  <a:srgbClr val="FFFFFF"/>
+              <a:defRPr sz="5500" b="1" i="1">
+                <a:solidFill>
+                  <a:srgbClr val="FFB800"/>
                 </a:solidFill>
                 <a:latin typeface="Arial Black"/>
               </a:defRPr>
             </a:pPr>
             <a:r>
-              <a:t>AT MAMULAT SA KANYANG KAPANGYARIHAN</a:t>
+              <a:t>TUYUIN ANG LUHA SA MGA MATA</a:t>
             </a:r>
           </a:p>
           <a:p>
@@ -13218,15 +13557,15 @@
               <a:spcAft>
                 <a:spcPts val="600"/>
               </a:spcAft>
-              <a:defRPr sz="5500" b="1" i="0">
-                <a:solidFill>
-                  <a:srgbClr val="FFFFFF"/>
+              <a:defRPr sz="5500" b="1" i="1">
+                <a:solidFill>
+                  <a:srgbClr val="FFB800"/>
                 </a:solidFill>
                 <a:latin typeface="Arial Black"/>
               </a:defRPr>
             </a:pPr>
             <a:r>
-              <a:t>NABATID MO BA NA SIYA'Y NAGLALAAN</a:t>
+              <a:t>HINDI SIYA PANAGINIP</a:t>
             </a:r>
           </a:p>
           <a:p>
@@ -13237,15 +13576,34 @@
               <a:spcAft>
                 <a:spcPts val="600"/>
               </a:spcAft>
-              <a:defRPr sz="5500" b="1" i="0">
-                <a:solidFill>
-                  <a:srgbClr val="FFFFFF"/>
+              <a:defRPr sz="5500" b="1" i="1">
+                <a:solidFill>
+                  <a:srgbClr val="FFB800"/>
                 </a:solidFill>
                 <a:latin typeface="Arial Black"/>
               </a:defRPr>
             </a:pPr>
             <a:r>
-              <a:t>PATULOY NA NAGHAHATID NG TUNAY NA KALAYAAN</a:t>
+              <a:t>HINDI SIYA ISANG PANGARAP</a:t>
+            </a:r>
+          </a:p>
+          <a:p>
+            <a:pPr algn="ctr">
+              <a:lnSpc>
+                <a:spcPct val="100000"/>
+              </a:lnSpc>
+              <a:spcAft>
+                <a:spcPts val="600"/>
+              </a:spcAft>
+              <a:defRPr sz="5500" b="1" i="1">
+                <a:solidFill>
+                  <a:srgbClr val="FFB800"/>
+                </a:solidFill>
+                <a:latin typeface="Arial Black"/>
+              </a:defRPr>
+            </a:pPr>
+            <a:r>
+              <a:t>SIYA AY BUHAY MANALIG KA</a:t>
             </a:r>
           </a:p>
         </p:txBody>
@@ -13345,15 +13703,15 @@
               <a:spcAft>
                 <a:spcPts val="600"/>
               </a:spcAft>
-              <a:defRPr sz="5500" b="1" i="1">
-                <a:solidFill>
-                  <a:srgbClr val="FFB800"/>
+              <a:defRPr sz="5500" b="1" i="0">
+                <a:solidFill>
+                  <a:srgbClr val="FFFFFF"/>
                 </a:solidFill>
                 <a:latin typeface="Arial Black"/>
               </a:defRPr>
             </a:pPr>
             <a:r>
-              <a:t>MANALIG KA</a:t>
+              <a:t>ANG NGAYON TILA WALANG MARARATING NA BUKAS</a:t>
             </a:r>
           </a:p>
           <a:p>
@@ -13364,15 +13722,15 @@
               <a:spcAft>
                 <a:spcPts val="600"/>
               </a:spcAft>
-              <a:defRPr sz="5500" b="1" i="1">
-                <a:solidFill>
-                  <a:srgbClr val="FFB800"/>
+              <a:defRPr sz="5500" b="1" i="0">
+                <a:solidFill>
+                  <a:srgbClr val="FFFFFF"/>
                 </a:solidFill>
                 <a:latin typeface="Arial Black"/>
               </a:defRPr>
             </a:pPr>
             <a:r>
-              <a:t>TUYUIN ANG LUHA SA MGA MATA</a:t>
+              <a:t>NGUNIT KUNG SIYA ANG ATING HAYAANG MAGLANDAS</a:t>
             </a:r>
           </a:p>
           <a:p>
@@ -13383,53 +13741,15 @@
               <a:spcAft>
                 <a:spcPts val="600"/>
               </a:spcAft>
-              <a:defRPr sz="5500" b="1" i="1">
-                <a:solidFill>
-                  <a:srgbClr val="FFB800"/>
+              <a:defRPr sz="5500" b="1" i="0">
+                <a:solidFill>
+                  <a:srgbClr val="FFFFFF"/>
                 </a:solidFill>
                 <a:latin typeface="Arial Black"/>
               </a:defRPr>
             </a:pPr>
             <a:r>
-              <a:t>HINDI SIYA PANAGINIP</a:t>
-            </a:r>
-          </a:p>
-          <a:p>
-            <a:pPr algn="ctr">
-              <a:lnSpc>
-                <a:spcPct val="100000"/>
-              </a:lnSpc>
-              <a:spcAft>
-                <a:spcPts val="600"/>
-              </a:spcAft>
-              <a:defRPr sz="5500" b="1" i="1">
-                <a:solidFill>
-                  <a:srgbClr val="FFB800"/>
-                </a:solidFill>
-                <a:latin typeface="Arial Black"/>
-              </a:defRPr>
-            </a:pPr>
-            <a:r>
-              <a:t>HINDI SIYA ISANG PANGARAP</a:t>
-            </a:r>
-          </a:p>
-          <a:p>
-            <a:pPr algn="ctr">
-              <a:lnSpc>
-                <a:spcPct val="100000"/>
-              </a:lnSpc>
-              <a:spcAft>
-                <a:spcPts val="600"/>
-              </a:spcAft>
-              <a:defRPr sz="5500" b="1" i="1">
-                <a:solidFill>
-                  <a:srgbClr val="FFB800"/>
-                </a:solidFill>
-                <a:latin typeface="Arial Black"/>
-              </a:defRPr>
-            </a:pPr>
-            <a:r>
-              <a:t>SIYA AY BUHAY MANALIG KA</a:t>
+              <a:t>PAG-ASA AY MULING MABIBIGKAS</a:t>
             </a:r>
           </a:p>
         </p:txBody>
@@ -13529,15 +13849,15 @@
               <a:spcAft>
                 <a:spcPts val="600"/>
               </a:spcAft>
-              <a:defRPr sz="5500" b="1" i="0">
-                <a:solidFill>
-                  <a:srgbClr val="FFFFFF"/>
+              <a:defRPr sz="5500" b="1" i="1">
+                <a:solidFill>
+                  <a:srgbClr val="FFB800"/>
                 </a:solidFill>
                 <a:latin typeface="Arial Black"/>
               </a:defRPr>
             </a:pPr>
             <a:r>
-              <a:t>ANG NGAYON TILA WALANG MARARATING NA BUKAS</a:t>
+              <a:t>MANALIG KA</a:t>
             </a:r>
           </a:p>
           <a:p>
@@ -13548,15 +13868,15 @@
               <a:spcAft>
                 <a:spcPts val="600"/>
               </a:spcAft>
-              <a:defRPr sz="5500" b="1" i="0">
-                <a:solidFill>
-                  <a:srgbClr val="FFFFFF"/>
+              <a:defRPr sz="5500" b="1" i="1">
+                <a:solidFill>
+                  <a:srgbClr val="FFB800"/>
                 </a:solidFill>
                 <a:latin typeface="Arial Black"/>
               </a:defRPr>
             </a:pPr>
             <a:r>
-              <a:t>NGUNIT KUNG SIYA ANG ATING HAYAANG MAGLANDAS</a:t>
+              <a:t>TUYUIN ANG LUHA SA MGA MATA</a:t>
             </a:r>
           </a:p>
           <a:p>
@@ -13567,15 +13887,53 @@
               <a:spcAft>
                 <a:spcPts val="600"/>
               </a:spcAft>
-              <a:defRPr sz="5500" b="1" i="0">
-                <a:solidFill>
-                  <a:srgbClr val="FFFFFF"/>
+              <a:defRPr sz="5500" b="1" i="1">
+                <a:solidFill>
+                  <a:srgbClr val="FFB800"/>
                 </a:solidFill>
                 <a:latin typeface="Arial Black"/>
               </a:defRPr>
             </a:pPr>
             <a:r>
-              <a:t>PAG-ASA AY MULING MABIBIGKAS</a:t>
+              <a:t>HINDI SIYA PANAGINIP</a:t>
+            </a:r>
+          </a:p>
+          <a:p>
+            <a:pPr algn="ctr">
+              <a:lnSpc>
+                <a:spcPct val="100000"/>
+              </a:lnSpc>
+              <a:spcAft>
+                <a:spcPts val="600"/>
+              </a:spcAft>
+              <a:defRPr sz="5500" b="1" i="1">
+                <a:solidFill>
+                  <a:srgbClr val="FFB800"/>
+                </a:solidFill>
+                <a:latin typeface="Arial Black"/>
+              </a:defRPr>
+            </a:pPr>
+            <a:r>
+              <a:t>HINDI SIYA ISANG PANGARAP</a:t>
+            </a:r>
+          </a:p>
+          <a:p>
+            <a:pPr algn="ctr">
+              <a:lnSpc>
+                <a:spcPct val="100000"/>
+              </a:lnSpc>
+              <a:spcAft>
+                <a:spcPts val="600"/>
+              </a:spcAft>
+              <a:defRPr sz="5500" b="1" i="1">
+                <a:solidFill>
+                  <a:srgbClr val="FFB800"/>
+                </a:solidFill>
+                <a:latin typeface="Arial Black"/>
+              </a:defRPr>
+            </a:pPr>
+            <a:r>
+              <a:t>SIYA AY BUHAY MANALIG KA</a:t>
             </a:r>
           </a:p>
         </p:txBody>
@@ -13675,9 +14033,9 @@
               <a:spcAft>
                 <a:spcPts val="600"/>
               </a:spcAft>
-              <a:defRPr sz="5500" b="1" i="1">
-                <a:solidFill>
-                  <a:srgbClr val="FFB800"/>
+              <a:defRPr sz="5500" b="1" i="0">
+                <a:solidFill>
+                  <a:srgbClr val="FFFFFF"/>
                 </a:solidFill>
                 <a:latin typeface="Arial Black"/>
               </a:defRPr>
@@ -13694,9 +14052,9 @@
               <a:spcAft>
                 <a:spcPts val="600"/>
               </a:spcAft>
-              <a:defRPr sz="5500" b="1" i="1">
-                <a:solidFill>
-                  <a:srgbClr val="FFB800"/>
+              <a:defRPr sz="5500" b="1" i="0">
+                <a:solidFill>
+                  <a:srgbClr val="FFFFFF"/>
                 </a:solidFill>
                 <a:latin typeface="Arial Black"/>
               </a:defRPr>
@@ -13713,15 +14071,15 @@
               <a:spcAft>
                 <a:spcPts val="600"/>
               </a:spcAft>
-              <a:defRPr sz="5500" b="1" i="1">
-                <a:solidFill>
-                  <a:srgbClr val="FFB800"/>
+              <a:defRPr sz="5500" b="1" i="0">
+                <a:solidFill>
+                  <a:srgbClr val="FFFFFF"/>
                 </a:solidFill>
                 <a:latin typeface="Arial Black"/>
               </a:defRPr>
             </a:pPr>
             <a:r>
-              <a:t>HINDI SIYA PANAGINIP</a:t>
+              <a:t>HINDI SIYA NATUTULOG</a:t>
             </a:r>
           </a:p>
           <a:p>
@@ -13732,15 +14090,15 @@
               <a:spcAft>
                 <a:spcPts val="600"/>
               </a:spcAft>
-              <a:defRPr sz="5500" b="1" i="1">
-                <a:solidFill>
-                  <a:srgbClr val="FFB800"/>
+              <a:defRPr sz="5500" b="1" i="0">
+                <a:solidFill>
+                  <a:srgbClr val="FFFFFF"/>
                 </a:solidFill>
                 <a:latin typeface="Arial Black"/>
               </a:defRPr>
             </a:pPr>
             <a:r>
-              <a:t>HINDI SIYA ISANG PANGARAP</a:t>
+              <a:t>HINDI NAKAKALIMOT</a:t>
             </a:r>
           </a:p>
           <a:p>
@@ -13751,15 +14109,34 @@
               <a:spcAft>
                 <a:spcPts val="600"/>
               </a:spcAft>
-              <a:defRPr sz="5500" b="1" i="1">
-                <a:solidFill>
-                  <a:srgbClr val="FFB800"/>
+              <a:defRPr sz="5500" b="1" i="0">
+                <a:solidFill>
+                  <a:srgbClr val="FFFFFF"/>
                 </a:solidFill>
                 <a:latin typeface="Arial Black"/>
               </a:defRPr>
             </a:pPr>
             <a:r>
-              <a:t>SIYA AY BUHAY MANALIG KA</a:t>
+              <a:t>KAY HESUS MANALIG KA</a:t>
+            </a:r>
+          </a:p>
+          <a:p>
+            <a:pPr algn="ctr">
+              <a:lnSpc>
+                <a:spcPct val="100000"/>
+              </a:lnSpc>
+              <a:spcAft>
+                <a:spcPts val="600"/>
+              </a:spcAft>
+              <a:defRPr sz="5500" b="1" i="0">
+                <a:solidFill>
+                  <a:srgbClr val="FFFFFF"/>
+                </a:solidFill>
+                <a:latin typeface="Arial Black"/>
+              </a:defRPr>
+            </a:pPr>
+            <a:r>
+              <a:t>KAY HESUS MANALIG KA</a:t>
             </a:r>
           </a:p>
         </p:txBody>
@@ -14022,16 +14399,52 @@
         </p:nvSpPr>
         <p:spPr>
           <a:xfrm>
-            <a:off x="0" y="0"/>
-            <a:ext cx="18288000" cy="10287000"/>
-          </a:xfrm>
-          <a:prstGeom prst="rect">
-            <a:avLst/>
-          </a:prstGeom>
-          <a:noFill/>
-        </p:spPr>
-        <p:txBody>
-          <a:bodyPr wrap="square" lIns="0" rIns="0" tIns="0" bIns="0" anchor="ctr">
+            <a:off x="914400" y="109728"/>
+            <a:ext cx="16459200" cy="868680"/>
+          </a:xfrm>
+          <a:prstGeom prst="rect">
+            <a:avLst/>
+          </a:prstGeom>
+          <a:noFill/>
+        </p:spPr>
+        <p:txBody>
+          <a:bodyPr wrap="square" lIns="109728" rIns="109728" tIns="73152" bIns="73152">
+            <a:noAutofit/>
+          </a:bodyPr>
+          <a:lstStyle/>
+          <a:p>
+            <a:pPr algn="ctr">
+              <a:defRPr sz="3850" b="1" i="0">
+                <a:solidFill>
+                  <a:srgbClr val="FFCC4D"/>
+                </a:solidFill>
+                <a:latin typeface="Georgia"/>
+              </a:defRPr>
+            </a:pPr>
+            <a:r>
+              <a:t>Pananagutan</a:t>
+            </a:r>
+          </a:p>
+        </p:txBody>
+      </p:sp>
+      <p:sp>
+        <p:nvSpPr>
+          <p:cNvPr id="3" name="TextBox 2"/>
+          <p:cNvSpPr txBox="1"/>
+          <p:nvPr/>
+        </p:nvSpPr>
+        <p:spPr>
+          <a:xfrm>
+            <a:off x="0" y="1069848"/>
+            <a:ext cx="18288000" cy="8348472"/>
+          </a:xfrm>
+          <a:prstGeom prst="rect">
+            <a:avLst/>
+          </a:prstGeom>
+          <a:noFill/>
+        </p:spPr>
+        <p:txBody>
+          <a:bodyPr wrap="square" lIns="0" rIns="0" tIns="73152" bIns="73152" anchor="ctr">
             <a:noAutofit/>
           </a:bodyPr>
           <a:lstStyle/>
@@ -14051,109 +14464,14 @@
               </a:defRPr>
             </a:pPr>
             <a:r>
-              <a:t>MANALIG KA</a:t>
-            </a:r>
-          </a:p>
-          <a:p>
-            <a:pPr algn="ctr">
-              <a:lnSpc>
-                <a:spcPct val="100000"/>
-              </a:lnSpc>
-              <a:spcAft>
-                <a:spcPts val="600"/>
-              </a:spcAft>
-              <a:defRPr sz="5500" b="1" i="0">
-                <a:solidFill>
-                  <a:srgbClr val="FFFFFF"/>
-                </a:solidFill>
-                <a:latin typeface="Arial Black"/>
-              </a:defRPr>
-            </a:pPr>
-            <a:r>
-              <a:t>TUYUIN ANG LUHA SA MGA MATA</a:t>
-            </a:r>
-          </a:p>
-          <a:p>
-            <a:pPr algn="ctr">
-              <a:lnSpc>
-                <a:spcPct val="100000"/>
-              </a:lnSpc>
-              <a:spcAft>
-                <a:spcPts val="600"/>
-              </a:spcAft>
-              <a:defRPr sz="5500" b="1" i="0">
-                <a:solidFill>
-                  <a:srgbClr val="FFFFFF"/>
-                </a:solidFill>
-                <a:latin typeface="Arial Black"/>
-              </a:defRPr>
-            </a:pPr>
-            <a:r>
-              <a:t>HINDI SIYA NATUTULOG</a:t>
-            </a:r>
-          </a:p>
-          <a:p>
-            <a:pPr algn="ctr">
-              <a:lnSpc>
-                <a:spcPct val="100000"/>
-              </a:lnSpc>
-              <a:spcAft>
-                <a:spcPts val="600"/>
-              </a:spcAft>
-              <a:defRPr sz="5500" b="1" i="0">
-                <a:solidFill>
-                  <a:srgbClr val="FFFFFF"/>
-                </a:solidFill>
-                <a:latin typeface="Arial Black"/>
-              </a:defRPr>
-            </a:pPr>
-            <a:r>
-              <a:t>HINDI NAKAKALIMOT</a:t>
-            </a:r>
-          </a:p>
-          <a:p>
-            <a:pPr algn="ctr">
-              <a:lnSpc>
-                <a:spcPct val="100000"/>
-              </a:lnSpc>
-              <a:spcAft>
-                <a:spcPts val="600"/>
-              </a:spcAft>
-              <a:defRPr sz="5500" b="1" i="0">
-                <a:solidFill>
-                  <a:srgbClr val="FFFFFF"/>
-                </a:solidFill>
-                <a:latin typeface="Arial Black"/>
-              </a:defRPr>
-            </a:pPr>
-            <a:r>
-              <a:t>KAY HESUS MANALIG KA</a:t>
-            </a:r>
-          </a:p>
-          <a:p>
-            <a:pPr algn="ctr">
-              <a:lnSpc>
-                <a:spcPct val="100000"/>
-              </a:lnSpc>
-              <a:spcAft>
-                <a:spcPts val="600"/>
-              </a:spcAft>
-              <a:defRPr sz="5500" b="1" i="0">
-                <a:solidFill>
-                  <a:srgbClr val="FFFFFF"/>
-                </a:solidFill>
-                <a:latin typeface="Arial Black"/>
-              </a:defRPr>
-            </a:pPr>
-            <a:r>
-              <a:t>KAY HESUS MANALIG KA</a:t>
-            </a:r>
-          </a:p>
-        </p:txBody>
-      </p:sp>
-      <p:sp>
-        <p:nvSpPr>
-          <p:cNvPr id="3" name="TextBox 2"/>
+              <a:t>(NO LYRICS IN LIBRARY FOR THIS HYMN.)</a:t>
+            </a:r>
+          </a:p>
+        </p:txBody>
+      </p:sp>
+      <p:sp>
+        <p:nvSpPr>
+          <p:cNvPr id="4" name="TextBox 3"/>
           <p:cNvSpPr txBox="1"/>
           <p:nvPr/>
         </p:nvSpPr>
@@ -14186,7 +14504,7 @@
               </a:defRPr>
             </a:pPr>
             <a:r>
-              <a:t>Communion (1)</a:t>
+              <a:t>Communion (2)</a:t>
             </a:r>
           </a:p>
         </p:txBody>
@@ -14200,150 +14518,6 @@
 </file>
 
 <file path=ppt/slides/slide71.xml><?xml version="1.0" encoding="utf-8"?>
-<p:sld xmlns:a="http://schemas.openxmlformats.org/drawingml/2006/main" xmlns:p="http://schemas.openxmlformats.org/presentationml/2006/main" xmlns:r="http://schemas.openxmlformats.org/officeDocument/2006/relationships">
-  <p:cSld>
-    <p:bg>
-      <p:bgPr>
-        <a:solidFill>
-          <a:srgbClr val="000000"/>
-        </a:solidFill>
-        <a:effectLst/>
-      </p:bgPr>
-    </p:bg>
-    <p:spTree>
-      <p:nvGrpSpPr>
-        <p:cNvPr id="1" name=""/>
-        <p:cNvGrpSpPr/>
-        <p:nvPr/>
-      </p:nvGrpSpPr>
-      <p:grpSpPr/>
-      <p:sp>
-        <p:nvSpPr>
-          <p:cNvPr id="2" name="TextBox 1"/>
-          <p:cNvSpPr txBox="1"/>
-          <p:nvPr/>
-        </p:nvSpPr>
-        <p:spPr>
-          <a:xfrm>
-            <a:off x="914400" y="109728"/>
-            <a:ext cx="16459200" cy="868680"/>
-          </a:xfrm>
-          <a:prstGeom prst="rect">
-            <a:avLst/>
-          </a:prstGeom>
-          <a:noFill/>
-        </p:spPr>
-        <p:txBody>
-          <a:bodyPr wrap="square" lIns="109728" rIns="109728" tIns="73152" bIns="73152">
-            <a:noAutofit/>
-          </a:bodyPr>
-          <a:lstStyle/>
-          <a:p>
-            <a:pPr algn="ctr">
-              <a:defRPr sz="3850" b="1" i="0">
-                <a:solidFill>
-                  <a:srgbClr val="FFCC4D"/>
-                </a:solidFill>
-                <a:latin typeface="Georgia"/>
-              </a:defRPr>
-            </a:pPr>
-            <a:r>
-              <a:t>Pananagutan</a:t>
-            </a:r>
-          </a:p>
-        </p:txBody>
-      </p:sp>
-      <p:sp>
-        <p:nvSpPr>
-          <p:cNvPr id="3" name="TextBox 2"/>
-          <p:cNvSpPr txBox="1"/>
-          <p:nvPr/>
-        </p:nvSpPr>
-        <p:spPr>
-          <a:xfrm>
-            <a:off x="0" y="1069848"/>
-            <a:ext cx="18288000" cy="8348472"/>
-          </a:xfrm>
-          <a:prstGeom prst="rect">
-            <a:avLst/>
-          </a:prstGeom>
-          <a:noFill/>
-        </p:spPr>
-        <p:txBody>
-          <a:bodyPr wrap="square" lIns="0" rIns="0" tIns="73152" bIns="73152" anchor="ctr">
-            <a:noAutofit/>
-          </a:bodyPr>
-          <a:lstStyle/>
-          <a:p>
-            <a:pPr algn="ctr">
-              <a:lnSpc>
-                <a:spcPct val="100000"/>
-              </a:lnSpc>
-              <a:spcAft>
-                <a:spcPts val="600"/>
-              </a:spcAft>
-              <a:defRPr sz="5500" b="1" i="0">
-                <a:solidFill>
-                  <a:srgbClr val="FFFFFF"/>
-                </a:solidFill>
-                <a:latin typeface="Arial Black"/>
-              </a:defRPr>
-            </a:pPr>
-            <a:r>
-              <a:t>(NO LYRICS IN LIBRARY FOR THIS HYMN.)</a:t>
-            </a:r>
-          </a:p>
-        </p:txBody>
-      </p:sp>
-      <p:sp>
-        <p:nvSpPr>
-          <p:cNvPr id="4" name="TextBox 3"/>
-          <p:cNvSpPr txBox="1"/>
-          <p:nvPr/>
-        </p:nvSpPr>
-        <p:spPr>
-          <a:xfrm>
-            <a:off x="914400" y="9418320"/>
-            <a:ext cx="16459200" cy="777240"/>
-          </a:xfrm>
-          <a:prstGeom prst="rect">
-            <a:avLst/>
-          </a:prstGeom>
-          <a:noFill/>
-        </p:spPr>
-        <p:txBody>
-          <a:bodyPr wrap="square" lIns="109728" rIns="109728" tIns="73152" bIns="73152">
-            <a:noAutofit/>
-          </a:bodyPr>
-          <a:lstStyle/>
-          <a:p/>
-          <a:p>
-            <a:pPr>
-              <a:spcBef>
-                <a:spcPts val="200"/>
-              </a:spcBef>
-              <a:defRPr sz="1200" b="0" i="0">
-                <a:solidFill>
-                  <a:srgbClr val="FFCC4D"/>
-                </a:solidFill>
-                <a:latin typeface="Inter"/>
-              </a:defRPr>
-            </a:pPr>
-            <a:r>
-              <a:t>Communion (2)</a:t>
-            </a:r>
-          </a:p>
-        </p:txBody>
-      </p:sp>
-    </p:spTree>
-  </p:cSld>
-  <p:clrMapOvr>
-    <a:masterClrMapping/>
-  </p:clrMapOvr>
-</p:sld>
-</file>
-
-<file path=ppt/slides/slide72.xml><?xml version="1.0" encoding="utf-8"?>
 <p:sld xmlns:a="http://schemas.openxmlformats.org/drawingml/2006/main" xmlns:p="http://schemas.openxmlformats.org/presentationml/2006/main" xmlns:r="http://schemas.openxmlformats.org/officeDocument/2006/relationships">
   <p:cSld>
     <p:bg>
@@ -14470,7 +14644,7 @@
 </p:sld>
 </file>
 
-<file path=ppt/slides/slide73.xml><?xml version="1.0" encoding="utf-8"?>
+<file path=ppt/slides/slide72.xml><?xml version="1.0" encoding="utf-8"?>
 <p:sld xmlns:a="http://schemas.openxmlformats.org/drawingml/2006/main" xmlns:p="http://schemas.openxmlformats.org/presentationml/2006/main" xmlns:r="http://schemas.openxmlformats.org/officeDocument/2006/relationships">
   <p:cSld>
     <p:spTree>
@@ -14554,7 +14728,7 @@
               </a:defRPr>
             </a:pPr>
             <a:r>
-              <a:t>Rev. Fr. Jonrey Lauron, RCJ</a:t>
+              <a:t>Fr. Michael Hwang</a:t>
             </a:r>
           </a:p>
           <a:p>
@@ -14685,6 +14859,143 @@
             </a:pPr>
             <a:r>
               <a:t>Mass poster / divider</a:t>
+            </a:r>
+          </a:p>
+        </p:txBody>
+      </p:sp>
+    </p:spTree>
+  </p:cSld>
+  <p:clrMapOvr>
+    <a:masterClrMapping/>
+  </p:clrMapOvr>
+</p:sld>
+</file>
+
+<file path=ppt/slides/slide73.xml><?xml version="1.0" encoding="utf-8"?>
+<p:sld xmlns:a="http://schemas.openxmlformats.org/drawingml/2006/main" xmlns:p="http://schemas.openxmlformats.org/presentationml/2006/main" xmlns:r="http://schemas.openxmlformats.org/officeDocument/2006/relationships">
+  <p:cSld>
+    <p:bg>
+      <p:bgPr>
+        <a:solidFill>
+          <a:srgbClr val="10251C"/>
+        </a:solidFill>
+        <a:effectLst/>
+      </p:bgPr>
+    </p:bg>
+    <p:spTree>
+      <p:nvGrpSpPr>
+        <p:cNvPr id="1" name=""/>
+        <p:cNvGrpSpPr/>
+        <p:nvPr/>
+      </p:nvGrpSpPr>
+      <p:grpSpPr/>
+      <p:sp>
+        <p:nvSpPr>
+          <p:cNvPr id="2" name="TextBox 1"/>
+          <p:cNvSpPr txBox="1"/>
+          <p:nvPr/>
+        </p:nvSpPr>
+        <p:spPr>
+          <a:xfrm>
+            <a:off x="914400" y="530352"/>
+            <a:ext cx="16459200" cy="8750808"/>
+          </a:xfrm>
+          <a:prstGeom prst="rect">
+            <a:avLst/>
+          </a:prstGeom>
+          <a:noFill/>
+        </p:spPr>
+        <p:txBody>
+          <a:bodyPr wrap="square" lIns="109728" rIns="109728" tIns="73152" bIns="73152">
+            <a:noAutofit/>
+          </a:bodyPr>
+          <a:lstStyle/>
+          <a:p>
+            <a:pPr algn="ctr">
+              <a:spcAft>
+                <a:spcPts val="500"/>
+              </a:spcAft>
+              <a:defRPr sz="5500" b="1" i="0">
+                <a:solidFill>
+                  <a:srgbClr val="F0FDF4"/>
+                </a:solidFill>
+                <a:latin typeface="Inter"/>
+              </a:defRPr>
+            </a:pPr>
+            <a:r>
+              <a:t>MASS COLLECTION</a:t>
+            </a:r>
+          </a:p>
+          <a:p>
+            <a:pPr algn="ctr">
+              <a:spcAft>
+                <a:spcPts val="500"/>
+              </a:spcAft>
+              <a:defRPr sz="5500" b="0" i="0">
+                <a:solidFill>
+                  <a:srgbClr val="F0FDF4"/>
+                </a:solidFill>
+                <a:latin typeface="Inter"/>
+              </a:defRPr>
+            </a:pPr>
+            <a:r>
+              <a:t>Thank you for your generosity.</a:t>
+            </a:r>
+          </a:p>
+          <a:p>
+            <a:pPr algn="ctr">
+              <a:spcAft>
+                <a:spcPts val="500"/>
+              </a:spcAft>
+              <a:defRPr sz="5500" b="0" i="0">
+                <a:solidFill>
+                  <a:srgbClr val="F0FDF4"/>
+                </a:solidFill>
+                <a:latin typeface="Inter"/>
+              </a:defRPr>
+            </a:pPr>
+            <a:r>
+              <a:t>Date: Sunday, May 31, 2026</a:t>
+            </a:r>
+          </a:p>
+        </p:txBody>
+      </p:sp>
+      <p:sp>
+        <p:nvSpPr>
+          <p:cNvPr id="3" name="TextBox 2"/>
+          <p:cNvSpPr txBox="1"/>
+          <p:nvPr/>
+        </p:nvSpPr>
+        <p:spPr>
+          <a:xfrm>
+            <a:off x="914400" y="9418320"/>
+            <a:ext cx="16459200" cy="777240"/>
+          </a:xfrm>
+          <a:prstGeom prst="rect">
+            <a:avLst/>
+          </a:prstGeom>
+          <a:noFill/>
+        </p:spPr>
+        <p:txBody>
+          <a:bodyPr wrap="square" lIns="109728" rIns="109728" tIns="73152" bIns="73152">
+            <a:noAutofit/>
+          </a:bodyPr>
+          <a:lstStyle/>
+          <a:p/>
+          <a:p>
+            <a:pPr algn="l">
+              <a:spcBef>
+                <a:spcPts val="200"/>
+              </a:spcBef>
+              <a:defRPr sz="1200" b="0" i="0">
+                <a:solidFill>
+                  <a:srgbClr val="86EFAC"/>
+                </a:solidFill>
+                <a:latin typeface="Inter"/>
+              </a:defRPr>
+            </a:pPr>
+            <a:r>
+              <a:t>Mass Collection</a:t>
             </a:r>
           </a:p>
         </p:txBody>
@@ -14749,39 +15060,7 @@
               </a:defRPr>
             </a:pPr>
             <a:r>
-              <a:t>MASS COLLECTION</a:t>
-            </a:r>
-          </a:p>
-          <a:p>
-            <a:pPr algn="ctr">
-              <a:spcAft>
-                <a:spcPts val="500"/>
-              </a:spcAft>
-              <a:defRPr sz="5500" b="0" i="0">
-                <a:solidFill>
-                  <a:srgbClr val="F0FDF4"/>
-                </a:solidFill>
-                <a:latin typeface="Inter"/>
-              </a:defRPr>
-            </a:pPr>
-            <a:r>
-              <a:t>Thank you for your generosity.</a:t>
-            </a:r>
-          </a:p>
-          <a:p>
-            <a:pPr algn="ctr">
-              <a:spcAft>
-                <a:spcPts val="500"/>
-              </a:spcAft>
-              <a:defRPr sz="5500" b="0" i="0">
-                <a:solidFill>
-                  <a:srgbClr val="F0FDF4"/>
-                </a:solidFill>
-                <a:latin typeface="Inter"/>
-              </a:defRPr>
-            </a:pPr>
-            <a:r>
-              <a:t>Date: Sunday, May 31, 2026</a:t>
+              <a:t>CHURCH ANNOUNCEMENTS</a:t>
             </a:r>
           </a:p>
         </p:txBody>
@@ -14821,7 +15100,7 @@
               </a:defRPr>
             </a:pPr>
             <a:r>
-              <a:t>Mass Collection</a:t>
+              <a:t>Announcements</a:t>
             </a:r>
           </a:p>
         </p:txBody>
@@ -14886,39 +15165,7 @@
               </a:defRPr>
             </a:pPr>
             <a:r>
-              <a:t>FOOD SPONSORS</a:t>
-            </a:r>
-          </a:p>
-          <a:p>
-            <a:pPr algn="ctr">
-              <a:spcAft>
-                <a:spcPts val="500"/>
-              </a:spcAft>
-              <a:defRPr sz="5500" b="0" i="0">
-                <a:solidFill>
-                  <a:srgbClr val="F0FDF4"/>
-                </a:solidFill>
-                <a:latin typeface="Inter"/>
-              </a:defRPr>
-            </a:pPr>
-            <a:r>
-              <a:t>The community thanks our food sponsors.</a:t>
-            </a:r>
-          </a:p>
-          <a:p>
-            <a:pPr algn="ctr">
-              <a:spcAft>
-                <a:spcPts val="500"/>
-              </a:spcAft>
-              <a:defRPr sz="5500" b="0" i="0">
-                <a:solidFill>
-                  <a:srgbClr val="F0FDF4"/>
-                </a:solidFill>
-                <a:latin typeface="Inter"/>
-              </a:defRPr>
-            </a:pPr>
-            <a:r>
-              <a:t>• Keshi</a:t>
+              <a:t>Welcome newcomers!</a:t>
             </a:r>
           </a:p>
         </p:txBody>
@@ -14958,7 +15205,7 @@
               </a:defRPr>
             </a:pPr>
             <a:r>
-              <a:t>Food Sponsors</a:t>
+              <a:t>Announcements</a:t>
             </a:r>
           </a:p>
         </p:txBody>
@@ -15023,7 +15270,7 @@
               </a:defRPr>
             </a:pPr>
             <a:r>
-              <a:t>CHURCH ANNOUNCEMENTS</a:t>
+              <a:t>Sacrament of Confession</a:t>
             </a:r>
           </a:p>
         </p:txBody>
@@ -15128,7 +15375,7 @@
               </a:defRPr>
             </a:pPr>
             <a:r>
-              <a:t>Welcome newcomers!</a:t>
+              <a:t>Updates and Announcements</a:t>
             </a:r>
           </a:p>
         </p:txBody>
@@ -15222,18 +15469,116 @@
           <a:lstStyle/>
           <a:p>
             <a:pPr algn="ctr">
+              <a:spcBef>
+                <a:spcPts val="400"/>
+              </a:spcBef>
               <a:spcAft>
                 <a:spcPts val="500"/>
               </a:spcAft>
               <a:defRPr sz="5500" b="1" i="0">
                 <a:solidFill>
+                  <a:srgbClr val="86EFAC"/>
+                </a:solidFill>
+                <a:latin typeface="Inter"/>
+              </a:defRPr>
+            </a:pPr>
+            <a:r>
+              <a:t>Priest: The Lord be with you.</a:t>
+            </a:r>
+          </a:p>
+          <a:p>
+            <a:pPr algn="ctr">
+              <a:spcBef>
+                <a:spcPts val="400"/>
+              </a:spcBef>
+              <a:spcAft>
+                <a:spcPts val="500"/>
+              </a:spcAft>
+              <a:defRPr sz="5500" b="1" i="0">
+                <a:solidFill>
                   <a:srgbClr val="F0FDF4"/>
                 </a:solidFill>
                 <a:latin typeface="Inter"/>
               </a:defRPr>
             </a:pPr>
             <a:r>
-              <a:t>Sacrament of Confession</a:t>
+              <a:t>All: And with your spirit.</a:t>
+            </a:r>
+          </a:p>
+          <a:p>
+            <a:pPr algn="ctr">
+              <a:spcBef>
+                <a:spcPts val="400"/>
+              </a:spcBef>
+              <a:spcAft>
+                <a:spcPts val="500"/>
+              </a:spcAft>
+              <a:defRPr sz="5500" b="1" i="0">
+                <a:solidFill>
+                  <a:srgbClr val="86EFAC"/>
+                </a:solidFill>
+                <a:latin typeface="Inter"/>
+              </a:defRPr>
+            </a:pPr>
+            <a:r>
+              <a:t>Priest: May almighty God bless you, the Father, and the Son, and the Holy Spirit.</a:t>
+            </a:r>
+          </a:p>
+          <a:p>
+            <a:pPr algn="ctr">
+              <a:spcBef>
+                <a:spcPts val="400"/>
+              </a:spcBef>
+              <a:spcAft>
+                <a:spcPts val="500"/>
+              </a:spcAft>
+              <a:defRPr sz="5500" b="1" i="0">
+                <a:solidFill>
+                  <a:srgbClr val="F0FDF4"/>
+                </a:solidFill>
+                <a:latin typeface="Inter"/>
+              </a:defRPr>
+            </a:pPr>
+            <a:r>
+              <a:t>All: Amen.</a:t>
+            </a:r>
+          </a:p>
+          <a:p>
+            <a:pPr algn="ctr">
+              <a:spcBef>
+                <a:spcPts val="400"/>
+              </a:spcBef>
+              <a:spcAft>
+                <a:spcPts val="500"/>
+              </a:spcAft>
+              <a:defRPr sz="5500" b="1" i="0">
+                <a:solidFill>
+                  <a:srgbClr val="86EFAC"/>
+                </a:solidFill>
+                <a:latin typeface="Inter"/>
+              </a:defRPr>
+            </a:pPr>
+            <a:r>
+              <a:t>Priest: Go in peace, glorifying the Lord by your life.</a:t>
+            </a:r>
+          </a:p>
+          <a:p>
+            <a:pPr algn="ctr">
+              <a:spcBef>
+                <a:spcPts val="400"/>
+              </a:spcBef>
+              <a:spcAft>
+                <a:spcPts val="500"/>
+              </a:spcAft>
+              <a:defRPr sz="5500" b="1" i="0">
+                <a:solidFill>
+                  <a:srgbClr val="F0FDF4"/>
+                </a:solidFill>
+                <a:latin typeface="Inter"/>
+              </a:defRPr>
+            </a:pPr>
+            <a:r>
+              <a:t>All: Thanks be to God.</a:t>
             </a:r>
           </a:p>
         </p:txBody>
@@ -15273,7 +15618,7 @@
               </a:defRPr>
             </a:pPr>
             <a:r>
-              <a:t>Announcements</a:t>
+              <a:t>Final Blessing</a:t>
             </a:r>
           </a:p>
         </p:txBody>
@@ -15292,7 +15637,7 @@
     <p:bg>
       <p:bgPr>
         <a:solidFill>
-          <a:srgbClr val="10251C"/>
+          <a:srgbClr val="000000"/>
         </a:solidFill>
         <a:effectLst/>
       </p:bgPr>
@@ -15312,8 +15657,8 @@
         </p:nvSpPr>
         <p:spPr>
           <a:xfrm>
-            <a:off x="914400" y="530352"/>
-            <a:ext cx="16459200" cy="8750808"/>
+            <a:off x="914400" y="109728"/>
+            <a:ext cx="16459200" cy="868680"/>
           </a:xfrm>
           <a:prstGeom prst="rect">
             <a:avLst/>
@@ -15327,25 +15672,121 @@
           <a:lstStyle/>
           <a:p>
             <a:pPr algn="ctr">
-              <a:spcAft>
-                <a:spcPts val="500"/>
+              <a:defRPr sz="3850" b="1" i="0">
+                <a:solidFill>
+                  <a:srgbClr val="FFCC4D"/>
+                </a:solidFill>
+                <a:latin typeface="Georgia"/>
+              </a:defRPr>
+            </a:pPr>
+            <a:r>
+              <a:t>We Are Called</a:t>
+            </a:r>
+          </a:p>
+        </p:txBody>
+      </p:sp>
+      <p:sp>
+        <p:nvSpPr>
+          <p:cNvPr id="3" name="TextBox 2"/>
+          <p:cNvSpPr txBox="1"/>
+          <p:nvPr/>
+        </p:nvSpPr>
+        <p:spPr>
+          <a:xfrm>
+            <a:off x="0" y="1069848"/>
+            <a:ext cx="18288000" cy="8348472"/>
+          </a:xfrm>
+          <a:prstGeom prst="rect">
+            <a:avLst/>
+          </a:prstGeom>
+          <a:noFill/>
+        </p:spPr>
+        <p:txBody>
+          <a:bodyPr wrap="square" lIns="0" rIns="0" tIns="73152" bIns="73152" anchor="ctr">
+            <a:noAutofit/>
+          </a:bodyPr>
+          <a:lstStyle/>
+          <a:p>
+            <a:pPr algn="ctr">
+              <a:lnSpc>
+                <a:spcPct val="100000"/>
+              </a:lnSpc>
+              <a:spcAft>
+                <a:spcPts val="600"/>
               </a:spcAft>
               <a:defRPr sz="5500" b="1" i="0">
                 <a:solidFill>
-                  <a:srgbClr val="F0FDF4"/>
-                </a:solidFill>
-                <a:latin typeface="Inter"/>
-              </a:defRPr>
-            </a:pPr>
-            <a:r>
-              <a:t>Updates and Announcements</a:t>
-            </a:r>
-          </a:p>
-        </p:txBody>
-      </p:sp>
-      <p:sp>
-        <p:nvSpPr>
-          <p:cNvPr id="3" name="TextBox 2"/>
+                  <a:srgbClr val="FFFFFF"/>
+                </a:solidFill>
+                <a:latin typeface="Arial Black"/>
+              </a:defRPr>
+            </a:pPr>
+            <a:r>
+              <a:t>WE ARE CALLED TO ACT WITH JUSTICE,</a:t>
+            </a:r>
+          </a:p>
+          <a:p>
+            <a:pPr algn="ctr">
+              <a:lnSpc>
+                <a:spcPct val="100000"/>
+              </a:lnSpc>
+              <a:spcAft>
+                <a:spcPts val="600"/>
+              </a:spcAft>
+              <a:defRPr sz="5500" b="1" i="0">
+                <a:solidFill>
+                  <a:srgbClr val="FFFFFF"/>
+                </a:solidFill>
+                <a:latin typeface="Arial Black"/>
+              </a:defRPr>
+            </a:pPr>
+            <a:r>
+              <a:t>WE ARE CALLED TO LOVE TENDERLY;</a:t>
+            </a:r>
+          </a:p>
+          <a:p>
+            <a:pPr algn="ctr">
+              <a:lnSpc>
+                <a:spcPct val="100000"/>
+              </a:lnSpc>
+              <a:spcAft>
+                <a:spcPts val="600"/>
+              </a:spcAft>
+              <a:defRPr sz="5500" b="1" i="0">
+                <a:solidFill>
+                  <a:srgbClr val="FFFFFF"/>
+                </a:solidFill>
+                <a:latin typeface="Arial Black"/>
+              </a:defRPr>
+            </a:pPr>
+            <a:r>
+              <a:t>WE ARE CALLED TO SERVE ONE ANOTHER,</a:t>
+            </a:r>
+          </a:p>
+          <a:p>
+            <a:pPr algn="ctr">
+              <a:lnSpc>
+                <a:spcPct val="100000"/>
+              </a:lnSpc>
+              <a:spcAft>
+                <a:spcPts val="600"/>
+              </a:spcAft>
+              <a:defRPr sz="5500" b="1" i="0">
+                <a:solidFill>
+                  <a:srgbClr val="FFFFFF"/>
+                </a:solidFill>
+                <a:latin typeface="Arial Black"/>
+              </a:defRPr>
+            </a:pPr>
+            <a:r>
+              <a:t>TO WALK HUMBLY WITH GOD.</a:t>
+            </a:r>
+          </a:p>
+        </p:txBody>
+      </p:sp>
+      <p:sp>
+        <p:nvSpPr>
+          <p:cNvPr id="4" name="TextBox 3"/>
           <p:cNvSpPr txBox="1"/>
           <p:nvPr/>
         </p:nvSpPr>
@@ -15366,19 +15807,19 @@
           <a:lstStyle/>
           <a:p/>
           <a:p>
-            <a:pPr algn="l">
+            <a:pPr>
               <a:spcBef>
                 <a:spcPts val="200"/>
               </a:spcBef>
               <a:defRPr sz="1200" b="0" i="0">
                 <a:solidFill>
-                  <a:srgbClr val="86EFAC"/>
-                </a:solidFill>
-                <a:latin typeface="Inter"/>
-              </a:defRPr>
-            </a:pPr>
-            <a:r>
-              <a:t>Announcements</a:t>
+                  <a:srgbClr val="FFCC4D"/>
+                </a:solidFill>
+                <a:latin typeface="Inter"/>
+              </a:defRPr>
+            </a:pPr>
+            <a:r>
+              <a:t>Recessional</a:t>
             </a:r>
           </a:p>
         </p:txBody>
@@ -15475,7 +15916,7 @@
               </a:defRPr>
             </a:pPr>
             <a:r>
-              <a:t>Rev. Fr. Jonrey Lauron, RCJ</a:t>
+              <a:t>Fr. Michael Hwang</a:t>
             </a:r>
           </a:p>
           <a:p>
@@ -15624,7 +16065,7 @@
     <p:bg>
       <p:bgPr>
         <a:solidFill>
-          <a:srgbClr val="10251C"/>
+          <a:srgbClr val="000000"/>
         </a:solidFill>
         <a:effectLst/>
       </p:bgPr>
@@ -15644,131 +16085,55 @@
         </p:nvSpPr>
         <p:spPr>
           <a:xfrm>
-            <a:off x="914400" y="530352"/>
-            <a:ext cx="16459200" cy="8750808"/>
-          </a:xfrm>
-          <a:prstGeom prst="rect">
-            <a:avLst/>
-          </a:prstGeom>
-          <a:noFill/>
-        </p:spPr>
-        <p:txBody>
-          <a:bodyPr wrap="square" lIns="109728" rIns="109728" tIns="73152" bIns="73152">
-            <a:noAutofit/>
-          </a:bodyPr>
-          <a:lstStyle/>
-          <a:p>
-            <a:pPr algn="ctr">
-              <a:spcBef>
-                <a:spcPts val="400"/>
-              </a:spcBef>
-              <a:spcAft>
-                <a:spcPts val="500"/>
+            <a:off x="0" y="0"/>
+            <a:ext cx="18288000" cy="10287000"/>
+          </a:xfrm>
+          <a:prstGeom prst="rect">
+            <a:avLst/>
+          </a:prstGeom>
+          <a:noFill/>
+        </p:spPr>
+        <p:txBody>
+          <a:bodyPr wrap="square" lIns="0" rIns="0" tIns="0" bIns="0" anchor="ctr">
+            <a:noAutofit/>
+          </a:bodyPr>
+          <a:lstStyle/>
+          <a:p>
+            <a:pPr algn="ctr">
+              <a:lnSpc>
+                <a:spcPct val="100000"/>
+              </a:lnSpc>
+              <a:spcAft>
+                <a:spcPts val="600"/>
               </a:spcAft>
               <a:defRPr sz="5500" b="1" i="0">
                 <a:solidFill>
-                  <a:srgbClr val="86EFAC"/>
-                </a:solidFill>
-                <a:latin typeface="Inter"/>
-              </a:defRPr>
-            </a:pPr>
-            <a:r>
-              <a:t>Priest: The Lord be with you.</a:t>
-            </a:r>
-          </a:p>
-          <a:p>
-            <a:pPr algn="ctr">
-              <a:spcBef>
-                <a:spcPts val="400"/>
-              </a:spcBef>
-              <a:spcAft>
-                <a:spcPts val="500"/>
+                  <a:srgbClr val="FFFFFF"/>
+                </a:solidFill>
+                <a:latin typeface="Arial Black"/>
+              </a:defRPr>
+            </a:pPr>
+            <a:r>
+              <a:t>COME! LIVE IN THE LIGHT!</a:t>
+            </a:r>
+          </a:p>
+          <a:p>
+            <a:pPr algn="ctr">
+              <a:lnSpc>
+                <a:spcPct val="100000"/>
+              </a:lnSpc>
+              <a:spcAft>
+                <a:spcPts val="600"/>
               </a:spcAft>
               <a:defRPr sz="5500" b="1" i="0">
                 <a:solidFill>
-                  <a:srgbClr val="F0FDF4"/>
-                </a:solidFill>
-                <a:latin typeface="Inter"/>
-              </a:defRPr>
-            </a:pPr>
-            <a:r>
-              <a:t>All: And with your spirit.</a:t>
-            </a:r>
-          </a:p>
-          <a:p>
-            <a:pPr algn="ctr">
-              <a:spcBef>
-                <a:spcPts val="400"/>
-              </a:spcBef>
-              <a:spcAft>
-                <a:spcPts val="500"/>
-              </a:spcAft>
-              <a:defRPr sz="5500" b="1" i="0">
-                <a:solidFill>
-                  <a:srgbClr val="86EFAC"/>
-                </a:solidFill>
-                <a:latin typeface="Inter"/>
-              </a:defRPr>
-            </a:pPr>
-            <a:r>
-              <a:t>Priest: May almighty God bless you, the Father, and the Son, and the Holy Spirit.</a:t>
-            </a:r>
-          </a:p>
-          <a:p>
-            <a:pPr algn="ctr">
-              <a:spcBef>
-                <a:spcPts val="400"/>
-              </a:spcBef>
-              <a:spcAft>
-                <a:spcPts val="500"/>
-              </a:spcAft>
-              <a:defRPr sz="5500" b="1" i="0">
-                <a:solidFill>
-                  <a:srgbClr val="F0FDF4"/>
-                </a:solidFill>
-                <a:latin typeface="Inter"/>
-              </a:defRPr>
-            </a:pPr>
-            <a:r>
-              <a:t>All: Amen.</a:t>
-            </a:r>
-          </a:p>
-          <a:p>
-            <a:pPr algn="ctr">
-              <a:spcBef>
-                <a:spcPts val="400"/>
-              </a:spcBef>
-              <a:spcAft>
-                <a:spcPts val="500"/>
-              </a:spcAft>
-              <a:defRPr sz="5500" b="1" i="0">
-                <a:solidFill>
-                  <a:srgbClr val="86EFAC"/>
-                </a:solidFill>
-                <a:latin typeface="Inter"/>
-              </a:defRPr>
-            </a:pPr>
-            <a:r>
-              <a:t>Priest: Go in peace, glorifying the Lord by your life.</a:t>
-            </a:r>
-          </a:p>
-          <a:p>
-            <a:pPr algn="ctr">
-              <a:spcBef>
-                <a:spcPts val="400"/>
-              </a:spcBef>
-              <a:spcAft>
-                <a:spcPts val="500"/>
-              </a:spcAft>
-              <a:defRPr sz="5500" b="1" i="0">
-                <a:solidFill>
-                  <a:srgbClr val="F0FDF4"/>
-                </a:solidFill>
-                <a:latin typeface="Inter"/>
-              </a:defRPr>
-            </a:pPr>
-            <a:r>
-              <a:t>All: Thanks be to God.</a:t>
+                  <a:srgbClr val="FFFFFF"/>
+                </a:solidFill>
+                <a:latin typeface="Arial Black"/>
+              </a:defRPr>
+            </a:pPr>
+            <a:r>
+              <a:t>SHINE WITH THE JOY AND THE LOVE OF THE LORD!</a:t>
             </a:r>
           </a:p>
         </p:txBody>
@@ -15796,19 +16161,19 @@
           <a:lstStyle/>
           <a:p/>
           <a:p>
-            <a:pPr algn="l">
+            <a:pPr>
               <a:spcBef>
                 <a:spcPts val="200"/>
               </a:spcBef>
               <a:defRPr sz="1200" b="0" i="0">
                 <a:solidFill>
-                  <a:srgbClr val="86EFAC"/>
-                </a:solidFill>
-                <a:latin typeface="Inter"/>
-              </a:defRPr>
-            </a:pPr>
-            <a:r>
-              <a:t>Final Blessing</a:t>
+                  <a:srgbClr val="FFCC4D"/>
+                </a:solidFill>
+                <a:latin typeface="Inter"/>
+              </a:defRPr>
+            </a:pPr>
+            <a:r>
+              <a:t>Recessional</a:t>
             </a:r>
           </a:p>
         </p:txBody>
@@ -15847,52 +16212,16 @@
         </p:nvSpPr>
         <p:spPr>
           <a:xfrm>
-            <a:off x="914400" y="109728"/>
-            <a:ext cx="16459200" cy="868680"/>
-          </a:xfrm>
-          <a:prstGeom prst="rect">
-            <a:avLst/>
-          </a:prstGeom>
-          <a:noFill/>
-        </p:spPr>
-        <p:txBody>
-          <a:bodyPr wrap="square" lIns="109728" rIns="109728" tIns="73152" bIns="73152">
-            <a:noAutofit/>
-          </a:bodyPr>
-          <a:lstStyle/>
-          <a:p>
-            <a:pPr algn="ctr">
-              <a:defRPr sz="3850" b="1" i="0">
-                <a:solidFill>
-                  <a:srgbClr val="FFCC4D"/>
-                </a:solidFill>
-                <a:latin typeface="Georgia"/>
-              </a:defRPr>
-            </a:pPr>
-            <a:r>
-              <a:t>We Are Called</a:t>
-            </a:r>
-          </a:p>
-        </p:txBody>
-      </p:sp>
-      <p:sp>
-        <p:nvSpPr>
-          <p:cNvPr id="3" name="TextBox 2"/>
-          <p:cNvSpPr txBox="1"/>
-          <p:nvPr/>
-        </p:nvSpPr>
-        <p:spPr>
-          <a:xfrm>
-            <a:off x="0" y="1069848"/>
-            <a:ext cx="18288000" cy="8348472"/>
-          </a:xfrm>
-          <a:prstGeom prst="rect">
-            <a:avLst/>
-          </a:prstGeom>
-          <a:noFill/>
-        </p:spPr>
-        <p:txBody>
-          <a:bodyPr wrap="square" lIns="0" rIns="0" tIns="73152" bIns="73152" anchor="ctr">
+            <a:off x="0" y="0"/>
+            <a:ext cx="18288000" cy="10287000"/>
+          </a:xfrm>
+          <a:prstGeom prst="rect">
+            <a:avLst/>
+          </a:prstGeom>
+          <a:noFill/>
+        </p:spPr>
+        <p:txBody>
+          <a:bodyPr wrap="square" lIns="0" rIns="0" tIns="0" bIns="0" anchor="ctr">
             <a:noAutofit/>
           </a:bodyPr>
           <a:lstStyle/>
@@ -15912,7 +16241,7 @@
               </a:defRPr>
             </a:pPr>
             <a:r>
-              <a:t>WE ARE CALLED TO ACT WITH JUSTICE,</a:t>
+              <a:t>GOD OF DAYBREAK, GOD OF SHADOW,</a:t>
             </a:r>
           </a:p>
           <a:p>
@@ -15931,7 +16260,7 @@
               </a:defRPr>
             </a:pPr>
             <a:r>
-              <a:t>WE ARE CALLED TO LOVE TENDERLY;</a:t>
+              <a:t>COME INTO OUR RESTLESS LIVES;</a:t>
             </a:r>
           </a:p>
           <a:p>
@@ -15950,7 +16279,7 @@
               </a:defRPr>
             </a:pPr>
             <a:r>
-              <a:t>WE ARE CALLED TO SERVE ONE ANOTHER,</a:t>
+              <a:t>LIFT FROM US THE FEAR OF SHADOWS,</a:t>
             </a:r>
           </a:p>
           <a:p>
@@ -15969,14 +16298,14 @@
               </a:defRPr>
             </a:pPr>
             <a:r>
-              <a:t>TO WALK HUMBLY WITH GOD.</a:t>
-            </a:r>
-          </a:p>
-        </p:txBody>
-      </p:sp>
-      <p:sp>
-        <p:nvSpPr>
-          <p:cNvPr id="4" name="TextBox 3"/>
+              <a:t>THAT WE MAY ARISE WITH LIGHT.</a:t>
+            </a:r>
+          </a:p>
+        </p:txBody>
+      </p:sp>
+      <p:sp>
+        <p:nvSpPr>
+          <p:cNvPr id="3" name="TextBox 2"/>
           <p:cNvSpPr txBox="1"/>
           <p:nvPr/>
         </p:nvSpPr>
@@ -16077,26 +16406,7 @@
               </a:defRPr>
             </a:pPr>
             <a:r>
-              <a:t>COME! LIVE IN THE LIGHT!</a:t>
-            </a:r>
-          </a:p>
-          <a:p>
-            <a:pPr algn="ctr">
-              <a:lnSpc>
-                <a:spcPct val="100000"/>
-              </a:lnSpc>
-              <a:spcAft>
-                <a:spcPts val="600"/>
-              </a:spcAft>
-              <a:defRPr sz="5500" b="1" i="0">
-                <a:solidFill>
-                  <a:srgbClr val="FFFFFF"/>
-                </a:solidFill>
-                <a:latin typeface="Arial Black"/>
-              </a:defRPr>
-            </a:pPr>
-            <a:r>
-              <a:t>SHINE WITH THE JOY AND THE LOVE OF THE LORD!</a:t>
+              <a:t>WE ARE CALLED TO ACT WITH JUSTICE...</a:t>
             </a:r>
           </a:p>
         </p:txBody>
@@ -16204,64 +16514,7 @@
               </a:defRPr>
             </a:pPr>
             <a:r>
-              <a:t>GOD OF DAYBREAK, GOD OF SHADOW,</a:t>
-            </a:r>
-          </a:p>
-          <a:p>
-            <a:pPr algn="ctr">
-              <a:lnSpc>
-                <a:spcPct val="100000"/>
-              </a:lnSpc>
-              <a:spcAft>
-                <a:spcPts val="600"/>
-              </a:spcAft>
-              <a:defRPr sz="5500" b="1" i="0">
-                <a:solidFill>
-                  <a:srgbClr val="FFFFFF"/>
-                </a:solidFill>
-                <a:latin typeface="Arial Black"/>
-              </a:defRPr>
-            </a:pPr>
-            <a:r>
-              <a:t>COME INTO OUR RESTLESS LIVES;</a:t>
-            </a:r>
-          </a:p>
-          <a:p>
-            <a:pPr algn="ctr">
-              <a:lnSpc>
-                <a:spcPct val="100000"/>
-              </a:lnSpc>
-              <a:spcAft>
-                <a:spcPts val="600"/>
-              </a:spcAft>
-              <a:defRPr sz="5500" b="1" i="0">
-                <a:solidFill>
-                  <a:srgbClr val="FFFFFF"/>
-                </a:solidFill>
-                <a:latin typeface="Arial Black"/>
-              </a:defRPr>
-            </a:pPr>
-            <a:r>
-              <a:t>LIFT FROM US THE FEAR OF SHADOWS,</a:t>
-            </a:r>
-          </a:p>
-          <a:p>
-            <a:pPr algn="ctr">
-              <a:lnSpc>
-                <a:spcPct val="100000"/>
-              </a:lnSpc>
-              <a:spcAft>
-                <a:spcPts val="600"/>
-              </a:spcAft>
-              <a:defRPr sz="5500" b="1" i="0">
-                <a:solidFill>
-                  <a:srgbClr val="FFFFFF"/>
-                </a:solidFill>
-                <a:latin typeface="Arial Black"/>
-              </a:defRPr>
-            </a:pPr>
-            <a:r>
-              <a:t>THAT WE MAY ARISE WITH LIGHT.</a:t>
+              <a:t>COME! LIVE IN THE LIGHT!...</a:t>
             </a:r>
           </a:p>
         </p:txBody>
@@ -16369,7 +16622,64 @@
               </a:defRPr>
             </a:pPr>
             <a:r>
-              <a:t>WE ARE CALLED TO ACT WITH JUSTICE...</a:t>
+              <a:t>GOD OF NEWNESS, GOD OF FRESHNESS,</a:t>
+            </a:r>
+          </a:p>
+          <a:p>
+            <a:pPr algn="ctr">
+              <a:lnSpc>
+                <a:spcPct val="100000"/>
+              </a:lnSpc>
+              <a:spcAft>
+                <a:spcPts val="600"/>
+              </a:spcAft>
+              <a:defRPr sz="5500" b="1" i="0">
+                <a:solidFill>
+                  <a:srgbClr val="FFFFFF"/>
+                </a:solidFill>
+                <a:latin typeface="Arial Black"/>
+              </a:defRPr>
+            </a:pPr>
+            <a:r>
+              <a:t>COME INTO OUR MORNING SONG:</a:t>
+            </a:r>
+          </a:p>
+          <a:p>
+            <a:pPr algn="ctr">
+              <a:lnSpc>
+                <a:spcPct val="100000"/>
+              </a:lnSpc>
+              <a:spcAft>
+                <a:spcPts val="600"/>
+              </a:spcAft>
+              <a:defRPr sz="5500" b="1" i="0">
+                <a:solidFill>
+                  <a:srgbClr val="FFFFFF"/>
+                </a:solidFill>
+                <a:latin typeface="Arial Black"/>
+              </a:defRPr>
+            </a:pPr>
+            <a:r>
+              <a:t>GIVE TO US A NEW BEGINNING,</a:t>
+            </a:r>
+          </a:p>
+          <a:p>
+            <a:pPr algn="ctr">
+              <a:lnSpc>
+                <a:spcPct val="100000"/>
+              </a:lnSpc>
+              <a:spcAft>
+                <a:spcPts val="600"/>
+              </a:spcAft>
+              <a:defRPr sz="5500" b="1" i="0">
+                <a:solidFill>
+                  <a:srgbClr val="FFFFFF"/>
+                </a:solidFill>
+                <a:latin typeface="Arial Black"/>
+              </a:defRPr>
+            </a:pPr>
+            <a:r>
+              <a:t>SEND US FORTH WITH HEARTS MADE STRONG.</a:t>
             </a:r>
           </a:p>
         </p:txBody>
@@ -16477,7 +16787,7 @@
               </a:defRPr>
             </a:pPr>
             <a:r>
-              <a:t>COME! LIVE IN THE LIGHT!...</a:t>
+              <a:t>WE ARE CALLED TO ACT WITH JUSTICE...</a:t>
             </a:r>
           </a:p>
         </p:txBody>
@@ -16585,64 +16895,7 @@
               </a:defRPr>
             </a:pPr>
             <a:r>
-              <a:t>GOD OF NEWNESS, GOD OF FRESHNESS,</a:t>
-            </a:r>
-          </a:p>
-          <a:p>
-            <a:pPr algn="ctr">
-              <a:lnSpc>
-                <a:spcPct val="100000"/>
-              </a:lnSpc>
-              <a:spcAft>
-                <a:spcPts val="600"/>
-              </a:spcAft>
-              <a:defRPr sz="5500" b="1" i="0">
-                <a:solidFill>
-                  <a:srgbClr val="FFFFFF"/>
-                </a:solidFill>
-                <a:latin typeface="Arial Black"/>
-              </a:defRPr>
-            </a:pPr>
-            <a:r>
-              <a:t>COME INTO OUR MORNING SONG:</a:t>
-            </a:r>
-          </a:p>
-          <a:p>
-            <a:pPr algn="ctr">
-              <a:lnSpc>
-                <a:spcPct val="100000"/>
-              </a:lnSpc>
-              <a:spcAft>
-                <a:spcPts val="600"/>
-              </a:spcAft>
-              <a:defRPr sz="5500" b="1" i="0">
-                <a:solidFill>
-                  <a:srgbClr val="FFFFFF"/>
-                </a:solidFill>
-                <a:latin typeface="Arial Black"/>
-              </a:defRPr>
-            </a:pPr>
-            <a:r>
-              <a:t>GIVE TO US A NEW BEGINNING,</a:t>
-            </a:r>
-          </a:p>
-          <a:p>
-            <a:pPr algn="ctr">
-              <a:lnSpc>
-                <a:spcPct val="100000"/>
-              </a:lnSpc>
-              <a:spcAft>
-                <a:spcPts val="600"/>
-              </a:spcAft>
-              <a:defRPr sz="5500" b="1" i="0">
-                <a:solidFill>
-                  <a:srgbClr val="FFFFFF"/>
-                </a:solidFill>
-                <a:latin typeface="Arial Black"/>
-              </a:defRPr>
-            </a:pPr>
-            <a:r>
-              <a:t>SEND US FORTH WITH HEARTS MADE STRONG.</a:t>
+              <a:t>COME! LIVE IN THE LIGHT!...</a:t>
             </a:r>
           </a:p>
         </p:txBody>
@@ -16696,222 +16949,6 @@
 </file>
 
 <file path=ppt/slides/slide87.xml><?xml version="1.0" encoding="utf-8"?>
-<p:sld xmlns:a="http://schemas.openxmlformats.org/drawingml/2006/main" xmlns:p="http://schemas.openxmlformats.org/presentationml/2006/main" xmlns:r="http://schemas.openxmlformats.org/officeDocument/2006/relationships">
-  <p:cSld>
-    <p:bg>
-      <p:bgPr>
-        <a:solidFill>
-          <a:srgbClr val="000000"/>
-        </a:solidFill>
-        <a:effectLst/>
-      </p:bgPr>
-    </p:bg>
-    <p:spTree>
-      <p:nvGrpSpPr>
-        <p:cNvPr id="1" name=""/>
-        <p:cNvGrpSpPr/>
-        <p:nvPr/>
-      </p:nvGrpSpPr>
-      <p:grpSpPr/>
-      <p:sp>
-        <p:nvSpPr>
-          <p:cNvPr id="2" name="TextBox 1"/>
-          <p:cNvSpPr txBox="1"/>
-          <p:nvPr/>
-        </p:nvSpPr>
-        <p:spPr>
-          <a:xfrm>
-            <a:off x="0" y="0"/>
-            <a:ext cx="18288000" cy="10287000"/>
-          </a:xfrm>
-          <a:prstGeom prst="rect">
-            <a:avLst/>
-          </a:prstGeom>
-          <a:noFill/>
-        </p:spPr>
-        <p:txBody>
-          <a:bodyPr wrap="square" lIns="0" rIns="0" tIns="0" bIns="0" anchor="ctr">
-            <a:noAutofit/>
-          </a:bodyPr>
-          <a:lstStyle/>
-          <a:p>
-            <a:pPr algn="ctr">
-              <a:lnSpc>
-                <a:spcPct val="100000"/>
-              </a:lnSpc>
-              <a:spcAft>
-                <a:spcPts val="600"/>
-              </a:spcAft>
-              <a:defRPr sz="5500" b="1" i="0">
-                <a:solidFill>
-                  <a:srgbClr val="FFFFFF"/>
-                </a:solidFill>
-                <a:latin typeface="Arial Black"/>
-              </a:defRPr>
-            </a:pPr>
-            <a:r>
-              <a:t>WE ARE CALLED TO ACT WITH JUSTICE...</a:t>
-            </a:r>
-          </a:p>
-        </p:txBody>
-      </p:sp>
-      <p:sp>
-        <p:nvSpPr>
-          <p:cNvPr id="3" name="TextBox 2"/>
-          <p:cNvSpPr txBox="1"/>
-          <p:nvPr/>
-        </p:nvSpPr>
-        <p:spPr>
-          <a:xfrm>
-            <a:off x="914400" y="9418320"/>
-            <a:ext cx="16459200" cy="777240"/>
-          </a:xfrm>
-          <a:prstGeom prst="rect">
-            <a:avLst/>
-          </a:prstGeom>
-          <a:noFill/>
-        </p:spPr>
-        <p:txBody>
-          <a:bodyPr wrap="square" lIns="109728" rIns="109728" tIns="73152" bIns="73152">
-            <a:noAutofit/>
-          </a:bodyPr>
-          <a:lstStyle/>
-          <a:p/>
-          <a:p>
-            <a:pPr>
-              <a:spcBef>
-                <a:spcPts val="200"/>
-              </a:spcBef>
-              <a:defRPr sz="1200" b="0" i="0">
-                <a:solidFill>
-                  <a:srgbClr val="FFCC4D"/>
-                </a:solidFill>
-                <a:latin typeface="Inter"/>
-              </a:defRPr>
-            </a:pPr>
-            <a:r>
-              <a:t>Recessional</a:t>
-            </a:r>
-          </a:p>
-        </p:txBody>
-      </p:sp>
-    </p:spTree>
-  </p:cSld>
-  <p:clrMapOvr>
-    <a:masterClrMapping/>
-  </p:clrMapOvr>
-</p:sld>
-</file>
-
-<file path=ppt/slides/slide88.xml><?xml version="1.0" encoding="utf-8"?>
-<p:sld xmlns:a="http://schemas.openxmlformats.org/drawingml/2006/main" xmlns:p="http://schemas.openxmlformats.org/presentationml/2006/main" xmlns:r="http://schemas.openxmlformats.org/officeDocument/2006/relationships">
-  <p:cSld>
-    <p:bg>
-      <p:bgPr>
-        <a:solidFill>
-          <a:srgbClr val="000000"/>
-        </a:solidFill>
-        <a:effectLst/>
-      </p:bgPr>
-    </p:bg>
-    <p:spTree>
-      <p:nvGrpSpPr>
-        <p:cNvPr id="1" name=""/>
-        <p:cNvGrpSpPr/>
-        <p:nvPr/>
-      </p:nvGrpSpPr>
-      <p:grpSpPr/>
-      <p:sp>
-        <p:nvSpPr>
-          <p:cNvPr id="2" name="TextBox 1"/>
-          <p:cNvSpPr txBox="1"/>
-          <p:nvPr/>
-        </p:nvSpPr>
-        <p:spPr>
-          <a:xfrm>
-            <a:off x="0" y="0"/>
-            <a:ext cx="18288000" cy="10287000"/>
-          </a:xfrm>
-          <a:prstGeom prst="rect">
-            <a:avLst/>
-          </a:prstGeom>
-          <a:noFill/>
-        </p:spPr>
-        <p:txBody>
-          <a:bodyPr wrap="square" lIns="0" rIns="0" tIns="0" bIns="0" anchor="ctr">
-            <a:noAutofit/>
-          </a:bodyPr>
-          <a:lstStyle/>
-          <a:p>
-            <a:pPr algn="ctr">
-              <a:lnSpc>
-                <a:spcPct val="100000"/>
-              </a:lnSpc>
-              <a:spcAft>
-                <a:spcPts val="600"/>
-              </a:spcAft>
-              <a:defRPr sz="5500" b="1" i="0">
-                <a:solidFill>
-                  <a:srgbClr val="FFFFFF"/>
-                </a:solidFill>
-                <a:latin typeface="Arial Black"/>
-              </a:defRPr>
-            </a:pPr>
-            <a:r>
-              <a:t>COME! LIVE IN THE LIGHT!...</a:t>
-            </a:r>
-          </a:p>
-        </p:txBody>
-      </p:sp>
-      <p:sp>
-        <p:nvSpPr>
-          <p:cNvPr id="3" name="TextBox 2"/>
-          <p:cNvSpPr txBox="1"/>
-          <p:nvPr/>
-        </p:nvSpPr>
-        <p:spPr>
-          <a:xfrm>
-            <a:off x="914400" y="9418320"/>
-            <a:ext cx="16459200" cy="777240"/>
-          </a:xfrm>
-          <a:prstGeom prst="rect">
-            <a:avLst/>
-          </a:prstGeom>
-          <a:noFill/>
-        </p:spPr>
-        <p:txBody>
-          <a:bodyPr wrap="square" lIns="109728" rIns="109728" tIns="73152" bIns="73152">
-            <a:noAutofit/>
-          </a:bodyPr>
-          <a:lstStyle/>
-          <a:p/>
-          <a:p>
-            <a:pPr>
-              <a:spcBef>
-                <a:spcPts val="200"/>
-              </a:spcBef>
-              <a:defRPr sz="1200" b="0" i="0">
-                <a:solidFill>
-                  <a:srgbClr val="FFCC4D"/>
-                </a:solidFill>
-                <a:latin typeface="Inter"/>
-              </a:defRPr>
-            </a:pPr>
-            <a:r>
-              <a:t>Recessional</a:t>
-            </a:r>
-          </a:p>
-        </p:txBody>
-      </p:sp>
-    </p:spTree>
-  </p:cSld>
-  <p:clrMapOvr>
-    <a:masterClrMapping/>
-  </p:clrMapOvr>
-</p:sld>
-</file>
-
-<file path=ppt/slides/slide89.xml><?xml version="1.0" encoding="utf-8"?>
 <p:sld xmlns:a="http://schemas.openxmlformats.org/drawingml/2006/main" xmlns:p="http://schemas.openxmlformats.org/presentationml/2006/main" xmlns:r="http://schemas.openxmlformats.org/officeDocument/2006/relationships">
   <p:cSld>
     <p:spTree>
@@ -16995,7 +17032,7 @@
               </a:defRPr>
             </a:pPr>
             <a:r>
-              <a:t>Rev. Fr. Jonrey Lauron, RCJ</a:t>
+              <a:t>Fr. Michael Hwang</a:t>
             </a:r>
           </a:p>
           <a:p>

--- a/outputs/GFCC7Jun2026_OrdinaryTime.pptx
+++ b/outputs/GFCC7Jun2026_OrdinaryTime.pptx
@@ -6160,7 +6160,7 @@
               </a:defRPr>
             </a:pPr>
             <a:r>
-              <a:t>Rev. Fr. Jonrey Lauron, RCJ</a:t>
+              <a:t>Fr. Macario Lee</a:t>
             </a:r>
           </a:p>
         </p:txBody>
@@ -6838,7 +6838,7 @@
       <p:grpSpPr/>
       <p:pic>
         <p:nvPicPr>
-          <p:cNvPr id="2" name="Picture 1" descr="divider_383479ed2b994d7885816aa55fa37f9a.jpg"/>
+          <p:cNvPr id="2" name="Picture 1" descr="GFCC7Jun2026_OrdinaryTime_16x9.png"/>
           <p:cNvPicPr>
             <a:picLocks noChangeAspect="1"/>
           </p:cNvPicPr>
@@ -6860,6 +6860,191 @@
           </a:prstGeom>
         </p:spPr>
       </p:pic>
+      <p:sp>
+        <p:nvSpPr>
+          <p:cNvPr id="3" name="TextBox 2"/>
+          <p:cNvSpPr txBox="1"/>
+          <p:nvPr/>
+        </p:nvSpPr>
+        <p:spPr>
+          <a:xfrm>
+            <a:off x="914400" y="850392"/>
+            <a:ext cx="16459200" cy="5943600"/>
+          </a:xfrm>
+          <a:prstGeom prst="rect">
+            <a:avLst/>
+          </a:prstGeom>
+          <a:noFill/>
+        </p:spPr>
+        <p:txBody>
+          <a:bodyPr wrap="square" lIns="109728" rIns="109728" tIns="73152" bIns="73152">
+            <a:noAutofit/>
+          </a:bodyPr>
+          <a:lstStyle/>
+          <a:p>
+            <a:pPr algn="ctr">
+              <a:spcAft>
+                <a:spcPts val="300"/>
+              </a:spcAft>
+              <a:defRPr sz="5500" b="1" i="0">
+                <a:solidFill>
+                  <a:srgbClr val="86EFAC"/>
+                </a:solidFill>
+                <a:latin typeface="Inter"/>
+              </a:defRPr>
+            </a:pPr>
+            <a:r>
+              <a:t>MASS CELEBRANT:</a:t>
+            </a:r>
+          </a:p>
+          <a:p>
+            <a:pPr algn="ctr">
+              <a:spcAft>
+                <a:spcPts val="300"/>
+              </a:spcAft>
+              <a:defRPr sz="5500" b="0" i="0">
+                <a:solidFill>
+                  <a:srgbClr val="F0FDF4"/>
+                </a:solidFill>
+                <a:latin typeface="Inter"/>
+              </a:defRPr>
+            </a:pPr>
+            <a:r>
+              <a:t>Fr. Macario Lee</a:t>
+            </a:r>
+          </a:p>
+          <a:p>
+            <a:pPr algn="ctr">
+              <a:spcAft>
+                <a:spcPts val="300"/>
+              </a:spcAft>
+              <a:defRPr sz="5500" b="0" i="0">
+                <a:solidFill>
+                  <a:srgbClr val="F0FDF4"/>
+                </a:solidFill>
+                <a:latin typeface="Inter"/>
+              </a:defRPr>
+            </a:pPr>
+          </a:p>
+          <a:p>
+            <a:pPr algn="ctr">
+              <a:spcAft>
+                <a:spcPts val="300"/>
+              </a:spcAft>
+              <a:defRPr sz="5500" b="0" i="0">
+                <a:solidFill>
+                  <a:srgbClr val="F0FDF4"/>
+                </a:solidFill>
+                <a:latin typeface="Inter"/>
+              </a:defRPr>
+            </a:pPr>
+            <a:r>
+              <a:t>Gospel (John 6:51-58)</a:t>
+            </a:r>
+          </a:p>
+          <a:p>
+            <a:pPr algn="ctr">
+              <a:spcAft>
+                <a:spcPts val="300"/>
+              </a:spcAft>
+              <a:defRPr sz="5500" b="0" i="0">
+                <a:solidFill>
+                  <a:srgbClr val="F0FDF4"/>
+                </a:solidFill>
+                <a:latin typeface="Inter"/>
+              </a:defRPr>
+            </a:pPr>
+            <a:r>
+              <a:t>“I am the living bread that came down from heaven; whoever eats this bread will live forever; and the bread that I will give is my flesh for the life of the world.”</a:t>
+            </a:r>
+          </a:p>
+          <a:p>
+            <a:pPr algn="ctr">
+              <a:spcAft>
+                <a:spcPts val="300"/>
+              </a:spcAft>
+              <a:defRPr sz="5500" b="0" i="0">
+                <a:solidFill>
+                  <a:srgbClr val="F0FDF4"/>
+                </a:solidFill>
+                <a:latin typeface="Inter"/>
+              </a:defRPr>
+            </a:pPr>
+          </a:p>
+          <a:p>
+            <a:pPr algn="ctr">
+              <a:spcAft>
+                <a:spcPts val="300"/>
+              </a:spcAft>
+              <a:defRPr sz="5500" b="0" i="0">
+                <a:solidFill>
+                  <a:srgbClr val="F0FDF4"/>
+                </a:solidFill>
+                <a:latin typeface="Inter"/>
+              </a:defRPr>
+            </a:pPr>
+            <a:r>
+              <a:t>YEAR A</a:t>
+            </a:r>
+          </a:p>
+          <a:p>
+            <a:pPr algn="ctr">
+              <a:spcAft>
+                <a:spcPts val="300"/>
+              </a:spcAft>
+              <a:defRPr sz="5500" b="0" i="0">
+                <a:solidFill>
+                  <a:srgbClr val="F0FDF4"/>
+                </a:solidFill>
+                <a:latin typeface="Inter"/>
+              </a:defRPr>
+            </a:pPr>
+            <a:r>
+              <a:t>2026-06-07 · Ordinary Time</a:t>
+            </a:r>
+          </a:p>
+        </p:txBody>
+      </p:sp>
+      <p:sp>
+        <p:nvSpPr>
+          <p:cNvPr id="4" name="TextBox 3"/>
+          <p:cNvSpPr txBox="1"/>
+          <p:nvPr/>
+        </p:nvSpPr>
+        <p:spPr>
+          <a:xfrm>
+            <a:off x="914400" y="9418320"/>
+            <a:ext cx="16459200" cy="777240"/>
+          </a:xfrm>
+          <a:prstGeom prst="rect">
+            <a:avLst/>
+          </a:prstGeom>
+          <a:noFill/>
+        </p:spPr>
+        <p:txBody>
+          <a:bodyPr wrap="square" lIns="109728" rIns="109728" tIns="73152" bIns="73152">
+            <a:noAutofit/>
+          </a:bodyPr>
+          <a:lstStyle/>
+          <a:p/>
+          <a:p>
+            <a:pPr algn="l">
+              <a:spcBef>
+                <a:spcPts val="200"/>
+              </a:spcBef>
+              <a:defRPr sz="1200" b="0" i="0">
+                <a:solidFill>
+                  <a:srgbClr val="86EFAC"/>
+                </a:solidFill>
+                <a:latin typeface="Inter"/>
+              </a:defRPr>
+            </a:pPr>
+            <a:r>
+              <a:t>Mass poster / divider</a:t>
+            </a:r>
+          </a:p>
+        </p:txBody>
+      </p:sp>
     </p:spTree>
   </p:cSld>
   <p:clrMapOvr>
@@ -8486,7 +8671,7 @@
       <p:grpSpPr/>
       <p:pic>
         <p:nvPicPr>
-          <p:cNvPr id="2" name="Picture 1" descr="divider_383479ed2b994d7885816aa55fa37f9a.jpg"/>
+          <p:cNvPr id="2" name="Picture 1" descr="GFCC7Jun2026_OrdinaryTime_16x9.png"/>
           <p:cNvPicPr>
             <a:picLocks noChangeAspect="1"/>
           </p:cNvPicPr>
@@ -8508,6 +8693,191 @@
           </a:prstGeom>
         </p:spPr>
       </p:pic>
+      <p:sp>
+        <p:nvSpPr>
+          <p:cNvPr id="3" name="TextBox 2"/>
+          <p:cNvSpPr txBox="1"/>
+          <p:nvPr/>
+        </p:nvSpPr>
+        <p:spPr>
+          <a:xfrm>
+            <a:off x="914400" y="850392"/>
+            <a:ext cx="16459200" cy="5943600"/>
+          </a:xfrm>
+          <a:prstGeom prst="rect">
+            <a:avLst/>
+          </a:prstGeom>
+          <a:noFill/>
+        </p:spPr>
+        <p:txBody>
+          <a:bodyPr wrap="square" lIns="109728" rIns="109728" tIns="73152" bIns="73152">
+            <a:noAutofit/>
+          </a:bodyPr>
+          <a:lstStyle/>
+          <a:p>
+            <a:pPr algn="ctr">
+              <a:spcAft>
+                <a:spcPts val="300"/>
+              </a:spcAft>
+              <a:defRPr sz="5500" b="1" i="0">
+                <a:solidFill>
+                  <a:srgbClr val="86EFAC"/>
+                </a:solidFill>
+                <a:latin typeface="Inter"/>
+              </a:defRPr>
+            </a:pPr>
+            <a:r>
+              <a:t>MASS CELEBRANT:</a:t>
+            </a:r>
+          </a:p>
+          <a:p>
+            <a:pPr algn="ctr">
+              <a:spcAft>
+                <a:spcPts val="300"/>
+              </a:spcAft>
+              <a:defRPr sz="5500" b="0" i="0">
+                <a:solidFill>
+                  <a:srgbClr val="F0FDF4"/>
+                </a:solidFill>
+                <a:latin typeface="Inter"/>
+              </a:defRPr>
+            </a:pPr>
+            <a:r>
+              <a:t>Fr. Macario Lee</a:t>
+            </a:r>
+          </a:p>
+          <a:p>
+            <a:pPr algn="ctr">
+              <a:spcAft>
+                <a:spcPts val="300"/>
+              </a:spcAft>
+              <a:defRPr sz="5500" b="0" i="0">
+                <a:solidFill>
+                  <a:srgbClr val="F0FDF4"/>
+                </a:solidFill>
+                <a:latin typeface="Inter"/>
+              </a:defRPr>
+            </a:pPr>
+          </a:p>
+          <a:p>
+            <a:pPr algn="ctr">
+              <a:spcAft>
+                <a:spcPts val="300"/>
+              </a:spcAft>
+              <a:defRPr sz="5500" b="0" i="0">
+                <a:solidFill>
+                  <a:srgbClr val="F0FDF4"/>
+                </a:solidFill>
+                <a:latin typeface="Inter"/>
+              </a:defRPr>
+            </a:pPr>
+            <a:r>
+              <a:t>Gospel (John 6:51-58)</a:t>
+            </a:r>
+          </a:p>
+          <a:p>
+            <a:pPr algn="ctr">
+              <a:spcAft>
+                <a:spcPts val="300"/>
+              </a:spcAft>
+              <a:defRPr sz="5500" b="0" i="0">
+                <a:solidFill>
+                  <a:srgbClr val="F0FDF4"/>
+                </a:solidFill>
+                <a:latin typeface="Inter"/>
+              </a:defRPr>
+            </a:pPr>
+            <a:r>
+              <a:t>“I am the living bread that came down from heaven; whoever eats this bread will live forever; and the bread that I will give is my flesh for the life of the world.”</a:t>
+            </a:r>
+          </a:p>
+          <a:p>
+            <a:pPr algn="ctr">
+              <a:spcAft>
+                <a:spcPts val="300"/>
+              </a:spcAft>
+              <a:defRPr sz="5500" b="0" i="0">
+                <a:solidFill>
+                  <a:srgbClr val="F0FDF4"/>
+                </a:solidFill>
+                <a:latin typeface="Inter"/>
+              </a:defRPr>
+            </a:pPr>
+          </a:p>
+          <a:p>
+            <a:pPr algn="ctr">
+              <a:spcAft>
+                <a:spcPts val="300"/>
+              </a:spcAft>
+              <a:defRPr sz="5500" b="0" i="0">
+                <a:solidFill>
+                  <a:srgbClr val="F0FDF4"/>
+                </a:solidFill>
+                <a:latin typeface="Inter"/>
+              </a:defRPr>
+            </a:pPr>
+            <a:r>
+              <a:t>YEAR A</a:t>
+            </a:r>
+          </a:p>
+          <a:p>
+            <a:pPr algn="ctr">
+              <a:spcAft>
+                <a:spcPts val="300"/>
+              </a:spcAft>
+              <a:defRPr sz="5500" b="0" i="0">
+                <a:solidFill>
+                  <a:srgbClr val="F0FDF4"/>
+                </a:solidFill>
+                <a:latin typeface="Inter"/>
+              </a:defRPr>
+            </a:pPr>
+            <a:r>
+              <a:t>2026-06-07 · Ordinary Time</a:t>
+            </a:r>
+          </a:p>
+        </p:txBody>
+      </p:sp>
+      <p:sp>
+        <p:nvSpPr>
+          <p:cNvPr id="4" name="TextBox 3"/>
+          <p:cNvSpPr txBox="1"/>
+          <p:nvPr/>
+        </p:nvSpPr>
+        <p:spPr>
+          <a:xfrm>
+            <a:off x="914400" y="9418320"/>
+            <a:ext cx="16459200" cy="777240"/>
+          </a:xfrm>
+          <a:prstGeom prst="rect">
+            <a:avLst/>
+          </a:prstGeom>
+          <a:noFill/>
+        </p:spPr>
+        <p:txBody>
+          <a:bodyPr wrap="square" lIns="109728" rIns="109728" tIns="73152" bIns="73152">
+            <a:noAutofit/>
+          </a:bodyPr>
+          <a:lstStyle/>
+          <a:p/>
+          <a:p>
+            <a:pPr algn="l">
+              <a:spcBef>
+                <a:spcPts val="200"/>
+              </a:spcBef>
+              <a:defRPr sz="1200" b="0" i="0">
+                <a:solidFill>
+                  <a:srgbClr val="86EFAC"/>
+                </a:solidFill>
+                <a:latin typeface="Inter"/>
+              </a:defRPr>
+            </a:pPr>
+            <a:r>
+              <a:t>Mass poster / divider</a:t>
+            </a:r>
+          </a:p>
+        </p:txBody>
+      </p:sp>
     </p:spTree>
   </p:cSld>
   <p:clrMapOvr>
@@ -8801,7 +9171,7 @@
       <p:grpSpPr/>
       <p:pic>
         <p:nvPicPr>
-          <p:cNvPr id="2" name="Picture 1" descr="divider_383479ed2b994d7885816aa55fa37f9a.jpg"/>
+          <p:cNvPr id="2" name="Picture 1" descr="GFCC7Jun2026_OrdinaryTime_16x9.png"/>
           <p:cNvPicPr>
             <a:picLocks noChangeAspect="1"/>
           </p:cNvPicPr>
@@ -8823,6 +9193,191 @@
           </a:prstGeom>
         </p:spPr>
       </p:pic>
+      <p:sp>
+        <p:nvSpPr>
+          <p:cNvPr id="3" name="TextBox 2"/>
+          <p:cNvSpPr txBox="1"/>
+          <p:nvPr/>
+        </p:nvSpPr>
+        <p:spPr>
+          <a:xfrm>
+            <a:off x="914400" y="850392"/>
+            <a:ext cx="16459200" cy="5943600"/>
+          </a:xfrm>
+          <a:prstGeom prst="rect">
+            <a:avLst/>
+          </a:prstGeom>
+          <a:noFill/>
+        </p:spPr>
+        <p:txBody>
+          <a:bodyPr wrap="square" lIns="109728" rIns="109728" tIns="73152" bIns="73152">
+            <a:noAutofit/>
+          </a:bodyPr>
+          <a:lstStyle/>
+          <a:p>
+            <a:pPr algn="ctr">
+              <a:spcAft>
+                <a:spcPts val="300"/>
+              </a:spcAft>
+              <a:defRPr sz="5500" b="1" i="0">
+                <a:solidFill>
+                  <a:srgbClr val="86EFAC"/>
+                </a:solidFill>
+                <a:latin typeface="Inter"/>
+              </a:defRPr>
+            </a:pPr>
+            <a:r>
+              <a:t>MASS CELEBRANT:</a:t>
+            </a:r>
+          </a:p>
+          <a:p>
+            <a:pPr algn="ctr">
+              <a:spcAft>
+                <a:spcPts val="300"/>
+              </a:spcAft>
+              <a:defRPr sz="5500" b="0" i="0">
+                <a:solidFill>
+                  <a:srgbClr val="F0FDF4"/>
+                </a:solidFill>
+                <a:latin typeface="Inter"/>
+              </a:defRPr>
+            </a:pPr>
+            <a:r>
+              <a:t>Fr. Macario Lee</a:t>
+            </a:r>
+          </a:p>
+          <a:p>
+            <a:pPr algn="ctr">
+              <a:spcAft>
+                <a:spcPts val="300"/>
+              </a:spcAft>
+              <a:defRPr sz="5500" b="0" i="0">
+                <a:solidFill>
+                  <a:srgbClr val="F0FDF4"/>
+                </a:solidFill>
+                <a:latin typeface="Inter"/>
+              </a:defRPr>
+            </a:pPr>
+          </a:p>
+          <a:p>
+            <a:pPr algn="ctr">
+              <a:spcAft>
+                <a:spcPts val="300"/>
+              </a:spcAft>
+              <a:defRPr sz="5500" b="0" i="0">
+                <a:solidFill>
+                  <a:srgbClr val="F0FDF4"/>
+                </a:solidFill>
+                <a:latin typeface="Inter"/>
+              </a:defRPr>
+            </a:pPr>
+            <a:r>
+              <a:t>Gospel (John 6:51-58)</a:t>
+            </a:r>
+          </a:p>
+          <a:p>
+            <a:pPr algn="ctr">
+              <a:spcAft>
+                <a:spcPts val="300"/>
+              </a:spcAft>
+              <a:defRPr sz="5500" b="0" i="0">
+                <a:solidFill>
+                  <a:srgbClr val="F0FDF4"/>
+                </a:solidFill>
+                <a:latin typeface="Inter"/>
+              </a:defRPr>
+            </a:pPr>
+            <a:r>
+              <a:t>“I am the living bread that came down from heaven; whoever eats this bread will live forever; and the bread that I will give is my flesh for the life of the world.”</a:t>
+            </a:r>
+          </a:p>
+          <a:p>
+            <a:pPr algn="ctr">
+              <a:spcAft>
+                <a:spcPts val="300"/>
+              </a:spcAft>
+              <a:defRPr sz="5500" b="0" i="0">
+                <a:solidFill>
+                  <a:srgbClr val="F0FDF4"/>
+                </a:solidFill>
+                <a:latin typeface="Inter"/>
+              </a:defRPr>
+            </a:pPr>
+          </a:p>
+          <a:p>
+            <a:pPr algn="ctr">
+              <a:spcAft>
+                <a:spcPts val="300"/>
+              </a:spcAft>
+              <a:defRPr sz="5500" b="0" i="0">
+                <a:solidFill>
+                  <a:srgbClr val="F0FDF4"/>
+                </a:solidFill>
+                <a:latin typeface="Inter"/>
+              </a:defRPr>
+            </a:pPr>
+            <a:r>
+              <a:t>YEAR A</a:t>
+            </a:r>
+          </a:p>
+          <a:p>
+            <a:pPr algn="ctr">
+              <a:spcAft>
+                <a:spcPts val="300"/>
+              </a:spcAft>
+              <a:defRPr sz="5500" b="0" i="0">
+                <a:solidFill>
+                  <a:srgbClr val="F0FDF4"/>
+                </a:solidFill>
+                <a:latin typeface="Inter"/>
+              </a:defRPr>
+            </a:pPr>
+            <a:r>
+              <a:t>2026-06-07 · Ordinary Time</a:t>
+            </a:r>
+          </a:p>
+        </p:txBody>
+      </p:sp>
+      <p:sp>
+        <p:nvSpPr>
+          <p:cNvPr id="4" name="TextBox 3"/>
+          <p:cNvSpPr txBox="1"/>
+          <p:nvPr/>
+        </p:nvSpPr>
+        <p:spPr>
+          <a:xfrm>
+            <a:off x="914400" y="9418320"/>
+            <a:ext cx="16459200" cy="777240"/>
+          </a:xfrm>
+          <a:prstGeom prst="rect">
+            <a:avLst/>
+          </a:prstGeom>
+          <a:noFill/>
+        </p:spPr>
+        <p:txBody>
+          <a:bodyPr wrap="square" lIns="109728" rIns="109728" tIns="73152" bIns="73152">
+            <a:noAutofit/>
+          </a:bodyPr>
+          <a:lstStyle/>
+          <a:p/>
+          <a:p>
+            <a:pPr algn="l">
+              <a:spcBef>
+                <a:spcPts val="200"/>
+              </a:spcBef>
+              <a:defRPr sz="1200" b="0" i="0">
+                <a:solidFill>
+                  <a:srgbClr val="86EFAC"/>
+                </a:solidFill>
+                <a:latin typeface="Inter"/>
+              </a:defRPr>
+            </a:pPr>
+            <a:r>
+              <a:t>Mass poster / divider</a:t>
+            </a:r>
+          </a:p>
+        </p:txBody>
+      </p:sp>
     </p:spTree>
   </p:cSld>
   <p:clrMapOvr>
@@ -11689,7 +12244,7 @@
       <p:grpSpPr/>
       <p:pic>
         <p:nvPicPr>
-          <p:cNvPr id="2" name="Picture 1" descr="divider_383479ed2b994d7885816aa55fa37f9a.jpg"/>
+          <p:cNvPr id="2" name="Picture 1" descr="GFCC7Jun2026_OrdinaryTime_16x9.png"/>
           <p:cNvPicPr>
             <a:picLocks noChangeAspect="1"/>
           </p:cNvPicPr>
@@ -11711,6 +12266,191 @@
           </a:prstGeom>
         </p:spPr>
       </p:pic>
+      <p:sp>
+        <p:nvSpPr>
+          <p:cNvPr id="3" name="TextBox 2"/>
+          <p:cNvSpPr txBox="1"/>
+          <p:nvPr/>
+        </p:nvSpPr>
+        <p:spPr>
+          <a:xfrm>
+            <a:off x="914400" y="850392"/>
+            <a:ext cx="16459200" cy="5943600"/>
+          </a:xfrm>
+          <a:prstGeom prst="rect">
+            <a:avLst/>
+          </a:prstGeom>
+          <a:noFill/>
+        </p:spPr>
+        <p:txBody>
+          <a:bodyPr wrap="square" lIns="109728" rIns="109728" tIns="73152" bIns="73152">
+            <a:noAutofit/>
+          </a:bodyPr>
+          <a:lstStyle/>
+          <a:p>
+            <a:pPr algn="ctr">
+              <a:spcAft>
+                <a:spcPts val="300"/>
+              </a:spcAft>
+              <a:defRPr sz="5500" b="1" i="0">
+                <a:solidFill>
+                  <a:srgbClr val="86EFAC"/>
+                </a:solidFill>
+                <a:latin typeface="Inter"/>
+              </a:defRPr>
+            </a:pPr>
+            <a:r>
+              <a:t>MASS CELEBRANT:</a:t>
+            </a:r>
+          </a:p>
+          <a:p>
+            <a:pPr algn="ctr">
+              <a:spcAft>
+                <a:spcPts val="300"/>
+              </a:spcAft>
+              <a:defRPr sz="5500" b="0" i="0">
+                <a:solidFill>
+                  <a:srgbClr val="F0FDF4"/>
+                </a:solidFill>
+                <a:latin typeface="Inter"/>
+              </a:defRPr>
+            </a:pPr>
+            <a:r>
+              <a:t>Fr. Macario Lee</a:t>
+            </a:r>
+          </a:p>
+          <a:p>
+            <a:pPr algn="ctr">
+              <a:spcAft>
+                <a:spcPts val="300"/>
+              </a:spcAft>
+              <a:defRPr sz="5500" b="0" i="0">
+                <a:solidFill>
+                  <a:srgbClr val="F0FDF4"/>
+                </a:solidFill>
+                <a:latin typeface="Inter"/>
+              </a:defRPr>
+            </a:pPr>
+          </a:p>
+          <a:p>
+            <a:pPr algn="ctr">
+              <a:spcAft>
+                <a:spcPts val="300"/>
+              </a:spcAft>
+              <a:defRPr sz="5500" b="0" i="0">
+                <a:solidFill>
+                  <a:srgbClr val="F0FDF4"/>
+                </a:solidFill>
+                <a:latin typeface="Inter"/>
+              </a:defRPr>
+            </a:pPr>
+            <a:r>
+              <a:t>Gospel (John 6:51-58)</a:t>
+            </a:r>
+          </a:p>
+          <a:p>
+            <a:pPr algn="ctr">
+              <a:spcAft>
+                <a:spcPts val="300"/>
+              </a:spcAft>
+              <a:defRPr sz="5500" b="0" i="0">
+                <a:solidFill>
+                  <a:srgbClr val="F0FDF4"/>
+                </a:solidFill>
+                <a:latin typeface="Inter"/>
+              </a:defRPr>
+            </a:pPr>
+            <a:r>
+              <a:t>“I am the living bread that came down from heaven; whoever eats this bread will live forever; and the bread that I will give is my flesh for the life of the world.”</a:t>
+            </a:r>
+          </a:p>
+          <a:p>
+            <a:pPr algn="ctr">
+              <a:spcAft>
+                <a:spcPts val="300"/>
+              </a:spcAft>
+              <a:defRPr sz="5500" b="0" i="0">
+                <a:solidFill>
+                  <a:srgbClr val="F0FDF4"/>
+                </a:solidFill>
+                <a:latin typeface="Inter"/>
+              </a:defRPr>
+            </a:pPr>
+          </a:p>
+          <a:p>
+            <a:pPr algn="ctr">
+              <a:spcAft>
+                <a:spcPts val="300"/>
+              </a:spcAft>
+              <a:defRPr sz="5500" b="0" i="0">
+                <a:solidFill>
+                  <a:srgbClr val="F0FDF4"/>
+                </a:solidFill>
+                <a:latin typeface="Inter"/>
+              </a:defRPr>
+            </a:pPr>
+            <a:r>
+              <a:t>YEAR A</a:t>
+            </a:r>
+          </a:p>
+          <a:p>
+            <a:pPr algn="ctr">
+              <a:spcAft>
+                <a:spcPts val="300"/>
+              </a:spcAft>
+              <a:defRPr sz="5500" b="0" i="0">
+                <a:solidFill>
+                  <a:srgbClr val="F0FDF4"/>
+                </a:solidFill>
+                <a:latin typeface="Inter"/>
+              </a:defRPr>
+            </a:pPr>
+            <a:r>
+              <a:t>2026-06-07 · Ordinary Time</a:t>
+            </a:r>
+          </a:p>
+        </p:txBody>
+      </p:sp>
+      <p:sp>
+        <p:nvSpPr>
+          <p:cNvPr id="4" name="TextBox 3"/>
+          <p:cNvSpPr txBox="1"/>
+          <p:nvPr/>
+        </p:nvSpPr>
+        <p:spPr>
+          <a:xfrm>
+            <a:off x="914400" y="9418320"/>
+            <a:ext cx="16459200" cy="777240"/>
+          </a:xfrm>
+          <a:prstGeom prst="rect">
+            <a:avLst/>
+          </a:prstGeom>
+          <a:noFill/>
+        </p:spPr>
+        <p:txBody>
+          <a:bodyPr wrap="square" lIns="109728" rIns="109728" tIns="73152" bIns="73152">
+            <a:noAutofit/>
+          </a:bodyPr>
+          <a:lstStyle/>
+          <a:p/>
+          <a:p>
+            <a:pPr algn="l">
+              <a:spcBef>
+                <a:spcPts val="200"/>
+              </a:spcBef>
+              <a:defRPr sz="1200" b="0" i="0">
+                <a:solidFill>
+                  <a:srgbClr val="86EFAC"/>
+                </a:solidFill>
+                <a:latin typeface="Inter"/>
+              </a:defRPr>
+            </a:pPr>
+            <a:r>
+              <a:t>Mass poster / divider</a:t>
+            </a:r>
+          </a:p>
+        </p:txBody>
+      </p:sp>
     </p:spTree>
   </p:cSld>
   <p:clrMapOvr>
@@ -12785,7 +13525,7 @@
       <p:grpSpPr/>
       <p:pic>
         <p:nvPicPr>
-          <p:cNvPr id="2" name="Picture 1" descr="divider_383479ed2b994d7885816aa55fa37f9a.jpg"/>
+          <p:cNvPr id="2" name="Picture 1" descr="GFCC7Jun2026_OrdinaryTime_16x9.png"/>
           <p:cNvPicPr>
             <a:picLocks noChangeAspect="1"/>
           </p:cNvPicPr>
@@ -12807,6 +13547,191 @@
           </a:prstGeom>
         </p:spPr>
       </p:pic>
+      <p:sp>
+        <p:nvSpPr>
+          <p:cNvPr id="3" name="TextBox 2"/>
+          <p:cNvSpPr txBox="1"/>
+          <p:nvPr/>
+        </p:nvSpPr>
+        <p:spPr>
+          <a:xfrm>
+            <a:off x="914400" y="850392"/>
+            <a:ext cx="16459200" cy="5943600"/>
+          </a:xfrm>
+          <a:prstGeom prst="rect">
+            <a:avLst/>
+          </a:prstGeom>
+          <a:noFill/>
+        </p:spPr>
+        <p:txBody>
+          <a:bodyPr wrap="square" lIns="109728" rIns="109728" tIns="73152" bIns="73152">
+            <a:noAutofit/>
+          </a:bodyPr>
+          <a:lstStyle/>
+          <a:p>
+            <a:pPr algn="ctr">
+              <a:spcAft>
+                <a:spcPts val="300"/>
+              </a:spcAft>
+              <a:defRPr sz="5500" b="1" i="0">
+                <a:solidFill>
+                  <a:srgbClr val="86EFAC"/>
+                </a:solidFill>
+                <a:latin typeface="Inter"/>
+              </a:defRPr>
+            </a:pPr>
+            <a:r>
+              <a:t>MASS CELEBRANT:</a:t>
+            </a:r>
+          </a:p>
+          <a:p>
+            <a:pPr algn="ctr">
+              <a:spcAft>
+                <a:spcPts val="300"/>
+              </a:spcAft>
+              <a:defRPr sz="5500" b="0" i="0">
+                <a:solidFill>
+                  <a:srgbClr val="F0FDF4"/>
+                </a:solidFill>
+                <a:latin typeface="Inter"/>
+              </a:defRPr>
+            </a:pPr>
+            <a:r>
+              <a:t>Fr. Macario Lee</a:t>
+            </a:r>
+          </a:p>
+          <a:p>
+            <a:pPr algn="ctr">
+              <a:spcAft>
+                <a:spcPts val="300"/>
+              </a:spcAft>
+              <a:defRPr sz="5500" b="0" i="0">
+                <a:solidFill>
+                  <a:srgbClr val="F0FDF4"/>
+                </a:solidFill>
+                <a:latin typeface="Inter"/>
+              </a:defRPr>
+            </a:pPr>
+          </a:p>
+          <a:p>
+            <a:pPr algn="ctr">
+              <a:spcAft>
+                <a:spcPts val="300"/>
+              </a:spcAft>
+              <a:defRPr sz="5500" b="0" i="0">
+                <a:solidFill>
+                  <a:srgbClr val="F0FDF4"/>
+                </a:solidFill>
+                <a:latin typeface="Inter"/>
+              </a:defRPr>
+            </a:pPr>
+            <a:r>
+              <a:t>Gospel (John 6:51-58)</a:t>
+            </a:r>
+          </a:p>
+          <a:p>
+            <a:pPr algn="ctr">
+              <a:spcAft>
+                <a:spcPts val="300"/>
+              </a:spcAft>
+              <a:defRPr sz="5500" b="0" i="0">
+                <a:solidFill>
+                  <a:srgbClr val="F0FDF4"/>
+                </a:solidFill>
+                <a:latin typeface="Inter"/>
+              </a:defRPr>
+            </a:pPr>
+            <a:r>
+              <a:t>“I am the living bread that came down from heaven; whoever eats this bread will live forever; and the bread that I will give is my flesh for the life of the world.”</a:t>
+            </a:r>
+          </a:p>
+          <a:p>
+            <a:pPr algn="ctr">
+              <a:spcAft>
+                <a:spcPts val="300"/>
+              </a:spcAft>
+              <a:defRPr sz="5500" b="0" i="0">
+                <a:solidFill>
+                  <a:srgbClr val="F0FDF4"/>
+                </a:solidFill>
+                <a:latin typeface="Inter"/>
+              </a:defRPr>
+            </a:pPr>
+          </a:p>
+          <a:p>
+            <a:pPr algn="ctr">
+              <a:spcAft>
+                <a:spcPts val="300"/>
+              </a:spcAft>
+              <a:defRPr sz="5500" b="0" i="0">
+                <a:solidFill>
+                  <a:srgbClr val="F0FDF4"/>
+                </a:solidFill>
+                <a:latin typeface="Inter"/>
+              </a:defRPr>
+            </a:pPr>
+            <a:r>
+              <a:t>YEAR A</a:t>
+            </a:r>
+          </a:p>
+          <a:p>
+            <a:pPr algn="ctr">
+              <a:spcAft>
+                <a:spcPts val="300"/>
+              </a:spcAft>
+              <a:defRPr sz="5500" b="0" i="0">
+                <a:solidFill>
+                  <a:srgbClr val="F0FDF4"/>
+                </a:solidFill>
+                <a:latin typeface="Inter"/>
+              </a:defRPr>
+            </a:pPr>
+            <a:r>
+              <a:t>2026-06-07 · Ordinary Time</a:t>
+            </a:r>
+          </a:p>
+        </p:txBody>
+      </p:sp>
+      <p:sp>
+        <p:nvSpPr>
+          <p:cNvPr id="4" name="TextBox 3"/>
+          <p:cNvSpPr txBox="1"/>
+          <p:nvPr/>
+        </p:nvSpPr>
+        <p:spPr>
+          <a:xfrm>
+            <a:off x="914400" y="9418320"/>
+            <a:ext cx="16459200" cy="777240"/>
+          </a:xfrm>
+          <a:prstGeom prst="rect">
+            <a:avLst/>
+          </a:prstGeom>
+          <a:noFill/>
+        </p:spPr>
+        <p:txBody>
+          <a:bodyPr wrap="square" lIns="109728" rIns="109728" tIns="73152" bIns="73152">
+            <a:noAutofit/>
+          </a:bodyPr>
+          <a:lstStyle/>
+          <a:p/>
+          <a:p>
+            <a:pPr algn="l">
+              <a:spcBef>
+                <a:spcPts val="200"/>
+              </a:spcBef>
+              <a:defRPr sz="1200" b="0" i="0">
+                <a:solidFill>
+                  <a:srgbClr val="86EFAC"/>
+                </a:solidFill>
+                <a:latin typeface="Inter"/>
+              </a:defRPr>
+            </a:pPr>
+            <a:r>
+              <a:t>Mass poster / divider</a:t>
+            </a:r>
+          </a:p>
+        </p:txBody>
+      </p:sp>
     </p:spTree>
   </p:cSld>
   <p:clrMapOvr>
@@ -14365,7 +15290,7 @@
       <p:grpSpPr/>
       <p:pic>
         <p:nvPicPr>
-          <p:cNvPr id="2" name="Picture 1" descr="divider_383479ed2b994d7885816aa55fa37f9a.jpg"/>
+          <p:cNvPr id="2" name="Picture 1" descr="GFCC7Jun2026_OrdinaryTime_16x9.png"/>
           <p:cNvPicPr>
             <a:picLocks noChangeAspect="1"/>
           </p:cNvPicPr>
@@ -14387,6 +15312,191 @@
           </a:prstGeom>
         </p:spPr>
       </p:pic>
+      <p:sp>
+        <p:nvSpPr>
+          <p:cNvPr id="3" name="TextBox 2"/>
+          <p:cNvSpPr txBox="1"/>
+          <p:nvPr/>
+        </p:nvSpPr>
+        <p:spPr>
+          <a:xfrm>
+            <a:off x="914400" y="850392"/>
+            <a:ext cx="16459200" cy="5943600"/>
+          </a:xfrm>
+          <a:prstGeom prst="rect">
+            <a:avLst/>
+          </a:prstGeom>
+          <a:noFill/>
+        </p:spPr>
+        <p:txBody>
+          <a:bodyPr wrap="square" lIns="109728" rIns="109728" tIns="73152" bIns="73152">
+            <a:noAutofit/>
+          </a:bodyPr>
+          <a:lstStyle/>
+          <a:p>
+            <a:pPr algn="ctr">
+              <a:spcAft>
+                <a:spcPts val="300"/>
+              </a:spcAft>
+              <a:defRPr sz="5500" b="1" i="0">
+                <a:solidFill>
+                  <a:srgbClr val="86EFAC"/>
+                </a:solidFill>
+                <a:latin typeface="Inter"/>
+              </a:defRPr>
+            </a:pPr>
+            <a:r>
+              <a:t>MASS CELEBRANT:</a:t>
+            </a:r>
+          </a:p>
+          <a:p>
+            <a:pPr algn="ctr">
+              <a:spcAft>
+                <a:spcPts val="300"/>
+              </a:spcAft>
+              <a:defRPr sz="5500" b="0" i="0">
+                <a:solidFill>
+                  <a:srgbClr val="F0FDF4"/>
+                </a:solidFill>
+                <a:latin typeface="Inter"/>
+              </a:defRPr>
+            </a:pPr>
+            <a:r>
+              <a:t>Fr. Macario Lee</a:t>
+            </a:r>
+          </a:p>
+          <a:p>
+            <a:pPr algn="ctr">
+              <a:spcAft>
+                <a:spcPts val="300"/>
+              </a:spcAft>
+              <a:defRPr sz="5500" b="0" i="0">
+                <a:solidFill>
+                  <a:srgbClr val="F0FDF4"/>
+                </a:solidFill>
+                <a:latin typeface="Inter"/>
+              </a:defRPr>
+            </a:pPr>
+          </a:p>
+          <a:p>
+            <a:pPr algn="ctr">
+              <a:spcAft>
+                <a:spcPts val="300"/>
+              </a:spcAft>
+              <a:defRPr sz="5500" b="0" i="0">
+                <a:solidFill>
+                  <a:srgbClr val="F0FDF4"/>
+                </a:solidFill>
+                <a:latin typeface="Inter"/>
+              </a:defRPr>
+            </a:pPr>
+            <a:r>
+              <a:t>Gospel (John 6:51-58)</a:t>
+            </a:r>
+          </a:p>
+          <a:p>
+            <a:pPr algn="ctr">
+              <a:spcAft>
+                <a:spcPts val="300"/>
+              </a:spcAft>
+              <a:defRPr sz="5500" b="0" i="0">
+                <a:solidFill>
+                  <a:srgbClr val="F0FDF4"/>
+                </a:solidFill>
+                <a:latin typeface="Inter"/>
+              </a:defRPr>
+            </a:pPr>
+            <a:r>
+              <a:t>“I am the living bread that came down from heaven; whoever eats this bread will live forever; and the bread that I will give is my flesh for the life of the world.”</a:t>
+            </a:r>
+          </a:p>
+          <a:p>
+            <a:pPr algn="ctr">
+              <a:spcAft>
+                <a:spcPts val="300"/>
+              </a:spcAft>
+              <a:defRPr sz="5500" b="0" i="0">
+                <a:solidFill>
+                  <a:srgbClr val="F0FDF4"/>
+                </a:solidFill>
+                <a:latin typeface="Inter"/>
+              </a:defRPr>
+            </a:pPr>
+          </a:p>
+          <a:p>
+            <a:pPr algn="ctr">
+              <a:spcAft>
+                <a:spcPts val="300"/>
+              </a:spcAft>
+              <a:defRPr sz="5500" b="0" i="0">
+                <a:solidFill>
+                  <a:srgbClr val="F0FDF4"/>
+                </a:solidFill>
+                <a:latin typeface="Inter"/>
+              </a:defRPr>
+            </a:pPr>
+            <a:r>
+              <a:t>YEAR A</a:t>
+            </a:r>
+          </a:p>
+          <a:p>
+            <a:pPr algn="ctr">
+              <a:spcAft>
+                <a:spcPts val="300"/>
+              </a:spcAft>
+              <a:defRPr sz="5500" b="0" i="0">
+                <a:solidFill>
+                  <a:srgbClr val="F0FDF4"/>
+                </a:solidFill>
+                <a:latin typeface="Inter"/>
+              </a:defRPr>
+            </a:pPr>
+            <a:r>
+              <a:t>2026-06-07 · Ordinary Time</a:t>
+            </a:r>
+          </a:p>
+        </p:txBody>
+      </p:sp>
+      <p:sp>
+        <p:nvSpPr>
+          <p:cNvPr id="4" name="TextBox 3"/>
+          <p:cNvSpPr txBox="1"/>
+          <p:nvPr/>
+        </p:nvSpPr>
+        <p:spPr>
+          <a:xfrm>
+            <a:off x="914400" y="9418320"/>
+            <a:ext cx="16459200" cy="777240"/>
+          </a:xfrm>
+          <a:prstGeom prst="rect">
+            <a:avLst/>
+          </a:prstGeom>
+          <a:noFill/>
+        </p:spPr>
+        <p:txBody>
+          <a:bodyPr wrap="square" lIns="109728" rIns="109728" tIns="73152" bIns="73152">
+            <a:noAutofit/>
+          </a:bodyPr>
+          <a:lstStyle/>
+          <a:p/>
+          <a:p>
+            <a:pPr algn="l">
+              <a:spcBef>
+                <a:spcPts val="200"/>
+              </a:spcBef>
+              <a:defRPr sz="1200" b="0" i="0">
+                <a:solidFill>
+                  <a:srgbClr val="86EFAC"/>
+                </a:solidFill>
+                <a:latin typeface="Inter"/>
+              </a:defRPr>
+            </a:pPr>
+            <a:r>
+              <a:t>Mass poster / divider</a:t>
+            </a:r>
+          </a:p>
+        </p:txBody>
+      </p:sp>
     </p:spTree>
   </p:cSld>
   <p:clrMapOvr>
@@ -15495,7 +16605,7 @@
       <p:grpSpPr/>
       <p:pic>
         <p:nvPicPr>
-          <p:cNvPr id="2" name="Picture 1" descr="divider_383479ed2b994d7885816aa55fa37f9a.jpg"/>
+          <p:cNvPr id="2" name="Picture 1" descr="GFCC7Jun2026_OrdinaryTime_16x9.png"/>
           <p:cNvPicPr>
             <a:picLocks noChangeAspect="1"/>
           </p:cNvPicPr>
@@ -15517,6 +16627,191 @@
           </a:prstGeom>
         </p:spPr>
       </p:pic>
+      <p:sp>
+        <p:nvSpPr>
+          <p:cNvPr id="3" name="TextBox 2"/>
+          <p:cNvSpPr txBox="1"/>
+          <p:nvPr/>
+        </p:nvSpPr>
+        <p:spPr>
+          <a:xfrm>
+            <a:off x="914400" y="850392"/>
+            <a:ext cx="16459200" cy="5943600"/>
+          </a:xfrm>
+          <a:prstGeom prst="rect">
+            <a:avLst/>
+          </a:prstGeom>
+          <a:noFill/>
+        </p:spPr>
+        <p:txBody>
+          <a:bodyPr wrap="square" lIns="109728" rIns="109728" tIns="73152" bIns="73152">
+            <a:noAutofit/>
+          </a:bodyPr>
+          <a:lstStyle/>
+          <a:p>
+            <a:pPr algn="ctr">
+              <a:spcAft>
+                <a:spcPts val="300"/>
+              </a:spcAft>
+              <a:defRPr sz="5500" b="1" i="0">
+                <a:solidFill>
+                  <a:srgbClr val="86EFAC"/>
+                </a:solidFill>
+                <a:latin typeface="Inter"/>
+              </a:defRPr>
+            </a:pPr>
+            <a:r>
+              <a:t>MASS CELEBRANT:</a:t>
+            </a:r>
+          </a:p>
+          <a:p>
+            <a:pPr algn="ctr">
+              <a:spcAft>
+                <a:spcPts val="300"/>
+              </a:spcAft>
+              <a:defRPr sz="5500" b="0" i="0">
+                <a:solidFill>
+                  <a:srgbClr val="F0FDF4"/>
+                </a:solidFill>
+                <a:latin typeface="Inter"/>
+              </a:defRPr>
+            </a:pPr>
+            <a:r>
+              <a:t>Fr. Macario Lee</a:t>
+            </a:r>
+          </a:p>
+          <a:p>
+            <a:pPr algn="ctr">
+              <a:spcAft>
+                <a:spcPts val="300"/>
+              </a:spcAft>
+              <a:defRPr sz="5500" b="0" i="0">
+                <a:solidFill>
+                  <a:srgbClr val="F0FDF4"/>
+                </a:solidFill>
+                <a:latin typeface="Inter"/>
+              </a:defRPr>
+            </a:pPr>
+          </a:p>
+          <a:p>
+            <a:pPr algn="ctr">
+              <a:spcAft>
+                <a:spcPts val="300"/>
+              </a:spcAft>
+              <a:defRPr sz="5500" b="0" i="0">
+                <a:solidFill>
+                  <a:srgbClr val="F0FDF4"/>
+                </a:solidFill>
+                <a:latin typeface="Inter"/>
+              </a:defRPr>
+            </a:pPr>
+            <a:r>
+              <a:t>Gospel (John 6:51-58)</a:t>
+            </a:r>
+          </a:p>
+          <a:p>
+            <a:pPr algn="ctr">
+              <a:spcAft>
+                <a:spcPts val="300"/>
+              </a:spcAft>
+              <a:defRPr sz="5500" b="0" i="0">
+                <a:solidFill>
+                  <a:srgbClr val="F0FDF4"/>
+                </a:solidFill>
+                <a:latin typeface="Inter"/>
+              </a:defRPr>
+            </a:pPr>
+            <a:r>
+              <a:t>“I am the living bread that came down from heaven; whoever eats this bread will live forever; and the bread that I will give is my flesh for the life of the world.”</a:t>
+            </a:r>
+          </a:p>
+          <a:p>
+            <a:pPr algn="ctr">
+              <a:spcAft>
+                <a:spcPts val="300"/>
+              </a:spcAft>
+              <a:defRPr sz="5500" b="0" i="0">
+                <a:solidFill>
+                  <a:srgbClr val="F0FDF4"/>
+                </a:solidFill>
+                <a:latin typeface="Inter"/>
+              </a:defRPr>
+            </a:pPr>
+          </a:p>
+          <a:p>
+            <a:pPr algn="ctr">
+              <a:spcAft>
+                <a:spcPts val="300"/>
+              </a:spcAft>
+              <a:defRPr sz="5500" b="0" i="0">
+                <a:solidFill>
+                  <a:srgbClr val="F0FDF4"/>
+                </a:solidFill>
+                <a:latin typeface="Inter"/>
+              </a:defRPr>
+            </a:pPr>
+            <a:r>
+              <a:t>YEAR A</a:t>
+            </a:r>
+          </a:p>
+          <a:p>
+            <a:pPr algn="ctr">
+              <a:spcAft>
+                <a:spcPts val="300"/>
+              </a:spcAft>
+              <a:defRPr sz="5500" b="0" i="0">
+                <a:solidFill>
+                  <a:srgbClr val="F0FDF4"/>
+                </a:solidFill>
+                <a:latin typeface="Inter"/>
+              </a:defRPr>
+            </a:pPr>
+            <a:r>
+              <a:t>2026-06-07 · Ordinary Time</a:t>
+            </a:r>
+          </a:p>
+        </p:txBody>
+      </p:sp>
+      <p:sp>
+        <p:nvSpPr>
+          <p:cNvPr id="4" name="TextBox 3"/>
+          <p:cNvSpPr txBox="1"/>
+          <p:nvPr/>
+        </p:nvSpPr>
+        <p:spPr>
+          <a:xfrm>
+            <a:off x="914400" y="9418320"/>
+            <a:ext cx="16459200" cy="777240"/>
+          </a:xfrm>
+          <a:prstGeom prst="rect">
+            <a:avLst/>
+          </a:prstGeom>
+          <a:noFill/>
+        </p:spPr>
+        <p:txBody>
+          <a:bodyPr wrap="square" lIns="109728" rIns="109728" tIns="73152" bIns="73152">
+            <a:noAutofit/>
+          </a:bodyPr>
+          <a:lstStyle/>
+          <a:p/>
+          <a:p>
+            <a:pPr algn="l">
+              <a:spcBef>
+                <a:spcPts val="200"/>
+              </a:spcBef>
+              <a:defRPr sz="1200" b="0" i="0">
+                <a:solidFill>
+                  <a:srgbClr val="86EFAC"/>
+                </a:solidFill>
+                <a:latin typeface="Inter"/>
+              </a:defRPr>
+            </a:pPr>
+            <a:r>
+              <a:t>Mass poster / divider</a:t>
+            </a:r>
+          </a:p>
+        </p:txBody>
+      </p:sp>
     </p:spTree>
   </p:cSld>
   <p:clrMapOvr>
@@ -16299,7 +17594,7 @@
       <p:grpSpPr/>
       <p:pic>
         <p:nvPicPr>
-          <p:cNvPr id="2" name="Picture 1" descr="divider_383479ed2b994d7885816aa55fa37f9a.jpg"/>
+          <p:cNvPr id="2" name="Picture 1" descr="GFCC7Jun2026_OrdinaryTime_16x9.png"/>
           <p:cNvPicPr>
             <a:picLocks noChangeAspect="1"/>
           </p:cNvPicPr>
@@ -16321,6 +17616,191 @@
           </a:prstGeom>
         </p:spPr>
       </p:pic>
+      <p:sp>
+        <p:nvSpPr>
+          <p:cNvPr id="3" name="TextBox 2"/>
+          <p:cNvSpPr txBox="1"/>
+          <p:nvPr/>
+        </p:nvSpPr>
+        <p:spPr>
+          <a:xfrm>
+            <a:off x="914400" y="850392"/>
+            <a:ext cx="16459200" cy="5943600"/>
+          </a:xfrm>
+          <a:prstGeom prst="rect">
+            <a:avLst/>
+          </a:prstGeom>
+          <a:noFill/>
+        </p:spPr>
+        <p:txBody>
+          <a:bodyPr wrap="square" lIns="109728" rIns="109728" tIns="73152" bIns="73152">
+            <a:noAutofit/>
+          </a:bodyPr>
+          <a:lstStyle/>
+          <a:p>
+            <a:pPr algn="ctr">
+              <a:spcAft>
+                <a:spcPts val="300"/>
+              </a:spcAft>
+              <a:defRPr sz="5500" b="1" i="0">
+                <a:solidFill>
+                  <a:srgbClr val="86EFAC"/>
+                </a:solidFill>
+                <a:latin typeface="Inter"/>
+              </a:defRPr>
+            </a:pPr>
+            <a:r>
+              <a:t>MASS CELEBRANT:</a:t>
+            </a:r>
+          </a:p>
+          <a:p>
+            <a:pPr algn="ctr">
+              <a:spcAft>
+                <a:spcPts val="300"/>
+              </a:spcAft>
+              <a:defRPr sz="5500" b="0" i="0">
+                <a:solidFill>
+                  <a:srgbClr val="F0FDF4"/>
+                </a:solidFill>
+                <a:latin typeface="Inter"/>
+              </a:defRPr>
+            </a:pPr>
+            <a:r>
+              <a:t>Fr. Macario Lee</a:t>
+            </a:r>
+          </a:p>
+          <a:p>
+            <a:pPr algn="ctr">
+              <a:spcAft>
+                <a:spcPts val="300"/>
+              </a:spcAft>
+              <a:defRPr sz="5500" b="0" i="0">
+                <a:solidFill>
+                  <a:srgbClr val="F0FDF4"/>
+                </a:solidFill>
+                <a:latin typeface="Inter"/>
+              </a:defRPr>
+            </a:pPr>
+          </a:p>
+          <a:p>
+            <a:pPr algn="ctr">
+              <a:spcAft>
+                <a:spcPts val="300"/>
+              </a:spcAft>
+              <a:defRPr sz="5500" b="0" i="0">
+                <a:solidFill>
+                  <a:srgbClr val="F0FDF4"/>
+                </a:solidFill>
+                <a:latin typeface="Inter"/>
+              </a:defRPr>
+            </a:pPr>
+            <a:r>
+              <a:t>Gospel (John 6:51-58)</a:t>
+            </a:r>
+          </a:p>
+          <a:p>
+            <a:pPr algn="ctr">
+              <a:spcAft>
+                <a:spcPts val="300"/>
+              </a:spcAft>
+              <a:defRPr sz="5500" b="0" i="0">
+                <a:solidFill>
+                  <a:srgbClr val="F0FDF4"/>
+                </a:solidFill>
+                <a:latin typeface="Inter"/>
+              </a:defRPr>
+            </a:pPr>
+            <a:r>
+              <a:t>“I am the living bread that came down from heaven; whoever eats this bread will live forever; and the bread that I will give is my flesh for the life of the world.”</a:t>
+            </a:r>
+          </a:p>
+          <a:p>
+            <a:pPr algn="ctr">
+              <a:spcAft>
+                <a:spcPts val="300"/>
+              </a:spcAft>
+              <a:defRPr sz="5500" b="0" i="0">
+                <a:solidFill>
+                  <a:srgbClr val="F0FDF4"/>
+                </a:solidFill>
+                <a:latin typeface="Inter"/>
+              </a:defRPr>
+            </a:pPr>
+          </a:p>
+          <a:p>
+            <a:pPr algn="ctr">
+              <a:spcAft>
+                <a:spcPts val="300"/>
+              </a:spcAft>
+              <a:defRPr sz="5500" b="0" i="0">
+                <a:solidFill>
+                  <a:srgbClr val="F0FDF4"/>
+                </a:solidFill>
+                <a:latin typeface="Inter"/>
+              </a:defRPr>
+            </a:pPr>
+            <a:r>
+              <a:t>YEAR A</a:t>
+            </a:r>
+          </a:p>
+          <a:p>
+            <a:pPr algn="ctr">
+              <a:spcAft>
+                <a:spcPts val="300"/>
+              </a:spcAft>
+              <a:defRPr sz="5500" b="0" i="0">
+                <a:solidFill>
+                  <a:srgbClr val="F0FDF4"/>
+                </a:solidFill>
+                <a:latin typeface="Inter"/>
+              </a:defRPr>
+            </a:pPr>
+            <a:r>
+              <a:t>2026-06-07 · Ordinary Time</a:t>
+            </a:r>
+          </a:p>
+        </p:txBody>
+      </p:sp>
+      <p:sp>
+        <p:nvSpPr>
+          <p:cNvPr id="4" name="TextBox 3"/>
+          <p:cNvSpPr txBox="1"/>
+          <p:nvPr/>
+        </p:nvSpPr>
+        <p:spPr>
+          <a:xfrm>
+            <a:off x="914400" y="9418320"/>
+            <a:ext cx="16459200" cy="777240"/>
+          </a:xfrm>
+          <a:prstGeom prst="rect">
+            <a:avLst/>
+          </a:prstGeom>
+          <a:noFill/>
+        </p:spPr>
+        <p:txBody>
+          <a:bodyPr wrap="square" lIns="109728" rIns="109728" tIns="73152" bIns="73152">
+            <a:noAutofit/>
+          </a:bodyPr>
+          <a:lstStyle/>
+          <a:p/>
+          <a:p>
+            <a:pPr algn="l">
+              <a:spcBef>
+                <a:spcPts val="200"/>
+              </a:spcBef>
+              <a:defRPr sz="1200" b="0" i="0">
+                <a:solidFill>
+                  <a:srgbClr val="86EFAC"/>
+                </a:solidFill>
+                <a:latin typeface="Inter"/>
+              </a:defRPr>
+            </a:pPr>
+            <a:r>
+              <a:t>Mass poster / divider</a:t>
+            </a:r>
+          </a:p>
+        </p:txBody>
+      </p:sp>
     </p:spTree>
   </p:cSld>
   <p:clrMapOvr>
